--- a/gakkyu/tegami/pptx/T4.pptx
+++ b/gakkyu/tegami/pptx/T4.pptx
@@ -3622,6 +3622,7 @@
               <a:srgbClr val="6AA7A7"/>
             </a:solidFill>
           </a:ln>
+          <a:effectLst/>
         </p:spPr>
         <p:style>
           <a:lnRef idx="2">
@@ -3630,7 +3631,7 @@
           <a:fillRef idx="0">
             <a:schemeClr val="accent1"/>
           </a:fillRef>
-          <a:effectRef idx="1">
+          <a:effectRef idx="0">
             <a:schemeClr val="accent1"/>
           </a:effectRef>
           <a:fontRef idx="minor">
@@ -3681,7 +3682,7 @@
             <a:fillRef idx="3">
               <a:schemeClr val="accent1"/>
             </a:fillRef>
-            <a:effectRef idx="2">
+            <a:effectRef idx="0">
               <a:schemeClr val="accent1"/>
             </a:effectRef>
             <a:fontRef idx="minor">
@@ -3715,15 +3716,16 @@
                 <a:srgbClr val="8FBFBF"/>
               </a:solidFill>
             </a:ln>
-          </p:spPr>
-          <p:style>
-            <a:lnRef idx="2">
-              <a:schemeClr val="accent1"/>
-            </a:lnRef>
-            <a:fillRef idx="0">
-              <a:schemeClr val="accent1"/>
-            </a:fillRef>
-            <a:effectRef idx="1">
+            <a:effectLst/>
+          </p:spPr>
+          <p:style>
+            <a:lnRef idx="2">
+              <a:schemeClr val="accent1"/>
+            </a:lnRef>
+            <a:fillRef idx="0">
+              <a:schemeClr val="accent1"/>
+            </a:fillRef>
+            <a:effectRef idx="0">
               <a:schemeClr val="accent1"/>
             </a:effectRef>
             <a:fontRef idx="minor">
@@ -3750,15 +3752,16 @@
                 <a:srgbClr val="8FBFBF"/>
               </a:solidFill>
             </a:ln>
-          </p:spPr>
-          <p:style>
-            <a:lnRef idx="2">
-              <a:schemeClr val="accent1"/>
-            </a:lnRef>
-            <a:fillRef idx="0">
-              <a:schemeClr val="accent1"/>
-            </a:fillRef>
-            <a:effectRef idx="1">
+            <a:effectLst/>
+          </p:spPr>
+          <p:style>
+            <a:lnRef idx="2">
+              <a:schemeClr val="accent1"/>
+            </a:lnRef>
+            <a:fillRef idx="0">
+              <a:schemeClr val="accent1"/>
+            </a:fillRef>
+            <a:effectRef idx="0">
               <a:schemeClr val="accent1"/>
             </a:effectRef>
             <a:fontRef idx="minor">
@@ -3785,15 +3788,16 @@
                 <a:srgbClr val="8FBFBF"/>
               </a:solidFill>
             </a:ln>
-          </p:spPr>
-          <p:style>
-            <a:lnRef idx="2">
-              <a:schemeClr val="accent1"/>
-            </a:lnRef>
-            <a:fillRef idx="0">
-              <a:schemeClr val="accent1"/>
-            </a:fillRef>
-            <a:effectRef idx="1">
+            <a:effectLst/>
+          </p:spPr>
+          <p:style>
+            <a:lnRef idx="2">
+              <a:schemeClr val="accent1"/>
+            </a:lnRef>
+            <a:fillRef idx="0">
+              <a:schemeClr val="accent1"/>
+            </a:fillRef>
+            <a:effectRef idx="0">
               <a:schemeClr val="accent1"/>
             </a:effectRef>
             <a:fontRef idx="minor">
@@ -3820,15 +3824,16 @@
                 <a:srgbClr val="8FBFBF"/>
               </a:solidFill>
             </a:ln>
-          </p:spPr>
-          <p:style>
-            <a:lnRef idx="2">
-              <a:schemeClr val="accent1"/>
-            </a:lnRef>
-            <a:fillRef idx="0">
-              <a:schemeClr val="accent1"/>
-            </a:fillRef>
-            <a:effectRef idx="1">
+            <a:effectLst/>
+          </p:spPr>
+          <p:style>
+            <a:lnRef idx="2">
+              <a:schemeClr val="accent1"/>
+            </a:lnRef>
+            <a:fillRef idx="0">
+              <a:schemeClr val="accent1"/>
+            </a:fillRef>
+            <a:effectRef idx="0">
               <a:schemeClr val="accent1"/>
             </a:effectRef>
             <a:fontRef idx="minor">
@@ -3855,15 +3860,16 @@
                 <a:srgbClr val="8FBFBF"/>
               </a:solidFill>
             </a:ln>
-          </p:spPr>
-          <p:style>
-            <a:lnRef idx="2">
-              <a:schemeClr val="accent1"/>
-            </a:lnRef>
-            <a:fillRef idx="0">
-              <a:schemeClr val="accent1"/>
-            </a:fillRef>
-            <a:effectRef idx="1">
+            <a:effectLst/>
+          </p:spPr>
+          <p:style>
+            <a:lnRef idx="2">
+              <a:schemeClr val="accent1"/>
+            </a:lnRef>
+            <a:fillRef idx="0">
+              <a:schemeClr val="accent1"/>
+            </a:fillRef>
+            <a:effectRef idx="0">
               <a:schemeClr val="accent1"/>
             </a:effectRef>
             <a:fontRef idx="minor">
@@ -3890,15 +3896,16 @@
                 <a:srgbClr val="8FBFBF"/>
               </a:solidFill>
             </a:ln>
-          </p:spPr>
-          <p:style>
-            <a:lnRef idx="2">
-              <a:schemeClr val="accent1"/>
-            </a:lnRef>
-            <a:fillRef idx="0">
-              <a:schemeClr val="accent1"/>
-            </a:fillRef>
-            <a:effectRef idx="1">
+            <a:effectLst/>
+          </p:spPr>
+          <p:style>
+            <a:lnRef idx="2">
+              <a:schemeClr val="accent1"/>
+            </a:lnRef>
+            <a:fillRef idx="0">
+              <a:schemeClr val="accent1"/>
+            </a:fillRef>
+            <a:effectRef idx="0">
               <a:schemeClr val="accent1"/>
             </a:effectRef>
             <a:fontRef idx="minor">
@@ -3925,15 +3932,16 @@
                 <a:srgbClr val="8FBFBF"/>
               </a:solidFill>
             </a:ln>
-          </p:spPr>
-          <p:style>
-            <a:lnRef idx="2">
-              <a:schemeClr val="accent1"/>
-            </a:lnRef>
-            <a:fillRef idx="0">
-              <a:schemeClr val="accent1"/>
-            </a:fillRef>
-            <a:effectRef idx="1">
+            <a:effectLst/>
+          </p:spPr>
+          <p:style>
+            <a:lnRef idx="2">
+              <a:schemeClr val="accent1"/>
+            </a:lnRef>
+            <a:fillRef idx="0">
+              <a:schemeClr val="accent1"/>
+            </a:fillRef>
+            <a:effectRef idx="0">
               <a:schemeClr val="accent1"/>
             </a:effectRef>
             <a:fontRef idx="minor">
@@ -3960,15 +3968,16 @@
                 <a:srgbClr val="8FBFBF"/>
               </a:solidFill>
             </a:ln>
-          </p:spPr>
-          <p:style>
-            <a:lnRef idx="2">
-              <a:schemeClr val="accent1"/>
-            </a:lnRef>
-            <a:fillRef idx="0">
-              <a:schemeClr val="accent1"/>
-            </a:fillRef>
-            <a:effectRef idx="1">
+            <a:effectLst/>
+          </p:spPr>
+          <p:style>
+            <a:lnRef idx="2">
+              <a:schemeClr val="accent1"/>
+            </a:lnRef>
+            <a:fillRef idx="0">
+              <a:schemeClr val="accent1"/>
+            </a:fillRef>
+            <a:effectRef idx="0">
               <a:schemeClr val="accent1"/>
             </a:effectRef>
             <a:fontRef idx="minor">
@@ -3995,15 +4004,16 @@
                 <a:srgbClr val="8FBFBF"/>
               </a:solidFill>
             </a:ln>
-          </p:spPr>
-          <p:style>
-            <a:lnRef idx="2">
-              <a:schemeClr val="accent1"/>
-            </a:lnRef>
-            <a:fillRef idx="0">
-              <a:schemeClr val="accent1"/>
-            </a:fillRef>
-            <a:effectRef idx="1">
+            <a:effectLst/>
+          </p:spPr>
+          <p:style>
+            <a:lnRef idx="2">
+              <a:schemeClr val="accent1"/>
+            </a:lnRef>
+            <a:fillRef idx="0">
+              <a:schemeClr val="accent1"/>
+            </a:fillRef>
+            <a:effectRef idx="0">
               <a:schemeClr val="accent1"/>
             </a:effectRef>
             <a:fontRef idx="minor">
@@ -4030,15 +4040,16 @@
                 <a:srgbClr val="8FBFBF"/>
               </a:solidFill>
             </a:ln>
-          </p:spPr>
-          <p:style>
-            <a:lnRef idx="2">
-              <a:schemeClr val="accent1"/>
-            </a:lnRef>
-            <a:fillRef idx="0">
-              <a:schemeClr val="accent1"/>
-            </a:fillRef>
-            <a:effectRef idx="1">
+            <a:effectLst/>
+          </p:spPr>
+          <p:style>
+            <a:lnRef idx="2">
+              <a:schemeClr val="accent1"/>
+            </a:lnRef>
+            <a:fillRef idx="0">
+              <a:schemeClr val="accent1"/>
+            </a:fillRef>
+            <a:effectRef idx="0">
               <a:schemeClr val="accent1"/>
             </a:effectRef>
             <a:fontRef idx="minor">
@@ -4065,15 +4076,16 @@
                 <a:srgbClr val="8FBFBF"/>
               </a:solidFill>
             </a:ln>
-          </p:spPr>
-          <p:style>
-            <a:lnRef idx="2">
-              <a:schemeClr val="accent1"/>
-            </a:lnRef>
-            <a:fillRef idx="0">
-              <a:schemeClr val="accent1"/>
-            </a:fillRef>
-            <a:effectRef idx="1">
+            <a:effectLst/>
+          </p:spPr>
+          <p:style>
+            <a:lnRef idx="2">
+              <a:schemeClr val="accent1"/>
+            </a:lnRef>
+            <a:fillRef idx="0">
+              <a:schemeClr val="accent1"/>
+            </a:fillRef>
+            <a:effectRef idx="0">
               <a:schemeClr val="accent1"/>
             </a:effectRef>
             <a:fontRef idx="minor">
@@ -4100,15 +4112,16 @@
                 <a:srgbClr val="8FBFBF"/>
               </a:solidFill>
             </a:ln>
-          </p:spPr>
-          <p:style>
-            <a:lnRef idx="2">
-              <a:schemeClr val="accent1"/>
-            </a:lnRef>
-            <a:fillRef idx="0">
-              <a:schemeClr val="accent1"/>
-            </a:fillRef>
-            <a:effectRef idx="1">
+            <a:effectLst/>
+          </p:spPr>
+          <p:style>
+            <a:lnRef idx="2">
+              <a:schemeClr val="accent1"/>
+            </a:lnRef>
+            <a:fillRef idx="0">
+              <a:schemeClr val="accent1"/>
+            </a:fillRef>
+            <a:effectRef idx="0">
               <a:schemeClr val="accent1"/>
             </a:effectRef>
             <a:fontRef idx="minor">
@@ -4135,15 +4148,16 @@
                 <a:srgbClr val="8FBFBF"/>
               </a:solidFill>
             </a:ln>
-          </p:spPr>
-          <p:style>
-            <a:lnRef idx="2">
-              <a:schemeClr val="accent1"/>
-            </a:lnRef>
-            <a:fillRef idx="0">
-              <a:schemeClr val="accent1"/>
-            </a:fillRef>
-            <a:effectRef idx="1">
+            <a:effectLst/>
+          </p:spPr>
+          <p:style>
+            <a:lnRef idx="2">
+              <a:schemeClr val="accent1"/>
+            </a:lnRef>
+            <a:fillRef idx="0">
+              <a:schemeClr val="accent1"/>
+            </a:fillRef>
+            <a:effectRef idx="0">
               <a:schemeClr val="accent1"/>
             </a:effectRef>
             <a:fontRef idx="minor">
@@ -4170,15 +4184,16 @@
                 <a:srgbClr val="8FBFBF"/>
               </a:solidFill>
             </a:ln>
-          </p:spPr>
-          <p:style>
-            <a:lnRef idx="2">
-              <a:schemeClr val="accent1"/>
-            </a:lnRef>
-            <a:fillRef idx="0">
-              <a:schemeClr val="accent1"/>
-            </a:fillRef>
-            <a:effectRef idx="1">
+            <a:effectLst/>
+          </p:spPr>
+          <p:style>
+            <a:lnRef idx="2">
+              <a:schemeClr val="accent1"/>
+            </a:lnRef>
+            <a:fillRef idx="0">
+              <a:schemeClr val="accent1"/>
+            </a:fillRef>
+            <a:effectRef idx="0">
               <a:schemeClr val="accent1"/>
             </a:effectRef>
             <a:fontRef idx="minor">
@@ -4205,15 +4220,16 @@
                 <a:srgbClr val="8FBFBF"/>
               </a:solidFill>
             </a:ln>
-          </p:spPr>
-          <p:style>
-            <a:lnRef idx="2">
-              <a:schemeClr val="accent1"/>
-            </a:lnRef>
-            <a:fillRef idx="0">
-              <a:schemeClr val="accent1"/>
-            </a:fillRef>
-            <a:effectRef idx="1">
+            <a:effectLst/>
+          </p:spPr>
+          <p:style>
+            <a:lnRef idx="2">
+              <a:schemeClr val="accent1"/>
+            </a:lnRef>
+            <a:fillRef idx="0">
+              <a:schemeClr val="accent1"/>
+            </a:fillRef>
+            <a:effectRef idx="0">
               <a:schemeClr val="accent1"/>
             </a:effectRef>
             <a:fontRef idx="minor">
@@ -4240,15 +4256,16 @@
                 <a:srgbClr val="8FBFBF"/>
               </a:solidFill>
             </a:ln>
-          </p:spPr>
-          <p:style>
-            <a:lnRef idx="2">
-              <a:schemeClr val="accent1"/>
-            </a:lnRef>
-            <a:fillRef idx="0">
-              <a:schemeClr val="accent1"/>
-            </a:fillRef>
-            <a:effectRef idx="1">
+            <a:effectLst/>
+          </p:spPr>
+          <p:style>
+            <a:lnRef idx="2">
+              <a:schemeClr val="accent1"/>
+            </a:lnRef>
+            <a:fillRef idx="0">
+              <a:schemeClr val="accent1"/>
+            </a:fillRef>
+            <a:effectRef idx="0">
               <a:schemeClr val="accent1"/>
             </a:effectRef>
             <a:fontRef idx="minor">
@@ -4275,15 +4292,16 @@
                 <a:srgbClr val="8FBFBF"/>
               </a:solidFill>
             </a:ln>
-          </p:spPr>
-          <p:style>
-            <a:lnRef idx="2">
-              <a:schemeClr val="accent1"/>
-            </a:lnRef>
-            <a:fillRef idx="0">
-              <a:schemeClr val="accent1"/>
-            </a:fillRef>
-            <a:effectRef idx="1">
+            <a:effectLst/>
+          </p:spPr>
+          <p:style>
+            <a:lnRef idx="2">
+              <a:schemeClr val="accent1"/>
+            </a:lnRef>
+            <a:fillRef idx="0">
+              <a:schemeClr val="accent1"/>
+            </a:fillRef>
+            <a:effectRef idx="0">
               <a:schemeClr val="accent1"/>
             </a:effectRef>
             <a:fontRef idx="minor">
@@ -4310,15 +4328,16 @@
                 <a:srgbClr val="8FBFBF"/>
               </a:solidFill>
             </a:ln>
-          </p:spPr>
-          <p:style>
-            <a:lnRef idx="2">
-              <a:schemeClr val="accent1"/>
-            </a:lnRef>
-            <a:fillRef idx="0">
-              <a:schemeClr val="accent1"/>
-            </a:fillRef>
-            <a:effectRef idx="1">
+            <a:effectLst/>
+          </p:spPr>
+          <p:style>
+            <a:lnRef idx="2">
+              <a:schemeClr val="accent1"/>
+            </a:lnRef>
+            <a:fillRef idx="0">
+              <a:schemeClr val="accent1"/>
+            </a:fillRef>
+            <a:effectRef idx="0">
               <a:schemeClr val="accent1"/>
             </a:effectRef>
             <a:fontRef idx="minor">
@@ -4345,15 +4364,16 @@
                 <a:srgbClr val="8FBFBF"/>
               </a:solidFill>
             </a:ln>
-          </p:spPr>
-          <p:style>
-            <a:lnRef idx="2">
-              <a:schemeClr val="accent1"/>
-            </a:lnRef>
-            <a:fillRef idx="0">
-              <a:schemeClr val="accent1"/>
-            </a:fillRef>
-            <a:effectRef idx="1">
+            <a:effectLst/>
+          </p:spPr>
+          <p:style>
+            <a:lnRef idx="2">
+              <a:schemeClr val="accent1"/>
+            </a:lnRef>
+            <a:fillRef idx="0">
+              <a:schemeClr val="accent1"/>
+            </a:fillRef>
+            <a:effectRef idx="0">
               <a:schemeClr val="accent1"/>
             </a:effectRef>
             <a:fontRef idx="minor">
@@ -4380,15 +4400,16 @@
                 <a:srgbClr val="8FBFBF"/>
               </a:solidFill>
             </a:ln>
-          </p:spPr>
-          <p:style>
-            <a:lnRef idx="2">
-              <a:schemeClr val="accent1"/>
-            </a:lnRef>
-            <a:fillRef idx="0">
-              <a:schemeClr val="accent1"/>
-            </a:fillRef>
-            <a:effectRef idx="1">
+            <a:effectLst/>
+          </p:spPr>
+          <p:style>
+            <a:lnRef idx="2">
+              <a:schemeClr val="accent1"/>
+            </a:lnRef>
+            <a:fillRef idx="0">
+              <a:schemeClr val="accent1"/>
+            </a:fillRef>
+            <a:effectRef idx="0">
               <a:schemeClr val="accent1"/>
             </a:effectRef>
             <a:fontRef idx="minor">
@@ -4415,15 +4436,16 @@
                 <a:srgbClr val="8FBFBF"/>
               </a:solidFill>
             </a:ln>
-          </p:spPr>
-          <p:style>
-            <a:lnRef idx="2">
-              <a:schemeClr val="accent1"/>
-            </a:lnRef>
-            <a:fillRef idx="0">
-              <a:schemeClr val="accent1"/>
-            </a:fillRef>
-            <a:effectRef idx="1">
+            <a:effectLst/>
+          </p:spPr>
+          <p:style>
+            <a:lnRef idx="2">
+              <a:schemeClr val="accent1"/>
+            </a:lnRef>
+            <a:fillRef idx="0">
+              <a:schemeClr val="accent1"/>
+            </a:fillRef>
+            <a:effectRef idx="0">
               <a:schemeClr val="accent1"/>
             </a:effectRef>
             <a:fontRef idx="minor">
@@ -4450,15 +4472,16 @@
                 <a:srgbClr val="8FBFBF"/>
               </a:solidFill>
             </a:ln>
-          </p:spPr>
-          <p:style>
-            <a:lnRef idx="2">
-              <a:schemeClr val="accent1"/>
-            </a:lnRef>
-            <a:fillRef idx="0">
-              <a:schemeClr val="accent1"/>
-            </a:fillRef>
-            <a:effectRef idx="1">
+            <a:effectLst/>
+          </p:spPr>
+          <p:style>
+            <a:lnRef idx="2">
+              <a:schemeClr val="accent1"/>
+            </a:lnRef>
+            <a:fillRef idx="0">
+              <a:schemeClr val="accent1"/>
+            </a:fillRef>
+            <a:effectRef idx="0">
               <a:schemeClr val="accent1"/>
             </a:effectRef>
             <a:fontRef idx="minor">
@@ -4485,15 +4508,16 @@
                 <a:srgbClr val="8FBFBF"/>
               </a:solidFill>
             </a:ln>
-          </p:spPr>
-          <p:style>
-            <a:lnRef idx="2">
-              <a:schemeClr val="accent1"/>
-            </a:lnRef>
-            <a:fillRef idx="0">
-              <a:schemeClr val="accent1"/>
-            </a:fillRef>
-            <a:effectRef idx="1">
+            <a:effectLst/>
+          </p:spPr>
+          <p:style>
+            <a:lnRef idx="2">
+              <a:schemeClr val="accent1"/>
+            </a:lnRef>
+            <a:fillRef idx="0">
+              <a:schemeClr val="accent1"/>
+            </a:fillRef>
+            <a:effectRef idx="0">
               <a:schemeClr val="accent1"/>
             </a:effectRef>
             <a:fontRef idx="minor">
@@ -4545,7 +4569,7 @@
             <a:fillRef idx="3">
               <a:schemeClr val="accent1"/>
             </a:fillRef>
-            <a:effectRef idx="2">
+            <a:effectRef idx="0">
               <a:schemeClr val="accent1"/>
             </a:effectRef>
             <a:fontRef idx="minor">
@@ -4579,15 +4603,16 @@
                 <a:srgbClr val="8FBFBF"/>
               </a:solidFill>
             </a:ln>
-          </p:spPr>
-          <p:style>
-            <a:lnRef idx="2">
-              <a:schemeClr val="accent1"/>
-            </a:lnRef>
-            <a:fillRef idx="0">
-              <a:schemeClr val="accent1"/>
-            </a:fillRef>
-            <a:effectRef idx="1">
+            <a:effectLst/>
+          </p:spPr>
+          <p:style>
+            <a:lnRef idx="2">
+              <a:schemeClr val="accent1"/>
+            </a:lnRef>
+            <a:fillRef idx="0">
+              <a:schemeClr val="accent1"/>
+            </a:fillRef>
+            <a:effectRef idx="0">
               <a:schemeClr val="accent1"/>
             </a:effectRef>
             <a:fontRef idx="minor">
@@ -4614,15 +4639,16 @@
                 <a:srgbClr val="8FBFBF"/>
               </a:solidFill>
             </a:ln>
-          </p:spPr>
-          <p:style>
-            <a:lnRef idx="2">
-              <a:schemeClr val="accent1"/>
-            </a:lnRef>
-            <a:fillRef idx="0">
-              <a:schemeClr val="accent1"/>
-            </a:fillRef>
-            <a:effectRef idx="1">
+            <a:effectLst/>
+          </p:spPr>
+          <p:style>
+            <a:lnRef idx="2">
+              <a:schemeClr val="accent1"/>
+            </a:lnRef>
+            <a:fillRef idx="0">
+              <a:schemeClr val="accent1"/>
+            </a:fillRef>
+            <a:effectRef idx="0">
               <a:schemeClr val="accent1"/>
             </a:effectRef>
             <a:fontRef idx="minor">
@@ -4649,15 +4675,16 @@
                 <a:srgbClr val="8FBFBF"/>
               </a:solidFill>
             </a:ln>
-          </p:spPr>
-          <p:style>
-            <a:lnRef idx="2">
-              <a:schemeClr val="accent1"/>
-            </a:lnRef>
-            <a:fillRef idx="0">
-              <a:schemeClr val="accent1"/>
-            </a:fillRef>
-            <a:effectRef idx="1">
+            <a:effectLst/>
+          </p:spPr>
+          <p:style>
+            <a:lnRef idx="2">
+              <a:schemeClr val="accent1"/>
+            </a:lnRef>
+            <a:fillRef idx="0">
+              <a:schemeClr val="accent1"/>
+            </a:fillRef>
+            <a:effectRef idx="0">
               <a:schemeClr val="accent1"/>
             </a:effectRef>
             <a:fontRef idx="minor">
@@ -4684,15 +4711,16 @@
                 <a:srgbClr val="8FBFBF"/>
               </a:solidFill>
             </a:ln>
-          </p:spPr>
-          <p:style>
-            <a:lnRef idx="2">
-              <a:schemeClr val="accent1"/>
-            </a:lnRef>
-            <a:fillRef idx="0">
-              <a:schemeClr val="accent1"/>
-            </a:fillRef>
-            <a:effectRef idx="1">
+            <a:effectLst/>
+          </p:spPr>
+          <p:style>
+            <a:lnRef idx="2">
+              <a:schemeClr val="accent1"/>
+            </a:lnRef>
+            <a:fillRef idx="0">
+              <a:schemeClr val="accent1"/>
+            </a:fillRef>
+            <a:effectRef idx="0">
               <a:schemeClr val="accent1"/>
             </a:effectRef>
             <a:fontRef idx="minor">
@@ -4719,15 +4747,16 @@
                 <a:srgbClr val="8FBFBF"/>
               </a:solidFill>
             </a:ln>
-          </p:spPr>
-          <p:style>
-            <a:lnRef idx="2">
-              <a:schemeClr val="accent1"/>
-            </a:lnRef>
-            <a:fillRef idx="0">
-              <a:schemeClr val="accent1"/>
-            </a:fillRef>
-            <a:effectRef idx="1">
+            <a:effectLst/>
+          </p:spPr>
+          <p:style>
+            <a:lnRef idx="2">
+              <a:schemeClr val="accent1"/>
+            </a:lnRef>
+            <a:fillRef idx="0">
+              <a:schemeClr val="accent1"/>
+            </a:fillRef>
+            <a:effectRef idx="0">
               <a:schemeClr val="accent1"/>
             </a:effectRef>
             <a:fontRef idx="minor">
@@ -4754,15 +4783,16 @@
                 <a:srgbClr val="8FBFBF"/>
               </a:solidFill>
             </a:ln>
-          </p:spPr>
-          <p:style>
-            <a:lnRef idx="2">
-              <a:schemeClr val="accent1"/>
-            </a:lnRef>
-            <a:fillRef idx="0">
-              <a:schemeClr val="accent1"/>
-            </a:fillRef>
-            <a:effectRef idx="1">
+            <a:effectLst/>
+          </p:spPr>
+          <p:style>
+            <a:lnRef idx="2">
+              <a:schemeClr val="accent1"/>
+            </a:lnRef>
+            <a:fillRef idx="0">
+              <a:schemeClr val="accent1"/>
+            </a:fillRef>
+            <a:effectRef idx="0">
               <a:schemeClr val="accent1"/>
             </a:effectRef>
             <a:fontRef idx="minor">
@@ -4789,15 +4819,16 @@
                 <a:srgbClr val="8FBFBF"/>
               </a:solidFill>
             </a:ln>
-          </p:spPr>
-          <p:style>
-            <a:lnRef idx="2">
-              <a:schemeClr val="accent1"/>
-            </a:lnRef>
-            <a:fillRef idx="0">
-              <a:schemeClr val="accent1"/>
-            </a:fillRef>
-            <a:effectRef idx="1">
+            <a:effectLst/>
+          </p:spPr>
+          <p:style>
+            <a:lnRef idx="2">
+              <a:schemeClr val="accent1"/>
+            </a:lnRef>
+            <a:fillRef idx="0">
+              <a:schemeClr val="accent1"/>
+            </a:fillRef>
+            <a:effectRef idx="0">
               <a:schemeClr val="accent1"/>
             </a:effectRef>
             <a:fontRef idx="minor">
@@ -4824,15 +4855,16 @@
                 <a:srgbClr val="8FBFBF"/>
               </a:solidFill>
             </a:ln>
-          </p:spPr>
-          <p:style>
-            <a:lnRef idx="2">
-              <a:schemeClr val="accent1"/>
-            </a:lnRef>
-            <a:fillRef idx="0">
-              <a:schemeClr val="accent1"/>
-            </a:fillRef>
-            <a:effectRef idx="1">
+            <a:effectLst/>
+          </p:spPr>
+          <p:style>
+            <a:lnRef idx="2">
+              <a:schemeClr val="accent1"/>
+            </a:lnRef>
+            <a:fillRef idx="0">
+              <a:schemeClr val="accent1"/>
+            </a:fillRef>
+            <a:effectRef idx="0">
               <a:schemeClr val="accent1"/>
             </a:effectRef>
             <a:fontRef idx="minor">
@@ -4859,15 +4891,16 @@
                 <a:srgbClr val="8FBFBF"/>
               </a:solidFill>
             </a:ln>
-          </p:spPr>
-          <p:style>
-            <a:lnRef idx="2">
-              <a:schemeClr val="accent1"/>
-            </a:lnRef>
-            <a:fillRef idx="0">
-              <a:schemeClr val="accent1"/>
-            </a:fillRef>
-            <a:effectRef idx="1">
+            <a:effectLst/>
+          </p:spPr>
+          <p:style>
+            <a:lnRef idx="2">
+              <a:schemeClr val="accent1"/>
+            </a:lnRef>
+            <a:fillRef idx="0">
+              <a:schemeClr val="accent1"/>
+            </a:fillRef>
+            <a:effectRef idx="0">
               <a:schemeClr val="accent1"/>
             </a:effectRef>
             <a:fontRef idx="minor">
@@ -4894,15 +4927,16 @@
                 <a:srgbClr val="8FBFBF"/>
               </a:solidFill>
             </a:ln>
-          </p:spPr>
-          <p:style>
-            <a:lnRef idx="2">
-              <a:schemeClr val="accent1"/>
-            </a:lnRef>
-            <a:fillRef idx="0">
-              <a:schemeClr val="accent1"/>
-            </a:fillRef>
-            <a:effectRef idx="1">
+            <a:effectLst/>
+          </p:spPr>
+          <p:style>
+            <a:lnRef idx="2">
+              <a:schemeClr val="accent1"/>
+            </a:lnRef>
+            <a:fillRef idx="0">
+              <a:schemeClr val="accent1"/>
+            </a:fillRef>
+            <a:effectRef idx="0">
               <a:schemeClr val="accent1"/>
             </a:effectRef>
             <a:fontRef idx="minor">
@@ -4929,15 +4963,16 @@
                 <a:srgbClr val="8FBFBF"/>
               </a:solidFill>
             </a:ln>
-          </p:spPr>
-          <p:style>
-            <a:lnRef idx="2">
-              <a:schemeClr val="accent1"/>
-            </a:lnRef>
-            <a:fillRef idx="0">
-              <a:schemeClr val="accent1"/>
-            </a:fillRef>
-            <a:effectRef idx="1">
+            <a:effectLst/>
+          </p:spPr>
+          <p:style>
+            <a:lnRef idx="2">
+              <a:schemeClr val="accent1"/>
+            </a:lnRef>
+            <a:fillRef idx="0">
+              <a:schemeClr val="accent1"/>
+            </a:fillRef>
+            <a:effectRef idx="0">
               <a:schemeClr val="accent1"/>
             </a:effectRef>
             <a:fontRef idx="minor">
@@ -4964,15 +4999,16 @@
                 <a:srgbClr val="8FBFBF"/>
               </a:solidFill>
             </a:ln>
-          </p:spPr>
-          <p:style>
-            <a:lnRef idx="2">
-              <a:schemeClr val="accent1"/>
-            </a:lnRef>
-            <a:fillRef idx="0">
-              <a:schemeClr val="accent1"/>
-            </a:fillRef>
-            <a:effectRef idx="1">
+            <a:effectLst/>
+          </p:spPr>
+          <p:style>
+            <a:lnRef idx="2">
+              <a:schemeClr val="accent1"/>
+            </a:lnRef>
+            <a:fillRef idx="0">
+              <a:schemeClr val="accent1"/>
+            </a:fillRef>
+            <a:effectRef idx="0">
               <a:schemeClr val="accent1"/>
             </a:effectRef>
             <a:fontRef idx="minor">
@@ -4999,15 +5035,16 @@
                 <a:srgbClr val="8FBFBF"/>
               </a:solidFill>
             </a:ln>
-          </p:spPr>
-          <p:style>
-            <a:lnRef idx="2">
-              <a:schemeClr val="accent1"/>
-            </a:lnRef>
-            <a:fillRef idx="0">
-              <a:schemeClr val="accent1"/>
-            </a:fillRef>
-            <a:effectRef idx="1">
+            <a:effectLst/>
+          </p:spPr>
+          <p:style>
+            <a:lnRef idx="2">
+              <a:schemeClr val="accent1"/>
+            </a:lnRef>
+            <a:fillRef idx="0">
+              <a:schemeClr val="accent1"/>
+            </a:fillRef>
+            <a:effectRef idx="0">
               <a:schemeClr val="accent1"/>
             </a:effectRef>
             <a:fontRef idx="minor">
@@ -5034,15 +5071,16 @@
                 <a:srgbClr val="8FBFBF"/>
               </a:solidFill>
             </a:ln>
-          </p:spPr>
-          <p:style>
-            <a:lnRef idx="2">
-              <a:schemeClr val="accent1"/>
-            </a:lnRef>
-            <a:fillRef idx="0">
-              <a:schemeClr val="accent1"/>
-            </a:fillRef>
-            <a:effectRef idx="1">
+            <a:effectLst/>
+          </p:spPr>
+          <p:style>
+            <a:lnRef idx="2">
+              <a:schemeClr val="accent1"/>
+            </a:lnRef>
+            <a:fillRef idx="0">
+              <a:schemeClr val="accent1"/>
+            </a:fillRef>
+            <a:effectRef idx="0">
               <a:schemeClr val="accent1"/>
             </a:effectRef>
             <a:fontRef idx="minor">
@@ -5069,15 +5107,16 @@
                 <a:srgbClr val="8FBFBF"/>
               </a:solidFill>
             </a:ln>
-          </p:spPr>
-          <p:style>
-            <a:lnRef idx="2">
-              <a:schemeClr val="accent1"/>
-            </a:lnRef>
-            <a:fillRef idx="0">
-              <a:schemeClr val="accent1"/>
-            </a:fillRef>
-            <a:effectRef idx="1">
+            <a:effectLst/>
+          </p:spPr>
+          <p:style>
+            <a:lnRef idx="2">
+              <a:schemeClr val="accent1"/>
+            </a:lnRef>
+            <a:fillRef idx="0">
+              <a:schemeClr val="accent1"/>
+            </a:fillRef>
+            <a:effectRef idx="0">
               <a:schemeClr val="accent1"/>
             </a:effectRef>
             <a:fontRef idx="minor">
@@ -5104,15 +5143,16 @@
                 <a:srgbClr val="8FBFBF"/>
               </a:solidFill>
             </a:ln>
-          </p:spPr>
-          <p:style>
-            <a:lnRef idx="2">
-              <a:schemeClr val="accent1"/>
-            </a:lnRef>
-            <a:fillRef idx="0">
-              <a:schemeClr val="accent1"/>
-            </a:fillRef>
-            <a:effectRef idx="1">
+            <a:effectLst/>
+          </p:spPr>
+          <p:style>
+            <a:lnRef idx="2">
+              <a:schemeClr val="accent1"/>
+            </a:lnRef>
+            <a:fillRef idx="0">
+              <a:schemeClr val="accent1"/>
+            </a:fillRef>
+            <a:effectRef idx="0">
               <a:schemeClr val="accent1"/>
             </a:effectRef>
             <a:fontRef idx="minor">
@@ -5139,15 +5179,16 @@
                 <a:srgbClr val="8FBFBF"/>
               </a:solidFill>
             </a:ln>
-          </p:spPr>
-          <p:style>
-            <a:lnRef idx="2">
-              <a:schemeClr val="accent1"/>
-            </a:lnRef>
-            <a:fillRef idx="0">
-              <a:schemeClr val="accent1"/>
-            </a:fillRef>
-            <a:effectRef idx="1">
+            <a:effectLst/>
+          </p:spPr>
+          <p:style>
+            <a:lnRef idx="2">
+              <a:schemeClr val="accent1"/>
+            </a:lnRef>
+            <a:fillRef idx="0">
+              <a:schemeClr val="accent1"/>
+            </a:fillRef>
+            <a:effectRef idx="0">
               <a:schemeClr val="accent1"/>
             </a:effectRef>
             <a:fontRef idx="minor">
@@ -5174,15 +5215,16 @@
                 <a:srgbClr val="8FBFBF"/>
               </a:solidFill>
             </a:ln>
-          </p:spPr>
-          <p:style>
-            <a:lnRef idx="2">
-              <a:schemeClr val="accent1"/>
-            </a:lnRef>
-            <a:fillRef idx="0">
-              <a:schemeClr val="accent1"/>
-            </a:fillRef>
-            <a:effectRef idx="1">
+            <a:effectLst/>
+          </p:spPr>
+          <p:style>
+            <a:lnRef idx="2">
+              <a:schemeClr val="accent1"/>
+            </a:lnRef>
+            <a:fillRef idx="0">
+              <a:schemeClr val="accent1"/>
+            </a:fillRef>
+            <a:effectRef idx="0">
               <a:schemeClr val="accent1"/>
             </a:effectRef>
             <a:fontRef idx="minor">
@@ -5209,15 +5251,16 @@
                 <a:srgbClr val="8FBFBF"/>
               </a:solidFill>
             </a:ln>
-          </p:spPr>
-          <p:style>
-            <a:lnRef idx="2">
-              <a:schemeClr val="accent1"/>
-            </a:lnRef>
-            <a:fillRef idx="0">
-              <a:schemeClr val="accent1"/>
-            </a:fillRef>
-            <a:effectRef idx="1">
+            <a:effectLst/>
+          </p:spPr>
+          <p:style>
+            <a:lnRef idx="2">
+              <a:schemeClr val="accent1"/>
+            </a:lnRef>
+            <a:fillRef idx="0">
+              <a:schemeClr val="accent1"/>
+            </a:fillRef>
+            <a:effectRef idx="0">
               <a:schemeClr val="accent1"/>
             </a:effectRef>
             <a:fontRef idx="minor">
@@ -5244,15 +5287,16 @@
                 <a:srgbClr val="8FBFBF"/>
               </a:solidFill>
             </a:ln>
-          </p:spPr>
-          <p:style>
-            <a:lnRef idx="2">
-              <a:schemeClr val="accent1"/>
-            </a:lnRef>
-            <a:fillRef idx="0">
-              <a:schemeClr val="accent1"/>
-            </a:fillRef>
-            <a:effectRef idx="1">
+            <a:effectLst/>
+          </p:spPr>
+          <p:style>
+            <a:lnRef idx="2">
+              <a:schemeClr val="accent1"/>
+            </a:lnRef>
+            <a:fillRef idx="0">
+              <a:schemeClr val="accent1"/>
+            </a:fillRef>
+            <a:effectRef idx="0">
               <a:schemeClr val="accent1"/>
             </a:effectRef>
             <a:fontRef idx="minor">
@@ -5279,15 +5323,16 @@
                 <a:srgbClr val="8FBFBF"/>
               </a:solidFill>
             </a:ln>
-          </p:spPr>
-          <p:style>
-            <a:lnRef idx="2">
-              <a:schemeClr val="accent1"/>
-            </a:lnRef>
-            <a:fillRef idx="0">
-              <a:schemeClr val="accent1"/>
-            </a:fillRef>
-            <a:effectRef idx="1">
+            <a:effectLst/>
+          </p:spPr>
+          <p:style>
+            <a:lnRef idx="2">
+              <a:schemeClr val="accent1"/>
+            </a:lnRef>
+            <a:fillRef idx="0">
+              <a:schemeClr val="accent1"/>
+            </a:fillRef>
+            <a:effectRef idx="0">
               <a:schemeClr val="accent1"/>
             </a:effectRef>
             <a:fontRef idx="minor">
@@ -5314,15 +5359,16 @@
                 <a:srgbClr val="8FBFBF"/>
               </a:solidFill>
             </a:ln>
-          </p:spPr>
-          <p:style>
-            <a:lnRef idx="2">
-              <a:schemeClr val="accent1"/>
-            </a:lnRef>
-            <a:fillRef idx="0">
-              <a:schemeClr val="accent1"/>
-            </a:fillRef>
-            <a:effectRef idx="1">
+            <a:effectLst/>
+          </p:spPr>
+          <p:style>
+            <a:lnRef idx="2">
+              <a:schemeClr val="accent1"/>
+            </a:lnRef>
+            <a:fillRef idx="0">
+              <a:schemeClr val="accent1"/>
+            </a:fillRef>
+            <a:effectRef idx="0">
               <a:schemeClr val="accent1"/>
             </a:effectRef>
             <a:fontRef idx="minor">
@@ -5349,15 +5395,16 @@
                 <a:srgbClr val="8FBFBF"/>
               </a:solidFill>
             </a:ln>
-          </p:spPr>
-          <p:style>
-            <a:lnRef idx="2">
-              <a:schemeClr val="accent1"/>
-            </a:lnRef>
-            <a:fillRef idx="0">
-              <a:schemeClr val="accent1"/>
-            </a:fillRef>
-            <a:effectRef idx="1">
+            <a:effectLst/>
+          </p:spPr>
+          <p:style>
+            <a:lnRef idx="2">
+              <a:schemeClr val="accent1"/>
+            </a:lnRef>
+            <a:fillRef idx="0">
+              <a:schemeClr val="accent1"/>
+            </a:fillRef>
+            <a:effectRef idx="0">
               <a:schemeClr val="accent1"/>
             </a:effectRef>
             <a:fontRef idx="minor">
@@ -5409,7 +5456,7 @@
             <a:fillRef idx="3">
               <a:schemeClr val="accent1"/>
             </a:fillRef>
-            <a:effectRef idx="2">
+            <a:effectRef idx="0">
               <a:schemeClr val="accent1"/>
             </a:effectRef>
             <a:fontRef idx="minor">
@@ -5443,15 +5490,16 @@
                 <a:srgbClr val="8FBFBF"/>
               </a:solidFill>
             </a:ln>
-          </p:spPr>
-          <p:style>
-            <a:lnRef idx="2">
-              <a:schemeClr val="accent1"/>
-            </a:lnRef>
-            <a:fillRef idx="0">
-              <a:schemeClr val="accent1"/>
-            </a:fillRef>
-            <a:effectRef idx="1">
+            <a:effectLst/>
+          </p:spPr>
+          <p:style>
+            <a:lnRef idx="2">
+              <a:schemeClr val="accent1"/>
+            </a:lnRef>
+            <a:fillRef idx="0">
+              <a:schemeClr val="accent1"/>
+            </a:fillRef>
+            <a:effectRef idx="0">
               <a:schemeClr val="accent1"/>
             </a:effectRef>
             <a:fontRef idx="minor">
@@ -5478,15 +5526,16 @@
                 <a:srgbClr val="8FBFBF"/>
               </a:solidFill>
             </a:ln>
-          </p:spPr>
-          <p:style>
-            <a:lnRef idx="2">
-              <a:schemeClr val="accent1"/>
-            </a:lnRef>
-            <a:fillRef idx="0">
-              <a:schemeClr val="accent1"/>
-            </a:fillRef>
-            <a:effectRef idx="1">
+            <a:effectLst/>
+          </p:spPr>
+          <p:style>
+            <a:lnRef idx="2">
+              <a:schemeClr val="accent1"/>
+            </a:lnRef>
+            <a:fillRef idx="0">
+              <a:schemeClr val="accent1"/>
+            </a:fillRef>
+            <a:effectRef idx="0">
               <a:schemeClr val="accent1"/>
             </a:effectRef>
             <a:fontRef idx="minor">
@@ -5513,15 +5562,16 @@
                 <a:srgbClr val="8FBFBF"/>
               </a:solidFill>
             </a:ln>
-          </p:spPr>
-          <p:style>
-            <a:lnRef idx="2">
-              <a:schemeClr val="accent1"/>
-            </a:lnRef>
-            <a:fillRef idx="0">
-              <a:schemeClr val="accent1"/>
-            </a:fillRef>
-            <a:effectRef idx="1">
+            <a:effectLst/>
+          </p:spPr>
+          <p:style>
+            <a:lnRef idx="2">
+              <a:schemeClr val="accent1"/>
+            </a:lnRef>
+            <a:fillRef idx="0">
+              <a:schemeClr val="accent1"/>
+            </a:fillRef>
+            <a:effectRef idx="0">
               <a:schemeClr val="accent1"/>
             </a:effectRef>
             <a:fontRef idx="minor">
@@ -5548,15 +5598,16 @@
                 <a:srgbClr val="8FBFBF"/>
               </a:solidFill>
             </a:ln>
-          </p:spPr>
-          <p:style>
-            <a:lnRef idx="2">
-              <a:schemeClr val="accent1"/>
-            </a:lnRef>
-            <a:fillRef idx="0">
-              <a:schemeClr val="accent1"/>
-            </a:fillRef>
-            <a:effectRef idx="1">
+            <a:effectLst/>
+          </p:spPr>
+          <p:style>
+            <a:lnRef idx="2">
+              <a:schemeClr val="accent1"/>
+            </a:lnRef>
+            <a:fillRef idx="0">
+              <a:schemeClr val="accent1"/>
+            </a:fillRef>
+            <a:effectRef idx="0">
               <a:schemeClr val="accent1"/>
             </a:effectRef>
             <a:fontRef idx="minor">
@@ -5583,15 +5634,16 @@
                 <a:srgbClr val="8FBFBF"/>
               </a:solidFill>
             </a:ln>
-          </p:spPr>
-          <p:style>
-            <a:lnRef idx="2">
-              <a:schemeClr val="accent1"/>
-            </a:lnRef>
-            <a:fillRef idx="0">
-              <a:schemeClr val="accent1"/>
-            </a:fillRef>
-            <a:effectRef idx="1">
+            <a:effectLst/>
+          </p:spPr>
+          <p:style>
+            <a:lnRef idx="2">
+              <a:schemeClr val="accent1"/>
+            </a:lnRef>
+            <a:fillRef idx="0">
+              <a:schemeClr val="accent1"/>
+            </a:fillRef>
+            <a:effectRef idx="0">
               <a:schemeClr val="accent1"/>
             </a:effectRef>
             <a:fontRef idx="minor">
@@ -5618,15 +5670,16 @@
                 <a:srgbClr val="8FBFBF"/>
               </a:solidFill>
             </a:ln>
-          </p:spPr>
-          <p:style>
-            <a:lnRef idx="2">
-              <a:schemeClr val="accent1"/>
-            </a:lnRef>
-            <a:fillRef idx="0">
-              <a:schemeClr val="accent1"/>
-            </a:fillRef>
-            <a:effectRef idx="1">
+            <a:effectLst/>
+          </p:spPr>
+          <p:style>
+            <a:lnRef idx="2">
+              <a:schemeClr val="accent1"/>
+            </a:lnRef>
+            <a:fillRef idx="0">
+              <a:schemeClr val="accent1"/>
+            </a:fillRef>
+            <a:effectRef idx="0">
               <a:schemeClr val="accent1"/>
             </a:effectRef>
             <a:fontRef idx="minor">
@@ -5653,15 +5706,16 @@
                 <a:srgbClr val="8FBFBF"/>
               </a:solidFill>
             </a:ln>
-          </p:spPr>
-          <p:style>
-            <a:lnRef idx="2">
-              <a:schemeClr val="accent1"/>
-            </a:lnRef>
-            <a:fillRef idx="0">
-              <a:schemeClr val="accent1"/>
-            </a:fillRef>
-            <a:effectRef idx="1">
+            <a:effectLst/>
+          </p:spPr>
+          <p:style>
+            <a:lnRef idx="2">
+              <a:schemeClr val="accent1"/>
+            </a:lnRef>
+            <a:fillRef idx="0">
+              <a:schemeClr val="accent1"/>
+            </a:fillRef>
+            <a:effectRef idx="0">
               <a:schemeClr val="accent1"/>
             </a:effectRef>
             <a:fontRef idx="minor">
@@ -5688,15 +5742,16 @@
                 <a:srgbClr val="8FBFBF"/>
               </a:solidFill>
             </a:ln>
-          </p:spPr>
-          <p:style>
-            <a:lnRef idx="2">
-              <a:schemeClr val="accent1"/>
-            </a:lnRef>
-            <a:fillRef idx="0">
-              <a:schemeClr val="accent1"/>
-            </a:fillRef>
-            <a:effectRef idx="1">
+            <a:effectLst/>
+          </p:spPr>
+          <p:style>
+            <a:lnRef idx="2">
+              <a:schemeClr val="accent1"/>
+            </a:lnRef>
+            <a:fillRef idx="0">
+              <a:schemeClr val="accent1"/>
+            </a:fillRef>
+            <a:effectRef idx="0">
               <a:schemeClr val="accent1"/>
             </a:effectRef>
             <a:fontRef idx="minor">
@@ -5723,15 +5778,16 @@
                 <a:srgbClr val="8FBFBF"/>
               </a:solidFill>
             </a:ln>
-          </p:spPr>
-          <p:style>
-            <a:lnRef idx="2">
-              <a:schemeClr val="accent1"/>
-            </a:lnRef>
-            <a:fillRef idx="0">
-              <a:schemeClr val="accent1"/>
-            </a:fillRef>
-            <a:effectRef idx="1">
+            <a:effectLst/>
+          </p:spPr>
+          <p:style>
+            <a:lnRef idx="2">
+              <a:schemeClr val="accent1"/>
+            </a:lnRef>
+            <a:fillRef idx="0">
+              <a:schemeClr val="accent1"/>
+            </a:fillRef>
+            <a:effectRef idx="0">
               <a:schemeClr val="accent1"/>
             </a:effectRef>
             <a:fontRef idx="minor">
@@ -5758,15 +5814,16 @@
                 <a:srgbClr val="8FBFBF"/>
               </a:solidFill>
             </a:ln>
-          </p:spPr>
-          <p:style>
-            <a:lnRef idx="2">
-              <a:schemeClr val="accent1"/>
-            </a:lnRef>
-            <a:fillRef idx="0">
-              <a:schemeClr val="accent1"/>
-            </a:fillRef>
-            <a:effectRef idx="1">
+            <a:effectLst/>
+          </p:spPr>
+          <p:style>
+            <a:lnRef idx="2">
+              <a:schemeClr val="accent1"/>
+            </a:lnRef>
+            <a:fillRef idx="0">
+              <a:schemeClr val="accent1"/>
+            </a:fillRef>
+            <a:effectRef idx="0">
               <a:schemeClr val="accent1"/>
             </a:effectRef>
             <a:fontRef idx="minor">
@@ -5793,15 +5850,16 @@
                 <a:srgbClr val="8FBFBF"/>
               </a:solidFill>
             </a:ln>
-          </p:spPr>
-          <p:style>
-            <a:lnRef idx="2">
-              <a:schemeClr val="accent1"/>
-            </a:lnRef>
-            <a:fillRef idx="0">
-              <a:schemeClr val="accent1"/>
-            </a:fillRef>
-            <a:effectRef idx="1">
+            <a:effectLst/>
+          </p:spPr>
+          <p:style>
+            <a:lnRef idx="2">
+              <a:schemeClr val="accent1"/>
+            </a:lnRef>
+            <a:fillRef idx="0">
+              <a:schemeClr val="accent1"/>
+            </a:fillRef>
+            <a:effectRef idx="0">
               <a:schemeClr val="accent1"/>
             </a:effectRef>
             <a:fontRef idx="minor">
@@ -5828,15 +5886,16 @@
                 <a:srgbClr val="8FBFBF"/>
               </a:solidFill>
             </a:ln>
-          </p:spPr>
-          <p:style>
-            <a:lnRef idx="2">
-              <a:schemeClr val="accent1"/>
-            </a:lnRef>
-            <a:fillRef idx="0">
-              <a:schemeClr val="accent1"/>
-            </a:fillRef>
-            <a:effectRef idx="1">
+            <a:effectLst/>
+          </p:spPr>
+          <p:style>
+            <a:lnRef idx="2">
+              <a:schemeClr val="accent1"/>
+            </a:lnRef>
+            <a:fillRef idx="0">
+              <a:schemeClr val="accent1"/>
+            </a:fillRef>
+            <a:effectRef idx="0">
               <a:schemeClr val="accent1"/>
             </a:effectRef>
             <a:fontRef idx="minor">
@@ -5863,15 +5922,16 @@
                 <a:srgbClr val="8FBFBF"/>
               </a:solidFill>
             </a:ln>
-          </p:spPr>
-          <p:style>
-            <a:lnRef idx="2">
-              <a:schemeClr val="accent1"/>
-            </a:lnRef>
-            <a:fillRef idx="0">
-              <a:schemeClr val="accent1"/>
-            </a:fillRef>
-            <a:effectRef idx="1">
+            <a:effectLst/>
+          </p:spPr>
+          <p:style>
+            <a:lnRef idx="2">
+              <a:schemeClr val="accent1"/>
+            </a:lnRef>
+            <a:fillRef idx="0">
+              <a:schemeClr val="accent1"/>
+            </a:fillRef>
+            <a:effectRef idx="0">
               <a:schemeClr val="accent1"/>
             </a:effectRef>
             <a:fontRef idx="minor">
@@ -5898,15 +5958,16 @@
                 <a:srgbClr val="8FBFBF"/>
               </a:solidFill>
             </a:ln>
-          </p:spPr>
-          <p:style>
-            <a:lnRef idx="2">
-              <a:schemeClr val="accent1"/>
-            </a:lnRef>
-            <a:fillRef idx="0">
-              <a:schemeClr val="accent1"/>
-            </a:fillRef>
-            <a:effectRef idx="1">
+            <a:effectLst/>
+          </p:spPr>
+          <p:style>
+            <a:lnRef idx="2">
+              <a:schemeClr val="accent1"/>
+            </a:lnRef>
+            <a:fillRef idx="0">
+              <a:schemeClr val="accent1"/>
+            </a:fillRef>
+            <a:effectRef idx="0">
               <a:schemeClr val="accent1"/>
             </a:effectRef>
             <a:fontRef idx="minor">
@@ -5933,15 +5994,16 @@
                 <a:srgbClr val="8FBFBF"/>
               </a:solidFill>
             </a:ln>
-          </p:spPr>
-          <p:style>
-            <a:lnRef idx="2">
-              <a:schemeClr val="accent1"/>
-            </a:lnRef>
-            <a:fillRef idx="0">
-              <a:schemeClr val="accent1"/>
-            </a:fillRef>
-            <a:effectRef idx="1">
+            <a:effectLst/>
+          </p:spPr>
+          <p:style>
+            <a:lnRef idx="2">
+              <a:schemeClr val="accent1"/>
+            </a:lnRef>
+            <a:fillRef idx="0">
+              <a:schemeClr val="accent1"/>
+            </a:fillRef>
+            <a:effectRef idx="0">
               <a:schemeClr val="accent1"/>
             </a:effectRef>
             <a:fontRef idx="minor">
@@ -5968,15 +6030,16 @@
                 <a:srgbClr val="8FBFBF"/>
               </a:solidFill>
             </a:ln>
-          </p:spPr>
-          <p:style>
-            <a:lnRef idx="2">
-              <a:schemeClr val="accent1"/>
-            </a:lnRef>
-            <a:fillRef idx="0">
-              <a:schemeClr val="accent1"/>
-            </a:fillRef>
-            <a:effectRef idx="1">
+            <a:effectLst/>
+          </p:spPr>
+          <p:style>
+            <a:lnRef idx="2">
+              <a:schemeClr val="accent1"/>
+            </a:lnRef>
+            <a:fillRef idx="0">
+              <a:schemeClr val="accent1"/>
+            </a:fillRef>
+            <a:effectRef idx="0">
               <a:schemeClr val="accent1"/>
             </a:effectRef>
             <a:fontRef idx="minor">
@@ -6003,15 +6066,16 @@
                 <a:srgbClr val="8FBFBF"/>
               </a:solidFill>
             </a:ln>
-          </p:spPr>
-          <p:style>
-            <a:lnRef idx="2">
-              <a:schemeClr val="accent1"/>
-            </a:lnRef>
-            <a:fillRef idx="0">
-              <a:schemeClr val="accent1"/>
-            </a:fillRef>
-            <a:effectRef idx="1">
+            <a:effectLst/>
+          </p:spPr>
+          <p:style>
+            <a:lnRef idx="2">
+              <a:schemeClr val="accent1"/>
+            </a:lnRef>
+            <a:fillRef idx="0">
+              <a:schemeClr val="accent1"/>
+            </a:fillRef>
+            <a:effectRef idx="0">
               <a:schemeClr val="accent1"/>
             </a:effectRef>
             <a:fontRef idx="minor">
@@ -6038,15 +6102,16 @@
                 <a:srgbClr val="8FBFBF"/>
               </a:solidFill>
             </a:ln>
-          </p:spPr>
-          <p:style>
-            <a:lnRef idx="2">
-              <a:schemeClr val="accent1"/>
-            </a:lnRef>
-            <a:fillRef idx="0">
-              <a:schemeClr val="accent1"/>
-            </a:fillRef>
-            <a:effectRef idx="1">
+            <a:effectLst/>
+          </p:spPr>
+          <p:style>
+            <a:lnRef idx="2">
+              <a:schemeClr val="accent1"/>
+            </a:lnRef>
+            <a:fillRef idx="0">
+              <a:schemeClr val="accent1"/>
+            </a:fillRef>
+            <a:effectRef idx="0">
               <a:schemeClr val="accent1"/>
             </a:effectRef>
             <a:fontRef idx="minor">
@@ -6073,15 +6138,16 @@
                 <a:srgbClr val="8FBFBF"/>
               </a:solidFill>
             </a:ln>
-          </p:spPr>
-          <p:style>
-            <a:lnRef idx="2">
-              <a:schemeClr val="accent1"/>
-            </a:lnRef>
-            <a:fillRef idx="0">
-              <a:schemeClr val="accent1"/>
-            </a:fillRef>
-            <a:effectRef idx="1">
+            <a:effectLst/>
+          </p:spPr>
+          <p:style>
+            <a:lnRef idx="2">
+              <a:schemeClr val="accent1"/>
+            </a:lnRef>
+            <a:fillRef idx="0">
+              <a:schemeClr val="accent1"/>
+            </a:fillRef>
+            <a:effectRef idx="0">
               <a:schemeClr val="accent1"/>
             </a:effectRef>
             <a:fontRef idx="minor">
@@ -6108,15 +6174,16 @@
                 <a:srgbClr val="8FBFBF"/>
               </a:solidFill>
             </a:ln>
-          </p:spPr>
-          <p:style>
-            <a:lnRef idx="2">
-              <a:schemeClr val="accent1"/>
-            </a:lnRef>
-            <a:fillRef idx="0">
-              <a:schemeClr val="accent1"/>
-            </a:fillRef>
-            <a:effectRef idx="1">
+            <a:effectLst/>
+          </p:spPr>
+          <p:style>
+            <a:lnRef idx="2">
+              <a:schemeClr val="accent1"/>
+            </a:lnRef>
+            <a:fillRef idx="0">
+              <a:schemeClr val="accent1"/>
+            </a:fillRef>
+            <a:effectRef idx="0">
               <a:schemeClr val="accent1"/>
             </a:effectRef>
             <a:fontRef idx="minor">
@@ -6143,15 +6210,16 @@
                 <a:srgbClr val="8FBFBF"/>
               </a:solidFill>
             </a:ln>
-          </p:spPr>
-          <p:style>
-            <a:lnRef idx="2">
-              <a:schemeClr val="accent1"/>
-            </a:lnRef>
-            <a:fillRef idx="0">
-              <a:schemeClr val="accent1"/>
-            </a:fillRef>
-            <a:effectRef idx="1">
+            <a:effectLst/>
+          </p:spPr>
+          <p:style>
+            <a:lnRef idx="2">
+              <a:schemeClr val="accent1"/>
+            </a:lnRef>
+            <a:fillRef idx="0">
+              <a:schemeClr val="accent1"/>
+            </a:fillRef>
+            <a:effectRef idx="0">
               <a:schemeClr val="accent1"/>
             </a:effectRef>
             <a:fontRef idx="minor">
@@ -6178,15 +6246,16 @@
                 <a:srgbClr val="8FBFBF"/>
               </a:solidFill>
             </a:ln>
-          </p:spPr>
-          <p:style>
-            <a:lnRef idx="2">
-              <a:schemeClr val="accent1"/>
-            </a:lnRef>
-            <a:fillRef idx="0">
-              <a:schemeClr val="accent1"/>
-            </a:fillRef>
-            <a:effectRef idx="1">
+            <a:effectLst/>
+          </p:spPr>
+          <p:style>
+            <a:lnRef idx="2">
+              <a:schemeClr val="accent1"/>
+            </a:lnRef>
+            <a:fillRef idx="0">
+              <a:schemeClr val="accent1"/>
+            </a:fillRef>
+            <a:effectRef idx="0">
               <a:schemeClr val="accent1"/>
             </a:effectRef>
             <a:fontRef idx="minor">
@@ -6213,15 +6282,16 @@
                 <a:srgbClr val="8FBFBF"/>
               </a:solidFill>
             </a:ln>
-          </p:spPr>
-          <p:style>
-            <a:lnRef idx="2">
-              <a:schemeClr val="accent1"/>
-            </a:lnRef>
-            <a:fillRef idx="0">
-              <a:schemeClr val="accent1"/>
-            </a:fillRef>
-            <a:effectRef idx="1">
+            <a:effectLst/>
+          </p:spPr>
+          <p:style>
+            <a:lnRef idx="2">
+              <a:schemeClr val="accent1"/>
+            </a:lnRef>
+            <a:fillRef idx="0">
+              <a:schemeClr val="accent1"/>
+            </a:fillRef>
+            <a:effectRef idx="0">
               <a:schemeClr val="accent1"/>
             </a:effectRef>
             <a:fontRef idx="minor">
@@ -6273,7 +6343,7 @@
             <a:fillRef idx="3">
               <a:schemeClr val="accent1"/>
             </a:fillRef>
-            <a:effectRef idx="2">
+            <a:effectRef idx="0">
               <a:schemeClr val="accent1"/>
             </a:effectRef>
             <a:fontRef idx="minor">
@@ -6307,15 +6377,16 @@
                 <a:srgbClr val="8FBFBF"/>
               </a:solidFill>
             </a:ln>
-          </p:spPr>
-          <p:style>
-            <a:lnRef idx="2">
-              <a:schemeClr val="accent1"/>
-            </a:lnRef>
-            <a:fillRef idx="0">
-              <a:schemeClr val="accent1"/>
-            </a:fillRef>
-            <a:effectRef idx="1">
+            <a:effectLst/>
+          </p:spPr>
+          <p:style>
+            <a:lnRef idx="2">
+              <a:schemeClr val="accent1"/>
+            </a:lnRef>
+            <a:fillRef idx="0">
+              <a:schemeClr val="accent1"/>
+            </a:fillRef>
+            <a:effectRef idx="0">
               <a:schemeClr val="accent1"/>
             </a:effectRef>
             <a:fontRef idx="minor">
@@ -6342,15 +6413,16 @@
                 <a:srgbClr val="8FBFBF"/>
               </a:solidFill>
             </a:ln>
-          </p:spPr>
-          <p:style>
-            <a:lnRef idx="2">
-              <a:schemeClr val="accent1"/>
-            </a:lnRef>
-            <a:fillRef idx="0">
-              <a:schemeClr val="accent1"/>
-            </a:fillRef>
-            <a:effectRef idx="1">
+            <a:effectLst/>
+          </p:spPr>
+          <p:style>
+            <a:lnRef idx="2">
+              <a:schemeClr val="accent1"/>
+            </a:lnRef>
+            <a:fillRef idx="0">
+              <a:schemeClr val="accent1"/>
+            </a:fillRef>
+            <a:effectRef idx="0">
               <a:schemeClr val="accent1"/>
             </a:effectRef>
             <a:fontRef idx="minor">
@@ -6377,15 +6449,16 @@
                 <a:srgbClr val="8FBFBF"/>
               </a:solidFill>
             </a:ln>
-          </p:spPr>
-          <p:style>
-            <a:lnRef idx="2">
-              <a:schemeClr val="accent1"/>
-            </a:lnRef>
-            <a:fillRef idx="0">
-              <a:schemeClr val="accent1"/>
-            </a:fillRef>
-            <a:effectRef idx="1">
+            <a:effectLst/>
+          </p:spPr>
+          <p:style>
+            <a:lnRef idx="2">
+              <a:schemeClr val="accent1"/>
+            </a:lnRef>
+            <a:fillRef idx="0">
+              <a:schemeClr val="accent1"/>
+            </a:fillRef>
+            <a:effectRef idx="0">
               <a:schemeClr val="accent1"/>
             </a:effectRef>
             <a:fontRef idx="minor">
@@ -6412,15 +6485,16 @@
                 <a:srgbClr val="8FBFBF"/>
               </a:solidFill>
             </a:ln>
-          </p:spPr>
-          <p:style>
-            <a:lnRef idx="2">
-              <a:schemeClr val="accent1"/>
-            </a:lnRef>
-            <a:fillRef idx="0">
-              <a:schemeClr val="accent1"/>
-            </a:fillRef>
-            <a:effectRef idx="1">
+            <a:effectLst/>
+          </p:spPr>
+          <p:style>
+            <a:lnRef idx="2">
+              <a:schemeClr val="accent1"/>
+            </a:lnRef>
+            <a:fillRef idx="0">
+              <a:schemeClr val="accent1"/>
+            </a:fillRef>
+            <a:effectRef idx="0">
               <a:schemeClr val="accent1"/>
             </a:effectRef>
             <a:fontRef idx="minor">
@@ -6447,15 +6521,16 @@
                 <a:srgbClr val="8FBFBF"/>
               </a:solidFill>
             </a:ln>
-          </p:spPr>
-          <p:style>
-            <a:lnRef idx="2">
-              <a:schemeClr val="accent1"/>
-            </a:lnRef>
-            <a:fillRef idx="0">
-              <a:schemeClr val="accent1"/>
-            </a:fillRef>
-            <a:effectRef idx="1">
+            <a:effectLst/>
+          </p:spPr>
+          <p:style>
+            <a:lnRef idx="2">
+              <a:schemeClr val="accent1"/>
+            </a:lnRef>
+            <a:fillRef idx="0">
+              <a:schemeClr val="accent1"/>
+            </a:fillRef>
+            <a:effectRef idx="0">
               <a:schemeClr val="accent1"/>
             </a:effectRef>
             <a:fontRef idx="minor">
@@ -6482,15 +6557,16 @@
                 <a:srgbClr val="8FBFBF"/>
               </a:solidFill>
             </a:ln>
-          </p:spPr>
-          <p:style>
-            <a:lnRef idx="2">
-              <a:schemeClr val="accent1"/>
-            </a:lnRef>
-            <a:fillRef idx="0">
-              <a:schemeClr val="accent1"/>
-            </a:fillRef>
-            <a:effectRef idx="1">
+            <a:effectLst/>
+          </p:spPr>
+          <p:style>
+            <a:lnRef idx="2">
+              <a:schemeClr val="accent1"/>
+            </a:lnRef>
+            <a:fillRef idx="0">
+              <a:schemeClr val="accent1"/>
+            </a:fillRef>
+            <a:effectRef idx="0">
               <a:schemeClr val="accent1"/>
             </a:effectRef>
             <a:fontRef idx="minor">
@@ -6517,15 +6593,16 @@
                 <a:srgbClr val="8FBFBF"/>
               </a:solidFill>
             </a:ln>
-          </p:spPr>
-          <p:style>
-            <a:lnRef idx="2">
-              <a:schemeClr val="accent1"/>
-            </a:lnRef>
-            <a:fillRef idx="0">
-              <a:schemeClr val="accent1"/>
-            </a:fillRef>
-            <a:effectRef idx="1">
+            <a:effectLst/>
+          </p:spPr>
+          <p:style>
+            <a:lnRef idx="2">
+              <a:schemeClr val="accent1"/>
+            </a:lnRef>
+            <a:fillRef idx="0">
+              <a:schemeClr val="accent1"/>
+            </a:fillRef>
+            <a:effectRef idx="0">
               <a:schemeClr val="accent1"/>
             </a:effectRef>
             <a:fontRef idx="minor">
@@ -6552,15 +6629,16 @@
                 <a:srgbClr val="8FBFBF"/>
               </a:solidFill>
             </a:ln>
-          </p:spPr>
-          <p:style>
-            <a:lnRef idx="2">
-              <a:schemeClr val="accent1"/>
-            </a:lnRef>
-            <a:fillRef idx="0">
-              <a:schemeClr val="accent1"/>
-            </a:fillRef>
-            <a:effectRef idx="1">
+            <a:effectLst/>
+          </p:spPr>
+          <p:style>
+            <a:lnRef idx="2">
+              <a:schemeClr val="accent1"/>
+            </a:lnRef>
+            <a:fillRef idx="0">
+              <a:schemeClr val="accent1"/>
+            </a:fillRef>
+            <a:effectRef idx="0">
               <a:schemeClr val="accent1"/>
             </a:effectRef>
             <a:fontRef idx="minor">
@@ -6587,15 +6665,16 @@
                 <a:srgbClr val="8FBFBF"/>
               </a:solidFill>
             </a:ln>
-          </p:spPr>
-          <p:style>
-            <a:lnRef idx="2">
-              <a:schemeClr val="accent1"/>
-            </a:lnRef>
-            <a:fillRef idx="0">
-              <a:schemeClr val="accent1"/>
-            </a:fillRef>
-            <a:effectRef idx="1">
+            <a:effectLst/>
+          </p:spPr>
+          <p:style>
+            <a:lnRef idx="2">
+              <a:schemeClr val="accent1"/>
+            </a:lnRef>
+            <a:fillRef idx="0">
+              <a:schemeClr val="accent1"/>
+            </a:fillRef>
+            <a:effectRef idx="0">
               <a:schemeClr val="accent1"/>
             </a:effectRef>
             <a:fontRef idx="minor">
@@ -6622,15 +6701,16 @@
                 <a:srgbClr val="8FBFBF"/>
               </a:solidFill>
             </a:ln>
-          </p:spPr>
-          <p:style>
-            <a:lnRef idx="2">
-              <a:schemeClr val="accent1"/>
-            </a:lnRef>
-            <a:fillRef idx="0">
-              <a:schemeClr val="accent1"/>
-            </a:fillRef>
-            <a:effectRef idx="1">
+            <a:effectLst/>
+          </p:spPr>
+          <p:style>
+            <a:lnRef idx="2">
+              <a:schemeClr val="accent1"/>
+            </a:lnRef>
+            <a:fillRef idx="0">
+              <a:schemeClr val="accent1"/>
+            </a:fillRef>
+            <a:effectRef idx="0">
               <a:schemeClr val="accent1"/>
             </a:effectRef>
             <a:fontRef idx="minor">
@@ -6657,15 +6737,16 @@
                 <a:srgbClr val="8FBFBF"/>
               </a:solidFill>
             </a:ln>
-          </p:spPr>
-          <p:style>
-            <a:lnRef idx="2">
-              <a:schemeClr val="accent1"/>
-            </a:lnRef>
-            <a:fillRef idx="0">
-              <a:schemeClr val="accent1"/>
-            </a:fillRef>
-            <a:effectRef idx="1">
+            <a:effectLst/>
+          </p:spPr>
+          <p:style>
+            <a:lnRef idx="2">
+              <a:schemeClr val="accent1"/>
+            </a:lnRef>
+            <a:fillRef idx="0">
+              <a:schemeClr val="accent1"/>
+            </a:fillRef>
+            <a:effectRef idx="0">
               <a:schemeClr val="accent1"/>
             </a:effectRef>
             <a:fontRef idx="minor">
@@ -6692,15 +6773,16 @@
                 <a:srgbClr val="8FBFBF"/>
               </a:solidFill>
             </a:ln>
-          </p:spPr>
-          <p:style>
-            <a:lnRef idx="2">
-              <a:schemeClr val="accent1"/>
-            </a:lnRef>
-            <a:fillRef idx="0">
-              <a:schemeClr val="accent1"/>
-            </a:fillRef>
-            <a:effectRef idx="1">
+            <a:effectLst/>
+          </p:spPr>
+          <p:style>
+            <a:lnRef idx="2">
+              <a:schemeClr val="accent1"/>
+            </a:lnRef>
+            <a:fillRef idx="0">
+              <a:schemeClr val="accent1"/>
+            </a:fillRef>
+            <a:effectRef idx="0">
               <a:schemeClr val="accent1"/>
             </a:effectRef>
             <a:fontRef idx="minor">
@@ -6727,15 +6809,16 @@
                 <a:srgbClr val="8FBFBF"/>
               </a:solidFill>
             </a:ln>
-          </p:spPr>
-          <p:style>
-            <a:lnRef idx="2">
-              <a:schemeClr val="accent1"/>
-            </a:lnRef>
-            <a:fillRef idx="0">
-              <a:schemeClr val="accent1"/>
-            </a:fillRef>
-            <a:effectRef idx="1">
+            <a:effectLst/>
+          </p:spPr>
+          <p:style>
+            <a:lnRef idx="2">
+              <a:schemeClr val="accent1"/>
+            </a:lnRef>
+            <a:fillRef idx="0">
+              <a:schemeClr val="accent1"/>
+            </a:fillRef>
+            <a:effectRef idx="0">
               <a:schemeClr val="accent1"/>
             </a:effectRef>
             <a:fontRef idx="minor">
@@ -6762,15 +6845,16 @@
                 <a:srgbClr val="8FBFBF"/>
               </a:solidFill>
             </a:ln>
-          </p:spPr>
-          <p:style>
-            <a:lnRef idx="2">
-              <a:schemeClr val="accent1"/>
-            </a:lnRef>
-            <a:fillRef idx="0">
-              <a:schemeClr val="accent1"/>
-            </a:fillRef>
-            <a:effectRef idx="1">
+            <a:effectLst/>
+          </p:spPr>
+          <p:style>
+            <a:lnRef idx="2">
+              <a:schemeClr val="accent1"/>
+            </a:lnRef>
+            <a:fillRef idx="0">
+              <a:schemeClr val="accent1"/>
+            </a:fillRef>
+            <a:effectRef idx="0">
               <a:schemeClr val="accent1"/>
             </a:effectRef>
             <a:fontRef idx="minor">
@@ -6797,15 +6881,16 @@
                 <a:srgbClr val="8FBFBF"/>
               </a:solidFill>
             </a:ln>
-          </p:spPr>
-          <p:style>
-            <a:lnRef idx="2">
-              <a:schemeClr val="accent1"/>
-            </a:lnRef>
-            <a:fillRef idx="0">
-              <a:schemeClr val="accent1"/>
-            </a:fillRef>
-            <a:effectRef idx="1">
+            <a:effectLst/>
+          </p:spPr>
+          <p:style>
+            <a:lnRef idx="2">
+              <a:schemeClr val="accent1"/>
+            </a:lnRef>
+            <a:fillRef idx="0">
+              <a:schemeClr val="accent1"/>
+            </a:fillRef>
+            <a:effectRef idx="0">
               <a:schemeClr val="accent1"/>
             </a:effectRef>
             <a:fontRef idx="minor">
@@ -6832,15 +6917,16 @@
                 <a:srgbClr val="8FBFBF"/>
               </a:solidFill>
             </a:ln>
-          </p:spPr>
-          <p:style>
-            <a:lnRef idx="2">
-              <a:schemeClr val="accent1"/>
-            </a:lnRef>
-            <a:fillRef idx="0">
-              <a:schemeClr val="accent1"/>
-            </a:fillRef>
-            <a:effectRef idx="1">
+            <a:effectLst/>
+          </p:spPr>
+          <p:style>
+            <a:lnRef idx="2">
+              <a:schemeClr val="accent1"/>
+            </a:lnRef>
+            <a:fillRef idx="0">
+              <a:schemeClr val="accent1"/>
+            </a:fillRef>
+            <a:effectRef idx="0">
               <a:schemeClr val="accent1"/>
             </a:effectRef>
             <a:fontRef idx="minor">
@@ -6867,15 +6953,16 @@
                 <a:srgbClr val="8FBFBF"/>
               </a:solidFill>
             </a:ln>
-          </p:spPr>
-          <p:style>
-            <a:lnRef idx="2">
-              <a:schemeClr val="accent1"/>
-            </a:lnRef>
-            <a:fillRef idx="0">
-              <a:schemeClr val="accent1"/>
-            </a:fillRef>
-            <a:effectRef idx="1">
+            <a:effectLst/>
+          </p:spPr>
+          <p:style>
+            <a:lnRef idx="2">
+              <a:schemeClr val="accent1"/>
+            </a:lnRef>
+            <a:fillRef idx="0">
+              <a:schemeClr val="accent1"/>
+            </a:fillRef>
+            <a:effectRef idx="0">
               <a:schemeClr val="accent1"/>
             </a:effectRef>
             <a:fontRef idx="minor">
@@ -6902,15 +6989,16 @@
                 <a:srgbClr val="8FBFBF"/>
               </a:solidFill>
             </a:ln>
-          </p:spPr>
-          <p:style>
-            <a:lnRef idx="2">
-              <a:schemeClr val="accent1"/>
-            </a:lnRef>
-            <a:fillRef idx="0">
-              <a:schemeClr val="accent1"/>
-            </a:fillRef>
-            <a:effectRef idx="1">
+            <a:effectLst/>
+          </p:spPr>
+          <p:style>
+            <a:lnRef idx="2">
+              <a:schemeClr val="accent1"/>
+            </a:lnRef>
+            <a:fillRef idx="0">
+              <a:schemeClr val="accent1"/>
+            </a:fillRef>
+            <a:effectRef idx="0">
               <a:schemeClr val="accent1"/>
             </a:effectRef>
             <a:fontRef idx="minor">
@@ -6937,15 +7025,16 @@
                 <a:srgbClr val="8FBFBF"/>
               </a:solidFill>
             </a:ln>
-          </p:spPr>
-          <p:style>
-            <a:lnRef idx="2">
-              <a:schemeClr val="accent1"/>
-            </a:lnRef>
-            <a:fillRef idx="0">
-              <a:schemeClr val="accent1"/>
-            </a:fillRef>
-            <a:effectRef idx="1">
+            <a:effectLst/>
+          </p:spPr>
+          <p:style>
+            <a:lnRef idx="2">
+              <a:schemeClr val="accent1"/>
+            </a:lnRef>
+            <a:fillRef idx="0">
+              <a:schemeClr val="accent1"/>
+            </a:fillRef>
+            <a:effectRef idx="0">
               <a:schemeClr val="accent1"/>
             </a:effectRef>
             <a:fontRef idx="minor">
@@ -6972,15 +7061,16 @@
                 <a:srgbClr val="8FBFBF"/>
               </a:solidFill>
             </a:ln>
-          </p:spPr>
-          <p:style>
-            <a:lnRef idx="2">
-              <a:schemeClr val="accent1"/>
-            </a:lnRef>
-            <a:fillRef idx="0">
-              <a:schemeClr val="accent1"/>
-            </a:fillRef>
-            <a:effectRef idx="1">
+            <a:effectLst/>
+          </p:spPr>
+          <p:style>
+            <a:lnRef idx="2">
+              <a:schemeClr val="accent1"/>
+            </a:lnRef>
+            <a:fillRef idx="0">
+              <a:schemeClr val="accent1"/>
+            </a:fillRef>
+            <a:effectRef idx="0">
               <a:schemeClr val="accent1"/>
             </a:effectRef>
             <a:fontRef idx="minor">
@@ -7007,15 +7097,16 @@
                 <a:srgbClr val="8FBFBF"/>
               </a:solidFill>
             </a:ln>
-          </p:spPr>
-          <p:style>
-            <a:lnRef idx="2">
-              <a:schemeClr val="accent1"/>
-            </a:lnRef>
-            <a:fillRef idx="0">
-              <a:schemeClr val="accent1"/>
-            </a:fillRef>
-            <a:effectRef idx="1">
+            <a:effectLst/>
+          </p:spPr>
+          <p:style>
+            <a:lnRef idx="2">
+              <a:schemeClr val="accent1"/>
+            </a:lnRef>
+            <a:fillRef idx="0">
+              <a:schemeClr val="accent1"/>
+            </a:fillRef>
+            <a:effectRef idx="0">
               <a:schemeClr val="accent1"/>
             </a:effectRef>
             <a:fontRef idx="minor">
@@ -7042,15 +7133,16 @@
                 <a:srgbClr val="8FBFBF"/>
               </a:solidFill>
             </a:ln>
-          </p:spPr>
-          <p:style>
-            <a:lnRef idx="2">
-              <a:schemeClr val="accent1"/>
-            </a:lnRef>
-            <a:fillRef idx="0">
-              <a:schemeClr val="accent1"/>
-            </a:fillRef>
-            <a:effectRef idx="1">
+            <a:effectLst/>
+          </p:spPr>
+          <p:style>
+            <a:lnRef idx="2">
+              <a:schemeClr val="accent1"/>
+            </a:lnRef>
+            <a:fillRef idx="0">
+              <a:schemeClr val="accent1"/>
+            </a:fillRef>
+            <a:effectRef idx="0">
               <a:schemeClr val="accent1"/>
             </a:effectRef>
             <a:fontRef idx="minor">
@@ -7077,15 +7169,16 @@
                 <a:srgbClr val="8FBFBF"/>
               </a:solidFill>
             </a:ln>
-          </p:spPr>
-          <p:style>
-            <a:lnRef idx="2">
-              <a:schemeClr val="accent1"/>
-            </a:lnRef>
-            <a:fillRef idx="0">
-              <a:schemeClr val="accent1"/>
-            </a:fillRef>
-            <a:effectRef idx="1">
+            <a:effectLst/>
+          </p:spPr>
+          <p:style>
+            <a:lnRef idx="2">
+              <a:schemeClr val="accent1"/>
+            </a:lnRef>
+            <a:fillRef idx="0">
+              <a:schemeClr val="accent1"/>
+            </a:fillRef>
+            <a:effectRef idx="0">
               <a:schemeClr val="accent1"/>
             </a:effectRef>
             <a:fontRef idx="minor">
@@ -7137,7 +7230,7 @@
             <a:fillRef idx="3">
               <a:schemeClr val="accent1"/>
             </a:fillRef>
-            <a:effectRef idx="2">
+            <a:effectRef idx="0">
               <a:schemeClr val="accent1"/>
             </a:effectRef>
             <a:fontRef idx="minor">
@@ -7171,15 +7264,16 @@
                 <a:srgbClr val="8FBFBF"/>
               </a:solidFill>
             </a:ln>
-          </p:spPr>
-          <p:style>
-            <a:lnRef idx="2">
-              <a:schemeClr val="accent1"/>
-            </a:lnRef>
-            <a:fillRef idx="0">
-              <a:schemeClr val="accent1"/>
-            </a:fillRef>
-            <a:effectRef idx="1">
+            <a:effectLst/>
+          </p:spPr>
+          <p:style>
+            <a:lnRef idx="2">
+              <a:schemeClr val="accent1"/>
+            </a:lnRef>
+            <a:fillRef idx="0">
+              <a:schemeClr val="accent1"/>
+            </a:fillRef>
+            <a:effectRef idx="0">
               <a:schemeClr val="accent1"/>
             </a:effectRef>
             <a:fontRef idx="minor">
@@ -7206,15 +7300,16 @@
                 <a:srgbClr val="8FBFBF"/>
               </a:solidFill>
             </a:ln>
-          </p:spPr>
-          <p:style>
-            <a:lnRef idx="2">
-              <a:schemeClr val="accent1"/>
-            </a:lnRef>
-            <a:fillRef idx="0">
-              <a:schemeClr val="accent1"/>
-            </a:fillRef>
-            <a:effectRef idx="1">
+            <a:effectLst/>
+          </p:spPr>
+          <p:style>
+            <a:lnRef idx="2">
+              <a:schemeClr val="accent1"/>
+            </a:lnRef>
+            <a:fillRef idx="0">
+              <a:schemeClr val="accent1"/>
+            </a:fillRef>
+            <a:effectRef idx="0">
               <a:schemeClr val="accent1"/>
             </a:effectRef>
             <a:fontRef idx="minor">
@@ -7241,15 +7336,16 @@
                 <a:srgbClr val="8FBFBF"/>
               </a:solidFill>
             </a:ln>
-          </p:spPr>
-          <p:style>
-            <a:lnRef idx="2">
-              <a:schemeClr val="accent1"/>
-            </a:lnRef>
-            <a:fillRef idx="0">
-              <a:schemeClr val="accent1"/>
-            </a:fillRef>
-            <a:effectRef idx="1">
+            <a:effectLst/>
+          </p:spPr>
+          <p:style>
+            <a:lnRef idx="2">
+              <a:schemeClr val="accent1"/>
+            </a:lnRef>
+            <a:fillRef idx="0">
+              <a:schemeClr val="accent1"/>
+            </a:fillRef>
+            <a:effectRef idx="0">
               <a:schemeClr val="accent1"/>
             </a:effectRef>
             <a:fontRef idx="minor">
@@ -7276,15 +7372,16 @@
                 <a:srgbClr val="8FBFBF"/>
               </a:solidFill>
             </a:ln>
-          </p:spPr>
-          <p:style>
-            <a:lnRef idx="2">
-              <a:schemeClr val="accent1"/>
-            </a:lnRef>
-            <a:fillRef idx="0">
-              <a:schemeClr val="accent1"/>
-            </a:fillRef>
-            <a:effectRef idx="1">
+            <a:effectLst/>
+          </p:spPr>
+          <p:style>
+            <a:lnRef idx="2">
+              <a:schemeClr val="accent1"/>
+            </a:lnRef>
+            <a:fillRef idx="0">
+              <a:schemeClr val="accent1"/>
+            </a:fillRef>
+            <a:effectRef idx="0">
               <a:schemeClr val="accent1"/>
             </a:effectRef>
             <a:fontRef idx="minor">
@@ -7311,15 +7408,16 @@
                 <a:srgbClr val="8FBFBF"/>
               </a:solidFill>
             </a:ln>
-          </p:spPr>
-          <p:style>
-            <a:lnRef idx="2">
-              <a:schemeClr val="accent1"/>
-            </a:lnRef>
-            <a:fillRef idx="0">
-              <a:schemeClr val="accent1"/>
-            </a:fillRef>
-            <a:effectRef idx="1">
+            <a:effectLst/>
+          </p:spPr>
+          <p:style>
+            <a:lnRef idx="2">
+              <a:schemeClr val="accent1"/>
+            </a:lnRef>
+            <a:fillRef idx="0">
+              <a:schemeClr val="accent1"/>
+            </a:fillRef>
+            <a:effectRef idx="0">
               <a:schemeClr val="accent1"/>
             </a:effectRef>
             <a:fontRef idx="minor">
@@ -7346,15 +7444,16 @@
                 <a:srgbClr val="8FBFBF"/>
               </a:solidFill>
             </a:ln>
-          </p:spPr>
-          <p:style>
-            <a:lnRef idx="2">
-              <a:schemeClr val="accent1"/>
-            </a:lnRef>
-            <a:fillRef idx="0">
-              <a:schemeClr val="accent1"/>
-            </a:fillRef>
-            <a:effectRef idx="1">
+            <a:effectLst/>
+          </p:spPr>
+          <p:style>
+            <a:lnRef idx="2">
+              <a:schemeClr val="accent1"/>
+            </a:lnRef>
+            <a:fillRef idx="0">
+              <a:schemeClr val="accent1"/>
+            </a:fillRef>
+            <a:effectRef idx="0">
               <a:schemeClr val="accent1"/>
             </a:effectRef>
             <a:fontRef idx="minor">
@@ -7381,15 +7480,16 @@
                 <a:srgbClr val="8FBFBF"/>
               </a:solidFill>
             </a:ln>
-          </p:spPr>
-          <p:style>
-            <a:lnRef idx="2">
-              <a:schemeClr val="accent1"/>
-            </a:lnRef>
-            <a:fillRef idx="0">
-              <a:schemeClr val="accent1"/>
-            </a:fillRef>
-            <a:effectRef idx="1">
+            <a:effectLst/>
+          </p:spPr>
+          <p:style>
+            <a:lnRef idx="2">
+              <a:schemeClr val="accent1"/>
+            </a:lnRef>
+            <a:fillRef idx="0">
+              <a:schemeClr val="accent1"/>
+            </a:fillRef>
+            <a:effectRef idx="0">
               <a:schemeClr val="accent1"/>
             </a:effectRef>
             <a:fontRef idx="minor">
@@ -7416,15 +7516,16 @@
                 <a:srgbClr val="8FBFBF"/>
               </a:solidFill>
             </a:ln>
-          </p:spPr>
-          <p:style>
-            <a:lnRef idx="2">
-              <a:schemeClr val="accent1"/>
-            </a:lnRef>
-            <a:fillRef idx="0">
-              <a:schemeClr val="accent1"/>
-            </a:fillRef>
-            <a:effectRef idx="1">
+            <a:effectLst/>
+          </p:spPr>
+          <p:style>
+            <a:lnRef idx="2">
+              <a:schemeClr val="accent1"/>
+            </a:lnRef>
+            <a:fillRef idx="0">
+              <a:schemeClr val="accent1"/>
+            </a:fillRef>
+            <a:effectRef idx="0">
               <a:schemeClr val="accent1"/>
             </a:effectRef>
             <a:fontRef idx="minor">
@@ -7451,15 +7552,16 @@
                 <a:srgbClr val="8FBFBF"/>
               </a:solidFill>
             </a:ln>
-          </p:spPr>
-          <p:style>
-            <a:lnRef idx="2">
-              <a:schemeClr val="accent1"/>
-            </a:lnRef>
-            <a:fillRef idx="0">
-              <a:schemeClr val="accent1"/>
-            </a:fillRef>
-            <a:effectRef idx="1">
+            <a:effectLst/>
+          </p:spPr>
+          <p:style>
+            <a:lnRef idx="2">
+              <a:schemeClr val="accent1"/>
+            </a:lnRef>
+            <a:fillRef idx="0">
+              <a:schemeClr val="accent1"/>
+            </a:fillRef>
+            <a:effectRef idx="0">
               <a:schemeClr val="accent1"/>
             </a:effectRef>
             <a:fontRef idx="minor">
@@ -7486,15 +7588,16 @@
                 <a:srgbClr val="8FBFBF"/>
               </a:solidFill>
             </a:ln>
-          </p:spPr>
-          <p:style>
-            <a:lnRef idx="2">
-              <a:schemeClr val="accent1"/>
-            </a:lnRef>
-            <a:fillRef idx="0">
-              <a:schemeClr val="accent1"/>
-            </a:fillRef>
-            <a:effectRef idx="1">
+            <a:effectLst/>
+          </p:spPr>
+          <p:style>
+            <a:lnRef idx="2">
+              <a:schemeClr val="accent1"/>
+            </a:lnRef>
+            <a:fillRef idx="0">
+              <a:schemeClr val="accent1"/>
+            </a:fillRef>
+            <a:effectRef idx="0">
               <a:schemeClr val="accent1"/>
             </a:effectRef>
             <a:fontRef idx="minor">
@@ -7521,15 +7624,16 @@
                 <a:srgbClr val="8FBFBF"/>
               </a:solidFill>
             </a:ln>
-          </p:spPr>
-          <p:style>
-            <a:lnRef idx="2">
-              <a:schemeClr val="accent1"/>
-            </a:lnRef>
-            <a:fillRef idx="0">
-              <a:schemeClr val="accent1"/>
-            </a:fillRef>
-            <a:effectRef idx="1">
+            <a:effectLst/>
+          </p:spPr>
+          <p:style>
+            <a:lnRef idx="2">
+              <a:schemeClr val="accent1"/>
+            </a:lnRef>
+            <a:fillRef idx="0">
+              <a:schemeClr val="accent1"/>
+            </a:fillRef>
+            <a:effectRef idx="0">
               <a:schemeClr val="accent1"/>
             </a:effectRef>
             <a:fontRef idx="minor">
@@ -7556,15 +7660,16 @@
                 <a:srgbClr val="8FBFBF"/>
               </a:solidFill>
             </a:ln>
-          </p:spPr>
-          <p:style>
-            <a:lnRef idx="2">
-              <a:schemeClr val="accent1"/>
-            </a:lnRef>
-            <a:fillRef idx="0">
-              <a:schemeClr val="accent1"/>
-            </a:fillRef>
-            <a:effectRef idx="1">
+            <a:effectLst/>
+          </p:spPr>
+          <p:style>
+            <a:lnRef idx="2">
+              <a:schemeClr val="accent1"/>
+            </a:lnRef>
+            <a:fillRef idx="0">
+              <a:schemeClr val="accent1"/>
+            </a:fillRef>
+            <a:effectRef idx="0">
               <a:schemeClr val="accent1"/>
             </a:effectRef>
             <a:fontRef idx="minor">
@@ -7591,15 +7696,16 @@
                 <a:srgbClr val="8FBFBF"/>
               </a:solidFill>
             </a:ln>
-          </p:spPr>
-          <p:style>
-            <a:lnRef idx="2">
-              <a:schemeClr val="accent1"/>
-            </a:lnRef>
-            <a:fillRef idx="0">
-              <a:schemeClr val="accent1"/>
-            </a:fillRef>
-            <a:effectRef idx="1">
+            <a:effectLst/>
+          </p:spPr>
+          <p:style>
+            <a:lnRef idx="2">
+              <a:schemeClr val="accent1"/>
+            </a:lnRef>
+            <a:fillRef idx="0">
+              <a:schemeClr val="accent1"/>
+            </a:fillRef>
+            <a:effectRef idx="0">
               <a:schemeClr val="accent1"/>
             </a:effectRef>
             <a:fontRef idx="minor">
@@ -7626,15 +7732,16 @@
                 <a:srgbClr val="8FBFBF"/>
               </a:solidFill>
             </a:ln>
-          </p:spPr>
-          <p:style>
-            <a:lnRef idx="2">
-              <a:schemeClr val="accent1"/>
-            </a:lnRef>
-            <a:fillRef idx="0">
-              <a:schemeClr val="accent1"/>
-            </a:fillRef>
-            <a:effectRef idx="1">
+            <a:effectLst/>
+          </p:spPr>
+          <p:style>
+            <a:lnRef idx="2">
+              <a:schemeClr val="accent1"/>
+            </a:lnRef>
+            <a:fillRef idx="0">
+              <a:schemeClr val="accent1"/>
+            </a:fillRef>
+            <a:effectRef idx="0">
               <a:schemeClr val="accent1"/>
             </a:effectRef>
             <a:fontRef idx="minor">
@@ -7661,15 +7768,16 @@
                 <a:srgbClr val="8FBFBF"/>
               </a:solidFill>
             </a:ln>
-          </p:spPr>
-          <p:style>
-            <a:lnRef idx="2">
-              <a:schemeClr val="accent1"/>
-            </a:lnRef>
-            <a:fillRef idx="0">
-              <a:schemeClr val="accent1"/>
-            </a:fillRef>
-            <a:effectRef idx="1">
+            <a:effectLst/>
+          </p:spPr>
+          <p:style>
+            <a:lnRef idx="2">
+              <a:schemeClr val="accent1"/>
+            </a:lnRef>
+            <a:fillRef idx="0">
+              <a:schemeClr val="accent1"/>
+            </a:fillRef>
+            <a:effectRef idx="0">
               <a:schemeClr val="accent1"/>
             </a:effectRef>
             <a:fontRef idx="minor">
@@ -7696,15 +7804,16 @@
                 <a:srgbClr val="8FBFBF"/>
               </a:solidFill>
             </a:ln>
-          </p:spPr>
-          <p:style>
-            <a:lnRef idx="2">
-              <a:schemeClr val="accent1"/>
-            </a:lnRef>
-            <a:fillRef idx="0">
-              <a:schemeClr val="accent1"/>
-            </a:fillRef>
-            <a:effectRef idx="1">
+            <a:effectLst/>
+          </p:spPr>
+          <p:style>
+            <a:lnRef idx="2">
+              <a:schemeClr val="accent1"/>
+            </a:lnRef>
+            <a:fillRef idx="0">
+              <a:schemeClr val="accent1"/>
+            </a:fillRef>
+            <a:effectRef idx="0">
               <a:schemeClr val="accent1"/>
             </a:effectRef>
             <a:fontRef idx="minor">
@@ -7731,15 +7840,16 @@
                 <a:srgbClr val="8FBFBF"/>
               </a:solidFill>
             </a:ln>
-          </p:spPr>
-          <p:style>
-            <a:lnRef idx="2">
-              <a:schemeClr val="accent1"/>
-            </a:lnRef>
-            <a:fillRef idx="0">
-              <a:schemeClr val="accent1"/>
-            </a:fillRef>
-            <a:effectRef idx="1">
+            <a:effectLst/>
+          </p:spPr>
+          <p:style>
+            <a:lnRef idx="2">
+              <a:schemeClr val="accent1"/>
+            </a:lnRef>
+            <a:fillRef idx="0">
+              <a:schemeClr val="accent1"/>
+            </a:fillRef>
+            <a:effectRef idx="0">
               <a:schemeClr val="accent1"/>
             </a:effectRef>
             <a:fontRef idx="minor">
@@ -7766,15 +7876,16 @@
                 <a:srgbClr val="8FBFBF"/>
               </a:solidFill>
             </a:ln>
-          </p:spPr>
-          <p:style>
-            <a:lnRef idx="2">
-              <a:schemeClr val="accent1"/>
-            </a:lnRef>
-            <a:fillRef idx="0">
-              <a:schemeClr val="accent1"/>
-            </a:fillRef>
-            <a:effectRef idx="1">
+            <a:effectLst/>
+          </p:spPr>
+          <p:style>
+            <a:lnRef idx="2">
+              <a:schemeClr val="accent1"/>
+            </a:lnRef>
+            <a:fillRef idx="0">
+              <a:schemeClr val="accent1"/>
+            </a:fillRef>
+            <a:effectRef idx="0">
               <a:schemeClr val="accent1"/>
             </a:effectRef>
             <a:fontRef idx="minor">
@@ -7801,15 +7912,16 @@
                 <a:srgbClr val="8FBFBF"/>
               </a:solidFill>
             </a:ln>
-          </p:spPr>
-          <p:style>
-            <a:lnRef idx="2">
-              <a:schemeClr val="accent1"/>
-            </a:lnRef>
-            <a:fillRef idx="0">
-              <a:schemeClr val="accent1"/>
-            </a:fillRef>
-            <a:effectRef idx="1">
+            <a:effectLst/>
+          </p:spPr>
+          <p:style>
+            <a:lnRef idx="2">
+              <a:schemeClr val="accent1"/>
+            </a:lnRef>
+            <a:fillRef idx="0">
+              <a:schemeClr val="accent1"/>
+            </a:fillRef>
+            <a:effectRef idx="0">
               <a:schemeClr val="accent1"/>
             </a:effectRef>
             <a:fontRef idx="minor">
@@ -7836,15 +7948,16 @@
                 <a:srgbClr val="8FBFBF"/>
               </a:solidFill>
             </a:ln>
-          </p:spPr>
-          <p:style>
-            <a:lnRef idx="2">
-              <a:schemeClr val="accent1"/>
-            </a:lnRef>
-            <a:fillRef idx="0">
-              <a:schemeClr val="accent1"/>
-            </a:fillRef>
-            <a:effectRef idx="1">
+            <a:effectLst/>
+          </p:spPr>
+          <p:style>
+            <a:lnRef idx="2">
+              <a:schemeClr val="accent1"/>
+            </a:lnRef>
+            <a:fillRef idx="0">
+              <a:schemeClr val="accent1"/>
+            </a:fillRef>
+            <a:effectRef idx="0">
               <a:schemeClr val="accent1"/>
             </a:effectRef>
             <a:fontRef idx="minor">
@@ -7871,15 +7984,16 @@
                 <a:srgbClr val="8FBFBF"/>
               </a:solidFill>
             </a:ln>
-          </p:spPr>
-          <p:style>
-            <a:lnRef idx="2">
-              <a:schemeClr val="accent1"/>
-            </a:lnRef>
-            <a:fillRef idx="0">
-              <a:schemeClr val="accent1"/>
-            </a:fillRef>
-            <a:effectRef idx="1">
+            <a:effectLst/>
+          </p:spPr>
+          <p:style>
+            <a:lnRef idx="2">
+              <a:schemeClr val="accent1"/>
+            </a:lnRef>
+            <a:fillRef idx="0">
+              <a:schemeClr val="accent1"/>
+            </a:fillRef>
+            <a:effectRef idx="0">
               <a:schemeClr val="accent1"/>
             </a:effectRef>
             <a:fontRef idx="minor">
@@ -7906,15 +8020,16 @@
                 <a:srgbClr val="8FBFBF"/>
               </a:solidFill>
             </a:ln>
-          </p:spPr>
-          <p:style>
-            <a:lnRef idx="2">
-              <a:schemeClr val="accent1"/>
-            </a:lnRef>
-            <a:fillRef idx="0">
-              <a:schemeClr val="accent1"/>
-            </a:fillRef>
-            <a:effectRef idx="1">
+            <a:effectLst/>
+          </p:spPr>
+          <p:style>
+            <a:lnRef idx="2">
+              <a:schemeClr val="accent1"/>
+            </a:lnRef>
+            <a:fillRef idx="0">
+              <a:schemeClr val="accent1"/>
+            </a:fillRef>
+            <a:effectRef idx="0">
               <a:schemeClr val="accent1"/>
             </a:effectRef>
             <a:fontRef idx="minor">
@@ -7941,15 +8056,16 @@
                 <a:srgbClr val="8FBFBF"/>
               </a:solidFill>
             </a:ln>
-          </p:spPr>
-          <p:style>
-            <a:lnRef idx="2">
-              <a:schemeClr val="accent1"/>
-            </a:lnRef>
-            <a:fillRef idx="0">
-              <a:schemeClr val="accent1"/>
-            </a:fillRef>
-            <a:effectRef idx="1">
+            <a:effectLst/>
+          </p:spPr>
+          <p:style>
+            <a:lnRef idx="2">
+              <a:schemeClr val="accent1"/>
+            </a:lnRef>
+            <a:fillRef idx="0">
+              <a:schemeClr val="accent1"/>
+            </a:fillRef>
+            <a:effectRef idx="0">
               <a:schemeClr val="accent1"/>
             </a:effectRef>
             <a:fontRef idx="minor">
@@ -8001,7 +8117,7 @@
             <a:fillRef idx="3">
               <a:schemeClr val="accent1"/>
             </a:fillRef>
-            <a:effectRef idx="2">
+            <a:effectRef idx="0">
               <a:schemeClr val="accent1"/>
             </a:effectRef>
             <a:fontRef idx="minor">
@@ -8035,15 +8151,16 @@
                 <a:srgbClr val="8FBFBF"/>
               </a:solidFill>
             </a:ln>
-          </p:spPr>
-          <p:style>
-            <a:lnRef idx="2">
-              <a:schemeClr val="accent1"/>
-            </a:lnRef>
-            <a:fillRef idx="0">
-              <a:schemeClr val="accent1"/>
-            </a:fillRef>
-            <a:effectRef idx="1">
+            <a:effectLst/>
+          </p:spPr>
+          <p:style>
+            <a:lnRef idx="2">
+              <a:schemeClr val="accent1"/>
+            </a:lnRef>
+            <a:fillRef idx="0">
+              <a:schemeClr val="accent1"/>
+            </a:fillRef>
+            <a:effectRef idx="0">
               <a:schemeClr val="accent1"/>
             </a:effectRef>
             <a:fontRef idx="minor">
@@ -8070,15 +8187,16 @@
                 <a:srgbClr val="8FBFBF"/>
               </a:solidFill>
             </a:ln>
-          </p:spPr>
-          <p:style>
-            <a:lnRef idx="2">
-              <a:schemeClr val="accent1"/>
-            </a:lnRef>
-            <a:fillRef idx="0">
-              <a:schemeClr val="accent1"/>
-            </a:fillRef>
-            <a:effectRef idx="1">
+            <a:effectLst/>
+          </p:spPr>
+          <p:style>
+            <a:lnRef idx="2">
+              <a:schemeClr val="accent1"/>
+            </a:lnRef>
+            <a:fillRef idx="0">
+              <a:schemeClr val="accent1"/>
+            </a:fillRef>
+            <a:effectRef idx="0">
               <a:schemeClr val="accent1"/>
             </a:effectRef>
             <a:fontRef idx="minor">
@@ -8105,15 +8223,16 @@
                 <a:srgbClr val="8FBFBF"/>
               </a:solidFill>
             </a:ln>
-          </p:spPr>
-          <p:style>
-            <a:lnRef idx="2">
-              <a:schemeClr val="accent1"/>
-            </a:lnRef>
-            <a:fillRef idx="0">
-              <a:schemeClr val="accent1"/>
-            </a:fillRef>
-            <a:effectRef idx="1">
+            <a:effectLst/>
+          </p:spPr>
+          <p:style>
+            <a:lnRef idx="2">
+              <a:schemeClr val="accent1"/>
+            </a:lnRef>
+            <a:fillRef idx="0">
+              <a:schemeClr val="accent1"/>
+            </a:fillRef>
+            <a:effectRef idx="0">
               <a:schemeClr val="accent1"/>
             </a:effectRef>
             <a:fontRef idx="minor">
@@ -8140,15 +8259,16 @@
                 <a:srgbClr val="8FBFBF"/>
               </a:solidFill>
             </a:ln>
-          </p:spPr>
-          <p:style>
-            <a:lnRef idx="2">
-              <a:schemeClr val="accent1"/>
-            </a:lnRef>
-            <a:fillRef idx="0">
-              <a:schemeClr val="accent1"/>
-            </a:fillRef>
-            <a:effectRef idx="1">
+            <a:effectLst/>
+          </p:spPr>
+          <p:style>
+            <a:lnRef idx="2">
+              <a:schemeClr val="accent1"/>
+            </a:lnRef>
+            <a:fillRef idx="0">
+              <a:schemeClr val="accent1"/>
+            </a:fillRef>
+            <a:effectRef idx="0">
               <a:schemeClr val="accent1"/>
             </a:effectRef>
             <a:fontRef idx="minor">
@@ -8175,15 +8295,16 @@
                 <a:srgbClr val="8FBFBF"/>
               </a:solidFill>
             </a:ln>
-          </p:spPr>
-          <p:style>
-            <a:lnRef idx="2">
-              <a:schemeClr val="accent1"/>
-            </a:lnRef>
-            <a:fillRef idx="0">
-              <a:schemeClr val="accent1"/>
-            </a:fillRef>
-            <a:effectRef idx="1">
+            <a:effectLst/>
+          </p:spPr>
+          <p:style>
+            <a:lnRef idx="2">
+              <a:schemeClr val="accent1"/>
+            </a:lnRef>
+            <a:fillRef idx="0">
+              <a:schemeClr val="accent1"/>
+            </a:fillRef>
+            <a:effectRef idx="0">
               <a:schemeClr val="accent1"/>
             </a:effectRef>
             <a:fontRef idx="minor">
@@ -8210,15 +8331,16 @@
                 <a:srgbClr val="8FBFBF"/>
               </a:solidFill>
             </a:ln>
-          </p:spPr>
-          <p:style>
-            <a:lnRef idx="2">
-              <a:schemeClr val="accent1"/>
-            </a:lnRef>
-            <a:fillRef idx="0">
-              <a:schemeClr val="accent1"/>
-            </a:fillRef>
-            <a:effectRef idx="1">
+            <a:effectLst/>
+          </p:spPr>
+          <p:style>
+            <a:lnRef idx="2">
+              <a:schemeClr val="accent1"/>
+            </a:lnRef>
+            <a:fillRef idx="0">
+              <a:schemeClr val="accent1"/>
+            </a:fillRef>
+            <a:effectRef idx="0">
               <a:schemeClr val="accent1"/>
             </a:effectRef>
             <a:fontRef idx="minor">
@@ -8245,15 +8367,16 @@
                 <a:srgbClr val="8FBFBF"/>
               </a:solidFill>
             </a:ln>
-          </p:spPr>
-          <p:style>
-            <a:lnRef idx="2">
-              <a:schemeClr val="accent1"/>
-            </a:lnRef>
-            <a:fillRef idx="0">
-              <a:schemeClr val="accent1"/>
-            </a:fillRef>
-            <a:effectRef idx="1">
+            <a:effectLst/>
+          </p:spPr>
+          <p:style>
+            <a:lnRef idx="2">
+              <a:schemeClr val="accent1"/>
+            </a:lnRef>
+            <a:fillRef idx="0">
+              <a:schemeClr val="accent1"/>
+            </a:fillRef>
+            <a:effectRef idx="0">
               <a:schemeClr val="accent1"/>
             </a:effectRef>
             <a:fontRef idx="minor">
@@ -8280,15 +8403,16 @@
                 <a:srgbClr val="8FBFBF"/>
               </a:solidFill>
             </a:ln>
-          </p:spPr>
-          <p:style>
-            <a:lnRef idx="2">
-              <a:schemeClr val="accent1"/>
-            </a:lnRef>
-            <a:fillRef idx="0">
-              <a:schemeClr val="accent1"/>
-            </a:fillRef>
-            <a:effectRef idx="1">
+            <a:effectLst/>
+          </p:spPr>
+          <p:style>
+            <a:lnRef idx="2">
+              <a:schemeClr val="accent1"/>
+            </a:lnRef>
+            <a:fillRef idx="0">
+              <a:schemeClr val="accent1"/>
+            </a:fillRef>
+            <a:effectRef idx="0">
               <a:schemeClr val="accent1"/>
             </a:effectRef>
             <a:fontRef idx="minor">
@@ -8315,15 +8439,16 @@
                 <a:srgbClr val="8FBFBF"/>
               </a:solidFill>
             </a:ln>
-          </p:spPr>
-          <p:style>
-            <a:lnRef idx="2">
-              <a:schemeClr val="accent1"/>
-            </a:lnRef>
-            <a:fillRef idx="0">
-              <a:schemeClr val="accent1"/>
-            </a:fillRef>
-            <a:effectRef idx="1">
+            <a:effectLst/>
+          </p:spPr>
+          <p:style>
+            <a:lnRef idx="2">
+              <a:schemeClr val="accent1"/>
+            </a:lnRef>
+            <a:fillRef idx="0">
+              <a:schemeClr val="accent1"/>
+            </a:fillRef>
+            <a:effectRef idx="0">
               <a:schemeClr val="accent1"/>
             </a:effectRef>
             <a:fontRef idx="minor">
@@ -8350,15 +8475,16 @@
                 <a:srgbClr val="8FBFBF"/>
               </a:solidFill>
             </a:ln>
-          </p:spPr>
-          <p:style>
-            <a:lnRef idx="2">
-              <a:schemeClr val="accent1"/>
-            </a:lnRef>
-            <a:fillRef idx="0">
-              <a:schemeClr val="accent1"/>
-            </a:fillRef>
-            <a:effectRef idx="1">
+            <a:effectLst/>
+          </p:spPr>
+          <p:style>
+            <a:lnRef idx="2">
+              <a:schemeClr val="accent1"/>
+            </a:lnRef>
+            <a:fillRef idx="0">
+              <a:schemeClr val="accent1"/>
+            </a:fillRef>
+            <a:effectRef idx="0">
               <a:schemeClr val="accent1"/>
             </a:effectRef>
             <a:fontRef idx="minor">
@@ -8385,15 +8511,16 @@
                 <a:srgbClr val="8FBFBF"/>
               </a:solidFill>
             </a:ln>
-          </p:spPr>
-          <p:style>
-            <a:lnRef idx="2">
-              <a:schemeClr val="accent1"/>
-            </a:lnRef>
-            <a:fillRef idx="0">
-              <a:schemeClr val="accent1"/>
-            </a:fillRef>
-            <a:effectRef idx="1">
+            <a:effectLst/>
+          </p:spPr>
+          <p:style>
+            <a:lnRef idx="2">
+              <a:schemeClr val="accent1"/>
+            </a:lnRef>
+            <a:fillRef idx="0">
+              <a:schemeClr val="accent1"/>
+            </a:fillRef>
+            <a:effectRef idx="0">
               <a:schemeClr val="accent1"/>
             </a:effectRef>
             <a:fontRef idx="minor">
@@ -8420,15 +8547,16 @@
                 <a:srgbClr val="8FBFBF"/>
               </a:solidFill>
             </a:ln>
-          </p:spPr>
-          <p:style>
-            <a:lnRef idx="2">
-              <a:schemeClr val="accent1"/>
-            </a:lnRef>
-            <a:fillRef idx="0">
-              <a:schemeClr val="accent1"/>
-            </a:fillRef>
-            <a:effectRef idx="1">
+            <a:effectLst/>
+          </p:spPr>
+          <p:style>
+            <a:lnRef idx="2">
+              <a:schemeClr val="accent1"/>
+            </a:lnRef>
+            <a:fillRef idx="0">
+              <a:schemeClr val="accent1"/>
+            </a:fillRef>
+            <a:effectRef idx="0">
               <a:schemeClr val="accent1"/>
             </a:effectRef>
             <a:fontRef idx="minor">
@@ -8455,15 +8583,16 @@
                 <a:srgbClr val="8FBFBF"/>
               </a:solidFill>
             </a:ln>
-          </p:spPr>
-          <p:style>
-            <a:lnRef idx="2">
-              <a:schemeClr val="accent1"/>
-            </a:lnRef>
-            <a:fillRef idx="0">
-              <a:schemeClr val="accent1"/>
-            </a:fillRef>
-            <a:effectRef idx="1">
+            <a:effectLst/>
+          </p:spPr>
+          <p:style>
+            <a:lnRef idx="2">
+              <a:schemeClr val="accent1"/>
+            </a:lnRef>
+            <a:fillRef idx="0">
+              <a:schemeClr val="accent1"/>
+            </a:fillRef>
+            <a:effectRef idx="0">
               <a:schemeClr val="accent1"/>
             </a:effectRef>
             <a:fontRef idx="minor">
@@ -8490,15 +8619,16 @@
                 <a:srgbClr val="8FBFBF"/>
               </a:solidFill>
             </a:ln>
-          </p:spPr>
-          <p:style>
-            <a:lnRef idx="2">
-              <a:schemeClr val="accent1"/>
-            </a:lnRef>
-            <a:fillRef idx="0">
-              <a:schemeClr val="accent1"/>
-            </a:fillRef>
-            <a:effectRef idx="1">
+            <a:effectLst/>
+          </p:spPr>
+          <p:style>
+            <a:lnRef idx="2">
+              <a:schemeClr val="accent1"/>
+            </a:lnRef>
+            <a:fillRef idx="0">
+              <a:schemeClr val="accent1"/>
+            </a:fillRef>
+            <a:effectRef idx="0">
               <a:schemeClr val="accent1"/>
             </a:effectRef>
             <a:fontRef idx="minor">
@@ -8525,15 +8655,16 @@
                 <a:srgbClr val="8FBFBF"/>
               </a:solidFill>
             </a:ln>
-          </p:spPr>
-          <p:style>
-            <a:lnRef idx="2">
-              <a:schemeClr val="accent1"/>
-            </a:lnRef>
-            <a:fillRef idx="0">
-              <a:schemeClr val="accent1"/>
-            </a:fillRef>
-            <a:effectRef idx="1">
+            <a:effectLst/>
+          </p:spPr>
+          <p:style>
+            <a:lnRef idx="2">
+              <a:schemeClr val="accent1"/>
+            </a:lnRef>
+            <a:fillRef idx="0">
+              <a:schemeClr val="accent1"/>
+            </a:fillRef>
+            <a:effectRef idx="0">
               <a:schemeClr val="accent1"/>
             </a:effectRef>
             <a:fontRef idx="minor">
@@ -8560,15 +8691,16 @@
                 <a:srgbClr val="8FBFBF"/>
               </a:solidFill>
             </a:ln>
-          </p:spPr>
-          <p:style>
-            <a:lnRef idx="2">
-              <a:schemeClr val="accent1"/>
-            </a:lnRef>
-            <a:fillRef idx="0">
-              <a:schemeClr val="accent1"/>
-            </a:fillRef>
-            <a:effectRef idx="1">
+            <a:effectLst/>
+          </p:spPr>
+          <p:style>
+            <a:lnRef idx="2">
+              <a:schemeClr val="accent1"/>
+            </a:lnRef>
+            <a:fillRef idx="0">
+              <a:schemeClr val="accent1"/>
+            </a:fillRef>
+            <a:effectRef idx="0">
               <a:schemeClr val="accent1"/>
             </a:effectRef>
             <a:fontRef idx="minor">
@@ -8595,15 +8727,16 @@
                 <a:srgbClr val="8FBFBF"/>
               </a:solidFill>
             </a:ln>
-          </p:spPr>
-          <p:style>
-            <a:lnRef idx="2">
-              <a:schemeClr val="accent1"/>
-            </a:lnRef>
-            <a:fillRef idx="0">
-              <a:schemeClr val="accent1"/>
-            </a:fillRef>
-            <a:effectRef idx="1">
+            <a:effectLst/>
+          </p:spPr>
+          <p:style>
+            <a:lnRef idx="2">
+              <a:schemeClr val="accent1"/>
+            </a:lnRef>
+            <a:fillRef idx="0">
+              <a:schemeClr val="accent1"/>
+            </a:fillRef>
+            <a:effectRef idx="0">
               <a:schemeClr val="accent1"/>
             </a:effectRef>
             <a:fontRef idx="minor">
@@ -8630,15 +8763,16 @@
                 <a:srgbClr val="8FBFBF"/>
               </a:solidFill>
             </a:ln>
-          </p:spPr>
-          <p:style>
-            <a:lnRef idx="2">
-              <a:schemeClr val="accent1"/>
-            </a:lnRef>
-            <a:fillRef idx="0">
-              <a:schemeClr val="accent1"/>
-            </a:fillRef>
-            <a:effectRef idx="1">
+            <a:effectLst/>
+          </p:spPr>
+          <p:style>
+            <a:lnRef idx="2">
+              <a:schemeClr val="accent1"/>
+            </a:lnRef>
+            <a:fillRef idx="0">
+              <a:schemeClr val="accent1"/>
+            </a:fillRef>
+            <a:effectRef idx="0">
               <a:schemeClr val="accent1"/>
             </a:effectRef>
             <a:fontRef idx="minor">
@@ -8665,15 +8799,16 @@
                 <a:srgbClr val="8FBFBF"/>
               </a:solidFill>
             </a:ln>
-          </p:spPr>
-          <p:style>
-            <a:lnRef idx="2">
-              <a:schemeClr val="accent1"/>
-            </a:lnRef>
-            <a:fillRef idx="0">
-              <a:schemeClr val="accent1"/>
-            </a:fillRef>
-            <a:effectRef idx="1">
+            <a:effectLst/>
+          </p:spPr>
+          <p:style>
+            <a:lnRef idx="2">
+              <a:schemeClr val="accent1"/>
+            </a:lnRef>
+            <a:fillRef idx="0">
+              <a:schemeClr val="accent1"/>
+            </a:fillRef>
+            <a:effectRef idx="0">
               <a:schemeClr val="accent1"/>
             </a:effectRef>
             <a:fontRef idx="minor">
@@ -8700,15 +8835,16 @@
                 <a:srgbClr val="8FBFBF"/>
               </a:solidFill>
             </a:ln>
-          </p:spPr>
-          <p:style>
-            <a:lnRef idx="2">
-              <a:schemeClr val="accent1"/>
-            </a:lnRef>
-            <a:fillRef idx="0">
-              <a:schemeClr val="accent1"/>
-            </a:fillRef>
-            <a:effectRef idx="1">
+            <a:effectLst/>
+          </p:spPr>
+          <p:style>
+            <a:lnRef idx="2">
+              <a:schemeClr val="accent1"/>
+            </a:lnRef>
+            <a:fillRef idx="0">
+              <a:schemeClr val="accent1"/>
+            </a:fillRef>
+            <a:effectRef idx="0">
               <a:schemeClr val="accent1"/>
             </a:effectRef>
             <a:fontRef idx="minor">
@@ -8735,15 +8871,16 @@
                 <a:srgbClr val="8FBFBF"/>
               </a:solidFill>
             </a:ln>
-          </p:spPr>
-          <p:style>
-            <a:lnRef idx="2">
-              <a:schemeClr val="accent1"/>
-            </a:lnRef>
-            <a:fillRef idx="0">
-              <a:schemeClr val="accent1"/>
-            </a:fillRef>
-            <a:effectRef idx="1">
+            <a:effectLst/>
+          </p:spPr>
+          <p:style>
+            <a:lnRef idx="2">
+              <a:schemeClr val="accent1"/>
+            </a:lnRef>
+            <a:fillRef idx="0">
+              <a:schemeClr val="accent1"/>
+            </a:fillRef>
+            <a:effectRef idx="0">
               <a:schemeClr val="accent1"/>
             </a:effectRef>
             <a:fontRef idx="minor">
@@ -8770,15 +8907,16 @@
                 <a:srgbClr val="8FBFBF"/>
               </a:solidFill>
             </a:ln>
-          </p:spPr>
-          <p:style>
-            <a:lnRef idx="2">
-              <a:schemeClr val="accent1"/>
-            </a:lnRef>
-            <a:fillRef idx="0">
-              <a:schemeClr val="accent1"/>
-            </a:fillRef>
-            <a:effectRef idx="1">
+            <a:effectLst/>
+          </p:spPr>
+          <p:style>
+            <a:lnRef idx="2">
+              <a:schemeClr val="accent1"/>
+            </a:lnRef>
+            <a:fillRef idx="0">
+              <a:schemeClr val="accent1"/>
+            </a:fillRef>
+            <a:effectRef idx="0">
               <a:schemeClr val="accent1"/>
             </a:effectRef>
             <a:fontRef idx="minor">
@@ -8805,15 +8943,16 @@
                 <a:srgbClr val="8FBFBF"/>
               </a:solidFill>
             </a:ln>
-          </p:spPr>
-          <p:style>
-            <a:lnRef idx="2">
-              <a:schemeClr val="accent1"/>
-            </a:lnRef>
-            <a:fillRef idx="0">
-              <a:schemeClr val="accent1"/>
-            </a:fillRef>
-            <a:effectRef idx="1">
+            <a:effectLst/>
+          </p:spPr>
+          <p:style>
+            <a:lnRef idx="2">
+              <a:schemeClr val="accent1"/>
+            </a:lnRef>
+            <a:fillRef idx="0">
+              <a:schemeClr val="accent1"/>
+            </a:fillRef>
+            <a:effectRef idx="0">
               <a:schemeClr val="accent1"/>
             </a:effectRef>
             <a:fontRef idx="minor">
@@ -8865,7 +9004,7 @@
             <a:fillRef idx="3">
               <a:schemeClr val="accent1"/>
             </a:fillRef>
-            <a:effectRef idx="2">
+            <a:effectRef idx="0">
               <a:schemeClr val="accent1"/>
             </a:effectRef>
             <a:fontRef idx="minor">
@@ -8899,15 +9038,16 @@
                 <a:srgbClr val="8FBFBF"/>
               </a:solidFill>
             </a:ln>
-          </p:spPr>
-          <p:style>
-            <a:lnRef idx="2">
-              <a:schemeClr val="accent1"/>
-            </a:lnRef>
-            <a:fillRef idx="0">
-              <a:schemeClr val="accent1"/>
-            </a:fillRef>
-            <a:effectRef idx="1">
+            <a:effectLst/>
+          </p:spPr>
+          <p:style>
+            <a:lnRef idx="2">
+              <a:schemeClr val="accent1"/>
+            </a:lnRef>
+            <a:fillRef idx="0">
+              <a:schemeClr val="accent1"/>
+            </a:fillRef>
+            <a:effectRef idx="0">
               <a:schemeClr val="accent1"/>
             </a:effectRef>
             <a:fontRef idx="minor">
@@ -8934,15 +9074,16 @@
                 <a:srgbClr val="8FBFBF"/>
               </a:solidFill>
             </a:ln>
-          </p:spPr>
-          <p:style>
-            <a:lnRef idx="2">
-              <a:schemeClr val="accent1"/>
-            </a:lnRef>
-            <a:fillRef idx="0">
-              <a:schemeClr val="accent1"/>
-            </a:fillRef>
-            <a:effectRef idx="1">
+            <a:effectLst/>
+          </p:spPr>
+          <p:style>
+            <a:lnRef idx="2">
+              <a:schemeClr val="accent1"/>
+            </a:lnRef>
+            <a:fillRef idx="0">
+              <a:schemeClr val="accent1"/>
+            </a:fillRef>
+            <a:effectRef idx="0">
               <a:schemeClr val="accent1"/>
             </a:effectRef>
             <a:fontRef idx="minor">
@@ -8969,15 +9110,16 @@
                 <a:srgbClr val="8FBFBF"/>
               </a:solidFill>
             </a:ln>
-          </p:spPr>
-          <p:style>
-            <a:lnRef idx="2">
-              <a:schemeClr val="accent1"/>
-            </a:lnRef>
-            <a:fillRef idx="0">
-              <a:schemeClr val="accent1"/>
-            </a:fillRef>
-            <a:effectRef idx="1">
+            <a:effectLst/>
+          </p:spPr>
+          <p:style>
+            <a:lnRef idx="2">
+              <a:schemeClr val="accent1"/>
+            </a:lnRef>
+            <a:fillRef idx="0">
+              <a:schemeClr val="accent1"/>
+            </a:fillRef>
+            <a:effectRef idx="0">
               <a:schemeClr val="accent1"/>
             </a:effectRef>
             <a:fontRef idx="minor">
@@ -9004,15 +9146,16 @@
                 <a:srgbClr val="8FBFBF"/>
               </a:solidFill>
             </a:ln>
-          </p:spPr>
-          <p:style>
-            <a:lnRef idx="2">
-              <a:schemeClr val="accent1"/>
-            </a:lnRef>
-            <a:fillRef idx="0">
-              <a:schemeClr val="accent1"/>
-            </a:fillRef>
-            <a:effectRef idx="1">
+            <a:effectLst/>
+          </p:spPr>
+          <p:style>
+            <a:lnRef idx="2">
+              <a:schemeClr val="accent1"/>
+            </a:lnRef>
+            <a:fillRef idx="0">
+              <a:schemeClr val="accent1"/>
+            </a:fillRef>
+            <a:effectRef idx="0">
               <a:schemeClr val="accent1"/>
             </a:effectRef>
             <a:fontRef idx="minor">
@@ -9039,15 +9182,16 @@
                 <a:srgbClr val="8FBFBF"/>
               </a:solidFill>
             </a:ln>
-          </p:spPr>
-          <p:style>
-            <a:lnRef idx="2">
-              <a:schemeClr val="accent1"/>
-            </a:lnRef>
-            <a:fillRef idx="0">
-              <a:schemeClr val="accent1"/>
-            </a:fillRef>
-            <a:effectRef idx="1">
+            <a:effectLst/>
+          </p:spPr>
+          <p:style>
+            <a:lnRef idx="2">
+              <a:schemeClr val="accent1"/>
+            </a:lnRef>
+            <a:fillRef idx="0">
+              <a:schemeClr val="accent1"/>
+            </a:fillRef>
+            <a:effectRef idx="0">
               <a:schemeClr val="accent1"/>
             </a:effectRef>
             <a:fontRef idx="minor">
@@ -9074,15 +9218,16 @@
                 <a:srgbClr val="8FBFBF"/>
               </a:solidFill>
             </a:ln>
-          </p:spPr>
-          <p:style>
-            <a:lnRef idx="2">
-              <a:schemeClr val="accent1"/>
-            </a:lnRef>
-            <a:fillRef idx="0">
-              <a:schemeClr val="accent1"/>
-            </a:fillRef>
-            <a:effectRef idx="1">
+            <a:effectLst/>
+          </p:spPr>
+          <p:style>
+            <a:lnRef idx="2">
+              <a:schemeClr val="accent1"/>
+            </a:lnRef>
+            <a:fillRef idx="0">
+              <a:schemeClr val="accent1"/>
+            </a:fillRef>
+            <a:effectRef idx="0">
               <a:schemeClr val="accent1"/>
             </a:effectRef>
             <a:fontRef idx="minor">
@@ -9109,15 +9254,16 @@
                 <a:srgbClr val="8FBFBF"/>
               </a:solidFill>
             </a:ln>
-          </p:spPr>
-          <p:style>
-            <a:lnRef idx="2">
-              <a:schemeClr val="accent1"/>
-            </a:lnRef>
-            <a:fillRef idx="0">
-              <a:schemeClr val="accent1"/>
-            </a:fillRef>
-            <a:effectRef idx="1">
+            <a:effectLst/>
+          </p:spPr>
+          <p:style>
+            <a:lnRef idx="2">
+              <a:schemeClr val="accent1"/>
+            </a:lnRef>
+            <a:fillRef idx="0">
+              <a:schemeClr val="accent1"/>
+            </a:fillRef>
+            <a:effectRef idx="0">
               <a:schemeClr val="accent1"/>
             </a:effectRef>
             <a:fontRef idx="minor">
@@ -9144,15 +9290,16 @@
                 <a:srgbClr val="8FBFBF"/>
               </a:solidFill>
             </a:ln>
-          </p:spPr>
-          <p:style>
-            <a:lnRef idx="2">
-              <a:schemeClr val="accent1"/>
-            </a:lnRef>
-            <a:fillRef idx="0">
-              <a:schemeClr val="accent1"/>
-            </a:fillRef>
-            <a:effectRef idx="1">
+            <a:effectLst/>
+          </p:spPr>
+          <p:style>
+            <a:lnRef idx="2">
+              <a:schemeClr val="accent1"/>
+            </a:lnRef>
+            <a:fillRef idx="0">
+              <a:schemeClr val="accent1"/>
+            </a:fillRef>
+            <a:effectRef idx="0">
               <a:schemeClr val="accent1"/>
             </a:effectRef>
             <a:fontRef idx="minor">
@@ -9179,15 +9326,16 @@
                 <a:srgbClr val="8FBFBF"/>
               </a:solidFill>
             </a:ln>
-          </p:spPr>
-          <p:style>
-            <a:lnRef idx="2">
-              <a:schemeClr val="accent1"/>
-            </a:lnRef>
-            <a:fillRef idx="0">
-              <a:schemeClr val="accent1"/>
-            </a:fillRef>
-            <a:effectRef idx="1">
+            <a:effectLst/>
+          </p:spPr>
+          <p:style>
+            <a:lnRef idx="2">
+              <a:schemeClr val="accent1"/>
+            </a:lnRef>
+            <a:fillRef idx="0">
+              <a:schemeClr val="accent1"/>
+            </a:fillRef>
+            <a:effectRef idx="0">
               <a:schemeClr val="accent1"/>
             </a:effectRef>
             <a:fontRef idx="minor">
@@ -9214,15 +9362,16 @@
                 <a:srgbClr val="8FBFBF"/>
               </a:solidFill>
             </a:ln>
-          </p:spPr>
-          <p:style>
-            <a:lnRef idx="2">
-              <a:schemeClr val="accent1"/>
-            </a:lnRef>
-            <a:fillRef idx="0">
-              <a:schemeClr val="accent1"/>
-            </a:fillRef>
-            <a:effectRef idx="1">
+            <a:effectLst/>
+          </p:spPr>
+          <p:style>
+            <a:lnRef idx="2">
+              <a:schemeClr val="accent1"/>
+            </a:lnRef>
+            <a:fillRef idx="0">
+              <a:schemeClr val="accent1"/>
+            </a:fillRef>
+            <a:effectRef idx="0">
               <a:schemeClr val="accent1"/>
             </a:effectRef>
             <a:fontRef idx="minor">
@@ -9249,15 +9398,16 @@
                 <a:srgbClr val="8FBFBF"/>
               </a:solidFill>
             </a:ln>
-          </p:spPr>
-          <p:style>
-            <a:lnRef idx="2">
-              <a:schemeClr val="accent1"/>
-            </a:lnRef>
-            <a:fillRef idx="0">
-              <a:schemeClr val="accent1"/>
-            </a:fillRef>
-            <a:effectRef idx="1">
+            <a:effectLst/>
+          </p:spPr>
+          <p:style>
+            <a:lnRef idx="2">
+              <a:schemeClr val="accent1"/>
+            </a:lnRef>
+            <a:fillRef idx="0">
+              <a:schemeClr val="accent1"/>
+            </a:fillRef>
+            <a:effectRef idx="0">
               <a:schemeClr val="accent1"/>
             </a:effectRef>
             <a:fontRef idx="minor">
@@ -9284,15 +9434,16 @@
                 <a:srgbClr val="8FBFBF"/>
               </a:solidFill>
             </a:ln>
-          </p:spPr>
-          <p:style>
-            <a:lnRef idx="2">
-              <a:schemeClr val="accent1"/>
-            </a:lnRef>
-            <a:fillRef idx="0">
-              <a:schemeClr val="accent1"/>
-            </a:fillRef>
-            <a:effectRef idx="1">
+            <a:effectLst/>
+          </p:spPr>
+          <p:style>
+            <a:lnRef idx="2">
+              <a:schemeClr val="accent1"/>
+            </a:lnRef>
+            <a:fillRef idx="0">
+              <a:schemeClr val="accent1"/>
+            </a:fillRef>
+            <a:effectRef idx="0">
               <a:schemeClr val="accent1"/>
             </a:effectRef>
             <a:fontRef idx="minor">
@@ -9319,15 +9470,16 @@
                 <a:srgbClr val="8FBFBF"/>
               </a:solidFill>
             </a:ln>
-          </p:spPr>
-          <p:style>
-            <a:lnRef idx="2">
-              <a:schemeClr val="accent1"/>
-            </a:lnRef>
-            <a:fillRef idx="0">
-              <a:schemeClr val="accent1"/>
-            </a:fillRef>
-            <a:effectRef idx="1">
+            <a:effectLst/>
+          </p:spPr>
+          <p:style>
+            <a:lnRef idx="2">
+              <a:schemeClr val="accent1"/>
+            </a:lnRef>
+            <a:fillRef idx="0">
+              <a:schemeClr val="accent1"/>
+            </a:fillRef>
+            <a:effectRef idx="0">
               <a:schemeClr val="accent1"/>
             </a:effectRef>
             <a:fontRef idx="minor">
@@ -9354,15 +9506,16 @@
                 <a:srgbClr val="8FBFBF"/>
               </a:solidFill>
             </a:ln>
-          </p:spPr>
-          <p:style>
-            <a:lnRef idx="2">
-              <a:schemeClr val="accent1"/>
-            </a:lnRef>
-            <a:fillRef idx="0">
-              <a:schemeClr val="accent1"/>
-            </a:fillRef>
-            <a:effectRef idx="1">
+            <a:effectLst/>
+          </p:spPr>
+          <p:style>
+            <a:lnRef idx="2">
+              <a:schemeClr val="accent1"/>
+            </a:lnRef>
+            <a:fillRef idx="0">
+              <a:schemeClr val="accent1"/>
+            </a:fillRef>
+            <a:effectRef idx="0">
               <a:schemeClr val="accent1"/>
             </a:effectRef>
             <a:fontRef idx="minor">
@@ -9389,15 +9542,16 @@
                 <a:srgbClr val="8FBFBF"/>
               </a:solidFill>
             </a:ln>
-          </p:spPr>
-          <p:style>
-            <a:lnRef idx="2">
-              <a:schemeClr val="accent1"/>
-            </a:lnRef>
-            <a:fillRef idx="0">
-              <a:schemeClr val="accent1"/>
-            </a:fillRef>
-            <a:effectRef idx="1">
+            <a:effectLst/>
+          </p:spPr>
+          <p:style>
+            <a:lnRef idx="2">
+              <a:schemeClr val="accent1"/>
+            </a:lnRef>
+            <a:fillRef idx="0">
+              <a:schemeClr val="accent1"/>
+            </a:fillRef>
+            <a:effectRef idx="0">
               <a:schemeClr val="accent1"/>
             </a:effectRef>
             <a:fontRef idx="minor">
@@ -9424,15 +9578,16 @@
                 <a:srgbClr val="8FBFBF"/>
               </a:solidFill>
             </a:ln>
-          </p:spPr>
-          <p:style>
-            <a:lnRef idx="2">
-              <a:schemeClr val="accent1"/>
-            </a:lnRef>
-            <a:fillRef idx="0">
-              <a:schemeClr val="accent1"/>
-            </a:fillRef>
-            <a:effectRef idx="1">
+            <a:effectLst/>
+          </p:spPr>
+          <p:style>
+            <a:lnRef idx="2">
+              <a:schemeClr val="accent1"/>
+            </a:lnRef>
+            <a:fillRef idx="0">
+              <a:schemeClr val="accent1"/>
+            </a:fillRef>
+            <a:effectRef idx="0">
               <a:schemeClr val="accent1"/>
             </a:effectRef>
             <a:fontRef idx="minor">
@@ -9459,15 +9614,16 @@
                 <a:srgbClr val="8FBFBF"/>
               </a:solidFill>
             </a:ln>
-          </p:spPr>
-          <p:style>
-            <a:lnRef idx="2">
-              <a:schemeClr val="accent1"/>
-            </a:lnRef>
-            <a:fillRef idx="0">
-              <a:schemeClr val="accent1"/>
-            </a:fillRef>
-            <a:effectRef idx="1">
+            <a:effectLst/>
+          </p:spPr>
+          <p:style>
+            <a:lnRef idx="2">
+              <a:schemeClr val="accent1"/>
+            </a:lnRef>
+            <a:fillRef idx="0">
+              <a:schemeClr val="accent1"/>
+            </a:fillRef>
+            <a:effectRef idx="0">
               <a:schemeClr val="accent1"/>
             </a:effectRef>
             <a:fontRef idx="minor">
@@ -9494,15 +9650,16 @@
                 <a:srgbClr val="8FBFBF"/>
               </a:solidFill>
             </a:ln>
-          </p:spPr>
-          <p:style>
-            <a:lnRef idx="2">
-              <a:schemeClr val="accent1"/>
-            </a:lnRef>
-            <a:fillRef idx="0">
-              <a:schemeClr val="accent1"/>
-            </a:fillRef>
-            <a:effectRef idx="1">
+            <a:effectLst/>
+          </p:spPr>
+          <p:style>
+            <a:lnRef idx="2">
+              <a:schemeClr val="accent1"/>
+            </a:lnRef>
+            <a:fillRef idx="0">
+              <a:schemeClr val="accent1"/>
+            </a:fillRef>
+            <a:effectRef idx="0">
               <a:schemeClr val="accent1"/>
             </a:effectRef>
             <a:fontRef idx="minor">
@@ -9529,15 +9686,16 @@
                 <a:srgbClr val="8FBFBF"/>
               </a:solidFill>
             </a:ln>
-          </p:spPr>
-          <p:style>
-            <a:lnRef idx="2">
-              <a:schemeClr val="accent1"/>
-            </a:lnRef>
-            <a:fillRef idx="0">
-              <a:schemeClr val="accent1"/>
-            </a:fillRef>
-            <a:effectRef idx="1">
+            <a:effectLst/>
+          </p:spPr>
+          <p:style>
+            <a:lnRef idx="2">
+              <a:schemeClr val="accent1"/>
+            </a:lnRef>
+            <a:fillRef idx="0">
+              <a:schemeClr val="accent1"/>
+            </a:fillRef>
+            <a:effectRef idx="0">
               <a:schemeClr val="accent1"/>
             </a:effectRef>
             <a:fontRef idx="minor">
@@ -9564,15 +9722,16 @@
                 <a:srgbClr val="8FBFBF"/>
               </a:solidFill>
             </a:ln>
-          </p:spPr>
-          <p:style>
-            <a:lnRef idx="2">
-              <a:schemeClr val="accent1"/>
-            </a:lnRef>
-            <a:fillRef idx="0">
-              <a:schemeClr val="accent1"/>
-            </a:fillRef>
-            <a:effectRef idx="1">
+            <a:effectLst/>
+          </p:spPr>
+          <p:style>
+            <a:lnRef idx="2">
+              <a:schemeClr val="accent1"/>
+            </a:lnRef>
+            <a:fillRef idx="0">
+              <a:schemeClr val="accent1"/>
+            </a:fillRef>
+            <a:effectRef idx="0">
               <a:schemeClr val="accent1"/>
             </a:effectRef>
             <a:fontRef idx="minor">
@@ -9599,15 +9758,16 @@
                 <a:srgbClr val="8FBFBF"/>
               </a:solidFill>
             </a:ln>
-          </p:spPr>
-          <p:style>
-            <a:lnRef idx="2">
-              <a:schemeClr val="accent1"/>
-            </a:lnRef>
-            <a:fillRef idx="0">
-              <a:schemeClr val="accent1"/>
-            </a:fillRef>
-            <a:effectRef idx="1">
+            <a:effectLst/>
+          </p:spPr>
+          <p:style>
+            <a:lnRef idx="2">
+              <a:schemeClr val="accent1"/>
+            </a:lnRef>
+            <a:fillRef idx="0">
+              <a:schemeClr val="accent1"/>
+            </a:fillRef>
+            <a:effectRef idx="0">
               <a:schemeClr val="accent1"/>
             </a:effectRef>
             <a:fontRef idx="minor">
@@ -9634,15 +9794,16 @@
                 <a:srgbClr val="8FBFBF"/>
               </a:solidFill>
             </a:ln>
-          </p:spPr>
-          <p:style>
-            <a:lnRef idx="2">
-              <a:schemeClr val="accent1"/>
-            </a:lnRef>
-            <a:fillRef idx="0">
-              <a:schemeClr val="accent1"/>
-            </a:fillRef>
-            <a:effectRef idx="1">
+            <a:effectLst/>
+          </p:spPr>
+          <p:style>
+            <a:lnRef idx="2">
+              <a:schemeClr val="accent1"/>
+            </a:lnRef>
+            <a:fillRef idx="0">
+              <a:schemeClr val="accent1"/>
+            </a:fillRef>
+            <a:effectRef idx="0">
               <a:schemeClr val="accent1"/>
             </a:effectRef>
             <a:fontRef idx="minor">
@@ -9669,15 +9830,16 @@
                 <a:srgbClr val="8FBFBF"/>
               </a:solidFill>
             </a:ln>
-          </p:spPr>
-          <p:style>
-            <a:lnRef idx="2">
-              <a:schemeClr val="accent1"/>
-            </a:lnRef>
-            <a:fillRef idx="0">
-              <a:schemeClr val="accent1"/>
-            </a:fillRef>
-            <a:effectRef idx="1">
+            <a:effectLst/>
+          </p:spPr>
+          <p:style>
+            <a:lnRef idx="2">
+              <a:schemeClr val="accent1"/>
+            </a:lnRef>
+            <a:fillRef idx="0">
+              <a:schemeClr val="accent1"/>
+            </a:fillRef>
+            <a:effectRef idx="0">
               <a:schemeClr val="accent1"/>
             </a:effectRef>
             <a:fontRef idx="minor">
@@ -9729,7 +9891,7 @@
             <a:fillRef idx="3">
               <a:schemeClr val="accent1"/>
             </a:fillRef>
-            <a:effectRef idx="2">
+            <a:effectRef idx="0">
               <a:schemeClr val="accent1"/>
             </a:effectRef>
             <a:fontRef idx="minor">
@@ -9763,15 +9925,16 @@
                 <a:srgbClr val="8FBFBF"/>
               </a:solidFill>
             </a:ln>
-          </p:spPr>
-          <p:style>
-            <a:lnRef idx="2">
-              <a:schemeClr val="accent1"/>
-            </a:lnRef>
-            <a:fillRef idx="0">
-              <a:schemeClr val="accent1"/>
-            </a:fillRef>
-            <a:effectRef idx="1">
+            <a:effectLst/>
+          </p:spPr>
+          <p:style>
+            <a:lnRef idx="2">
+              <a:schemeClr val="accent1"/>
+            </a:lnRef>
+            <a:fillRef idx="0">
+              <a:schemeClr val="accent1"/>
+            </a:fillRef>
+            <a:effectRef idx="0">
               <a:schemeClr val="accent1"/>
             </a:effectRef>
             <a:fontRef idx="minor">
@@ -9798,15 +9961,16 @@
                 <a:srgbClr val="8FBFBF"/>
               </a:solidFill>
             </a:ln>
-          </p:spPr>
-          <p:style>
-            <a:lnRef idx="2">
-              <a:schemeClr val="accent1"/>
-            </a:lnRef>
-            <a:fillRef idx="0">
-              <a:schemeClr val="accent1"/>
-            </a:fillRef>
-            <a:effectRef idx="1">
+            <a:effectLst/>
+          </p:spPr>
+          <p:style>
+            <a:lnRef idx="2">
+              <a:schemeClr val="accent1"/>
+            </a:lnRef>
+            <a:fillRef idx="0">
+              <a:schemeClr val="accent1"/>
+            </a:fillRef>
+            <a:effectRef idx="0">
               <a:schemeClr val="accent1"/>
             </a:effectRef>
             <a:fontRef idx="minor">
@@ -9833,15 +9997,16 @@
                 <a:srgbClr val="8FBFBF"/>
               </a:solidFill>
             </a:ln>
-          </p:spPr>
-          <p:style>
-            <a:lnRef idx="2">
-              <a:schemeClr val="accent1"/>
-            </a:lnRef>
-            <a:fillRef idx="0">
-              <a:schemeClr val="accent1"/>
-            </a:fillRef>
-            <a:effectRef idx="1">
+            <a:effectLst/>
+          </p:spPr>
+          <p:style>
+            <a:lnRef idx="2">
+              <a:schemeClr val="accent1"/>
+            </a:lnRef>
+            <a:fillRef idx="0">
+              <a:schemeClr val="accent1"/>
+            </a:fillRef>
+            <a:effectRef idx="0">
               <a:schemeClr val="accent1"/>
             </a:effectRef>
             <a:fontRef idx="minor">
@@ -9868,15 +10033,16 @@
                 <a:srgbClr val="8FBFBF"/>
               </a:solidFill>
             </a:ln>
-          </p:spPr>
-          <p:style>
-            <a:lnRef idx="2">
-              <a:schemeClr val="accent1"/>
-            </a:lnRef>
-            <a:fillRef idx="0">
-              <a:schemeClr val="accent1"/>
-            </a:fillRef>
-            <a:effectRef idx="1">
+            <a:effectLst/>
+          </p:spPr>
+          <p:style>
+            <a:lnRef idx="2">
+              <a:schemeClr val="accent1"/>
+            </a:lnRef>
+            <a:fillRef idx="0">
+              <a:schemeClr val="accent1"/>
+            </a:fillRef>
+            <a:effectRef idx="0">
               <a:schemeClr val="accent1"/>
             </a:effectRef>
             <a:fontRef idx="minor">
@@ -9903,15 +10069,16 @@
                 <a:srgbClr val="8FBFBF"/>
               </a:solidFill>
             </a:ln>
-          </p:spPr>
-          <p:style>
-            <a:lnRef idx="2">
-              <a:schemeClr val="accent1"/>
-            </a:lnRef>
-            <a:fillRef idx="0">
-              <a:schemeClr val="accent1"/>
-            </a:fillRef>
-            <a:effectRef idx="1">
+            <a:effectLst/>
+          </p:spPr>
+          <p:style>
+            <a:lnRef idx="2">
+              <a:schemeClr val="accent1"/>
+            </a:lnRef>
+            <a:fillRef idx="0">
+              <a:schemeClr val="accent1"/>
+            </a:fillRef>
+            <a:effectRef idx="0">
               <a:schemeClr val="accent1"/>
             </a:effectRef>
             <a:fontRef idx="minor">
@@ -9938,15 +10105,16 @@
                 <a:srgbClr val="8FBFBF"/>
               </a:solidFill>
             </a:ln>
-          </p:spPr>
-          <p:style>
-            <a:lnRef idx="2">
-              <a:schemeClr val="accent1"/>
-            </a:lnRef>
-            <a:fillRef idx="0">
-              <a:schemeClr val="accent1"/>
-            </a:fillRef>
-            <a:effectRef idx="1">
+            <a:effectLst/>
+          </p:spPr>
+          <p:style>
+            <a:lnRef idx="2">
+              <a:schemeClr val="accent1"/>
+            </a:lnRef>
+            <a:fillRef idx="0">
+              <a:schemeClr val="accent1"/>
+            </a:fillRef>
+            <a:effectRef idx="0">
               <a:schemeClr val="accent1"/>
             </a:effectRef>
             <a:fontRef idx="minor">
@@ -9973,15 +10141,16 @@
                 <a:srgbClr val="8FBFBF"/>
               </a:solidFill>
             </a:ln>
-          </p:spPr>
-          <p:style>
-            <a:lnRef idx="2">
-              <a:schemeClr val="accent1"/>
-            </a:lnRef>
-            <a:fillRef idx="0">
-              <a:schemeClr val="accent1"/>
-            </a:fillRef>
-            <a:effectRef idx="1">
+            <a:effectLst/>
+          </p:spPr>
+          <p:style>
+            <a:lnRef idx="2">
+              <a:schemeClr val="accent1"/>
+            </a:lnRef>
+            <a:fillRef idx="0">
+              <a:schemeClr val="accent1"/>
+            </a:fillRef>
+            <a:effectRef idx="0">
               <a:schemeClr val="accent1"/>
             </a:effectRef>
             <a:fontRef idx="minor">
@@ -10008,15 +10177,16 @@
                 <a:srgbClr val="8FBFBF"/>
               </a:solidFill>
             </a:ln>
-          </p:spPr>
-          <p:style>
-            <a:lnRef idx="2">
-              <a:schemeClr val="accent1"/>
-            </a:lnRef>
-            <a:fillRef idx="0">
-              <a:schemeClr val="accent1"/>
-            </a:fillRef>
-            <a:effectRef idx="1">
+            <a:effectLst/>
+          </p:spPr>
+          <p:style>
+            <a:lnRef idx="2">
+              <a:schemeClr val="accent1"/>
+            </a:lnRef>
+            <a:fillRef idx="0">
+              <a:schemeClr val="accent1"/>
+            </a:fillRef>
+            <a:effectRef idx="0">
               <a:schemeClr val="accent1"/>
             </a:effectRef>
             <a:fontRef idx="minor">
@@ -10043,15 +10213,16 @@
                 <a:srgbClr val="8FBFBF"/>
               </a:solidFill>
             </a:ln>
-          </p:spPr>
-          <p:style>
-            <a:lnRef idx="2">
-              <a:schemeClr val="accent1"/>
-            </a:lnRef>
-            <a:fillRef idx="0">
-              <a:schemeClr val="accent1"/>
-            </a:fillRef>
-            <a:effectRef idx="1">
+            <a:effectLst/>
+          </p:spPr>
+          <p:style>
+            <a:lnRef idx="2">
+              <a:schemeClr val="accent1"/>
+            </a:lnRef>
+            <a:fillRef idx="0">
+              <a:schemeClr val="accent1"/>
+            </a:fillRef>
+            <a:effectRef idx="0">
               <a:schemeClr val="accent1"/>
             </a:effectRef>
             <a:fontRef idx="minor">
@@ -10078,15 +10249,16 @@
                 <a:srgbClr val="8FBFBF"/>
               </a:solidFill>
             </a:ln>
-          </p:spPr>
-          <p:style>
-            <a:lnRef idx="2">
-              <a:schemeClr val="accent1"/>
-            </a:lnRef>
-            <a:fillRef idx="0">
-              <a:schemeClr val="accent1"/>
-            </a:fillRef>
-            <a:effectRef idx="1">
+            <a:effectLst/>
+          </p:spPr>
+          <p:style>
+            <a:lnRef idx="2">
+              <a:schemeClr val="accent1"/>
+            </a:lnRef>
+            <a:fillRef idx="0">
+              <a:schemeClr val="accent1"/>
+            </a:fillRef>
+            <a:effectRef idx="0">
               <a:schemeClr val="accent1"/>
             </a:effectRef>
             <a:fontRef idx="minor">
@@ -10113,15 +10285,16 @@
                 <a:srgbClr val="8FBFBF"/>
               </a:solidFill>
             </a:ln>
-          </p:spPr>
-          <p:style>
-            <a:lnRef idx="2">
-              <a:schemeClr val="accent1"/>
-            </a:lnRef>
-            <a:fillRef idx="0">
-              <a:schemeClr val="accent1"/>
-            </a:fillRef>
-            <a:effectRef idx="1">
+            <a:effectLst/>
+          </p:spPr>
+          <p:style>
+            <a:lnRef idx="2">
+              <a:schemeClr val="accent1"/>
+            </a:lnRef>
+            <a:fillRef idx="0">
+              <a:schemeClr val="accent1"/>
+            </a:fillRef>
+            <a:effectRef idx="0">
               <a:schemeClr val="accent1"/>
             </a:effectRef>
             <a:fontRef idx="minor">
@@ -10148,15 +10321,16 @@
                 <a:srgbClr val="8FBFBF"/>
               </a:solidFill>
             </a:ln>
-          </p:spPr>
-          <p:style>
-            <a:lnRef idx="2">
-              <a:schemeClr val="accent1"/>
-            </a:lnRef>
-            <a:fillRef idx="0">
-              <a:schemeClr val="accent1"/>
-            </a:fillRef>
-            <a:effectRef idx="1">
+            <a:effectLst/>
+          </p:spPr>
+          <p:style>
+            <a:lnRef idx="2">
+              <a:schemeClr val="accent1"/>
+            </a:lnRef>
+            <a:fillRef idx="0">
+              <a:schemeClr val="accent1"/>
+            </a:fillRef>
+            <a:effectRef idx="0">
               <a:schemeClr val="accent1"/>
             </a:effectRef>
             <a:fontRef idx="minor">
@@ -10183,15 +10357,16 @@
                 <a:srgbClr val="8FBFBF"/>
               </a:solidFill>
             </a:ln>
-          </p:spPr>
-          <p:style>
-            <a:lnRef idx="2">
-              <a:schemeClr val="accent1"/>
-            </a:lnRef>
-            <a:fillRef idx="0">
-              <a:schemeClr val="accent1"/>
-            </a:fillRef>
-            <a:effectRef idx="1">
+            <a:effectLst/>
+          </p:spPr>
+          <p:style>
+            <a:lnRef idx="2">
+              <a:schemeClr val="accent1"/>
+            </a:lnRef>
+            <a:fillRef idx="0">
+              <a:schemeClr val="accent1"/>
+            </a:fillRef>
+            <a:effectRef idx="0">
               <a:schemeClr val="accent1"/>
             </a:effectRef>
             <a:fontRef idx="minor">
@@ -10218,15 +10393,16 @@
                 <a:srgbClr val="8FBFBF"/>
               </a:solidFill>
             </a:ln>
-          </p:spPr>
-          <p:style>
-            <a:lnRef idx="2">
-              <a:schemeClr val="accent1"/>
-            </a:lnRef>
-            <a:fillRef idx="0">
-              <a:schemeClr val="accent1"/>
-            </a:fillRef>
-            <a:effectRef idx="1">
+            <a:effectLst/>
+          </p:spPr>
+          <p:style>
+            <a:lnRef idx="2">
+              <a:schemeClr val="accent1"/>
+            </a:lnRef>
+            <a:fillRef idx="0">
+              <a:schemeClr val="accent1"/>
+            </a:fillRef>
+            <a:effectRef idx="0">
               <a:schemeClr val="accent1"/>
             </a:effectRef>
             <a:fontRef idx="minor">
@@ -10253,15 +10429,16 @@
                 <a:srgbClr val="8FBFBF"/>
               </a:solidFill>
             </a:ln>
-          </p:spPr>
-          <p:style>
-            <a:lnRef idx="2">
-              <a:schemeClr val="accent1"/>
-            </a:lnRef>
-            <a:fillRef idx="0">
-              <a:schemeClr val="accent1"/>
-            </a:fillRef>
-            <a:effectRef idx="1">
+            <a:effectLst/>
+          </p:spPr>
+          <p:style>
+            <a:lnRef idx="2">
+              <a:schemeClr val="accent1"/>
+            </a:lnRef>
+            <a:fillRef idx="0">
+              <a:schemeClr val="accent1"/>
+            </a:fillRef>
+            <a:effectRef idx="0">
               <a:schemeClr val="accent1"/>
             </a:effectRef>
             <a:fontRef idx="minor">
@@ -10288,15 +10465,16 @@
                 <a:srgbClr val="8FBFBF"/>
               </a:solidFill>
             </a:ln>
-          </p:spPr>
-          <p:style>
-            <a:lnRef idx="2">
-              <a:schemeClr val="accent1"/>
-            </a:lnRef>
-            <a:fillRef idx="0">
-              <a:schemeClr val="accent1"/>
-            </a:fillRef>
-            <a:effectRef idx="1">
+            <a:effectLst/>
+          </p:spPr>
+          <p:style>
+            <a:lnRef idx="2">
+              <a:schemeClr val="accent1"/>
+            </a:lnRef>
+            <a:fillRef idx="0">
+              <a:schemeClr val="accent1"/>
+            </a:fillRef>
+            <a:effectRef idx="0">
               <a:schemeClr val="accent1"/>
             </a:effectRef>
             <a:fontRef idx="minor">
@@ -10323,15 +10501,16 @@
                 <a:srgbClr val="8FBFBF"/>
               </a:solidFill>
             </a:ln>
-          </p:spPr>
-          <p:style>
-            <a:lnRef idx="2">
-              <a:schemeClr val="accent1"/>
-            </a:lnRef>
-            <a:fillRef idx="0">
-              <a:schemeClr val="accent1"/>
-            </a:fillRef>
-            <a:effectRef idx="1">
+            <a:effectLst/>
+          </p:spPr>
+          <p:style>
+            <a:lnRef idx="2">
+              <a:schemeClr val="accent1"/>
+            </a:lnRef>
+            <a:fillRef idx="0">
+              <a:schemeClr val="accent1"/>
+            </a:fillRef>
+            <a:effectRef idx="0">
               <a:schemeClr val="accent1"/>
             </a:effectRef>
             <a:fontRef idx="minor">
@@ -10358,15 +10537,16 @@
                 <a:srgbClr val="8FBFBF"/>
               </a:solidFill>
             </a:ln>
-          </p:spPr>
-          <p:style>
-            <a:lnRef idx="2">
-              <a:schemeClr val="accent1"/>
-            </a:lnRef>
-            <a:fillRef idx="0">
-              <a:schemeClr val="accent1"/>
-            </a:fillRef>
-            <a:effectRef idx="1">
+            <a:effectLst/>
+          </p:spPr>
+          <p:style>
+            <a:lnRef idx="2">
+              <a:schemeClr val="accent1"/>
+            </a:lnRef>
+            <a:fillRef idx="0">
+              <a:schemeClr val="accent1"/>
+            </a:fillRef>
+            <a:effectRef idx="0">
               <a:schemeClr val="accent1"/>
             </a:effectRef>
             <a:fontRef idx="minor">
@@ -10393,15 +10573,16 @@
                 <a:srgbClr val="8FBFBF"/>
               </a:solidFill>
             </a:ln>
-          </p:spPr>
-          <p:style>
-            <a:lnRef idx="2">
-              <a:schemeClr val="accent1"/>
-            </a:lnRef>
-            <a:fillRef idx="0">
-              <a:schemeClr val="accent1"/>
-            </a:fillRef>
-            <a:effectRef idx="1">
+            <a:effectLst/>
+          </p:spPr>
+          <p:style>
+            <a:lnRef idx="2">
+              <a:schemeClr val="accent1"/>
+            </a:lnRef>
+            <a:fillRef idx="0">
+              <a:schemeClr val="accent1"/>
+            </a:fillRef>
+            <a:effectRef idx="0">
               <a:schemeClr val="accent1"/>
             </a:effectRef>
             <a:fontRef idx="minor">
@@ -10428,15 +10609,16 @@
                 <a:srgbClr val="8FBFBF"/>
               </a:solidFill>
             </a:ln>
-          </p:spPr>
-          <p:style>
-            <a:lnRef idx="2">
-              <a:schemeClr val="accent1"/>
-            </a:lnRef>
-            <a:fillRef idx="0">
-              <a:schemeClr val="accent1"/>
-            </a:fillRef>
-            <a:effectRef idx="1">
+            <a:effectLst/>
+          </p:spPr>
+          <p:style>
+            <a:lnRef idx="2">
+              <a:schemeClr val="accent1"/>
+            </a:lnRef>
+            <a:fillRef idx="0">
+              <a:schemeClr val="accent1"/>
+            </a:fillRef>
+            <a:effectRef idx="0">
               <a:schemeClr val="accent1"/>
             </a:effectRef>
             <a:fontRef idx="minor">
@@ -10463,15 +10645,16 @@
                 <a:srgbClr val="8FBFBF"/>
               </a:solidFill>
             </a:ln>
-          </p:spPr>
-          <p:style>
-            <a:lnRef idx="2">
-              <a:schemeClr val="accent1"/>
-            </a:lnRef>
-            <a:fillRef idx="0">
-              <a:schemeClr val="accent1"/>
-            </a:fillRef>
-            <a:effectRef idx="1">
+            <a:effectLst/>
+          </p:spPr>
+          <p:style>
+            <a:lnRef idx="2">
+              <a:schemeClr val="accent1"/>
+            </a:lnRef>
+            <a:fillRef idx="0">
+              <a:schemeClr val="accent1"/>
+            </a:fillRef>
+            <a:effectRef idx="0">
               <a:schemeClr val="accent1"/>
             </a:effectRef>
             <a:fontRef idx="minor">
@@ -10498,15 +10681,16 @@
                 <a:srgbClr val="8FBFBF"/>
               </a:solidFill>
             </a:ln>
-          </p:spPr>
-          <p:style>
-            <a:lnRef idx="2">
-              <a:schemeClr val="accent1"/>
-            </a:lnRef>
-            <a:fillRef idx="0">
-              <a:schemeClr val="accent1"/>
-            </a:fillRef>
-            <a:effectRef idx="1">
+            <a:effectLst/>
+          </p:spPr>
+          <p:style>
+            <a:lnRef idx="2">
+              <a:schemeClr val="accent1"/>
+            </a:lnRef>
+            <a:fillRef idx="0">
+              <a:schemeClr val="accent1"/>
+            </a:fillRef>
+            <a:effectRef idx="0">
               <a:schemeClr val="accent1"/>
             </a:effectRef>
             <a:fontRef idx="minor">
@@ -10533,15 +10717,16 @@
                 <a:srgbClr val="8FBFBF"/>
               </a:solidFill>
             </a:ln>
-          </p:spPr>
-          <p:style>
-            <a:lnRef idx="2">
-              <a:schemeClr val="accent1"/>
-            </a:lnRef>
-            <a:fillRef idx="0">
-              <a:schemeClr val="accent1"/>
-            </a:fillRef>
-            <a:effectRef idx="1">
+            <a:effectLst/>
+          </p:spPr>
+          <p:style>
+            <a:lnRef idx="2">
+              <a:schemeClr val="accent1"/>
+            </a:lnRef>
+            <a:fillRef idx="0">
+              <a:schemeClr val="accent1"/>
+            </a:fillRef>
+            <a:effectRef idx="0">
               <a:schemeClr val="accent1"/>
             </a:effectRef>
             <a:fontRef idx="minor">
@@ -10593,7 +10778,7 @@
             <a:fillRef idx="3">
               <a:schemeClr val="accent1"/>
             </a:fillRef>
-            <a:effectRef idx="2">
+            <a:effectRef idx="0">
               <a:schemeClr val="accent1"/>
             </a:effectRef>
             <a:fontRef idx="minor">
@@ -10627,15 +10812,16 @@
                 <a:srgbClr val="8FBFBF"/>
               </a:solidFill>
             </a:ln>
-          </p:spPr>
-          <p:style>
-            <a:lnRef idx="2">
-              <a:schemeClr val="accent1"/>
-            </a:lnRef>
-            <a:fillRef idx="0">
-              <a:schemeClr val="accent1"/>
-            </a:fillRef>
-            <a:effectRef idx="1">
+            <a:effectLst/>
+          </p:spPr>
+          <p:style>
+            <a:lnRef idx="2">
+              <a:schemeClr val="accent1"/>
+            </a:lnRef>
+            <a:fillRef idx="0">
+              <a:schemeClr val="accent1"/>
+            </a:fillRef>
+            <a:effectRef idx="0">
               <a:schemeClr val="accent1"/>
             </a:effectRef>
             <a:fontRef idx="minor">
@@ -10662,15 +10848,16 @@
                 <a:srgbClr val="8FBFBF"/>
               </a:solidFill>
             </a:ln>
-          </p:spPr>
-          <p:style>
-            <a:lnRef idx="2">
-              <a:schemeClr val="accent1"/>
-            </a:lnRef>
-            <a:fillRef idx="0">
-              <a:schemeClr val="accent1"/>
-            </a:fillRef>
-            <a:effectRef idx="1">
+            <a:effectLst/>
+          </p:spPr>
+          <p:style>
+            <a:lnRef idx="2">
+              <a:schemeClr val="accent1"/>
+            </a:lnRef>
+            <a:fillRef idx="0">
+              <a:schemeClr val="accent1"/>
+            </a:fillRef>
+            <a:effectRef idx="0">
               <a:schemeClr val="accent1"/>
             </a:effectRef>
             <a:fontRef idx="minor">
@@ -10697,15 +10884,16 @@
                 <a:srgbClr val="8FBFBF"/>
               </a:solidFill>
             </a:ln>
-          </p:spPr>
-          <p:style>
-            <a:lnRef idx="2">
-              <a:schemeClr val="accent1"/>
-            </a:lnRef>
-            <a:fillRef idx="0">
-              <a:schemeClr val="accent1"/>
-            </a:fillRef>
-            <a:effectRef idx="1">
+            <a:effectLst/>
+          </p:spPr>
+          <p:style>
+            <a:lnRef idx="2">
+              <a:schemeClr val="accent1"/>
+            </a:lnRef>
+            <a:fillRef idx="0">
+              <a:schemeClr val="accent1"/>
+            </a:fillRef>
+            <a:effectRef idx="0">
               <a:schemeClr val="accent1"/>
             </a:effectRef>
             <a:fontRef idx="minor">
@@ -10732,15 +10920,16 @@
                 <a:srgbClr val="8FBFBF"/>
               </a:solidFill>
             </a:ln>
-          </p:spPr>
-          <p:style>
-            <a:lnRef idx="2">
-              <a:schemeClr val="accent1"/>
-            </a:lnRef>
-            <a:fillRef idx="0">
-              <a:schemeClr val="accent1"/>
-            </a:fillRef>
-            <a:effectRef idx="1">
+            <a:effectLst/>
+          </p:spPr>
+          <p:style>
+            <a:lnRef idx="2">
+              <a:schemeClr val="accent1"/>
+            </a:lnRef>
+            <a:fillRef idx="0">
+              <a:schemeClr val="accent1"/>
+            </a:fillRef>
+            <a:effectRef idx="0">
               <a:schemeClr val="accent1"/>
             </a:effectRef>
             <a:fontRef idx="minor">
@@ -10767,15 +10956,16 @@
                 <a:srgbClr val="8FBFBF"/>
               </a:solidFill>
             </a:ln>
-          </p:spPr>
-          <p:style>
-            <a:lnRef idx="2">
-              <a:schemeClr val="accent1"/>
-            </a:lnRef>
-            <a:fillRef idx="0">
-              <a:schemeClr val="accent1"/>
-            </a:fillRef>
-            <a:effectRef idx="1">
+            <a:effectLst/>
+          </p:spPr>
+          <p:style>
+            <a:lnRef idx="2">
+              <a:schemeClr val="accent1"/>
+            </a:lnRef>
+            <a:fillRef idx="0">
+              <a:schemeClr val="accent1"/>
+            </a:fillRef>
+            <a:effectRef idx="0">
               <a:schemeClr val="accent1"/>
             </a:effectRef>
             <a:fontRef idx="minor">
@@ -10802,15 +10992,16 @@
                 <a:srgbClr val="8FBFBF"/>
               </a:solidFill>
             </a:ln>
-          </p:spPr>
-          <p:style>
-            <a:lnRef idx="2">
-              <a:schemeClr val="accent1"/>
-            </a:lnRef>
-            <a:fillRef idx="0">
-              <a:schemeClr val="accent1"/>
-            </a:fillRef>
-            <a:effectRef idx="1">
+            <a:effectLst/>
+          </p:spPr>
+          <p:style>
+            <a:lnRef idx="2">
+              <a:schemeClr val="accent1"/>
+            </a:lnRef>
+            <a:fillRef idx="0">
+              <a:schemeClr val="accent1"/>
+            </a:fillRef>
+            <a:effectRef idx="0">
               <a:schemeClr val="accent1"/>
             </a:effectRef>
             <a:fontRef idx="minor">
@@ -10837,15 +11028,16 @@
                 <a:srgbClr val="8FBFBF"/>
               </a:solidFill>
             </a:ln>
-          </p:spPr>
-          <p:style>
-            <a:lnRef idx="2">
-              <a:schemeClr val="accent1"/>
-            </a:lnRef>
-            <a:fillRef idx="0">
-              <a:schemeClr val="accent1"/>
-            </a:fillRef>
-            <a:effectRef idx="1">
+            <a:effectLst/>
+          </p:spPr>
+          <p:style>
+            <a:lnRef idx="2">
+              <a:schemeClr val="accent1"/>
+            </a:lnRef>
+            <a:fillRef idx="0">
+              <a:schemeClr val="accent1"/>
+            </a:fillRef>
+            <a:effectRef idx="0">
               <a:schemeClr val="accent1"/>
             </a:effectRef>
             <a:fontRef idx="minor">
@@ -10872,15 +11064,16 @@
                 <a:srgbClr val="8FBFBF"/>
               </a:solidFill>
             </a:ln>
-          </p:spPr>
-          <p:style>
-            <a:lnRef idx="2">
-              <a:schemeClr val="accent1"/>
-            </a:lnRef>
-            <a:fillRef idx="0">
-              <a:schemeClr val="accent1"/>
-            </a:fillRef>
-            <a:effectRef idx="1">
+            <a:effectLst/>
+          </p:spPr>
+          <p:style>
+            <a:lnRef idx="2">
+              <a:schemeClr val="accent1"/>
+            </a:lnRef>
+            <a:fillRef idx="0">
+              <a:schemeClr val="accent1"/>
+            </a:fillRef>
+            <a:effectRef idx="0">
               <a:schemeClr val="accent1"/>
             </a:effectRef>
             <a:fontRef idx="minor">
@@ -10907,15 +11100,16 @@
                 <a:srgbClr val="8FBFBF"/>
               </a:solidFill>
             </a:ln>
-          </p:spPr>
-          <p:style>
-            <a:lnRef idx="2">
-              <a:schemeClr val="accent1"/>
-            </a:lnRef>
-            <a:fillRef idx="0">
-              <a:schemeClr val="accent1"/>
-            </a:fillRef>
-            <a:effectRef idx="1">
+            <a:effectLst/>
+          </p:spPr>
+          <p:style>
+            <a:lnRef idx="2">
+              <a:schemeClr val="accent1"/>
+            </a:lnRef>
+            <a:fillRef idx="0">
+              <a:schemeClr val="accent1"/>
+            </a:fillRef>
+            <a:effectRef idx="0">
               <a:schemeClr val="accent1"/>
             </a:effectRef>
             <a:fontRef idx="minor">
@@ -10942,15 +11136,16 @@
                 <a:srgbClr val="8FBFBF"/>
               </a:solidFill>
             </a:ln>
-          </p:spPr>
-          <p:style>
-            <a:lnRef idx="2">
-              <a:schemeClr val="accent1"/>
-            </a:lnRef>
-            <a:fillRef idx="0">
-              <a:schemeClr val="accent1"/>
-            </a:fillRef>
-            <a:effectRef idx="1">
+            <a:effectLst/>
+          </p:spPr>
+          <p:style>
+            <a:lnRef idx="2">
+              <a:schemeClr val="accent1"/>
+            </a:lnRef>
+            <a:fillRef idx="0">
+              <a:schemeClr val="accent1"/>
+            </a:fillRef>
+            <a:effectRef idx="0">
               <a:schemeClr val="accent1"/>
             </a:effectRef>
             <a:fontRef idx="minor">
@@ -10977,15 +11172,16 @@
                 <a:srgbClr val="8FBFBF"/>
               </a:solidFill>
             </a:ln>
-          </p:spPr>
-          <p:style>
-            <a:lnRef idx="2">
-              <a:schemeClr val="accent1"/>
-            </a:lnRef>
-            <a:fillRef idx="0">
-              <a:schemeClr val="accent1"/>
-            </a:fillRef>
-            <a:effectRef idx="1">
+            <a:effectLst/>
+          </p:spPr>
+          <p:style>
+            <a:lnRef idx="2">
+              <a:schemeClr val="accent1"/>
+            </a:lnRef>
+            <a:fillRef idx="0">
+              <a:schemeClr val="accent1"/>
+            </a:fillRef>
+            <a:effectRef idx="0">
               <a:schemeClr val="accent1"/>
             </a:effectRef>
             <a:fontRef idx="minor">
@@ -11012,15 +11208,16 @@
                 <a:srgbClr val="8FBFBF"/>
               </a:solidFill>
             </a:ln>
-          </p:spPr>
-          <p:style>
-            <a:lnRef idx="2">
-              <a:schemeClr val="accent1"/>
-            </a:lnRef>
-            <a:fillRef idx="0">
-              <a:schemeClr val="accent1"/>
-            </a:fillRef>
-            <a:effectRef idx="1">
+            <a:effectLst/>
+          </p:spPr>
+          <p:style>
+            <a:lnRef idx="2">
+              <a:schemeClr val="accent1"/>
+            </a:lnRef>
+            <a:fillRef idx="0">
+              <a:schemeClr val="accent1"/>
+            </a:fillRef>
+            <a:effectRef idx="0">
               <a:schemeClr val="accent1"/>
             </a:effectRef>
             <a:fontRef idx="minor">
@@ -11047,15 +11244,16 @@
                 <a:srgbClr val="8FBFBF"/>
               </a:solidFill>
             </a:ln>
-          </p:spPr>
-          <p:style>
-            <a:lnRef idx="2">
-              <a:schemeClr val="accent1"/>
-            </a:lnRef>
-            <a:fillRef idx="0">
-              <a:schemeClr val="accent1"/>
-            </a:fillRef>
-            <a:effectRef idx="1">
+            <a:effectLst/>
+          </p:spPr>
+          <p:style>
+            <a:lnRef idx="2">
+              <a:schemeClr val="accent1"/>
+            </a:lnRef>
+            <a:fillRef idx="0">
+              <a:schemeClr val="accent1"/>
+            </a:fillRef>
+            <a:effectRef idx="0">
               <a:schemeClr val="accent1"/>
             </a:effectRef>
             <a:fontRef idx="minor">
@@ -11082,15 +11280,16 @@
                 <a:srgbClr val="8FBFBF"/>
               </a:solidFill>
             </a:ln>
-          </p:spPr>
-          <p:style>
-            <a:lnRef idx="2">
-              <a:schemeClr val="accent1"/>
-            </a:lnRef>
-            <a:fillRef idx="0">
-              <a:schemeClr val="accent1"/>
-            </a:fillRef>
-            <a:effectRef idx="1">
+            <a:effectLst/>
+          </p:spPr>
+          <p:style>
+            <a:lnRef idx="2">
+              <a:schemeClr val="accent1"/>
+            </a:lnRef>
+            <a:fillRef idx="0">
+              <a:schemeClr val="accent1"/>
+            </a:fillRef>
+            <a:effectRef idx="0">
               <a:schemeClr val="accent1"/>
             </a:effectRef>
             <a:fontRef idx="minor">
@@ -11117,15 +11316,16 @@
                 <a:srgbClr val="8FBFBF"/>
               </a:solidFill>
             </a:ln>
-          </p:spPr>
-          <p:style>
-            <a:lnRef idx="2">
-              <a:schemeClr val="accent1"/>
-            </a:lnRef>
-            <a:fillRef idx="0">
-              <a:schemeClr val="accent1"/>
-            </a:fillRef>
-            <a:effectRef idx="1">
+            <a:effectLst/>
+          </p:spPr>
+          <p:style>
+            <a:lnRef idx="2">
+              <a:schemeClr val="accent1"/>
+            </a:lnRef>
+            <a:fillRef idx="0">
+              <a:schemeClr val="accent1"/>
+            </a:fillRef>
+            <a:effectRef idx="0">
               <a:schemeClr val="accent1"/>
             </a:effectRef>
             <a:fontRef idx="minor">
@@ -11152,15 +11352,16 @@
                 <a:srgbClr val="8FBFBF"/>
               </a:solidFill>
             </a:ln>
-          </p:spPr>
-          <p:style>
-            <a:lnRef idx="2">
-              <a:schemeClr val="accent1"/>
-            </a:lnRef>
-            <a:fillRef idx="0">
-              <a:schemeClr val="accent1"/>
-            </a:fillRef>
-            <a:effectRef idx="1">
+            <a:effectLst/>
+          </p:spPr>
+          <p:style>
+            <a:lnRef idx="2">
+              <a:schemeClr val="accent1"/>
+            </a:lnRef>
+            <a:fillRef idx="0">
+              <a:schemeClr val="accent1"/>
+            </a:fillRef>
+            <a:effectRef idx="0">
               <a:schemeClr val="accent1"/>
             </a:effectRef>
             <a:fontRef idx="minor">
@@ -11187,15 +11388,16 @@
                 <a:srgbClr val="8FBFBF"/>
               </a:solidFill>
             </a:ln>
-          </p:spPr>
-          <p:style>
-            <a:lnRef idx="2">
-              <a:schemeClr val="accent1"/>
-            </a:lnRef>
-            <a:fillRef idx="0">
-              <a:schemeClr val="accent1"/>
-            </a:fillRef>
-            <a:effectRef idx="1">
+            <a:effectLst/>
+          </p:spPr>
+          <p:style>
+            <a:lnRef idx="2">
+              <a:schemeClr val="accent1"/>
+            </a:lnRef>
+            <a:fillRef idx="0">
+              <a:schemeClr val="accent1"/>
+            </a:fillRef>
+            <a:effectRef idx="0">
               <a:schemeClr val="accent1"/>
             </a:effectRef>
             <a:fontRef idx="minor">
@@ -11222,15 +11424,16 @@
                 <a:srgbClr val="8FBFBF"/>
               </a:solidFill>
             </a:ln>
-          </p:spPr>
-          <p:style>
-            <a:lnRef idx="2">
-              <a:schemeClr val="accent1"/>
-            </a:lnRef>
-            <a:fillRef idx="0">
-              <a:schemeClr val="accent1"/>
-            </a:fillRef>
-            <a:effectRef idx="1">
+            <a:effectLst/>
+          </p:spPr>
+          <p:style>
+            <a:lnRef idx="2">
+              <a:schemeClr val="accent1"/>
+            </a:lnRef>
+            <a:fillRef idx="0">
+              <a:schemeClr val="accent1"/>
+            </a:fillRef>
+            <a:effectRef idx="0">
               <a:schemeClr val="accent1"/>
             </a:effectRef>
             <a:fontRef idx="minor">
@@ -11257,15 +11460,16 @@
                 <a:srgbClr val="8FBFBF"/>
               </a:solidFill>
             </a:ln>
-          </p:spPr>
-          <p:style>
-            <a:lnRef idx="2">
-              <a:schemeClr val="accent1"/>
-            </a:lnRef>
-            <a:fillRef idx="0">
-              <a:schemeClr val="accent1"/>
-            </a:fillRef>
-            <a:effectRef idx="1">
+            <a:effectLst/>
+          </p:spPr>
+          <p:style>
+            <a:lnRef idx="2">
+              <a:schemeClr val="accent1"/>
+            </a:lnRef>
+            <a:fillRef idx="0">
+              <a:schemeClr val="accent1"/>
+            </a:fillRef>
+            <a:effectRef idx="0">
               <a:schemeClr val="accent1"/>
             </a:effectRef>
             <a:fontRef idx="minor">
@@ -11292,15 +11496,16 @@
                 <a:srgbClr val="8FBFBF"/>
               </a:solidFill>
             </a:ln>
-          </p:spPr>
-          <p:style>
-            <a:lnRef idx="2">
-              <a:schemeClr val="accent1"/>
-            </a:lnRef>
-            <a:fillRef idx="0">
-              <a:schemeClr val="accent1"/>
-            </a:fillRef>
-            <a:effectRef idx="1">
+            <a:effectLst/>
+          </p:spPr>
+          <p:style>
+            <a:lnRef idx="2">
+              <a:schemeClr val="accent1"/>
+            </a:lnRef>
+            <a:fillRef idx="0">
+              <a:schemeClr val="accent1"/>
+            </a:fillRef>
+            <a:effectRef idx="0">
               <a:schemeClr val="accent1"/>
             </a:effectRef>
             <a:fontRef idx="minor">
@@ -11327,15 +11532,16 @@
                 <a:srgbClr val="8FBFBF"/>
               </a:solidFill>
             </a:ln>
-          </p:spPr>
-          <p:style>
-            <a:lnRef idx="2">
-              <a:schemeClr val="accent1"/>
-            </a:lnRef>
-            <a:fillRef idx="0">
-              <a:schemeClr val="accent1"/>
-            </a:fillRef>
-            <a:effectRef idx="1">
+            <a:effectLst/>
+          </p:spPr>
+          <p:style>
+            <a:lnRef idx="2">
+              <a:schemeClr val="accent1"/>
+            </a:lnRef>
+            <a:fillRef idx="0">
+              <a:schemeClr val="accent1"/>
+            </a:fillRef>
+            <a:effectRef idx="0">
               <a:schemeClr val="accent1"/>
             </a:effectRef>
             <a:fontRef idx="minor">
@@ -11362,15 +11568,16 @@
                 <a:srgbClr val="8FBFBF"/>
               </a:solidFill>
             </a:ln>
-          </p:spPr>
-          <p:style>
-            <a:lnRef idx="2">
-              <a:schemeClr val="accent1"/>
-            </a:lnRef>
-            <a:fillRef idx="0">
-              <a:schemeClr val="accent1"/>
-            </a:fillRef>
-            <a:effectRef idx="1">
+            <a:effectLst/>
+          </p:spPr>
+          <p:style>
+            <a:lnRef idx="2">
+              <a:schemeClr val="accent1"/>
+            </a:lnRef>
+            <a:fillRef idx="0">
+              <a:schemeClr val="accent1"/>
+            </a:fillRef>
+            <a:effectRef idx="0">
               <a:schemeClr val="accent1"/>
             </a:effectRef>
             <a:fontRef idx="minor">
@@ -11397,15 +11604,16 @@
                 <a:srgbClr val="8FBFBF"/>
               </a:solidFill>
             </a:ln>
-          </p:spPr>
-          <p:style>
-            <a:lnRef idx="2">
-              <a:schemeClr val="accent1"/>
-            </a:lnRef>
-            <a:fillRef idx="0">
-              <a:schemeClr val="accent1"/>
-            </a:fillRef>
-            <a:effectRef idx="1">
+            <a:effectLst/>
+          </p:spPr>
+          <p:style>
+            <a:lnRef idx="2">
+              <a:schemeClr val="accent1"/>
+            </a:lnRef>
+            <a:fillRef idx="0">
+              <a:schemeClr val="accent1"/>
+            </a:fillRef>
+            <a:effectRef idx="0">
               <a:schemeClr val="accent1"/>
             </a:effectRef>
             <a:fontRef idx="minor">
@@ -11457,7 +11665,7 @@
             <a:fillRef idx="3">
               <a:schemeClr val="accent1"/>
             </a:fillRef>
-            <a:effectRef idx="2">
+            <a:effectRef idx="0">
               <a:schemeClr val="accent1"/>
             </a:effectRef>
             <a:fontRef idx="minor">
@@ -11491,15 +11699,16 @@
                 <a:srgbClr val="8FBFBF"/>
               </a:solidFill>
             </a:ln>
-          </p:spPr>
-          <p:style>
-            <a:lnRef idx="2">
-              <a:schemeClr val="accent1"/>
-            </a:lnRef>
-            <a:fillRef idx="0">
-              <a:schemeClr val="accent1"/>
-            </a:fillRef>
-            <a:effectRef idx="1">
+            <a:effectLst/>
+          </p:spPr>
+          <p:style>
+            <a:lnRef idx="2">
+              <a:schemeClr val="accent1"/>
+            </a:lnRef>
+            <a:fillRef idx="0">
+              <a:schemeClr val="accent1"/>
+            </a:fillRef>
+            <a:effectRef idx="0">
               <a:schemeClr val="accent1"/>
             </a:effectRef>
             <a:fontRef idx="minor">
@@ -11526,15 +11735,16 @@
                 <a:srgbClr val="8FBFBF"/>
               </a:solidFill>
             </a:ln>
-          </p:spPr>
-          <p:style>
-            <a:lnRef idx="2">
-              <a:schemeClr val="accent1"/>
-            </a:lnRef>
-            <a:fillRef idx="0">
-              <a:schemeClr val="accent1"/>
-            </a:fillRef>
-            <a:effectRef idx="1">
+            <a:effectLst/>
+          </p:spPr>
+          <p:style>
+            <a:lnRef idx="2">
+              <a:schemeClr val="accent1"/>
+            </a:lnRef>
+            <a:fillRef idx="0">
+              <a:schemeClr val="accent1"/>
+            </a:fillRef>
+            <a:effectRef idx="0">
               <a:schemeClr val="accent1"/>
             </a:effectRef>
             <a:fontRef idx="minor">
@@ -11561,15 +11771,16 @@
                 <a:srgbClr val="8FBFBF"/>
               </a:solidFill>
             </a:ln>
-          </p:spPr>
-          <p:style>
-            <a:lnRef idx="2">
-              <a:schemeClr val="accent1"/>
-            </a:lnRef>
-            <a:fillRef idx="0">
-              <a:schemeClr val="accent1"/>
-            </a:fillRef>
-            <a:effectRef idx="1">
+            <a:effectLst/>
+          </p:spPr>
+          <p:style>
+            <a:lnRef idx="2">
+              <a:schemeClr val="accent1"/>
+            </a:lnRef>
+            <a:fillRef idx="0">
+              <a:schemeClr val="accent1"/>
+            </a:fillRef>
+            <a:effectRef idx="0">
               <a:schemeClr val="accent1"/>
             </a:effectRef>
             <a:fontRef idx="minor">
@@ -11596,15 +11807,16 @@
                 <a:srgbClr val="8FBFBF"/>
               </a:solidFill>
             </a:ln>
-          </p:spPr>
-          <p:style>
-            <a:lnRef idx="2">
-              <a:schemeClr val="accent1"/>
-            </a:lnRef>
-            <a:fillRef idx="0">
-              <a:schemeClr val="accent1"/>
-            </a:fillRef>
-            <a:effectRef idx="1">
+            <a:effectLst/>
+          </p:spPr>
+          <p:style>
+            <a:lnRef idx="2">
+              <a:schemeClr val="accent1"/>
+            </a:lnRef>
+            <a:fillRef idx="0">
+              <a:schemeClr val="accent1"/>
+            </a:fillRef>
+            <a:effectRef idx="0">
               <a:schemeClr val="accent1"/>
             </a:effectRef>
             <a:fontRef idx="minor">
@@ -11631,15 +11843,16 @@
                 <a:srgbClr val="8FBFBF"/>
               </a:solidFill>
             </a:ln>
-          </p:spPr>
-          <p:style>
-            <a:lnRef idx="2">
-              <a:schemeClr val="accent1"/>
-            </a:lnRef>
-            <a:fillRef idx="0">
-              <a:schemeClr val="accent1"/>
-            </a:fillRef>
-            <a:effectRef idx="1">
+            <a:effectLst/>
+          </p:spPr>
+          <p:style>
+            <a:lnRef idx="2">
+              <a:schemeClr val="accent1"/>
+            </a:lnRef>
+            <a:fillRef idx="0">
+              <a:schemeClr val="accent1"/>
+            </a:fillRef>
+            <a:effectRef idx="0">
               <a:schemeClr val="accent1"/>
             </a:effectRef>
             <a:fontRef idx="minor">
@@ -11666,15 +11879,16 @@
                 <a:srgbClr val="8FBFBF"/>
               </a:solidFill>
             </a:ln>
-          </p:spPr>
-          <p:style>
-            <a:lnRef idx="2">
-              <a:schemeClr val="accent1"/>
-            </a:lnRef>
-            <a:fillRef idx="0">
-              <a:schemeClr val="accent1"/>
-            </a:fillRef>
-            <a:effectRef idx="1">
+            <a:effectLst/>
+          </p:spPr>
+          <p:style>
+            <a:lnRef idx="2">
+              <a:schemeClr val="accent1"/>
+            </a:lnRef>
+            <a:fillRef idx="0">
+              <a:schemeClr val="accent1"/>
+            </a:fillRef>
+            <a:effectRef idx="0">
               <a:schemeClr val="accent1"/>
             </a:effectRef>
             <a:fontRef idx="minor">
@@ -11701,15 +11915,16 @@
                 <a:srgbClr val="8FBFBF"/>
               </a:solidFill>
             </a:ln>
-          </p:spPr>
-          <p:style>
-            <a:lnRef idx="2">
-              <a:schemeClr val="accent1"/>
-            </a:lnRef>
-            <a:fillRef idx="0">
-              <a:schemeClr val="accent1"/>
-            </a:fillRef>
-            <a:effectRef idx="1">
+            <a:effectLst/>
+          </p:spPr>
+          <p:style>
+            <a:lnRef idx="2">
+              <a:schemeClr val="accent1"/>
+            </a:lnRef>
+            <a:fillRef idx="0">
+              <a:schemeClr val="accent1"/>
+            </a:fillRef>
+            <a:effectRef idx="0">
               <a:schemeClr val="accent1"/>
             </a:effectRef>
             <a:fontRef idx="minor">
@@ -11736,15 +11951,16 @@
                 <a:srgbClr val="8FBFBF"/>
               </a:solidFill>
             </a:ln>
-          </p:spPr>
-          <p:style>
-            <a:lnRef idx="2">
-              <a:schemeClr val="accent1"/>
-            </a:lnRef>
-            <a:fillRef idx="0">
-              <a:schemeClr val="accent1"/>
-            </a:fillRef>
-            <a:effectRef idx="1">
+            <a:effectLst/>
+          </p:spPr>
+          <p:style>
+            <a:lnRef idx="2">
+              <a:schemeClr val="accent1"/>
+            </a:lnRef>
+            <a:fillRef idx="0">
+              <a:schemeClr val="accent1"/>
+            </a:fillRef>
+            <a:effectRef idx="0">
               <a:schemeClr val="accent1"/>
             </a:effectRef>
             <a:fontRef idx="minor">
@@ -11771,15 +11987,16 @@
                 <a:srgbClr val="8FBFBF"/>
               </a:solidFill>
             </a:ln>
-          </p:spPr>
-          <p:style>
-            <a:lnRef idx="2">
-              <a:schemeClr val="accent1"/>
-            </a:lnRef>
-            <a:fillRef idx="0">
-              <a:schemeClr val="accent1"/>
-            </a:fillRef>
-            <a:effectRef idx="1">
+            <a:effectLst/>
+          </p:spPr>
+          <p:style>
+            <a:lnRef idx="2">
+              <a:schemeClr val="accent1"/>
+            </a:lnRef>
+            <a:fillRef idx="0">
+              <a:schemeClr val="accent1"/>
+            </a:fillRef>
+            <a:effectRef idx="0">
               <a:schemeClr val="accent1"/>
             </a:effectRef>
             <a:fontRef idx="minor">
@@ -11806,15 +12023,16 @@
                 <a:srgbClr val="8FBFBF"/>
               </a:solidFill>
             </a:ln>
-          </p:spPr>
-          <p:style>
-            <a:lnRef idx="2">
-              <a:schemeClr val="accent1"/>
-            </a:lnRef>
-            <a:fillRef idx="0">
-              <a:schemeClr val="accent1"/>
-            </a:fillRef>
-            <a:effectRef idx="1">
+            <a:effectLst/>
+          </p:spPr>
+          <p:style>
+            <a:lnRef idx="2">
+              <a:schemeClr val="accent1"/>
+            </a:lnRef>
+            <a:fillRef idx="0">
+              <a:schemeClr val="accent1"/>
+            </a:fillRef>
+            <a:effectRef idx="0">
               <a:schemeClr val="accent1"/>
             </a:effectRef>
             <a:fontRef idx="minor">
@@ -11841,15 +12059,16 @@
                 <a:srgbClr val="8FBFBF"/>
               </a:solidFill>
             </a:ln>
-          </p:spPr>
-          <p:style>
-            <a:lnRef idx="2">
-              <a:schemeClr val="accent1"/>
-            </a:lnRef>
-            <a:fillRef idx="0">
-              <a:schemeClr val="accent1"/>
-            </a:fillRef>
-            <a:effectRef idx="1">
+            <a:effectLst/>
+          </p:spPr>
+          <p:style>
+            <a:lnRef idx="2">
+              <a:schemeClr val="accent1"/>
+            </a:lnRef>
+            <a:fillRef idx="0">
+              <a:schemeClr val="accent1"/>
+            </a:fillRef>
+            <a:effectRef idx="0">
               <a:schemeClr val="accent1"/>
             </a:effectRef>
             <a:fontRef idx="minor">
@@ -11876,15 +12095,16 @@
                 <a:srgbClr val="8FBFBF"/>
               </a:solidFill>
             </a:ln>
-          </p:spPr>
-          <p:style>
-            <a:lnRef idx="2">
-              <a:schemeClr val="accent1"/>
-            </a:lnRef>
-            <a:fillRef idx="0">
-              <a:schemeClr val="accent1"/>
-            </a:fillRef>
-            <a:effectRef idx="1">
+            <a:effectLst/>
+          </p:spPr>
+          <p:style>
+            <a:lnRef idx="2">
+              <a:schemeClr val="accent1"/>
+            </a:lnRef>
+            <a:fillRef idx="0">
+              <a:schemeClr val="accent1"/>
+            </a:fillRef>
+            <a:effectRef idx="0">
               <a:schemeClr val="accent1"/>
             </a:effectRef>
             <a:fontRef idx="minor">
@@ -11911,15 +12131,16 @@
                 <a:srgbClr val="8FBFBF"/>
               </a:solidFill>
             </a:ln>
-          </p:spPr>
-          <p:style>
-            <a:lnRef idx="2">
-              <a:schemeClr val="accent1"/>
-            </a:lnRef>
-            <a:fillRef idx="0">
-              <a:schemeClr val="accent1"/>
-            </a:fillRef>
-            <a:effectRef idx="1">
+            <a:effectLst/>
+          </p:spPr>
+          <p:style>
+            <a:lnRef idx="2">
+              <a:schemeClr val="accent1"/>
+            </a:lnRef>
+            <a:fillRef idx="0">
+              <a:schemeClr val="accent1"/>
+            </a:fillRef>
+            <a:effectRef idx="0">
               <a:schemeClr val="accent1"/>
             </a:effectRef>
             <a:fontRef idx="minor">
@@ -11946,15 +12167,16 @@
                 <a:srgbClr val="8FBFBF"/>
               </a:solidFill>
             </a:ln>
-          </p:spPr>
-          <p:style>
-            <a:lnRef idx="2">
-              <a:schemeClr val="accent1"/>
-            </a:lnRef>
-            <a:fillRef idx="0">
-              <a:schemeClr val="accent1"/>
-            </a:fillRef>
-            <a:effectRef idx="1">
+            <a:effectLst/>
+          </p:spPr>
+          <p:style>
+            <a:lnRef idx="2">
+              <a:schemeClr val="accent1"/>
+            </a:lnRef>
+            <a:fillRef idx="0">
+              <a:schemeClr val="accent1"/>
+            </a:fillRef>
+            <a:effectRef idx="0">
               <a:schemeClr val="accent1"/>
             </a:effectRef>
             <a:fontRef idx="minor">
@@ -11981,15 +12203,16 @@
                 <a:srgbClr val="8FBFBF"/>
               </a:solidFill>
             </a:ln>
-          </p:spPr>
-          <p:style>
-            <a:lnRef idx="2">
-              <a:schemeClr val="accent1"/>
-            </a:lnRef>
-            <a:fillRef idx="0">
-              <a:schemeClr val="accent1"/>
-            </a:fillRef>
-            <a:effectRef idx="1">
+            <a:effectLst/>
+          </p:spPr>
+          <p:style>
+            <a:lnRef idx="2">
+              <a:schemeClr val="accent1"/>
+            </a:lnRef>
+            <a:fillRef idx="0">
+              <a:schemeClr val="accent1"/>
+            </a:fillRef>
+            <a:effectRef idx="0">
               <a:schemeClr val="accent1"/>
             </a:effectRef>
             <a:fontRef idx="minor">
@@ -12016,15 +12239,16 @@
                 <a:srgbClr val="8FBFBF"/>
               </a:solidFill>
             </a:ln>
-          </p:spPr>
-          <p:style>
-            <a:lnRef idx="2">
-              <a:schemeClr val="accent1"/>
-            </a:lnRef>
-            <a:fillRef idx="0">
-              <a:schemeClr val="accent1"/>
-            </a:fillRef>
-            <a:effectRef idx="1">
+            <a:effectLst/>
+          </p:spPr>
+          <p:style>
+            <a:lnRef idx="2">
+              <a:schemeClr val="accent1"/>
+            </a:lnRef>
+            <a:fillRef idx="0">
+              <a:schemeClr val="accent1"/>
+            </a:fillRef>
+            <a:effectRef idx="0">
               <a:schemeClr val="accent1"/>
             </a:effectRef>
             <a:fontRef idx="minor">
@@ -12051,15 +12275,16 @@
                 <a:srgbClr val="8FBFBF"/>
               </a:solidFill>
             </a:ln>
-          </p:spPr>
-          <p:style>
-            <a:lnRef idx="2">
-              <a:schemeClr val="accent1"/>
-            </a:lnRef>
-            <a:fillRef idx="0">
-              <a:schemeClr val="accent1"/>
-            </a:fillRef>
-            <a:effectRef idx="1">
+            <a:effectLst/>
+          </p:spPr>
+          <p:style>
+            <a:lnRef idx="2">
+              <a:schemeClr val="accent1"/>
+            </a:lnRef>
+            <a:fillRef idx="0">
+              <a:schemeClr val="accent1"/>
+            </a:fillRef>
+            <a:effectRef idx="0">
               <a:schemeClr val="accent1"/>
             </a:effectRef>
             <a:fontRef idx="minor">
@@ -12086,15 +12311,16 @@
                 <a:srgbClr val="8FBFBF"/>
               </a:solidFill>
             </a:ln>
-          </p:spPr>
-          <p:style>
-            <a:lnRef idx="2">
-              <a:schemeClr val="accent1"/>
-            </a:lnRef>
-            <a:fillRef idx="0">
-              <a:schemeClr val="accent1"/>
-            </a:fillRef>
-            <a:effectRef idx="1">
+            <a:effectLst/>
+          </p:spPr>
+          <p:style>
+            <a:lnRef idx="2">
+              <a:schemeClr val="accent1"/>
+            </a:lnRef>
+            <a:fillRef idx="0">
+              <a:schemeClr val="accent1"/>
+            </a:fillRef>
+            <a:effectRef idx="0">
               <a:schemeClr val="accent1"/>
             </a:effectRef>
             <a:fontRef idx="minor">
@@ -12121,15 +12347,16 @@
                 <a:srgbClr val="8FBFBF"/>
               </a:solidFill>
             </a:ln>
-          </p:spPr>
-          <p:style>
-            <a:lnRef idx="2">
-              <a:schemeClr val="accent1"/>
-            </a:lnRef>
-            <a:fillRef idx="0">
-              <a:schemeClr val="accent1"/>
-            </a:fillRef>
-            <a:effectRef idx="1">
+            <a:effectLst/>
+          </p:spPr>
+          <p:style>
+            <a:lnRef idx="2">
+              <a:schemeClr val="accent1"/>
+            </a:lnRef>
+            <a:fillRef idx="0">
+              <a:schemeClr val="accent1"/>
+            </a:fillRef>
+            <a:effectRef idx="0">
               <a:schemeClr val="accent1"/>
             </a:effectRef>
             <a:fontRef idx="minor">
@@ -12156,15 +12383,16 @@
                 <a:srgbClr val="8FBFBF"/>
               </a:solidFill>
             </a:ln>
-          </p:spPr>
-          <p:style>
-            <a:lnRef idx="2">
-              <a:schemeClr val="accent1"/>
-            </a:lnRef>
-            <a:fillRef idx="0">
-              <a:schemeClr val="accent1"/>
-            </a:fillRef>
-            <a:effectRef idx="1">
+            <a:effectLst/>
+          </p:spPr>
+          <p:style>
+            <a:lnRef idx="2">
+              <a:schemeClr val="accent1"/>
+            </a:lnRef>
+            <a:fillRef idx="0">
+              <a:schemeClr val="accent1"/>
+            </a:fillRef>
+            <a:effectRef idx="0">
               <a:schemeClr val="accent1"/>
             </a:effectRef>
             <a:fontRef idx="minor">
@@ -12191,15 +12419,16 @@
                 <a:srgbClr val="8FBFBF"/>
               </a:solidFill>
             </a:ln>
-          </p:spPr>
-          <p:style>
-            <a:lnRef idx="2">
-              <a:schemeClr val="accent1"/>
-            </a:lnRef>
-            <a:fillRef idx="0">
-              <a:schemeClr val="accent1"/>
-            </a:fillRef>
-            <a:effectRef idx="1">
+            <a:effectLst/>
+          </p:spPr>
+          <p:style>
+            <a:lnRef idx="2">
+              <a:schemeClr val="accent1"/>
+            </a:lnRef>
+            <a:fillRef idx="0">
+              <a:schemeClr val="accent1"/>
+            </a:fillRef>
+            <a:effectRef idx="0">
               <a:schemeClr val="accent1"/>
             </a:effectRef>
             <a:fontRef idx="minor">
@@ -12226,15 +12455,16 @@
                 <a:srgbClr val="8FBFBF"/>
               </a:solidFill>
             </a:ln>
-          </p:spPr>
-          <p:style>
-            <a:lnRef idx="2">
-              <a:schemeClr val="accent1"/>
-            </a:lnRef>
-            <a:fillRef idx="0">
-              <a:schemeClr val="accent1"/>
-            </a:fillRef>
-            <a:effectRef idx="1">
+            <a:effectLst/>
+          </p:spPr>
+          <p:style>
+            <a:lnRef idx="2">
+              <a:schemeClr val="accent1"/>
+            </a:lnRef>
+            <a:fillRef idx="0">
+              <a:schemeClr val="accent1"/>
+            </a:fillRef>
+            <a:effectRef idx="0">
               <a:schemeClr val="accent1"/>
             </a:effectRef>
             <a:fontRef idx="minor">
@@ -12261,15 +12491,16 @@
                 <a:srgbClr val="8FBFBF"/>
               </a:solidFill>
             </a:ln>
-          </p:spPr>
-          <p:style>
-            <a:lnRef idx="2">
-              <a:schemeClr val="accent1"/>
-            </a:lnRef>
-            <a:fillRef idx="0">
-              <a:schemeClr val="accent1"/>
-            </a:fillRef>
-            <a:effectRef idx="1">
+            <a:effectLst/>
+          </p:spPr>
+          <p:style>
+            <a:lnRef idx="2">
+              <a:schemeClr val="accent1"/>
+            </a:lnRef>
+            <a:fillRef idx="0">
+              <a:schemeClr val="accent1"/>
+            </a:fillRef>
+            <a:effectRef idx="0">
               <a:schemeClr val="accent1"/>
             </a:effectRef>
             <a:fontRef idx="minor">
@@ -12321,7 +12552,7 @@
             <a:fillRef idx="3">
               <a:schemeClr val="accent1"/>
             </a:fillRef>
-            <a:effectRef idx="2">
+            <a:effectRef idx="0">
               <a:schemeClr val="accent1"/>
             </a:effectRef>
             <a:fontRef idx="minor">
@@ -12355,15 +12586,16 @@
                 <a:srgbClr val="8FBFBF"/>
               </a:solidFill>
             </a:ln>
-          </p:spPr>
-          <p:style>
-            <a:lnRef idx="2">
-              <a:schemeClr val="accent1"/>
-            </a:lnRef>
-            <a:fillRef idx="0">
-              <a:schemeClr val="accent1"/>
-            </a:fillRef>
-            <a:effectRef idx="1">
+            <a:effectLst/>
+          </p:spPr>
+          <p:style>
+            <a:lnRef idx="2">
+              <a:schemeClr val="accent1"/>
+            </a:lnRef>
+            <a:fillRef idx="0">
+              <a:schemeClr val="accent1"/>
+            </a:fillRef>
+            <a:effectRef idx="0">
               <a:schemeClr val="accent1"/>
             </a:effectRef>
             <a:fontRef idx="minor">
@@ -12390,15 +12622,16 @@
                 <a:srgbClr val="8FBFBF"/>
               </a:solidFill>
             </a:ln>
-          </p:spPr>
-          <p:style>
-            <a:lnRef idx="2">
-              <a:schemeClr val="accent1"/>
-            </a:lnRef>
-            <a:fillRef idx="0">
-              <a:schemeClr val="accent1"/>
-            </a:fillRef>
-            <a:effectRef idx="1">
+            <a:effectLst/>
+          </p:spPr>
+          <p:style>
+            <a:lnRef idx="2">
+              <a:schemeClr val="accent1"/>
+            </a:lnRef>
+            <a:fillRef idx="0">
+              <a:schemeClr val="accent1"/>
+            </a:fillRef>
+            <a:effectRef idx="0">
               <a:schemeClr val="accent1"/>
             </a:effectRef>
             <a:fontRef idx="minor">
@@ -12425,15 +12658,16 @@
                 <a:srgbClr val="8FBFBF"/>
               </a:solidFill>
             </a:ln>
-          </p:spPr>
-          <p:style>
-            <a:lnRef idx="2">
-              <a:schemeClr val="accent1"/>
-            </a:lnRef>
-            <a:fillRef idx="0">
-              <a:schemeClr val="accent1"/>
-            </a:fillRef>
-            <a:effectRef idx="1">
+            <a:effectLst/>
+          </p:spPr>
+          <p:style>
+            <a:lnRef idx="2">
+              <a:schemeClr val="accent1"/>
+            </a:lnRef>
+            <a:fillRef idx="0">
+              <a:schemeClr val="accent1"/>
+            </a:fillRef>
+            <a:effectRef idx="0">
               <a:schemeClr val="accent1"/>
             </a:effectRef>
             <a:fontRef idx="minor">
@@ -12460,15 +12694,16 @@
                 <a:srgbClr val="8FBFBF"/>
               </a:solidFill>
             </a:ln>
-          </p:spPr>
-          <p:style>
-            <a:lnRef idx="2">
-              <a:schemeClr val="accent1"/>
-            </a:lnRef>
-            <a:fillRef idx="0">
-              <a:schemeClr val="accent1"/>
-            </a:fillRef>
-            <a:effectRef idx="1">
+            <a:effectLst/>
+          </p:spPr>
+          <p:style>
+            <a:lnRef idx="2">
+              <a:schemeClr val="accent1"/>
+            </a:lnRef>
+            <a:fillRef idx="0">
+              <a:schemeClr val="accent1"/>
+            </a:fillRef>
+            <a:effectRef idx="0">
               <a:schemeClr val="accent1"/>
             </a:effectRef>
             <a:fontRef idx="minor">
@@ -12495,15 +12730,16 @@
                 <a:srgbClr val="8FBFBF"/>
               </a:solidFill>
             </a:ln>
-          </p:spPr>
-          <p:style>
-            <a:lnRef idx="2">
-              <a:schemeClr val="accent1"/>
-            </a:lnRef>
-            <a:fillRef idx="0">
-              <a:schemeClr val="accent1"/>
-            </a:fillRef>
-            <a:effectRef idx="1">
+            <a:effectLst/>
+          </p:spPr>
+          <p:style>
+            <a:lnRef idx="2">
+              <a:schemeClr val="accent1"/>
+            </a:lnRef>
+            <a:fillRef idx="0">
+              <a:schemeClr val="accent1"/>
+            </a:fillRef>
+            <a:effectRef idx="0">
               <a:schemeClr val="accent1"/>
             </a:effectRef>
             <a:fontRef idx="minor">
@@ -12530,15 +12766,16 @@
                 <a:srgbClr val="8FBFBF"/>
               </a:solidFill>
             </a:ln>
-          </p:spPr>
-          <p:style>
-            <a:lnRef idx="2">
-              <a:schemeClr val="accent1"/>
-            </a:lnRef>
-            <a:fillRef idx="0">
-              <a:schemeClr val="accent1"/>
-            </a:fillRef>
-            <a:effectRef idx="1">
+            <a:effectLst/>
+          </p:spPr>
+          <p:style>
+            <a:lnRef idx="2">
+              <a:schemeClr val="accent1"/>
+            </a:lnRef>
+            <a:fillRef idx="0">
+              <a:schemeClr val="accent1"/>
+            </a:fillRef>
+            <a:effectRef idx="0">
               <a:schemeClr val="accent1"/>
             </a:effectRef>
             <a:fontRef idx="minor">
@@ -12565,15 +12802,16 @@
                 <a:srgbClr val="8FBFBF"/>
               </a:solidFill>
             </a:ln>
-          </p:spPr>
-          <p:style>
-            <a:lnRef idx="2">
-              <a:schemeClr val="accent1"/>
-            </a:lnRef>
-            <a:fillRef idx="0">
-              <a:schemeClr val="accent1"/>
-            </a:fillRef>
-            <a:effectRef idx="1">
+            <a:effectLst/>
+          </p:spPr>
+          <p:style>
+            <a:lnRef idx="2">
+              <a:schemeClr val="accent1"/>
+            </a:lnRef>
+            <a:fillRef idx="0">
+              <a:schemeClr val="accent1"/>
+            </a:fillRef>
+            <a:effectRef idx="0">
               <a:schemeClr val="accent1"/>
             </a:effectRef>
             <a:fontRef idx="minor">
@@ -12600,15 +12838,16 @@
                 <a:srgbClr val="8FBFBF"/>
               </a:solidFill>
             </a:ln>
-          </p:spPr>
-          <p:style>
-            <a:lnRef idx="2">
-              <a:schemeClr val="accent1"/>
-            </a:lnRef>
-            <a:fillRef idx="0">
-              <a:schemeClr val="accent1"/>
-            </a:fillRef>
-            <a:effectRef idx="1">
+            <a:effectLst/>
+          </p:spPr>
+          <p:style>
+            <a:lnRef idx="2">
+              <a:schemeClr val="accent1"/>
+            </a:lnRef>
+            <a:fillRef idx="0">
+              <a:schemeClr val="accent1"/>
+            </a:fillRef>
+            <a:effectRef idx="0">
               <a:schemeClr val="accent1"/>
             </a:effectRef>
             <a:fontRef idx="minor">
@@ -12635,15 +12874,16 @@
                 <a:srgbClr val="8FBFBF"/>
               </a:solidFill>
             </a:ln>
-          </p:spPr>
-          <p:style>
-            <a:lnRef idx="2">
-              <a:schemeClr val="accent1"/>
-            </a:lnRef>
-            <a:fillRef idx="0">
-              <a:schemeClr val="accent1"/>
-            </a:fillRef>
-            <a:effectRef idx="1">
+            <a:effectLst/>
+          </p:spPr>
+          <p:style>
+            <a:lnRef idx="2">
+              <a:schemeClr val="accent1"/>
+            </a:lnRef>
+            <a:fillRef idx="0">
+              <a:schemeClr val="accent1"/>
+            </a:fillRef>
+            <a:effectRef idx="0">
               <a:schemeClr val="accent1"/>
             </a:effectRef>
             <a:fontRef idx="minor">
@@ -12670,15 +12910,16 @@
                 <a:srgbClr val="8FBFBF"/>
               </a:solidFill>
             </a:ln>
-          </p:spPr>
-          <p:style>
-            <a:lnRef idx="2">
-              <a:schemeClr val="accent1"/>
-            </a:lnRef>
-            <a:fillRef idx="0">
-              <a:schemeClr val="accent1"/>
-            </a:fillRef>
-            <a:effectRef idx="1">
+            <a:effectLst/>
+          </p:spPr>
+          <p:style>
+            <a:lnRef idx="2">
+              <a:schemeClr val="accent1"/>
+            </a:lnRef>
+            <a:fillRef idx="0">
+              <a:schemeClr val="accent1"/>
+            </a:fillRef>
+            <a:effectRef idx="0">
               <a:schemeClr val="accent1"/>
             </a:effectRef>
             <a:fontRef idx="minor">
@@ -12705,15 +12946,16 @@
                 <a:srgbClr val="8FBFBF"/>
               </a:solidFill>
             </a:ln>
-          </p:spPr>
-          <p:style>
-            <a:lnRef idx="2">
-              <a:schemeClr val="accent1"/>
-            </a:lnRef>
-            <a:fillRef idx="0">
-              <a:schemeClr val="accent1"/>
-            </a:fillRef>
-            <a:effectRef idx="1">
+            <a:effectLst/>
+          </p:spPr>
+          <p:style>
+            <a:lnRef idx="2">
+              <a:schemeClr val="accent1"/>
+            </a:lnRef>
+            <a:fillRef idx="0">
+              <a:schemeClr val="accent1"/>
+            </a:fillRef>
+            <a:effectRef idx="0">
               <a:schemeClr val="accent1"/>
             </a:effectRef>
             <a:fontRef idx="minor">
@@ -12740,15 +12982,16 @@
                 <a:srgbClr val="8FBFBF"/>
               </a:solidFill>
             </a:ln>
-          </p:spPr>
-          <p:style>
-            <a:lnRef idx="2">
-              <a:schemeClr val="accent1"/>
-            </a:lnRef>
-            <a:fillRef idx="0">
-              <a:schemeClr val="accent1"/>
-            </a:fillRef>
-            <a:effectRef idx="1">
+            <a:effectLst/>
+          </p:spPr>
+          <p:style>
+            <a:lnRef idx="2">
+              <a:schemeClr val="accent1"/>
+            </a:lnRef>
+            <a:fillRef idx="0">
+              <a:schemeClr val="accent1"/>
+            </a:fillRef>
+            <a:effectRef idx="0">
               <a:schemeClr val="accent1"/>
             </a:effectRef>
             <a:fontRef idx="minor">
@@ -12775,15 +13018,16 @@
                 <a:srgbClr val="8FBFBF"/>
               </a:solidFill>
             </a:ln>
-          </p:spPr>
-          <p:style>
-            <a:lnRef idx="2">
-              <a:schemeClr val="accent1"/>
-            </a:lnRef>
-            <a:fillRef idx="0">
-              <a:schemeClr val="accent1"/>
-            </a:fillRef>
-            <a:effectRef idx="1">
+            <a:effectLst/>
+          </p:spPr>
+          <p:style>
+            <a:lnRef idx="2">
+              <a:schemeClr val="accent1"/>
+            </a:lnRef>
+            <a:fillRef idx="0">
+              <a:schemeClr val="accent1"/>
+            </a:fillRef>
+            <a:effectRef idx="0">
               <a:schemeClr val="accent1"/>
             </a:effectRef>
             <a:fontRef idx="minor">
@@ -12810,15 +13054,16 @@
                 <a:srgbClr val="8FBFBF"/>
               </a:solidFill>
             </a:ln>
-          </p:spPr>
-          <p:style>
-            <a:lnRef idx="2">
-              <a:schemeClr val="accent1"/>
-            </a:lnRef>
-            <a:fillRef idx="0">
-              <a:schemeClr val="accent1"/>
-            </a:fillRef>
-            <a:effectRef idx="1">
+            <a:effectLst/>
+          </p:spPr>
+          <p:style>
+            <a:lnRef idx="2">
+              <a:schemeClr val="accent1"/>
+            </a:lnRef>
+            <a:fillRef idx="0">
+              <a:schemeClr val="accent1"/>
+            </a:fillRef>
+            <a:effectRef idx="0">
               <a:schemeClr val="accent1"/>
             </a:effectRef>
             <a:fontRef idx="minor">
@@ -12845,15 +13090,16 @@
                 <a:srgbClr val="8FBFBF"/>
               </a:solidFill>
             </a:ln>
-          </p:spPr>
-          <p:style>
-            <a:lnRef idx="2">
-              <a:schemeClr val="accent1"/>
-            </a:lnRef>
-            <a:fillRef idx="0">
-              <a:schemeClr val="accent1"/>
-            </a:fillRef>
-            <a:effectRef idx="1">
+            <a:effectLst/>
+          </p:spPr>
+          <p:style>
+            <a:lnRef idx="2">
+              <a:schemeClr val="accent1"/>
+            </a:lnRef>
+            <a:fillRef idx="0">
+              <a:schemeClr val="accent1"/>
+            </a:fillRef>
+            <a:effectRef idx="0">
               <a:schemeClr val="accent1"/>
             </a:effectRef>
             <a:fontRef idx="minor">
@@ -12880,15 +13126,16 @@
                 <a:srgbClr val="8FBFBF"/>
               </a:solidFill>
             </a:ln>
-          </p:spPr>
-          <p:style>
-            <a:lnRef idx="2">
-              <a:schemeClr val="accent1"/>
-            </a:lnRef>
-            <a:fillRef idx="0">
-              <a:schemeClr val="accent1"/>
-            </a:fillRef>
-            <a:effectRef idx="1">
+            <a:effectLst/>
+          </p:spPr>
+          <p:style>
+            <a:lnRef idx="2">
+              <a:schemeClr val="accent1"/>
+            </a:lnRef>
+            <a:fillRef idx="0">
+              <a:schemeClr val="accent1"/>
+            </a:fillRef>
+            <a:effectRef idx="0">
               <a:schemeClr val="accent1"/>
             </a:effectRef>
             <a:fontRef idx="minor">
@@ -12915,15 +13162,16 @@
                 <a:srgbClr val="8FBFBF"/>
               </a:solidFill>
             </a:ln>
-          </p:spPr>
-          <p:style>
-            <a:lnRef idx="2">
-              <a:schemeClr val="accent1"/>
-            </a:lnRef>
-            <a:fillRef idx="0">
-              <a:schemeClr val="accent1"/>
-            </a:fillRef>
-            <a:effectRef idx="1">
+            <a:effectLst/>
+          </p:spPr>
+          <p:style>
+            <a:lnRef idx="2">
+              <a:schemeClr val="accent1"/>
+            </a:lnRef>
+            <a:fillRef idx="0">
+              <a:schemeClr val="accent1"/>
+            </a:fillRef>
+            <a:effectRef idx="0">
               <a:schemeClr val="accent1"/>
             </a:effectRef>
             <a:fontRef idx="minor">
@@ -12950,15 +13198,16 @@
                 <a:srgbClr val="8FBFBF"/>
               </a:solidFill>
             </a:ln>
-          </p:spPr>
-          <p:style>
-            <a:lnRef idx="2">
-              <a:schemeClr val="accent1"/>
-            </a:lnRef>
-            <a:fillRef idx="0">
-              <a:schemeClr val="accent1"/>
-            </a:fillRef>
-            <a:effectRef idx="1">
+            <a:effectLst/>
+          </p:spPr>
+          <p:style>
+            <a:lnRef idx="2">
+              <a:schemeClr val="accent1"/>
+            </a:lnRef>
+            <a:fillRef idx="0">
+              <a:schemeClr val="accent1"/>
+            </a:fillRef>
+            <a:effectRef idx="0">
               <a:schemeClr val="accent1"/>
             </a:effectRef>
             <a:fontRef idx="minor">
@@ -12985,15 +13234,16 @@
                 <a:srgbClr val="8FBFBF"/>
               </a:solidFill>
             </a:ln>
-          </p:spPr>
-          <p:style>
-            <a:lnRef idx="2">
-              <a:schemeClr val="accent1"/>
-            </a:lnRef>
-            <a:fillRef idx="0">
-              <a:schemeClr val="accent1"/>
-            </a:fillRef>
-            <a:effectRef idx="1">
+            <a:effectLst/>
+          </p:spPr>
+          <p:style>
+            <a:lnRef idx="2">
+              <a:schemeClr val="accent1"/>
+            </a:lnRef>
+            <a:fillRef idx="0">
+              <a:schemeClr val="accent1"/>
+            </a:fillRef>
+            <a:effectRef idx="0">
               <a:schemeClr val="accent1"/>
             </a:effectRef>
             <a:fontRef idx="minor">
@@ -13020,15 +13270,16 @@
                 <a:srgbClr val="8FBFBF"/>
               </a:solidFill>
             </a:ln>
-          </p:spPr>
-          <p:style>
-            <a:lnRef idx="2">
-              <a:schemeClr val="accent1"/>
-            </a:lnRef>
-            <a:fillRef idx="0">
-              <a:schemeClr val="accent1"/>
-            </a:fillRef>
-            <a:effectRef idx="1">
+            <a:effectLst/>
+          </p:spPr>
+          <p:style>
+            <a:lnRef idx="2">
+              <a:schemeClr val="accent1"/>
+            </a:lnRef>
+            <a:fillRef idx="0">
+              <a:schemeClr val="accent1"/>
+            </a:fillRef>
+            <a:effectRef idx="0">
               <a:schemeClr val="accent1"/>
             </a:effectRef>
             <a:fontRef idx="minor">
@@ -13055,15 +13306,16 @@
                 <a:srgbClr val="8FBFBF"/>
               </a:solidFill>
             </a:ln>
-          </p:spPr>
-          <p:style>
-            <a:lnRef idx="2">
-              <a:schemeClr val="accent1"/>
-            </a:lnRef>
-            <a:fillRef idx="0">
-              <a:schemeClr val="accent1"/>
-            </a:fillRef>
-            <a:effectRef idx="1">
+            <a:effectLst/>
+          </p:spPr>
+          <p:style>
+            <a:lnRef idx="2">
+              <a:schemeClr val="accent1"/>
+            </a:lnRef>
+            <a:fillRef idx="0">
+              <a:schemeClr val="accent1"/>
+            </a:fillRef>
+            <a:effectRef idx="0">
               <a:schemeClr val="accent1"/>
             </a:effectRef>
             <a:fontRef idx="minor">
@@ -13090,15 +13342,16 @@
                 <a:srgbClr val="8FBFBF"/>
               </a:solidFill>
             </a:ln>
-          </p:spPr>
-          <p:style>
-            <a:lnRef idx="2">
-              <a:schemeClr val="accent1"/>
-            </a:lnRef>
-            <a:fillRef idx="0">
-              <a:schemeClr val="accent1"/>
-            </a:fillRef>
-            <a:effectRef idx="1">
+            <a:effectLst/>
+          </p:spPr>
+          <p:style>
+            <a:lnRef idx="2">
+              <a:schemeClr val="accent1"/>
+            </a:lnRef>
+            <a:fillRef idx="0">
+              <a:schemeClr val="accent1"/>
+            </a:fillRef>
+            <a:effectRef idx="0">
               <a:schemeClr val="accent1"/>
             </a:effectRef>
             <a:fontRef idx="minor">
@@ -13125,15 +13378,16 @@
                 <a:srgbClr val="8FBFBF"/>
               </a:solidFill>
             </a:ln>
-          </p:spPr>
-          <p:style>
-            <a:lnRef idx="2">
-              <a:schemeClr val="accent1"/>
-            </a:lnRef>
-            <a:fillRef idx="0">
-              <a:schemeClr val="accent1"/>
-            </a:fillRef>
-            <a:effectRef idx="1">
+            <a:effectLst/>
+          </p:spPr>
+          <p:style>
+            <a:lnRef idx="2">
+              <a:schemeClr val="accent1"/>
+            </a:lnRef>
+            <a:fillRef idx="0">
+              <a:schemeClr val="accent1"/>
+            </a:fillRef>
+            <a:effectRef idx="0">
               <a:schemeClr val="accent1"/>
             </a:effectRef>
             <a:fontRef idx="minor">
@@ -13185,7 +13439,7 @@
             <a:fillRef idx="3">
               <a:schemeClr val="accent1"/>
             </a:fillRef>
-            <a:effectRef idx="2">
+            <a:effectRef idx="0">
               <a:schemeClr val="accent1"/>
             </a:effectRef>
             <a:fontRef idx="minor">
@@ -13219,15 +13473,16 @@
                 <a:srgbClr val="8FBFBF"/>
               </a:solidFill>
             </a:ln>
-          </p:spPr>
-          <p:style>
-            <a:lnRef idx="2">
-              <a:schemeClr val="accent1"/>
-            </a:lnRef>
-            <a:fillRef idx="0">
-              <a:schemeClr val="accent1"/>
-            </a:fillRef>
-            <a:effectRef idx="1">
+            <a:effectLst/>
+          </p:spPr>
+          <p:style>
+            <a:lnRef idx="2">
+              <a:schemeClr val="accent1"/>
+            </a:lnRef>
+            <a:fillRef idx="0">
+              <a:schemeClr val="accent1"/>
+            </a:fillRef>
+            <a:effectRef idx="0">
               <a:schemeClr val="accent1"/>
             </a:effectRef>
             <a:fontRef idx="minor">
@@ -13254,15 +13509,16 @@
                 <a:srgbClr val="8FBFBF"/>
               </a:solidFill>
             </a:ln>
-          </p:spPr>
-          <p:style>
-            <a:lnRef idx="2">
-              <a:schemeClr val="accent1"/>
-            </a:lnRef>
-            <a:fillRef idx="0">
-              <a:schemeClr val="accent1"/>
-            </a:fillRef>
-            <a:effectRef idx="1">
+            <a:effectLst/>
+          </p:spPr>
+          <p:style>
+            <a:lnRef idx="2">
+              <a:schemeClr val="accent1"/>
+            </a:lnRef>
+            <a:fillRef idx="0">
+              <a:schemeClr val="accent1"/>
+            </a:fillRef>
+            <a:effectRef idx="0">
               <a:schemeClr val="accent1"/>
             </a:effectRef>
             <a:fontRef idx="minor">
@@ -13289,15 +13545,16 @@
                 <a:srgbClr val="8FBFBF"/>
               </a:solidFill>
             </a:ln>
-          </p:spPr>
-          <p:style>
-            <a:lnRef idx="2">
-              <a:schemeClr val="accent1"/>
-            </a:lnRef>
-            <a:fillRef idx="0">
-              <a:schemeClr val="accent1"/>
-            </a:fillRef>
-            <a:effectRef idx="1">
+            <a:effectLst/>
+          </p:spPr>
+          <p:style>
+            <a:lnRef idx="2">
+              <a:schemeClr val="accent1"/>
+            </a:lnRef>
+            <a:fillRef idx="0">
+              <a:schemeClr val="accent1"/>
+            </a:fillRef>
+            <a:effectRef idx="0">
               <a:schemeClr val="accent1"/>
             </a:effectRef>
             <a:fontRef idx="minor">
@@ -13324,15 +13581,16 @@
                 <a:srgbClr val="8FBFBF"/>
               </a:solidFill>
             </a:ln>
-          </p:spPr>
-          <p:style>
-            <a:lnRef idx="2">
-              <a:schemeClr val="accent1"/>
-            </a:lnRef>
-            <a:fillRef idx="0">
-              <a:schemeClr val="accent1"/>
-            </a:fillRef>
-            <a:effectRef idx="1">
+            <a:effectLst/>
+          </p:spPr>
+          <p:style>
+            <a:lnRef idx="2">
+              <a:schemeClr val="accent1"/>
+            </a:lnRef>
+            <a:fillRef idx="0">
+              <a:schemeClr val="accent1"/>
+            </a:fillRef>
+            <a:effectRef idx="0">
               <a:schemeClr val="accent1"/>
             </a:effectRef>
             <a:fontRef idx="minor">
@@ -13359,15 +13617,16 @@
                 <a:srgbClr val="8FBFBF"/>
               </a:solidFill>
             </a:ln>
-          </p:spPr>
-          <p:style>
-            <a:lnRef idx="2">
-              <a:schemeClr val="accent1"/>
-            </a:lnRef>
-            <a:fillRef idx="0">
-              <a:schemeClr val="accent1"/>
-            </a:fillRef>
-            <a:effectRef idx="1">
+            <a:effectLst/>
+          </p:spPr>
+          <p:style>
+            <a:lnRef idx="2">
+              <a:schemeClr val="accent1"/>
+            </a:lnRef>
+            <a:fillRef idx="0">
+              <a:schemeClr val="accent1"/>
+            </a:fillRef>
+            <a:effectRef idx="0">
               <a:schemeClr val="accent1"/>
             </a:effectRef>
             <a:fontRef idx="minor">
@@ -13394,15 +13653,16 @@
                 <a:srgbClr val="8FBFBF"/>
               </a:solidFill>
             </a:ln>
-          </p:spPr>
-          <p:style>
-            <a:lnRef idx="2">
-              <a:schemeClr val="accent1"/>
-            </a:lnRef>
-            <a:fillRef idx="0">
-              <a:schemeClr val="accent1"/>
-            </a:fillRef>
-            <a:effectRef idx="1">
+            <a:effectLst/>
+          </p:spPr>
+          <p:style>
+            <a:lnRef idx="2">
+              <a:schemeClr val="accent1"/>
+            </a:lnRef>
+            <a:fillRef idx="0">
+              <a:schemeClr val="accent1"/>
+            </a:fillRef>
+            <a:effectRef idx="0">
               <a:schemeClr val="accent1"/>
             </a:effectRef>
             <a:fontRef idx="minor">
@@ -13429,15 +13689,16 @@
                 <a:srgbClr val="8FBFBF"/>
               </a:solidFill>
             </a:ln>
-          </p:spPr>
-          <p:style>
-            <a:lnRef idx="2">
-              <a:schemeClr val="accent1"/>
-            </a:lnRef>
-            <a:fillRef idx="0">
-              <a:schemeClr val="accent1"/>
-            </a:fillRef>
-            <a:effectRef idx="1">
+            <a:effectLst/>
+          </p:spPr>
+          <p:style>
+            <a:lnRef idx="2">
+              <a:schemeClr val="accent1"/>
+            </a:lnRef>
+            <a:fillRef idx="0">
+              <a:schemeClr val="accent1"/>
+            </a:fillRef>
+            <a:effectRef idx="0">
               <a:schemeClr val="accent1"/>
             </a:effectRef>
             <a:fontRef idx="minor">
@@ -13464,15 +13725,16 @@
                 <a:srgbClr val="8FBFBF"/>
               </a:solidFill>
             </a:ln>
-          </p:spPr>
-          <p:style>
-            <a:lnRef idx="2">
-              <a:schemeClr val="accent1"/>
-            </a:lnRef>
-            <a:fillRef idx="0">
-              <a:schemeClr val="accent1"/>
-            </a:fillRef>
-            <a:effectRef idx="1">
+            <a:effectLst/>
+          </p:spPr>
+          <p:style>
+            <a:lnRef idx="2">
+              <a:schemeClr val="accent1"/>
+            </a:lnRef>
+            <a:fillRef idx="0">
+              <a:schemeClr val="accent1"/>
+            </a:fillRef>
+            <a:effectRef idx="0">
               <a:schemeClr val="accent1"/>
             </a:effectRef>
             <a:fontRef idx="minor">
@@ -13499,15 +13761,16 @@
                 <a:srgbClr val="8FBFBF"/>
               </a:solidFill>
             </a:ln>
-          </p:spPr>
-          <p:style>
-            <a:lnRef idx="2">
-              <a:schemeClr val="accent1"/>
-            </a:lnRef>
-            <a:fillRef idx="0">
-              <a:schemeClr val="accent1"/>
-            </a:fillRef>
-            <a:effectRef idx="1">
+            <a:effectLst/>
+          </p:spPr>
+          <p:style>
+            <a:lnRef idx="2">
+              <a:schemeClr val="accent1"/>
+            </a:lnRef>
+            <a:fillRef idx="0">
+              <a:schemeClr val="accent1"/>
+            </a:fillRef>
+            <a:effectRef idx="0">
               <a:schemeClr val="accent1"/>
             </a:effectRef>
             <a:fontRef idx="minor">
@@ -13534,15 +13797,16 @@
                 <a:srgbClr val="8FBFBF"/>
               </a:solidFill>
             </a:ln>
-          </p:spPr>
-          <p:style>
-            <a:lnRef idx="2">
-              <a:schemeClr val="accent1"/>
-            </a:lnRef>
-            <a:fillRef idx="0">
-              <a:schemeClr val="accent1"/>
-            </a:fillRef>
-            <a:effectRef idx="1">
+            <a:effectLst/>
+          </p:spPr>
+          <p:style>
+            <a:lnRef idx="2">
+              <a:schemeClr val="accent1"/>
+            </a:lnRef>
+            <a:fillRef idx="0">
+              <a:schemeClr val="accent1"/>
+            </a:fillRef>
+            <a:effectRef idx="0">
               <a:schemeClr val="accent1"/>
             </a:effectRef>
             <a:fontRef idx="minor">
@@ -13569,15 +13833,16 @@
                 <a:srgbClr val="8FBFBF"/>
               </a:solidFill>
             </a:ln>
-          </p:spPr>
-          <p:style>
-            <a:lnRef idx="2">
-              <a:schemeClr val="accent1"/>
-            </a:lnRef>
-            <a:fillRef idx="0">
-              <a:schemeClr val="accent1"/>
-            </a:fillRef>
-            <a:effectRef idx="1">
+            <a:effectLst/>
+          </p:spPr>
+          <p:style>
+            <a:lnRef idx="2">
+              <a:schemeClr val="accent1"/>
+            </a:lnRef>
+            <a:fillRef idx="0">
+              <a:schemeClr val="accent1"/>
+            </a:fillRef>
+            <a:effectRef idx="0">
               <a:schemeClr val="accent1"/>
             </a:effectRef>
             <a:fontRef idx="minor">
@@ -13604,15 +13869,16 @@
                 <a:srgbClr val="8FBFBF"/>
               </a:solidFill>
             </a:ln>
-          </p:spPr>
-          <p:style>
-            <a:lnRef idx="2">
-              <a:schemeClr val="accent1"/>
-            </a:lnRef>
-            <a:fillRef idx="0">
-              <a:schemeClr val="accent1"/>
-            </a:fillRef>
-            <a:effectRef idx="1">
+            <a:effectLst/>
+          </p:spPr>
+          <p:style>
+            <a:lnRef idx="2">
+              <a:schemeClr val="accent1"/>
+            </a:lnRef>
+            <a:fillRef idx="0">
+              <a:schemeClr val="accent1"/>
+            </a:fillRef>
+            <a:effectRef idx="0">
               <a:schemeClr val="accent1"/>
             </a:effectRef>
             <a:fontRef idx="minor">
@@ -13639,15 +13905,16 @@
                 <a:srgbClr val="8FBFBF"/>
               </a:solidFill>
             </a:ln>
-          </p:spPr>
-          <p:style>
-            <a:lnRef idx="2">
-              <a:schemeClr val="accent1"/>
-            </a:lnRef>
-            <a:fillRef idx="0">
-              <a:schemeClr val="accent1"/>
-            </a:fillRef>
-            <a:effectRef idx="1">
+            <a:effectLst/>
+          </p:spPr>
+          <p:style>
+            <a:lnRef idx="2">
+              <a:schemeClr val="accent1"/>
+            </a:lnRef>
+            <a:fillRef idx="0">
+              <a:schemeClr val="accent1"/>
+            </a:fillRef>
+            <a:effectRef idx="0">
               <a:schemeClr val="accent1"/>
             </a:effectRef>
             <a:fontRef idx="minor">
@@ -13674,15 +13941,16 @@
                 <a:srgbClr val="8FBFBF"/>
               </a:solidFill>
             </a:ln>
-          </p:spPr>
-          <p:style>
-            <a:lnRef idx="2">
-              <a:schemeClr val="accent1"/>
-            </a:lnRef>
-            <a:fillRef idx="0">
-              <a:schemeClr val="accent1"/>
-            </a:fillRef>
-            <a:effectRef idx="1">
+            <a:effectLst/>
+          </p:spPr>
+          <p:style>
+            <a:lnRef idx="2">
+              <a:schemeClr val="accent1"/>
+            </a:lnRef>
+            <a:fillRef idx="0">
+              <a:schemeClr val="accent1"/>
+            </a:fillRef>
+            <a:effectRef idx="0">
               <a:schemeClr val="accent1"/>
             </a:effectRef>
             <a:fontRef idx="minor">
@@ -13709,15 +13977,16 @@
                 <a:srgbClr val="8FBFBF"/>
               </a:solidFill>
             </a:ln>
-          </p:spPr>
-          <p:style>
-            <a:lnRef idx="2">
-              <a:schemeClr val="accent1"/>
-            </a:lnRef>
-            <a:fillRef idx="0">
-              <a:schemeClr val="accent1"/>
-            </a:fillRef>
-            <a:effectRef idx="1">
+            <a:effectLst/>
+          </p:spPr>
+          <p:style>
+            <a:lnRef idx="2">
+              <a:schemeClr val="accent1"/>
+            </a:lnRef>
+            <a:fillRef idx="0">
+              <a:schemeClr val="accent1"/>
+            </a:fillRef>
+            <a:effectRef idx="0">
               <a:schemeClr val="accent1"/>
             </a:effectRef>
             <a:fontRef idx="minor">
@@ -13744,15 +14013,16 @@
                 <a:srgbClr val="8FBFBF"/>
               </a:solidFill>
             </a:ln>
-          </p:spPr>
-          <p:style>
-            <a:lnRef idx="2">
-              <a:schemeClr val="accent1"/>
-            </a:lnRef>
-            <a:fillRef idx="0">
-              <a:schemeClr val="accent1"/>
-            </a:fillRef>
-            <a:effectRef idx="1">
+            <a:effectLst/>
+          </p:spPr>
+          <p:style>
+            <a:lnRef idx="2">
+              <a:schemeClr val="accent1"/>
+            </a:lnRef>
+            <a:fillRef idx="0">
+              <a:schemeClr val="accent1"/>
+            </a:fillRef>
+            <a:effectRef idx="0">
               <a:schemeClr val="accent1"/>
             </a:effectRef>
             <a:fontRef idx="minor">
@@ -13779,15 +14049,16 @@
                 <a:srgbClr val="8FBFBF"/>
               </a:solidFill>
             </a:ln>
-          </p:spPr>
-          <p:style>
-            <a:lnRef idx="2">
-              <a:schemeClr val="accent1"/>
-            </a:lnRef>
-            <a:fillRef idx="0">
-              <a:schemeClr val="accent1"/>
-            </a:fillRef>
-            <a:effectRef idx="1">
+            <a:effectLst/>
+          </p:spPr>
+          <p:style>
+            <a:lnRef idx="2">
+              <a:schemeClr val="accent1"/>
+            </a:lnRef>
+            <a:fillRef idx="0">
+              <a:schemeClr val="accent1"/>
+            </a:fillRef>
+            <a:effectRef idx="0">
               <a:schemeClr val="accent1"/>
             </a:effectRef>
             <a:fontRef idx="minor">
@@ -13814,15 +14085,16 @@
                 <a:srgbClr val="8FBFBF"/>
               </a:solidFill>
             </a:ln>
-          </p:spPr>
-          <p:style>
-            <a:lnRef idx="2">
-              <a:schemeClr val="accent1"/>
-            </a:lnRef>
-            <a:fillRef idx="0">
-              <a:schemeClr val="accent1"/>
-            </a:fillRef>
-            <a:effectRef idx="1">
+            <a:effectLst/>
+          </p:spPr>
+          <p:style>
+            <a:lnRef idx="2">
+              <a:schemeClr val="accent1"/>
+            </a:lnRef>
+            <a:fillRef idx="0">
+              <a:schemeClr val="accent1"/>
+            </a:fillRef>
+            <a:effectRef idx="0">
               <a:schemeClr val="accent1"/>
             </a:effectRef>
             <a:fontRef idx="minor">
@@ -13849,15 +14121,16 @@
                 <a:srgbClr val="8FBFBF"/>
               </a:solidFill>
             </a:ln>
-          </p:spPr>
-          <p:style>
-            <a:lnRef idx="2">
-              <a:schemeClr val="accent1"/>
-            </a:lnRef>
-            <a:fillRef idx="0">
-              <a:schemeClr val="accent1"/>
-            </a:fillRef>
-            <a:effectRef idx="1">
+            <a:effectLst/>
+          </p:spPr>
+          <p:style>
+            <a:lnRef idx="2">
+              <a:schemeClr val="accent1"/>
+            </a:lnRef>
+            <a:fillRef idx="0">
+              <a:schemeClr val="accent1"/>
+            </a:fillRef>
+            <a:effectRef idx="0">
               <a:schemeClr val="accent1"/>
             </a:effectRef>
             <a:fontRef idx="minor">
@@ -13884,15 +14157,16 @@
                 <a:srgbClr val="8FBFBF"/>
               </a:solidFill>
             </a:ln>
-          </p:spPr>
-          <p:style>
-            <a:lnRef idx="2">
-              <a:schemeClr val="accent1"/>
-            </a:lnRef>
-            <a:fillRef idx="0">
-              <a:schemeClr val="accent1"/>
-            </a:fillRef>
-            <a:effectRef idx="1">
+            <a:effectLst/>
+          </p:spPr>
+          <p:style>
+            <a:lnRef idx="2">
+              <a:schemeClr val="accent1"/>
+            </a:lnRef>
+            <a:fillRef idx="0">
+              <a:schemeClr val="accent1"/>
+            </a:fillRef>
+            <a:effectRef idx="0">
               <a:schemeClr val="accent1"/>
             </a:effectRef>
             <a:fontRef idx="minor">
@@ -13919,15 +14193,16 @@
                 <a:srgbClr val="8FBFBF"/>
               </a:solidFill>
             </a:ln>
-          </p:spPr>
-          <p:style>
-            <a:lnRef idx="2">
-              <a:schemeClr val="accent1"/>
-            </a:lnRef>
-            <a:fillRef idx="0">
-              <a:schemeClr val="accent1"/>
-            </a:fillRef>
-            <a:effectRef idx="1">
+            <a:effectLst/>
+          </p:spPr>
+          <p:style>
+            <a:lnRef idx="2">
+              <a:schemeClr val="accent1"/>
+            </a:lnRef>
+            <a:fillRef idx="0">
+              <a:schemeClr val="accent1"/>
+            </a:fillRef>
+            <a:effectRef idx="0">
               <a:schemeClr val="accent1"/>
             </a:effectRef>
             <a:fontRef idx="minor">
@@ -13954,15 +14229,16 @@
                 <a:srgbClr val="8FBFBF"/>
               </a:solidFill>
             </a:ln>
-          </p:spPr>
-          <p:style>
-            <a:lnRef idx="2">
-              <a:schemeClr val="accent1"/>
-            </a:lnRef>
-            <a:fillRef idx="0">
-              <a:schemeClr val="accent1"/>
-            </a:fillRef>
-            <a:effectRef idx="1">
+            <a:effectLst/>
+          </p:spPr>
+          <p:style>
+            <a:lnRef idx="2">
+              <a:schemeClr val="accent1"/>
+            </a:lnRef>
+            <a:fillRef idx="0">
+              <a:schemeClr val="accent1"/>
+            </a:fillRef>
+            <a:effectRef idx="0">
               <a:schemeClr val="accent1"/>
             </a:effectRef>
             <a:fontRef idx="minor">
@@ -13989,15 +14265,16 @@
                 <a:srgbClr val="8FBFBF"/>
               </a:solidFill>
             </a:ln>
-          </p:spPr>
-          <p:style>
-            <a:lnRef idx="2">
-              <a:schemeClr val="accent1"/>
-            </a:lnRef>
-            <a:fillRef idx="0">
-              <a:schemeClr val="accent1"/>
-            </a:fillRef>
-            <a:effectRef idx="1">
+            <a:effectLst/>
+          </p:spPr>
+          <p:style>
+            <a:lnRef idx="2">
+              <a:schemeClr val="accent1"/>
+            </a:lnRef>
+            <a:fillRef idx="0">
+              <a:schemeClr val="accent1"/>
+            </a:fillRef>
+            <a:effectRef idx="0">
               <a:schemeClr val="accent1"/>
             </a:effectRef>
             <a:fontRef idx="minor">
@@ -14049,7 +14326,7 @@
             <a:fillRef idx="3">
               <a:schemeClr val="accent1"/>
             </a:fillRef>
-            <a:effectRef idx="2">
+            <a:effectRef idx="0">
               <a:schemeClr val="accent1"/>
             </a:effectRef>
             <a:fontRef idx="minor">
@@ -14083,15 +14360,16 @@
                 <a:srgbClr val="8FBFBF"/>
               </a:solidFill>
             </a:ln>
-          </p:spPr>
-          <p:style>
-            <a:lnRef idx="2">
-              <a:schemeClr val="accent1"/>
-            </a:lnRef>
-            <a:fillRef idx="0">
-              <a:schemeClr val="accent1"/>
-            </a:fillRef>
-            <a:effectRef idx="1">
+            <a:effectLst/>
+          </p:spPr>
+          <p:style>
+            <a:lnRef idx="2">
+              <a:schemeClr val="accent1"/>
+            </a:lnRef>
+            <a:fillRef idx="0">
+              <a:schemeClr val="accent1"/>
+            </a:fillRef>
+            <a:effectRef idx="0">
               <a:schemeClr val="accent1"/>
             </a:effectRef>
             <a:fontRef idx="minor">
@@ -14118,15 +14396,16 @@
                 <a:srgbClr val="8FBFBF"/>
               </a:solidFill>
             </a:ln>
-          </p:spPr>
-          <p:style>
-            <a:lnRef idx="2">
-              <a:schemeClr val="accent1"/>
-            </a:lnRef>
-            <a:fillRef idx="0">
-              <a:schemeClr val="accent1"/>
-            </a:fillRef>
-            <a:effectRef idx="1">
+            <a:effectLst/>
+          </p:spPr>
+          <p:style>
+            <a:lnRef idx="2">
+              <a:schemeClr val="accent1"/>
+            </a:lnRef>
+            <a:fillRef idx="0">
+              <a:schemeClr val="accent1"/>
+            </a:fillRef>
+            <a:effectRef idx="0">
               <a:schemeClr val="accent1"/>
             </a:effectRef>
             <a:fontRef idx="minor">
@@ -14153,15 +14432,16 @@
                 <a:srgbClr val="8FBFBF"/>
               </a:solidFill>
             </a:ln>
-          </p:spPr>
-          <p:style>
-            <a:lnRef idx="2">
-              <a:schemeClr val="accent1"/>
-            </a:lnRef>
-            <a:fillRef idx="0">
-              <a:schemeClr val="accent1"/>
-            </a:fillRef>
-            <a:effectRef idx="1">
+            <a:effectLst/>
+          </p:spPr>
+          <p:style>
+            <a:lnRef idx="2">
+              <a:schemeClr val="accent1"/>
+            </a:lnRef>
+            <a:fillRef idx="0">
+              <a:schemeClr val="accent1"/>
+            </a:fillRef>
+            <a:effectRef idx="0">
               <a:schemeClr val="accent1"/>
             </a:effectRef>
             <a:fontRef idx="minor">
@@ -14188,15 +14468,16 @@
                 <a:srgbClr val="8FBFBF"/>
               </a:solidFill>
             </a:ln>
-          </p:spPr>
-          <p:style>
-            <a:lnRef idx="2">
-              <a:schemeClr val="accent1"/>
-            </a:lnRef>
-            <a:fillRef idx="0">
-              <a:schemeClr val="accent1"/>
-            </a:fillRef>
-            <a:effectRef idx="1">
+            <a:effectLst/>
+          </p:spPr>
+          <p:style>
+            <a:lnRef idx="2">
+              <a:schemeClr val="accent1"/>
+            </a:lnRef>
+            <a:fillRef idx="0">
+              <a:schemeClr val="accent1"/>
+            </a:fillRef>
+            <a:effectRef idx="0">
               <a:schemeClr val="accent1"/>
             </a:effectRef>
             <a:fontRef idx="minor">
@@ -14223,15 +14504,16 @@
                 <a:srgbClr val="8FBFBF"/>
               </a:solidFill>
             </a:ln>
-          </p:spPr>
-          <p:style>
-            <a:lnRef idx="2">
-              <a:schemeClr val="accent1"/>
-            </a:lnRef>
-            <a:fillRef idx="0">
-              <a:schemeClr val="accent1"/>
-            </a:fillRef>
-            <a:effectRef idx="1">
+            <a:effectLst/>
+          </p:spPr>
+          <p:style>
+            <a:lnRef idx="2">
+              <a:schemeClr val="accent1"/>
+            </a:lnRef>
+            <a:fillRef idx="0">
+              <a:schemeClr val="accent1"/>
+            </a:fillRef>
+            <a:effectRef idx="0">
               <a:schemeClr val="accent1"/>
             </a:effectRef>
             <a:fontRef idx="minor">
@@ -14258,15 +14540,16 @@
                 <a:srgbClr val="8FBFBF"/>
               </a:solidFill>
             </a:ln>
-          </p:spPr>
-          <p:style>
-            <a:lnRef idx="2">
-              <a:schemeClr val="accent1"/>
-            </a:lnRef>
-            <a:fillRef idx="0">
-              <a:schemeClr val="accent1"/>
-            </a:fillRef>
-            <a:effectRef idx="1">
+            <a:effectLst/>
+          </p:spPr>
+          <p:style>
+            <a:lnRef idx="2">
+              <a:schemeClr val="accent1"/>
+            </a:lnRef>
+            <a:fillRef idx="0">
+              <a:schemeClr val="accent1"/>
+            </a:fillRef>
+            <a:effectRef idx="0">
               <a:schemeClr val="accent1"/>
             </a:effectRef>
             <a:fontRef idx="minor">
@@ -14293,15 +14576,16 @@
                 <a:srgbClr val="8FBFBF"/>
               </a:solidFill>
             </a:ln>
-          </p:spPr>
-          <p:style>
-            <a:lnRef idx="2">
-              <a:schemeClr val="accent1"/>
-            </a:lnRef>
-            <a:fillRef idx="0">
-              <a:schemeClr val="accent1"/>
-            </a:fillRef>
-            <a:effectRef idx="1">
+            <a:effectLst/>
+          </p:spPr>
+          <p:style>
+            <a:lnRef idx="2">
+              <a:schemeClr val="accent1"/>
+            </a:lnRef>
+            <a:fillRef idx="0">
+              <a:schemeClr val="accent1"/>
+            </a:fillRef>
+            <a:effectRef idx="0">
               <a:schemeClr val="accent1"/>
             </a:effectRef>
             <a:fontRef idx="minor">
@@ -14328,15 +14612,16 @@
                 <a:srgbClr val="8FBFBF"/>
               </a:solidFill>
             </a:ln>
-          </p:spPr>
-          <p:style>
-            <a:lnRef idx="2">
-              <a:schemeClr val="accent1"/>
-            </a:lnRef>
-            <a:fillRef idx="0">
-              <a:schemeClr val="accent1"/>
-            </a:fillRef>
-            <a:effectRef idx="1">
+            <a:effectLst/>
+          </p:spPr>
+          <p:style>
+            <a:lnRef idx="2">
+              <a:schemeClr val="accent1"/>
+            </a:lnRef>
+            <a:fillRef idx="0">
+              <a:schemeClr val="accent1"/>
+            </a:fillRef>
+            <a:effectRef idx="0">
               <a:schemeClr val="accent1"/>
             </a:effectRef>
             <a:fontRef idx="minor">
@@ -14363,15 +14648,16 @@
                 <a:srgbClr val="8FBFBF"/>
               </a:solidFill>
             </a:ln>
-          </p:spPr>
-          <p:style>
-            <a:lnRef idx="2">
-              <a:schemeClr val="accent1"/>
-            </a:lnRef>
-            <a:fillRef idx="0">
-              <a:schemeClr val="accent1"/>
-            </a:fillRef>
-            <a:effectRef idx="1">
+            <a:effectLst/>
+          </p:spPr>
+          <p:style>
+            <a:lnRef idx="2">
+              <a:schemeClr val="accent1"/>
+            </a:lnRef>
+            <a:fillRef idx="0">
+              <a:schemeClr val="accent1"/>
+            </a:fillRef>
+            <a:effectRef idx="0">
               <a:schemeClr val="accent1"/>
             </a:effectRef>
             <a:fontRef idx="minor">
@@ -14398,15 +14684,16 @@
                 <a:srgbClr val="8FBFBF"/>
               </a:solidFill>
             </a:ln>
-          </p:spPr>
-          <p:style>
-            <a:lnRef idx="2">
-              <a:schemeClr val="accent1"/>
-            </a:lnRef>
-            <a:fillRef idx="0">
-              <a:schemeClr val="accent1"/>
-            </a:fillRef>
-            <a:effectRef idx="1">
+            <a:effectLst/>
+          </p:spPr>
+          <p:style>
+            <a:lnRef idx="2">
+              <a:schemeClr val="accent1"/>
+            </a:lnRef>
+            <a:fillRef idx="0">
+              <a:schemeClr val="accent1"/>
+            </a:fillRef>
+            <a:effectRef idx="0">
               <a:schemeClr val="accent1"/>
             </a:effectRef>
             <a:fontRef idx="minor">
@@ -14433,15 +14720,16 @@
                 <a:srgbClr val="8FBFBF"/>
               </a:solidFill>
             </a:ln>
-          </p:spPr>
-          <p:style>
-            <a:lnRef idx="2">
-              <a:schemeClr val="accent1"/>
-            </a:lnRef>
-            <a:fillRef idx="0">
-              <a:schemeClr val="accent1"/>
-            </a:fillRef>
-            <a:effectRef idx="1">
+            <a:effectLst/>
+          </p:spPr>
+          <p:style>
+            <a:lnRef idx="2">
+              <a:schemeClr val="accent1"/>
+            </a:lnRef>
+            <a:fillRef idx="0">
+              <a:schemeClr val="accent1"/>
+            </a:fillRef>
+            <a:effectRef idx="0">
               <a:schemeClr val="accent1"/>
             </a:effectRef>
             <a:fontRef idx="minor">
@@ -14468,15 +14756,16 @@
                 <a:srgbClr val="8FBFBF"/>
               </a:solidFill>
             </a:ln>
-          </p:spPr>
-          <p:style>
-            <a:lnRef idx="2">
-              <a:schemeClr val="accent1"/>
-            </a:lnRef>
-            <a:fillRef idx="0">
-              <a:schemeClr val="accent1"/>
-            </a:fillRef>
-            <a:effectRef idx="1">
+            <a:effectLst/>
+          </p:spPr>
+          <p:style>
+            <a:lnRef idx="2">
+              <a:schemeClr val="accent1"/>
+            </a:lnRef>
+            <a:fillRef idx="0">
+              <a:schemeClr val="accent1"/>
+            </a:fillRef>
+            <a:effectRef idx="0">
               <a:schemeClr val="accent1"/>
             </a:effectRef>
             <a:fontRef idx="minor">
@@ -14503,15 +14792,16 @@
                 <a:srgbClr val="8FBFBF"/>
               </a:solidFill>
             </a:ln>
-          </p:spPr>
-          <p:style>
-            <a:lnRef idx="2">
-              <a:schemeClr val="accent1"/>
-            </a:lnRef>
-            <a:fillRef idx="0">
-              <a:schemeClr val="accent1"/>
-            </a:fillRef>
-            <a:effectRef idx="1">
+            <a:effectLst/>
+          </p:spPr>
+          <p:style>
+            <a:lnRef idx="2">
+              <a:schemeClr val="accent1"/>
+            </a:lnRef>
+            <a:fillRef idx="0">
+              <a:schemeClr val="accent1"/>
+            </a:fillRef>
+            <a:effectRef idx="0">
               <a:schemeClr val="accent1"/>
             </a:effectRef>
             <a:fontRef idx="minor">
@@ -14538,15 +14828,16 @@
                 <a:srgbClr val="8FBFBF"/>
               </a:solidFill>
             </a:ln>
-          </p:spPr>
-          <p:style>
-            <a:lnRef idx="2">
-              <a:schemeClr val="accent1"/>
-            </a:lnRef>
-            <a:fillRef idx="0">
-              <a:schemeClr val="accent1"/>
-            </a:fillRef>
-            <a:effectRef idx="1">
+            <a:effectLst/>
+          </p:spPr>
+          <p:style>
+            <a:lnRef idx="2">
+              <a:schemeClr val="accent1"/>
+            </a:lnRef>
+            <a:fillRef idx="0">
+              <a:schemeClr val="accent1"/>
+            </a:fillRef>
+            <a:effectRef idx="0">
               <a:schemeClr val="accent1"/>
             </a:effectRef>
             <a:fontRef idx="minor">
@@ -14573,15 +14864,16 @@
                 <a:srgbClr val="8FBFBF"/>
               </a:solidFill>
             </a:ln>
-          </p:spPr>
-          <p:style>
-            <a:lnRef idx="2">
-              <a:schemeClr val="accent1"/>
-            </a:lnRef>
-            <a:fillRef idx="0">
-              <a:schemeClr val="accent1"/>
-            </a:fillRef>
-            <a:effectRef idx="1">
+            <a:effectLst/>
+          </p:spPr>
+          <p:style>
+            <a:lnRef idx="2">
+              <a:schemeClr val="accent1"/>
+            </a:lnRef>
+            <a:fillRef idx="0">
+              <a:schemeClr val="accent1"/>
+            </a:fillRef>
+            <a:effectRef idx="0">
               <a:schemeClr val="accent1"/>
             </a:effectRef>
             <a:fontRef idx="minor">
@@ -14608,15 +14900,16 @@
                 <a:srgbClr val="8FBFBF"/>
               </a:solidFill>
             </a:ln>
-          </p:spPr>
-          <p:style>
-            <a:lnRef idx="2">
-              <a:schemeClr val="accent1"/>
-            </a:lnRef>
-            <a:fillRef idx="0">
-              <a:schemeClr val="accent1"/>
-            </a:fillRef>
-            <a:effectRef idx="1">
+            <a:effectLst/>
+          </p:spPr>
+          <p:style>
+            <a:lnRef idx="2">
+              <a:schemeClr val="accent1"/>
+            </a:lnRef>
+            <a:fillRef idx="0">
+              <a:schemeClr val="accent1"/>
+            </a:fillRef>
+            <a:effectRef idx="0">
               <a:schemeClr val="accent1"/>
             </a:effectRef>
             <a:fontRef idx="minor">
@@ -14643,15 +14936,16 @@
                 <a:srgbClr val="8FBFBF"/>
               </a:solidFill>
             </a:ln>
-          </p:spPr>
-          <p:style>
-            <a:lnRef idx="2">
-              <a:schemeClr val="accent1"/>
-            </a:lnRef>
-            <a:fillRef idx="0">
-              <a:schemeClr val="accent1"/>
-            </a:fillRef>
-            <a:effectRef idx="1">
+            <a:effectLst/>
+          </p:spPr>
+          <p:style>
+            <a:lnRef idx="2">
+              <a:schemeClr val="accent1"/>
+            </a:lnRef>
+            <a:fillRef idx="0">
+              <a:schemeClr val="accent1"/>
+            </a:fillRef>
+            <a:effectRef idx="0">
               <a:schemeClr val="accent1"/>
             </a:effectRef>
             <a:fontRef idx="minor">
@@ -14678,15 +14972,16 @@
                 <a:srgbClr val="8FBFBF"/>
               </a:solidFill>
             </a:ln>
-          </p:spPr>
-          <p:style>
-            <a:lnRef idx="2">
-              <a:schemeClr val="accent1"/>
-            </a:lnRef>
-            <a:fillRef idx="0">
-              <a:schemeClr val="accent1"/>
-            </a:fillRef>
-            <a:effectRef idx="1">
+            <a:effectLst/>
+          </p:spPr>
+          <p:style>
+            <a:lnRef idx="2">
+              <a:schemeClr val="accent1"/>
+            </a:lnRef>
+            <a:fillRef idx="0">
+              <a:schemeClr val="accent1"/>
+            </a:fillRef>
+            <a:effectRef idx="0">
               <a:schemeClr val="accent1"/>
             </a:effectRef>
             <a:fontRef idx="minor">
@@ -14713,15 +15008,16 @@
                 <a:srgbClr val="8FBFBF"/>
               </a:solidFill>
             </a:ln>
-          </p:spPr>
-          <p:style>
-            <a:lnRef idx="2">
-              <a:schemeClr val="accent1"/>
-            </a:lnRef>
-            <a:fillRef idx="0">
-              <a:schemeClr val="accent1"/>
-            </a:fillRef>
-            <a:effectRef idx="1">
+            <a:effectLst/>
+          </p:spPr>
+          <p:style>
+            <a:lnRef idx="2">
+              <a:schemeClr val="accent1"/>
+            </a:lnRef>
+            <a:fillRef idx="0">
+              <a:schemeClr val="accent1"/>
+            </a:fillRef>
+            <a:effectRef idx="0">
               <a:schemeClr val="accent1"/>
             </a:effectRef>
             <a:fontRef idx="minor">
@@ -14748,15 +15044,16 @@
                 <a:srgbClr val="8FBFBF"/>
               </a:solidFill>
             </a:ln>
-          </p:spPr>
-          <p:style>
-            <a:lnRef idx="2">
-              <a:schemeClr val="accent1"/>
-            </a:lnRef>
-            <a:fillRef idx="0">
-              <a:schemeClr val="accent1"/>
-            </a:fillRef>
-            <a:effectRef idx="1">
+            <a:effectLst/>
+          </p:spPr>
+          <p:style>
+            <a:lnRef idx="2">
+              <a:schemeClr val="accent1"/>
+            </a:lnRef>
+            <a:fillRef idx="0">
+              <a:schemeClr val="accent1"/>
+            </a:fillRef>
+            <a:effectRef idx="0">
               <a:schemeClr val="accent1"/>
             </a:effectRef>
             <a:fontRef idx="minor">
@@ -14783,15 +15080,16 @@
                 <a:srgbClr val="8FBFBF"/>
               </a:solidFill>
             </a:ln>
-          </p:spPr>
-          <p:style>
-            <a:lnRef idx="2">
-              <a:schemeClr val="accent1"/>
-            </a:lnRef>
-            <a:fillRef idx="0">
-              <a:schemeClr val="accent1"/>
-            </a:fillRef>
-            <a:effectRef idx="1">
+            <a:effectLst/>
+          </p:spPr>
+          <p:style>
+            <a:lnRef idx="2">
+              <a:schemeClr val="accent1"/>
+            </a:lnRef>
+            <a:fillRef idx="0">
+              <a:schemeClr val="accent1"/>
+            </a:fillRef>
+            <a:effectRef idx="0">
               <a:schemeClr val="accent1"/>
             </a:effectRef>
             <a:fontRef idx="minor">
@@ -14818,15 +15116,16 @@
                 <a:srgbClr val="8FBFBF"/>
               </a:solidFill>
             </a:ln>
-          </p:spPr>
-          <p:style>
-            <a:lnRef idx="2">
-              <a:schemeClr val="accent1"/>
-            </a:lnRef>
-            <a:fillRef idx="0">
-              <a:schemeClr val="accent1"/>
-            </a:fillRef>
-            <a:effectRef idx="1">
+            <a:effectLst/>
+          </p:spPr>
+          <p:style>
+            <a:lnRef idx="2">
+              <a:schemeClr val="accent1"/>
+            </a:lnRef>
+            <a:fillRef idx="0">
+              <a:schemeClr val="accent1"/>
+            </a:fillRef>
+            <a:effectRef idx="0">
               <a:schemeClr val="accent1"/>
             </a:effectRef>
             <a:fontRef idx="minor">
@@ -14853,15 +15152,16 @@
                 <a:srgbClr val="8FBFBF"/>
               </a:solidFill>
             </a:ln>
-          </p:spPr>
-          <p:style>
-            <a:lnRef idx="2">
-              <a:schemeClr val="accent1"/>
-            </a:lnRef>
-            <a:fillRef idx="0">
-              <a:schemeClr val="accent1"/>
-            </a:fillRef>
-            <a:effectRef idx="1">
+            <a:effectLst/>
+          </p:spPr>
+          <p:style>
+            <a:lnRef idx="2">
+              <a:schemeClr val="accent1"/>
+            </a:lnRef>
+            <a:fillRef idx="0">
+              <a:schemeClr val="accent1"/>
+            </a:fillRef>
+            <a:effectRef idx="0">
               <a:schemeClr val="accent1"/>
             </a:effectRef>
             <a:fontRef idx="minor">
@@ -14913,7 +15213,7 @@
             <a:fillRef idx="3">
               <a:schemeClr val="accent1"/>
             </a:fillRef>
-            <a:effectRef idx="2">
+            <a:effectRef idx="0">
               <a:schemeClr val="accent1"/>
             </a:effectRef>
             <a:fontRef idx="minor">
@@ -14947,15 +15247,16 @@
                 <a:srgbClr val="8FBFBF"/>
               </a:solidFill>
             </a:ln>
-          </p:spPr>
-          <p:style>
-            <a:lnRef idx="2">
-              <a:schemeClr val="accent1"/>
-            </a:lnRef>
-            <a:fillRef idx="0">
-              <a:schemeClr val="accent1"/>
-            </a:fillRef>
-            <a:effectRef idx="1">
+            <a:effectLst/>
+          </p:spPr>
+          <p:style>
+            <a:lnRef idx="2">
+              <a:schemeClr val="accent1"/>
+            </a:lnRef>
+            <a:fillRef idx="0">
+              <a:schemeClr val="accent1"/>
+            </a:fillRef>
+            <a:effectRef idx="0">
               <a:schemeClr val="accent1"/>
             </a:effectRef>
             <a:fontRef idx="minor">
@@ -14982,15 +15283,16 @@
                 <a:srgbClr val="8FBFBF"/>
               </a:solidFill>
             </a:ln>
-          </p:spPr>
-          <p:style>
-            <a:lnRef idx="2">
-              <a:schemeClr val="accent1"/>
-            </a:lnRef>
-            <a:fillRef idx="0">
-              <a:schemeClr val="accent1"/>
-            </a:fillRef>
-            <a:effectRef idx="1">
+            <a:effectLst/>
+          </p:spPr>
+          <p:style>
+            <a:lnRef idx="2">
+              <a:schemeClr val="accent1"/>
+            </a:lnRef>
+            <a:fillRef idx="0">
+              <a:schemeClr val="accent1"/>
+            </a:fillRef>
+            <a:effectRef idx="0">
               <a:schemeClr val="accent1"/>
             </a:effectRef>
             <a:fontRef idx="minor">
@@ -15017,15 +15319,16 @@
                 <a:srgbClr val="8FBFBF"/>
               </a:solidFill>
             </a:ln>
-          </p:spPr>
-          <p:style>
-            <a:lnRef idx="2">
-              <a:schemeClr val="accent1"/>
-            </a:lnRef>
-            <a:fillRef idx="0">
-              <a:schemeClr val="accent1"/>
-            </a:fillRef>
-            <a:effectRef idx="1">
+            <a:effectLst/>
+          </p:spPr>
+          <p:style>
+            <a:lnRef idx="2">
+              <a:schemeClr val="accent1"/>
+            </a:lnRef>
+            <a:fillRef idx="0">
+              <a:schemeClr val="accent1"/>
+            </a:fillRef>
+            <a:effectRef idx="0">
               <a:schemeClr val="accent1"/>
             </a:effectRef>
             <a:fontRef idx="minor">
@@ -15052,15 +15355,16 @@
                 <a:srgbClr val="8FBFBF"/>
               </a:solidFill>
             </a:ln>
-          </p:spPr>
-          <p:style>
-            <a:lnRef idx="2">
-              <a:schemeClr val="accent1"/>
-            </a:lnRef>
-            <a:fillRef idx="0">
-              <a:schemeClr val="accent1"/>
-            </a:fillRef>
-            <a:effectRef idx="1">
+            <a:effectLst/>
+          </p:spPr>
+          <p:style>
+            <a:lnRef idx="2">
+              <a:schemeClr val="accent1"/>
+            </a:lnRef>
+            <a:fillRef idx="0">
+              <a:schemeClr val="accent1"/>
+            </a:fillRef>
+            <a:effectRef idx="0">
               <a:schemeClr val="accent1"/>
             </a:effectRef>
             <a:fontRef idx="minor">
@@ -15087,15 +15391,16 @@
                 <a:srgbClr val="8FBFBF"/>
               </a:solidFill>
             </a:ln>
-          </p:spPr>
-          <p:style>
-            <a:lnRef idx="2">
-              <a:schemeClr val="accent1"/>
-            </a:lnRef>
-            <a:fillRef idx="0">
-              <a:schemeClr val="accent1"/>
-            </a:fillRef>
-            <a:effectRef idx="1">
+            <a:effectLst/>
+          </p:spPr>
+          <p:style>
+            <a:lnRef idx="2">
+              <a:schemeClr val="accent1"/>
+            </a:lnRef>
+            <a:fillRef idx="0">
+              <a:schemeClr val="accent1"/>
+            </a:fillRef>
+            <a:effectRef idx="0">
               <a:schemeClr val="accent1"/>
             </a:effectRef>
             <a:fontRef idx="minor">
@@ -15122,15 +15427,16 @@
                 <a:srgbClr val="8FBFBF"/>
               </a:solidFill>
             </a:ln>
-          </p:spPr>
-          <p:style>
-            <a:lnRef idx="2">
-              <a:schemeClr val="accent1"/>
-            </a:lnRef>
-            <a:fillRef idx="0">
-              <a:schemeClr val="accent1"/>
-            </a:fillRef>
-            <a:effectRef idx="1">
+            <a:effectLst/>
+          </p:spPr>
+          <p:style>
+            <a:lnRef idx="2">
+              <a:schemeClr val="accent1"/>
+            </a:lnRef>
+            <a:fillRef idx="0">
+              <a:schemeClr val="accent1"/>
+            </a:fillRef>
+            <a:effectRef idx="0">
               <a:schemeClr val="accent1"/>
             </a:effectRef>
             <a:fontRef idx="minor">
@@ -15157,15 +15463,16 @@
                 <a:srgbClr val="8FBFBF"/>
               </a:solidFill>
             </a:ln>
-          </p:spPr>
-          <p:style>
-            <a:lnRef idx="2">
-              <a:schemeClr val="accent1"/>
-            </a:lnRef>
-            <a:fillRef idx="0">
-              <a:schemeClr val="accent1"/>
-            </a:fillRef>
-            <a:effectRef idx="1">
+            <a:effectLst/>
+          </p:spPr>
+          <p:style>
+            <a:lnRef idx="2">
+              <a:schemeClr val="accent1"/>
+            </a:lnRef>
+            <a:fillRef idx="0">
+              <a:schemeClr val="accent1"/>
+            </a:fillRef>
+            <a:effectRef idx="0">
               <a:schemeClr val="accent1"/>
             </a:effectRef>
             <a:fontRef idx="minor">
@@ -15192,15 +15499,16 @@
                 <a:srgbClr val="8FBFBF"/>
               </a:solidFill>
             </a:ln>
-          </p:spPr>
-          <p:style>
-            <a:lnRef idx="2">
-              <a:schemeClr val="accent1"/>
-            </a:lnRef>
-            <a:fillRef idx="0">
-              <a:schemeClr val="accent1"/>
-            </a:fillRef>
-            <a:effectRef idx="1">
+            <a:effectLst/>
+          </p:spPr>
+          <p:style>
+            <a:lnRef idx="2">
+              <a:schemeClr val="accent1"/>
+            </a:lnRef>
+            <a:fillRef idx="0">
+              <a:schemeClr val="accent1"/>
+            </a:fillRef>
+            <a:effectRef idx="0">
               <a:schemeClr val="accent1"/>
             </a:effectRef>
             <a:fontRef idx="minor">
@@ -15227,15 +15535,16 @@
                 <a:srgbClr val="8FBFBF"/>
               </a:solidFill>
             </a:ln>
-          </p:spPr>
-          <p:style>
-            <a:lnRef idx="2">
-              <a:schemeClr val="accent1"/>
-            </a:lnRef>
-            <a:fillRef idx="0">
-              <a:schemeClr val="accent1"/>
-            </a:fillRef>
-            <a:effectRef idx="1">
+            <a:effectLst/>
+          </p:spPr>
+          <p:style>
+            <a:lnRef idx="2">
+              <a:schemeClr val="accent1"/>
+            </a:lnRef>
+            <a:fillRef idx="0">
+              <a:schemeClr val="accent1"/>
+            </a:fillRef>
+            <a:effectRef idx="0">
               <a:schemeClr val="accent1"/>
             </a:effectRef>
             <a:fontRef idx="minor">
@@ -15262,15 +15571,16 @@
                 <a:srgbClr val="8FBFBF"/>
               </a:solidFill>
             </a:ln>
-          </p:spPr>
-          <p:style>
-            <a:lnRef idx="2">
-              <a:schemeClr val="accent1"/>
-            </a:lnRef>
-            <a:fillRef idx="0">
-              <a:schemeClr val="accent1"/>
-            </a:fillRef>
-            <a:effectRef idx="1">
+            <a:effectLst/>
+          </p:spPr>
+          <p:style>
+            <a:lnRef idx="2">
+              <a:schemeClr val="accent1"/>
+            </a:lnRef>
+            <a:fillRef idx="0">
+              <a:schemeClr val="accent1"/>
+            </a:fillRef>
+            <a:effectRef idx="0">
               <a:schemeClr val="accent1"/>
             </a:effectRef>
             <a:fontRef idx="minor">
@@ -15297,15 +15607,16 @@
                 <a:srgbClr val="8FBFBF"/>
               </a:solidFill>
             </a:ln>
-          </p:spPr>
-          <p:style>
-            <a:lnRef idx="2">
-              <a:schemeClr val="accent1"/>
-            </a:lnRef>
-            <a:fillRef idx="0">
-              <a:schemeClr val="accent1"/>
-            </a:fillRef>
-            <a:effectRef idx="1">
+            <a:effectLst/>
+          </p:spPr>
+          <p:style>
+            <a:lnRef idx="2">
+              <a:schemeClr val="accent1"/>
+            </a:lnRef>
+            <a:fillRef idx="0">
+              <a:schemeClr val="accent1"/>
+            </a:fillRef>
+            <a:effectRef idx="0">
               <a:schemeClr val="accent1"/>
             </a:effectRef>
             <a:fontRef idx="minor">
@@ -15332,15 +15643,16 @@
                 <a:srgbClr val="8FBFBF"/>
               </a:solidFill>
             </a:ln>
-          </p:spPr>
-          <p:style>
-            <a:lnRef idx="2">
-              <a:schemeClr val="accent1"/>
-            </a:lnRef>
-            <a:fillRef idx="0">
-              <a:schemeClr val="accent1"/>
-            </a:fillRef>
-            <a:effectRef idx="1">
+            <a:effectLst/>
+          </p:spPr>
+          <p:style>
+            <a:lnRef idx="2">
+              <a:schemeClr val="accent1"/>
+            </a:lnRef>
+            <a:fillRef idx="0">
+              <a:schemeClr val="accent1"/>
+            </a:fillRef>
+            <a:effectRef idx="0">
               <a:schemeClr val="accent1"/>
             </a:effectRef>
             <a:fontRef idx="minor">
@@ -15367,15 +15679,16 @@
                 <a:srgbClr val="8FBFBF"/>
               </a:solidFill>
             </a:ln>
-          </p:spPr>
-          <p:style>
-            <a:lnRef idx="2">
-              <a:schemeClr val="accent1"/>
-            </a:lnRef>
-            <a:fillRef idx="0">
-              <a:schemeClr val="accent1"/>
-            </a:fillRef>
-            <a:effectRef idx="1">
+            <a:effectLst/>
+          </p:spPr>
+          <p:style>
+            <a:lnRef idx="2">
+              <a:schemeClr val="accent1"/>
+            </a:lnRef>
+            <a:fillRef idx="0">
+              <a:schemeClr val="accent1"/>
+            </a:fillRef>
+            <a:effectRef idx="0">
               <a:schemeClr val="accent1"/>
             </a:effectRef>
             <a:fontRef idx="minor">
@@ -15402,15 +15715,16 @@
                 <a:srgbClr val="8FBFBF"/>
               </a:solidFill>
             </a:ln>
-          </p:spPr>
-          <p:style>
-            <a:lnRef idx="2">
-              <a:schemeClr val="accent1"/>
-            </a:lnRef>
-            <a:fillRef idx="0">
-              <a:schemeClr val="accent1"/>
-            </a:fillRef>
-            <a:effectRef idx="1">
+            <a:effectLst/>
+          </p:spPr>
+          <p:style>
+            <a:lnRef idx="2">
+              <a:schemeClr val="accent1"/>
+            </a:lnRef>
+            <a:fillRef idx="0">
+              <a:schemeClr val="accent1"/>
+            </a:fillRef>
+            <a:effectRef idx="0">
               <a:schemeClr val="accent1"/>
             </a:effectRef>
             <a:fontRef idx="minor">
@@ -15437,15 +15751,16 @@
                 <a:srgbClr val="8FBFBF"/>
               </a:solidFill>
             </a:ln>
-          </p:spPr>
-          <p:style>
-            <a:lnRef idx="2">
-              <a:schemeClr val="accent1"/>
-            </a:lnRef>
-            <a:fillRef idx="0">
-              <a:schemeClr val="accent1"/>
-            </a:fillRef>
-            <a:effectRef idx="1">
+            <a:effectLst/>
+          </p:spPr>
+          <p:style>
+            <a:lnRef idx="2">
+              <a:schemeClr val="accent1"/>
+            </a:lnRef>
+            <a:fillRef idx="0">
+              <a:schemeClr val="accent1"/>
+            </a:fillRef>
+            <a:effectRef idx="0">
               <a:schemeClr val="accent1"/>
             </a:effectRef>
             <a:fontRef idx="minor">
@@ -15472,15 +15787,16 @@
                 <a:srgbClr val="8FBFBF"/>
               </a:solidFill>
             </a:ln>
-          </p:spPr>
-          <p:style>
-            <a:lnRef idx="2">
-              <a:schemeClr val="accent1"/>
-            </a:lnRef>
-            <a:fillRef idx="0">
-              <a:schemeClr val="accent1"/>
-            </a:fillRef>
-            <a:effectRef idx="1">
+            <a:effectLst/>
+          </p:spPr>
+          <p:style>
+            <a:lnRef idx="2">
+              <a:schemeClr val="accent1"/>
+            </a:lnRef>
+            <a:fillRef idx="0">
+              <a:schemeClr val="accent1"/>
+            </a:fillRef>
+            <a:effectRef idx="0">
               <a:schemeClr val="accent1"/>
             </a:effectRef>
             <a:fontRef idx="minor">
@@ -15507,15 +15823,16 @@
                 <a:srgbClr val="8FBFBF"/>
               </a:solidFill>
             </a:ln>
-          </p:spPr>
-          <p:style>
-            <a:lnRef idx="2">
-              <a:schemeClr val="accent1"/>
-            </a:lnRef>
-            <a:fillRef idx="0">
-              <a:schemeClr val="accent1"/>
-            </a:fillRef>
-            <a:effectRef idx="1">
+            <a:effectLst/>
+          </p:spPr>
+          <p:style>
+            <a:lnRef idx="2">
+              <a:schemeClr val="accent1"/>
+            </a:lnRef>
+            <a:fillRef idx="0">
+              <a:schemeClr val="accent1"/>
+            </a:fillRef>
+            <a:effectRef idx="0">
               <a:schemeClr val="accent1"/>
             </a:effectRef>
             <a:fontRef idx="minor">
@@ -15542,15 +15859,16 @@
                 <a:srgbClr val="8FBFBF"/>
               </a:solidFill>
             </a:ln>
-          </p:spPr>
-          <p:style>
-            <a:lnRef idx="2">
-              <a:schemeClr val="accent1"/>
-            </a:lnRef>
-            <a:fillRef idx="0">
-              <a:schemeClr val="accent1"/>
-            </a:fillRef>
-            <a:effectRef idx="1">
+            <a:effectLst/>
+          </p:spPr>
+          <p:style>
+            <a:lnRef idx="2">
+              <a:schemeClr val="accent1"/>
+            </a:lnRef>
+            <a:fillRef idx="0">
+              <a:schemeClr val="accent1"/>
+            </a:fillRef>
+            <a:effectRef idx="0">
               <a:schemeClr val="accent1"/>
             </a:effectRef>
             <a:fontRef idx="minor">
@@ -15577,15 +15895,16 @@
                 <a:srgbClr val="8FBFBF"/>
               </a:solidFill>
             </a:ln>
-          </p:spPr>
-          <p:style>
-            <a:lnRef idx="2">
-              <a:schemeClr val="accent1"/>
-            </a:lnRef>
-            <a:fillRef idx="0">
-              <a:schemeClr val="accent1"/>
-            </a:fillRef>
-            <a:effectRef idx="1">
+            <a:effectLst/>
+          </p:spPr>
+          <p:style>
+            <a:lnRef idx="2">
+              <a:schemeClr val="accent1"/>
+            </a:lnRef>
+            <a:fillRef idx="0">
+              <a:schemeClr val="accent1"/>
+            </a:fillRef>
+            <a:effectRef idx="0">
               <a:schemeClr val="accent1"/>
             </a:effectRef>
             <a:fontRef idx="minor">
@@ -15612,15 +15931,16 @@
                 <a:srgbClr val="8FBFBF"/>
               </a:solidFill>
             </a:ln>
-          </p:spPr>
-          <p:style>
-            <a:lnRef idx="2">
-              <a:schemeClr val="accent1"/>
-            </a:lnRef>
-            <a:fillRef idx="0">
-              <a:schemeClr val="accent1"/>
-            </a:fillRef>
-            <a:effectRef idx="1">
+            <a:effectLst/>
+          </p:spPr>
+          <p:style>
+            <a:lnRef idx="2">
+              <a:schemeClr val="accent1"/>
+            </a:lnRef>
+            <a:fillRef idx="0">
+              <a:schemeClr val="accent1"/>
+            </a:fillRef>
+            <a:effectRef idx="0">
               <a:schemeClr val="accent1"/>
             </a:effectRef>
             <a:fontRef idx="minor">
@@ -15647,15 +15967,16 @@
                 <a:srgbClr val="8FBFBF"/>
               </a:solidFill>
             </a:ln>
-          </p:spPr>
-          <p:style>
-            <a:lnRef idx="2">
-              <a:schemeClr val="accent1"/>
-            </a:lnRef>
-            <a:fillRef idx="0">
-              <a:schemeClr val="accent1"/>
-            </a:fillRef>
-            <a:effectRef idx="1">
+            <a:effectLst/>
+          </p:spPr>
+          <p:style>
+            <a:lnRef idx="2">
+              <a:schemeClr val="accent1"/>
+            </a:lnRef>
+            <a:fillRef idx="0">
+              <a:schemeClr val="accent1"/>
+            </a:fillRef>
+            <a:effectRef idx="0">
               <a:schemeClr val="accent1"/>
             </a:effectRef>
             <a:fontRef idx="minor">
@@ -15682,15 +16003,16 @@
                 <a:srgbClr val="8FBFBF"/>
               </a:solidFill>
             </a:ln>
-          </p:spPr>
-          <p:style>
-            <a:lnRef idx="2">
-              <a:schemeClr val="accent1"/>
-            </a:lnRef>
-            <a:fillRef idx="0">
-              <a:schemeClr val="accent1"/>
-            </a:fillRef>
-            <a:effectRef idx="1">
+            <a:effectLst/>
+          </p:spPr>
+          <p:style>
+            <a:lnRef idx="2">
+              <a:schemeClr val="accent1"/>
+            </a:lnRef>
+            <a:fillRef idx="0">
+              <a:schemeClr val="accent1"/>
+            </a:fillRef>
+            <a:effectRef idx="0">
               <a:schemeClr val="accent1"/>
             </a:effectRef>
             <a:fontRef idx="minor">
@@ -15717,15 +16039,16 @@
                 <a:srgbClr val="8FBFBF"/>
               </a:solidFill>
             </a:ln>
-          </p:spPr>
-          <p:style>
-            <a:lnRef idx="2">
-              <a:schemeClr val="accent1"/>
-            </a:lnRef>
-            <a:fillRef idx="0">
-              <a:schemeClr val="accent1"/>
-            </a:fillRef>
-            <a:effectRef idx="1">
+            <a:effectLst/>
+          </p:spPr>
+          <p:style>
+            <a:lnRef idx="2">
+              <a:schemeClr val="accent1"/>
+            </a:lnRef>
+            <a:fillRef idx="0">
+              <a:schemeClr val="accent1"/>
+            </a:fillRef>
+            <a:effectRef idx="0">
               <a:schemeClr val="accent1"/>
             </a:effectRef>
             <a:fontRef idx="minor">
@@ -15777,7 +16100,7 @@
             <a:fillRef idx="3">
               <a:schemeClr val="accent1"/>
             </a:fillRef>
-            <a:effectRef idx="2">
+            <a:effectRef idx="0">
               <a:schemeClr val="accent1"/>
             </a:effectRef>
             <a:fontRef idx="minor">
@@ -15811,15 +16134,16 @@
                 <a:srgbClr val="8FBFBF"/>
               </a:solidFill>
             </a:ln>
-          </p:spPr>
-          <p:style>
-            <a:lnRef idx="2">
-              <a:schemeClr val="accent1"/>
-            </a:lnRef>
-            <a:fillRef idx="0">
-              <a:schemeClr val="accent1"/>
-            </a:fillRef>
-            <a:effectRef idx="1">
+            <a:effectLst/>
+          </p:spPr>
+          <p:style>
+            <a:lnRef idx="2">
+              <a:schemeClr val="accent1"/>
+            </a:lnRef>
+            <a:fillRef idx="0">
+              <a:schemeClr val="accent1"/>
+            </a:fillRef>
+            <a:effectRef idx="0">
               <a:schemeClr val="accent1"/>
             </a:effectRef>
             <a:fontRef idx="minor">
@@ -15846,15 +16170,16 @@
                 <a:srgbClr val="8FBFBF"/>
               </a:solidFill>
             </a:ln>
-          </p:spPr>
-          <p:style>
-            <a:lnRef idx="2">
-              <a:schemeClr val="accent1"/>
-            </a:lnRef>
-            <a:fillRef idx="0">
-              <a:schemeClr val="accent1"/>
-            </a:fillRef>
-            <a:effectRef idx="1">
+            <a:effectLst/>
+          </p:spPr>
+          <p:style>
+            <a:lnRef idx="2">
+              <a:schemeClr val="accent1"/>
+            </a:lnRef>
+            <a:fillRef idx="0">
+              <a:schemeClr val="accent1"/>
+            </a:fillRef>
+            <a:effectRef idx="0">
               <a:schemeClr val="accent1"/>
             </a:effectRef>
             <a:fontRef idx="minor">
@@ -15881,15 +16206,16 @@
                 <a:srgbClr val="8FBFBF"/>
               </a:solidFill>
             </a:ln>
-          </p:spPr>
-          <p:style>
-            <a:lnRef idx="2">
-              <a:schemeClr val="accent1"/>
-            </a:lnRef>
-            <a:fillRef idx="0">
-              <a:schemeClr val="accent1"/>
-            </a:fillRef>
-            <a:effectRef idx="1">
+            <a:effectLst/>
+          </p:spPr>
+          <p:style>
+            <a:lnRef idx="2">
+              <a:schemeClr val="accent1"/>
+            </a:lnRef>
+            <a:fillRef idx="0">
+              <a:schemeClr val="accent1"/>
+            </a:fillRef>
+            <a:effectRef idx="0">
               <a:schemeClr val="accent1"/>
             </a:effectRef>
             <a:fontRef idx="minor">
@@ -15916,15 +16242,16 @@
                 <a:srgbClr val="8FBFBF"/>
               </a:solidFill>
             </a:ln>
-          </p:spPr>
-          <p:style>
-            <a:lnRef idx="2">
-              <a:schemeClr val="accent1"/>
-            </a:lnRef>
-            <a:fillRef idx="0">
-              <a:schemeClr val="accent1"/>
-            </a:fillRef>
-            <a:effectRef idx="1">
+            <a:effectLst/>
+          </p:spPr>
+          <p:style>
+            <a:lnRef idx="2">
+              <a:schemeClr val="accent1"/>
+            </a:lnRef>
+            <a:fillRef idx="0">
+              <a:schemeClr val="accent1"/>
+            </a:fillRef>
+            <a:effectRef idx="0">
               <a:schemeClr val="accent1"/>
             </a:effectRef>
             <a:fontRef idx="minor">
@@ -15951,15 +16278,16 @@
                 <a:srgbClr val="8FBFBF"/>
               </a:solidFill>
             </a:ln>
-          </p:spPr>
-          <p:style>
-            <a:lnRef idx="2">
-              <a:schemeClr val="accent1"/>
-            </a:lnRef>
-            <a:fillRef idx="0">
-              <a:schemeClr val="accent1"/>
-            </a:fillRef>
-            <a:effectRef idx="1">
+            <a:effectLst/>
+          </p:spPr>
+          <p:style>
+            <a:lnRef idx="2">
+              <a:schemeClr val="accent1"/>
+            </a:lnRef>
+            <a:fillRef idx="0">
+              <a:schemeClr val="accent1"/>
+            </a:fillRef>
+            <a:effectRef idx="0">
               <a:schemeClr val="accent1"/>
             </a:effectRef>
             <a:fontRef idx="minor">
@@ -15986,15 +16314,16 @@
                 <a:srgbClr val="8FBFBF"/>
               </a:solidFill>
             </a:ln>
-          </p:spPr>
-          <p:style>
-            <a:lnRef idx="2">
-              <a:schemeClr val="accent1"/>
-            </a:lnRef>
-            <a:fillRef idx="0">
-              <a:schemeClr val="accent1"/>
-            </a:fillRef>
-            <a:effectRef idx="1">
+            <a:effectLst/>
+          </p:spPr>
+          <p:style>
+            <a:lnRef idx="2">
+              <a:schemeClr val="accent1"/>
+            </a:lnRef>
+            <a:fillRef idx="0">
+              <a:schemeClr val="accent1"/>
+            </a:fillRef>
+            <a:effectRef idx="0">
               <a:schemeClr val="accent1"/>
             </a:effectRef>
             <a:fontRef idx="minor">
@@ -16021,15 +16350,16 @@
                 <a:srgbClr val="8FBFBF"/>
               </a:solidFill>
             </a:ln>
-          </p:spPr>
-          <p:style>
-            <a:lnRef idx="2">
-              <a:schemeClr val="accent1"/>
-            </a:lnRef>
-            <a:fillRef idx="0">
-              <a:schemeClr val="accent1"/>
-            </a:fillRef>
-            <a:effectRef idx="1">
+            <a:effectLst/>
+          </p:spPr>
+          <p:style>
+            <a:lnRef idx="2">
+              <a:schemeClr val="accent1"/>
+            </a:lnRef>
+            <a:fillRef idx="0">
+              <a:schemeClr val="accent1"/>
+            </a:fillRef>
+            <a:effectRef idx="0">
               <a:schemeClr val="accent1"/>
             </a:effectRef>
             <a:fontRef idx="minor">
@@ -16056,15 +16386,16 @@
                 <a:srgbClr val="8FBFBF"/>
               </a:solidFill>
             </a:ln>
-          </p:spPr>
-          <p:style>
-            <a:lnRef idx="2">
-              <a:schemeClr val="accent1"/>
-            </a:lnRef>
-            <a:fillRef idx="0">
-              <a:schemeClr val="accent1"/>
-            </a:fillRef>
-            <a:effectRef idx="1">
+            <a:effectLst/>
+          </p:spPr>
+          <p:style>
+            <a:lnRef idx="2">
+              <a:schemeClr val="accent1"/>
+            </a:lnRef>
+            <a:fillRef idx="0">
+              <a:schemeClr val="accent1"/>
+            </a:fillRef>
+            <a:effectRef idx="0">
               <a:schemeClr val="accent1"/>
             </a:effectRef>
             <a:fontRef idx="minor">
@@ -16091,15 +16422,16 @@
                 <a:srgbClr val="8FBFBF"/>
               </a:solidFill>
             </a:ln>
-          </p:spPr>
-          <p:style>
-            <a:lnRef idx="2">
-              <a:schemeClr val="accent1"/>
-            </a:lnRef>
-            <a:fillRef idx="0">
-              <a:schemeClr val="accent1"/>
-            </a:fillRef>
-            <a:effectRef idx="1">
+            <a:effectLst/>
+          </p:spPr>
+          <p:style>
+            <a:lnRef idx="2">
+              <a:schemeClr val="accent1"/>
+            </a:lnRef>
+            <a:fillRef idx="0">
+              <a:schemeClr val="accent1"/>
+            </a:fillRef>
+            <a:effectRef idx="0">
               <a:schemeClr val="accent1"/>
             </a:effectRef>
             <a:fontRef idx="minor">
@@ -16126,15 +16458,16 @@
                 <a:srgbClr val="8FBFBF"/>
               </a:solidFill>
             </a:ln>
-          </p:spPr>
-          <p:style>
-            <a:lnRef idx="2">
-              <a:schemeClr val="accent1"/>
-            </a:lnRef>
-            <a:fillRef idx="0">
-              <a:schemeClr val="accent1"/>
-            </a:fillRef>
-            <a:effectRef idx="1">
+            <a:effectLst/>
+          </p:spPr>
+          <p:style>
+            <a:lnRef idx="2">
+              <a:schemeClr val="accent1"/>
+            </a:lnRef>
+            <a:fillRef idx="0">
+              <a:schemeClr val="accent1"/>
+            </a:fillRef>
+            <a:effectRef idx="0">
               <a:schemeClr val="accent1"/>
             </a:effectRef>
             <a:fontRef idx="minor">
@@ -16161,15 +16494,16 @@
                 <a:srgbClr val="8FBFBF"/>
               </a:solidFill>
             </a:ln>
-          </p:spPr>
-          <p:style>
-            <a:lnRef idx="2">
-              <a:schemeClr val="accent1"/>
-            </a:lnRef>
-            <a:fillRef idx="0">
-              <a:schemeClr val="accent1"/>
-            </a:fillRef>
-            <a:effectRef idx="1">
+            <a:effectLst/>
+          </p:spPr>
+          <p:style>
+            <a:lnRef idx="2">
+              <a:schemeClr val="accent1"/>
+            </a:lnRef>
+            <a:fillRef idx="0">
+              <a:schemeClr val="accent1"/>
+            </a:fillRef>
+            <a:effectRef idx="0">
               <a:schemeClr val="accent1"/>
             </a:effectRef>
             <a:fontRef idx="minor">
@@ -16196,15 +16530,16 @@
                 <a:srgbClr val="8FBFBF"/>
               </a:solidFill>
             </a:ln>
-          </p:spPr>
-          <p:style>
-            <a:lnRef idx="2">
-              <a:schemeClr val="accent1"/>
-            </a:lnRef>
-            <a:fillRef idx="0">
-              <a:schemeClr val="accent1"/>
-            </a:fillRef>
-            <a:effectRef idx="1">
+            <a:effectLst/>
+          </p:spPr>
+          <p:style>
+            <a:lnRef idx="2">
+              <a:schemeClr val="accent1"/>
+            </a:lnRef>
+            <a:fillRef idx="0">
+              <a:schemeClr val="accent1"/>
+            </a:fillRef>
+            <a:effectRef idx="0">
               <a:schemeClr val="accent1"/>
             </a:effectRef>
             <a:fontRef idx="minor">
@@ -16231,15 +16566,16 @@
                 <a:srgbClr val="8FBFBF"/>
               </a:solidFill>
             </a:ln>
-          </p:spPr>
-          <p:style>
-            <a:lnRef idx="2">
-              <a:schemeClr val="accent1"/>
-            </a:lnRef>
-            <a:fillRef idx="0">
-              <a:schemeClr val="accent1"/>
-            </a:fillRef>
-            <a:effectRef idx="1">
+            <a:effectLst/>
+          </p:spPr>
+          <p:style>
+            <a:lnRef idx="2">
+              <a:schemeClr val="accent1"/>
+            </a:lnRef>
+            <a:fillRef idx="0">
+              <a:schemeClr val="accent1"/>
+            </a:fillRef>
+            <a:effectRef idx="0">
               <a:schemeClr val="accent1"/>
             </a:effectRef>
             <a:fontRef idx="minor">
@@ -16266,15 +16602,16 @@
                 <a:srgbClr val="8FBFBF"/>
               </a:solidFill>
             </a:ln>
-          </p:spPr>
-          <p:style>
-            <a:lnRef idx="2">
-              <a:schemeClr val="accent1"/>
-            </a:lnRef>
-            <a:fillRef idx="0">
-              <a:schemeClr val="accent1"/>
-            </a:fillRef>
-            <a:effectRef idx="1">
+            <a:effectLst/>
+          </p:spPr>
+          <p:style>
+            <a:lnRef idx="2">
+              <a:schemeClr val="accent1"/>
+            </a:lnRef>
+            <a:fillRef idx="0">
+              <a:schemeClr val="accent1"/>
+            </a:fillRef>
+            <a:effectRef idx="0">
               <a:schemeClr val="accent1"/>
             </a:effectRef>
             <a:fontRef idx="minor">
@@ -16301,15 +16638,16 @@
                 <a:srgbClr val="8FBFBF"/>
               </a:solidFill>
             </a:ln>
-          </p:spPr>
-          <p:style>
-            <a:lnRef idx="2">
-              <a:schemeClr val="accent1"/>
-            </a:lnRef>
-            <a:fillRef idx="0">
-              <a:schemeClr val="accent1"/>
-            </a:fillRef>
-            <a:effectRef idx="1">
+            <a:effectLst/>
+          </p:spPr>
+          <p:style>
+            <a:lnRef idx="2">
+              <a:schemeClr val="accent1"/>
+            </a:lnRef>
+            <a:fillRef idx="0">
+              <a:schemeClr val="accent1"/>
+            </a:fillRef>
+            <a:effectRef idx="0">
               <a:schemeClr val="accent1"/>
             </a:effectRef>
             <a:fontRef idx="minor">
@@ -16336,15 +16674,16 @@
                 <a:srgbClr val="8FBFBF"/>
               </a:solidFill>
             </a:ln>
-          </p:spPr>
-          <p:style>
-            <a:lnRef idx="2">
-              <a:schemeClr val="accent1"/>
-            </a:lnRef>
-            <a:fillRef idx="0">
-              <a:schemeClr val="accent1"/>
-            </a:fillRef>
-            <a:effectRef idx="1">
+            <a:effectLst/>
+          </p:spPr>
+          <p:style>
+            <a:lnRef idx="2">
+              <a:schemeClr val="accent1"/>
+            </a:lnRef>
+            <a:fillRef idx="0">
+              <a:schemeClr val="accent1"/>
+            </a:fillRef>
+            <a:effectRef idx="0">
               <a:schemeClr val="accent1"/>
             </a:effectRef>
             <a:fontRef idx="minor">
@@ -16371,15 +16710,16 @@
                 <a:srgbClr val="8FBFBF"/>
               </a:solidFill>
             </a:ln>
-          </p:spPr>
-          <p:style>
-            <a:lnRef idx="2">
-              <a:schemeClr val="accent1"/>
-            </a:lnRef>
-            <a:fillRef idx="0">
-              <a:schemeClr val="accent1"/>
-            </a:fillRef>
-            <a:effectRef idx="1">
+            <a:effectLst/>
+          </p:spPr>
+          <p:style>
+            <a:lnRef idx="2">
+              <a:schemeClr val="accent1"/>
+            </a:lnRef>
+            <a:fillRef idx="0">
+              <a:schemeClr val="accent1"/>
+            </a:fillRef>
+            <a:effectRef idx="0">
               <a:schemeClr val="accent1"/>
             </a:effectRef>
             <a:fontRef idx="minor">
@@ -16406,15 +16746,16 @@
                 <a:srgbClr val="8FBFBF"/>
               </a:solidFill>
             </a:ln>
-          </p:spPr>
-          <p:style>
-            <a:lnRef idx="2">
-              <a:schemeClr val="accent1"/>
-            </a:lnRef>
-            <a:fillRef idx="0">
-              <a:schemeClr val="accent1"/>
-            </a:fillRef>
-            <a:effectRef idx="1">
+            <a:effectLst/>
+          </p:spPr>
+          <p:style>
+            <a:lnRef idx="2">
+              <a:schemeClr val="accent1"/>
+            </a:lnRef>
+            <a:fillRef idx="0">
+              <a:schemeClr val="accent1"/>
+            </a:fillRef>
+            <a:effectRef idx="0">
               <a:schemeClr val="accent1"/>
             </a:effectRef>
             <a:fontRef idx="minor">
@@ -16441,15 +16782,16 @@
                 <a:srgbClr val="8FBFBF"/>
               </a:solidFill>
             </a:ln>
-          </p:spPr>
-          <p:style>
-            <a:lnRef idx="2">
-              <a:schemeClr val="accent1"/>
-            </a:lnRef>
-            <a:fillRef idx="0">
-              <a:schemeClr val="accent1"/>
-            </a:fillRef>
-            <a:effectRef idx="1">
+            <a:effectLst/>
+          </p:spPr>
+          <p:style>
+            <a:lnRef idx="2">
+              <a:schemeClr val="accent1"/>
+            </a:lnRef>
+            <a:fillRef idx="0">
+              <a:schemeClr val="accent1"/>
+            </a:fillRef>
+            <a:effectRef idx="0">
               <a:schemeClr val="accent1"/>
             </a:effectRef>
             <a:fontRef idx="minor">
@@ -16476,15 +16818,16 @@
                 <a:srgbClr val="8FBFBF"/>
               </a:solidFill>
             </a:ln>
-          </p:spPr>
-          <p:style>
-            <a:lnRef idx="2">
-              <a:schemeClr val="accent1"/>
-            </a:lnRef>
-            <a:fillRef idx="0">
-              <a:schemeClr val="accent1"/>
-            </a:fillRef>
-            <a:effectRef idx="1">
+            <a:effectLst/>
+          </p:spPr>
+          <p:style>
+            <a:lnRef idx="2">
+              <a:schemeClr val="accent1"/>
+            </a:lnRef>
+            <a:fillRef idx="0">
+              <a:schemeClr val="accent1"/>
+            </a:fillRef>
+            <a:effectRef idx="0">
               <a:schemeClr val="accent1"/>
             </a:effectRef>
             <a:fontRef idx="minor">
@@ -16511,15 +16854,16 @@
                 <a:srgbClr val="8FBFBF"/>
               </a:solidFill>
             </a:ln>
-          </p:spPr>
-          <p:style>
-            <a:lnRef idx="2">
-              <a:schemeClr val="accent1"/>
-            </a:lnRef>
-            <a:fillRef idx="0">
-              <a:schemeClr val="accent1"/>
-            </a:fillRef>
-            <a:effectRef idx="1">
+            <a:effectLst/>
+          </p:spPr>
+          <p:style>
+            <a:lnRef idx="2">
+              <a:schemeClr val="accent1"/>
+            </a:lnRef>
+            <a:fillRef idx="0">
+              <a:schemeClr val="accent1"/>
+            </a:fillRef>
+            <a:effectRef idx="0">
               <a:schemeClr val="accent1"/>
             </a:effectRef>
             <a:fontRef idx="minor">
@@ -16546,15 +16890,16 @@
                 <a:srgbClr val="8FBFBF"/>
               </a:solidFill>
             </a:ln>
-          </p:spPr>
-          <p:style>
-            <a:lnRef idx="2">
-              <a:schemeClr val="accent1"/>
-            </a:lnRef>
-            <a:fillRef idx="0">
-              <a:schemeClr val="accent1"/>
-            </a:fillRef>
-            <a:effectRef idx="1">
+            <a:effectLst/>
+          </p:spPr>
+          <p:style>
+            <a:lnRef idx="2">
+              <a:schemeClr val="accent1"/>
+            </a:lnRef>
+            <a:fillRef idx="0">
+              <a:schemeClr val="accent1"/>
+            </a:fillRef>
+            <a:effectRef idx="0">
               <a:schemeClr val="accent1"/>
             </a:effectRef>
             <a:fontRef idx="minor">
@@ -16581,15 +16926,16 @@
                 <a:srgbClr val="8FBFBF"/>
               </a:solidFill>
             </a:ln>
-          </p:spPr>
-          <p:style>
-            <a:lnRef idx="2">
-              <a:schemeClr val="accent1"/>
-            </a:lnRef>
-            <a:fillRef idx="0">
-              <a:schemeClr val="accent1"/>
-            </a:fillRef>
-            <a:effectRef idx="1">
+            <a:effectLst/>
+          </p:spPr>
+          <p:style>
+            <a:lnRef idx="2">
+              <a:schemeClr val="accent1"/>
+            </a:lnRef>
+            <a:fillRef idx="0">
+              <a:schemeClr val="accent1"/>
+            </a:fillRef>
+            <a:effectRef idx="0">
               <a:schemeClr val="accent1"/>
             </a:effectRef>
             <a:fontRef idx="minor">

--- a/gakkyu/tegami/pptx/T4.pptx
+++ b/gakkyu/tegami/pptx/T4.pptx
@@ -3568,44 +3568,9 @@
           </a:p>
         </p:txBody>
       </p:sp>
-      <p:sp>
-        <p:nvSpPr>
-          <p:cNvPr id="3" name="名前欄"/>
-          <p:cNvSpPr txBox="1"/>
-          <p:nvPr/>
-        </p:nvSpPr>
-        <p:spPr>
-          <a:xfrm>
-            <a:off x="3600000" y="475200"/>
-            <a:ext cx="3420000" cy="252000"/>
-          </a:xfrm>
-          <a:prstGeom prst="rect">
-            <a:avLst/>
-          </a:prstGeom>
-          <a:noFill/>
-        </p:spPr>
-        <p:txBody>
-          <a:bodyPr wrap="square" lIns="0" rIns="0" tIns="0" bIns="0" anchor="t">
-            <a:spAutoFit/>
-          </a:bodyPr>
-          <a:lstStyle/>
-          <a:p>
-            <a:pPr algn="r"/>
-            <a:r>
-              <a:rPr sz="1000" b="0">
-                <a:solidFill>
-                  <a:srgbClr val="38424B"/>
-                </a:solidFill>
-                <a:latin typeface="UD デジタル 教科書体 N-R"/>
-              </a:rPr>
-              <a:t>（　　年　　組　　名前　　　　　　　　）</a:t>
-            </a:r>
-          </a:p>
-        </p:txBody>
-      </p:sp>
       <p:cxnSp>
         <p:nvCxnSpPr>
-          <p:cNvPr id="4" name="見出しの線"/>
+          <p:cNvPr id="3" name="見出しの線"/>
           <p:cNvCxnSpPr/>
           <p:nvPr/>
         </p:nvCxnSpPr>
@@ -3641,7 +3606,7 @@
       </p:cxnSp>
       <p:grpSp>
         <p:nvGrpSpPr>
-          <p:cNvPr id="5" name="1行目（右から）"/>
+          <p:cNvPr id="4" name="1行目（右から）"/>
           <p:cNvGrpSpPr/>
           <p:nvPr/>
         </p:nvGrpSpPr>
@@ -3655,7 +3620,7 @@
         </p:grpSpPr>
         <p:sp>
           <p:nvSpPr>
-            <p:cNvPr id="6" name="外わく"/>
+            <p:cNvPr id="5" name="外わく"/>
             <p:cNvSpPr/>
             <p:nvPr/>
           </p:nvSpPr>
@@ -3699,7 +3664,7 @@
         </p:sp>
         <p:cxnSp>
           <p:nvCxnSpPr>
-            <p:cNvPr id="7" name="マスの線 1"/>
+            <p:cNvPr id="6" name="マスの線 1"/>
             <p:cNvCxnSpPr/>
             <p:nvPr/>
           </p:nvCxnSpPr>
@@ -3735,7 +3700,7 @@
         </p:cxnSp>
         <p:cxnSp>
           <p:nvCxnSpPr>
-            <p:cNvPr id="8" name="マスの線 2"/>
+            <p:cNvPr id="7" name="マスの線 2"/>
             <p:cNvCxnSpPr/>
             <p:nvPr/>
           </p:nvCxnSpPr>
@@ -3771,7 +3736,7 @@
         </p:cxnSp>
         <p:cxnSp>
           <p:nvCxnSpPr>
-            <p:cNvPr id="9" name="マスの線 3"/>
+            <p:cNvPr id="8" name="マスの線 3"/>
             <p:cNvCxnSpPr/>
             <p:nvPr/>
           </p:nvCxnSpPr>
@@ -3807,7 +3772,7 @@
         </p:cxnSp>
         <p:cxnSp>
           <p:nvCxnSpPr>
-            <p:cNvPr id="10" name="マスの線 4"/>
+            <p:cNvPr id="9" name="マスの線 4"/>
             <p:cNvCxnSpPr/>
             <p:nvPr/>
           </p:nvCxnSpPr>
@@ -3843,7 +3808,7 @@
         </p:cxnSp>
         <p:cxnSp>
           <p:nvCxnSpPr>
-            <p:cNvPr id="11" name="マスの線 5"/>
+            <p:cNvPr id="10" name="マスの線 5"/>
             <p:cNvCxnSpPr/>
             <p:nvPr/>
           </p:nvCxnSpPr>
@@ -3879,7 +3844,7 @@
         </p:cxnSp>
         <p:cxnSp>
           <p:nvCxnSpPr>
-            <p:cNvPr id="12" name="マスの線 6"/>
+            <p:cNvPr id="11" name="マスの線 6"/>
             <p:cNvCxnSpPr/>
             <p:nvPr/>
           </p:nvCxnSpPr>
@@ -3915,7 +3880,7 @@
         </p:cxnSp>
         <p:cxnSp>
           <p:nvCxnSpPr>
-            <p:cNvPr id="13" name="マスの線 7"/>
+            <p:cNvPr id="12" name="マスの線 7"/>
             <p:cNvCxnSpPr/>
             <p:nvPr/>
           </p:nvCxnSpPr>
@@ -3951,7 +3916,7 @@
         </p:cxnSp>
         <p:cxnSp>
           <p:nvCxnSpPr>
-            <p:cNvPr id="14" name="マスの線 8"/>
+            <p:cNvPr id="13" name="マスの線 8"/>
             <p:cNvCxnSpPr/>
             <p:nvPr/>
           </p:nvCxnSpPr>
@@ -3987,7 +3952,7 @@
         </p:cxnSp>
         <p:cxnSp>
           <p:nvCxnSpPr>
-            <p:cNvPr id="15" name="マスの線 9"/>
+            <p:cNvPr id="14" name="マスの線 9"/>
             <p:cNvCxnSpPr/>
             <p:nvPr/>
           </p:nvCxnSpPr>
@@ -4023,7 +3988,7 @@
         </p:cxnSp>
         <p:cxnSp>
           <p:nvCxnSpPr>
-            <p:cNvPr id="16" name="マスの線 10"/>
+            <p:cNvPr id="15" name="マスの線 10"/>
             <p:cNvCxnSpPr/>
             <p:nvPr/>
           </p:nvCxnSpPr>
@@ -4059,7 +4024,7 @@
         </p:cxnSp>
         <p:cxnSp>
           <p:nvCxnSpPr>
-            <p:cNvPr id="17" name="マスの線 11"/>
+            <p:cNvPr id="16" name="マスの線 11"/>
             <p:cNvCxnSpPr/>
             <p:nvPr/>
           </p:nvCxnSpPr>
@@ -4095,7 +4060,7 @@
         </p:cxnSp>
         <p:cxnSp>
           <p:nvCxnSpPr>
-            <p:cNvPr id="18" name="マスの線 12"/>
+            <p:cNvPr id="17" name="マスの線 12"/>
             <p:cNvCxnSpPr/>
             <p:nvPr/>
           </p:nvCxnSpPr>
@@ -4131,7 +4096,7 @@
         </p:cxnSp>
         <p:cxnSp>
           <p:nvCxnSpPr>
-            <p:cNvPr id="19" name="マスの線 13"/>
+            <p:cNvPr id="18" name="マスの線 13"/>
             <p:cNvCxnSpPr/>
             <p:nvPr/>
           </p:nvCxnSpPr>
@@ -4167,7 +4132,7 @@
         </p:cxnSp>
         <p:cxnSp>
           <p:nvCxnSpPr>
-            <p:cNvPr id="20" name="マスの線 14"/>
+            <p:cNvPr id="19" name="マスの線 14"/>
             <p:cNvCxnSpPr/>
             <p:nvPr/>
           </p:nvCxnSpPr>
@@ -4203,7 +4168,7 @@
         </p:cxnSp>
         <p:cxnSp>
           <p:nvCxnSpPr>
-            <p:cNvPr id="21" name="マスの線 15"/>
+            <p:cNvPr id="20" name="マスの線 15"/>
             <p:cNvCxnSpPr/>
             <p:nvPr/>
           </p:nvCxnSpPr>
@@ -4239,7 +4204,7 @@
         </p:cxnSp>
         <p:cxnSp>
           <p:nvCxnSpPr>
-            <p:cNvPr id="22" name="マスの線 16"/>
+            <p:cNvPr id="21" name="マスの線 16"/>
             <p:cNvCxnSpPr/>
             <p:nvPr/>
           </p:nvCxnSpPr>
@@ -4275,7 +4240,7 @@
         </p:cxnSp>
         <p:cxnSp>
           <p:nvCxnSpPr>
-            <p:cNvPr id="23" name="マスの線 17"/>
+            <p:cNvPr id="22" name="マスの線 17"/>
             <p:cNvCxnSpPr/>
             <p:nvPr/>
           </p:nvCxnSpPr>
@@ -4311,7 +4276,7 @@
         </p:cxnSp>
         <p:cxnSp>
           <p:nvCxnSpPr>
-            <p:cNvPr id="24" name="マスの線 18"/>
+            <p:cNvPr id="23" name="マスの線 18"/>
             <p:cNvCxnSpPr/>
             <p:nvPr/>
           </p:nvCxnSpPr>
@@ -4347,7 +4312,7 @@
         </p:cxnSp>
         <p:cxnSp>
           <p:nvCxnSpPr>
-            <p:cNvPr id="25" name="マスの線 19"/>
+            <p:cNvPr id="24" name="マスの線 19"/>
             <p:cNvCxnSpPr/>
             <p:nvPr/>
           </p:nvCxnSpPr>
@@ -4383,7 +4348,7 @@
         </p:cxnSp>
         <p:cxnSp>
           <p:nvCxnSpPr>
-            <p:cNvPr id="26" name="マスの線 20"/>
+            <p:cNvPr id="25" name="マスの線 20"/>
             <p:cNvCxnSpPr/>
             <p:nvPr/>
           </p:nvCxnSpPr>
@@ -4419,7 +4384,7 @@
         </p:cxnSp>
         <p:cxnSp>
           <p:nvCxnSpPr>
-            <p:cNvPr id="27" name="マスの線 21"/>
+            <p:cNvPr id="26" name="マスの線 21"/>
             <p:cNvCxnSpPr/>
             <p:nvPr/>
           </p:nvCxnSpPr>
@@ -4455,7 +4420,7 @@
         </p:cxnSp>
         <p:cxnSp>
           <p:nvCxnSpPr>
-            <p:cNvPr id="28" name="マスの線 22"/>
+            <p:cNvPr id="27" name="マスの線 22"/>
             <p:cNvCxnSpPr/>
             <p:nvPr/>
           </p:nvCxnSpPr>
@@ -4491,7 +4456,7 @@
         </p:cxnSp>
         <p:cxnSp>
           <p:nvCxnSpPr>
-            <p:cNvPr id="29" name="マスの線 23"/>
+            <p:cNvPr id="28" name="マスの線 23"/>
             <p:cNvCxnSpPr/>
             <p:nvPr/>
           </p:nvCxnSpPr>
@@ -4528,7 +4493,7 @@
       </p:grpSp>
       <p:grpSp>
         <p:nvGrpSpPr>
-          <p:cNvPr id="30" name="2行目（右から）"/>
+          <p:cNvPr id="29" name="2行目（右から）"/>
           <p:cNvGrpSpPr/>
           <p:nvPr/>
         </p:nvGrpSpPr>
@@ -4542,7 +4507,7 @@
         </p:grpSpPr>
         <p:sp>
           <p:nvSpPr>
-            <p:cNvPr id="31" name="外わく"/>
+            <p:cNvPr id="30" name="外わく"/>
             <p:cNvSpPr/>
             <p:nvPr/>
           </p:nvSpPr>
@@ -4586,7 +4551,7 @@
         </p:sp>
         <p:cxnSp>
           <p:nvCxnSpPr>
-            <p:cNvPr id="32" name="マスの線 1"/>
+            <p:cNvPr id="31" name="マスの線 1"/>
             <p:cNvCxnSpPr/>
             <p:nvPr/>
           </p:nvCxnSpPr>
@@ -4622,7 +4587,7 @@
         </p:cxnSp>
         <p:cxnSp>
           <p:nvCxnSpPr>
-            <p:cNvPr id="33" name="マスの線 2"/>
+            <p:cNvPr id="32" name="マスの線 2"/>
             <p:cNvCxnSpPr/>
             <p:nvPr/>
           </p:nvCxnSpPr>
@@ -4658,7 +4623,7 @@
         </p:cxnSp>
         <p:cxnSp>
           <p:nvCxnSpPr>
-            <p:cNvPr id="34" name="マスの線 3"/>
+            <p:cNvPr id="33" name="マスの線 3"/>
             <p:cNvCxnSpPr/>
             <p:nvPr/>
           </p:nvCxnSpPr>
@@ -4694,7 +4659,7 @@
         </p:cxnSp>
         <p:cxnSp>
           <p:nvCxnSpPr>
-            <p:cNvPr id="35" name="マスの線 4"/>
+            <p:cNvPr id="34" name="マスの線 4"/>
             <p:cNvCxnSpPr/>
             <p:nvPr/>
           </p:nvCxnSpPr>
@@ -4730,7 +4695,7 @@
         </p:cxnSp>
         <p:cxnSp>
           <p:nvCxnSpPr>
-            <p:cNvPr id="36" name="マスの線 5"/>
+            <p:cNvPr id="35" name="マスの線 5"/>
             <p:cNvCxnSpPr/>
             <p:nvPr/>
           </p:nvCxnSpPr>
@@ -4766,7 +4731,7 @@
         </p:cxnSp>
         <p:cxnSp>
           <p:nvCxnSpPr>
-            <p:cNvPr id="37" name="マスの線 6"/>
+            <p:cNvPr id="36" name="マスの線 6"/>
             <p:cNvCxnSpPr/>
             <p:nvPr/>
           </p:nvCxnSpPr>
@@ -4802,7 +4767,7 @@
         </p:cxnSp>
         <p:cxnSp>
           <p:nvCxnSpPr>
-            <p:cNvPr id="38" name="マスの線 7"/>
+            <p:cNvPr id="37" name="マスの線 7"/>
             <p:cNvCxnSpPr/>
             <p:nvPr/>
           </p:nvCxnSpPr>
@@ -4838,7 +4803,7 @@
         </p:cxnSp>
         <p:cxnSp>
           <p:nvCxnSpPr>
-            <p:cNvPr id="39" name="マスの線 8"/>
+            <p:cNvPr id="38" name="マスの線 8"/>
             <p:cNvCxnSpPr/>
             <p:nvPr/>
           </p:nvCxnSpPr>
@@ -4874,7 +4839,7 @@
         </p:cxnSp>
         <p:cxnSp>
           <p:nvCxnSpPr>
-            <p:cNvPr id="40" name="マスの線 9"/>
+            <p:cNvPr id="39" name="マスの線 9"/>
             <p:cNvCxnSpPr/>
             <p:nvPr/>
           </p:nvCxnSpPr>
@@ -4910,7 +4875,7 @@
         </p:cxnSp>
         <p:cxnSp>
           <p:nvCxnSpPr>
-            <p:cNvPr id="41" name="マスの線 10"/>
+            <p:cNvPr id="40" name="マスの線 10"/>
             <p:cNvCxnSpPr/>
             <p:nvPr/>
           </p:nvCxnSpPr>
@@ -4946,7 +4911,7 @@
         </p:cxnSp>
         <p:cxnSp>
           <p:nvCxnSpPr>
-            <p:cNvPr id="42" name="マスの線 11"/>
+            <p:cNvPr id="41" name="マスの線 11"/>
             <p:cNvCxnSpPr/>
             <p:nvPr/>
           </p:nvCxnSpPr>
@@ -4982,7 +4947,7 @@
         </p:cxnSp>
         <p:cxnSp>
           <p:nvCxnSpPr>
-            <p:cNvPr id="43" name="マスの線 12"/>
+            <p:cNvPr id="42" name="マスの線 12"/>
             <p:cNvCxnSpPr/>
             <p:nvPr/>
           </p:nvCxnSpPr>
@@ -5018,7 +4983,7 @@
         </p:cxnSp>
         <p:cxnSp>
           <p:nvCxnSpPr>
-            <p:cNvPr id="44" name="マスの線 13"/>
+            <p:cNvPr id="43" name="マスの線 13"/>
             <p:cNvCxnSpPr/>
             <p:nvPr/>
           </p:nvCxnSpPr>
@@ -5054,7 +5019,7 @@
         </p:cxnSp>
         <p:cxnSp>
           <p:nvCxnSpPr>
-            <p:cNvPr id="45" name="マスの線 14"/>
+            <p:cNvPr id="44" name="マスの線 14"/>
             <p:cNvCxnSpPr/>
             <p:nvPr/>
           </p:nvCxnSpPr>
@@ -5090,7 +5055,7 @@
         </p:cxnSp>
         <p:cxnSp>
           <p:nvCxnSpPr>
-            <p:cNvPr id="46" name="マスの線 15"/>
+            <p:cNvPr id="45" name="マスの線 15"/>
             <p:cNvCxnSpPr/>
             <p:nvPr/>
           </p:nvCxnSpPr>
@@ -5126,7 +5091,7 @@
         </p:cxnSp>
         <p:cxnSp>
           <p:nvCxnSpPr>
-            <p:cNvPr id="47" name="マスの線 16"/>
+            <p:cNvPr id="46" name="マスの線 16"/>
             <p:cNvCxnSpPr/>
             <p:nvPr/>
           </p:nvCxnSpPr>
@@ -5162,7 +5127,7 @@
         </p:cxnSp>
         <p:cxnSp>
           <p:nvCxnSpPr>
-            <p:cNvPr id="48" name="マスの線 17"/>
+            <p:cNvPr id="47" name="マスの線 17"/>
             <p:cNvCxnSpPr/>
             <p:nvPr/>
           </p:nvCxnSpPr>
@@ -5198,7 +5163,7 @@
         </p:cxnSp>
         <p:cxnSp>
           <p:nvCxnSpPr>
-            <p:cNvPr id="49" name="マスの線 18"/>
+            <p:cNvPr id="48" name="マスの線 18"/>
             <p:cNvCxnSpPr/>
             <p:nvPr/>
           </p:nvCxnSpPr>
@@ -5234,7 +5199,7 @@
         </p:cxnSp>
         <p:cxnSp>
           <p:nvCxnSpPr>
-            <p:cNvPr id="50" name="マスの線 19"/>
+            <p:cNvPr id="49" name="マスの線 19"/>
             <p:cNvCxnSpPr/>
             <p:nvPr/>
           </p:nvCxnSpPr>
@@ -5270,7 +5235,7 @@
         </p:cxnSp>
         <p:cxnSp>
           <p:nvCxnSpPr>
-            <p:cNvPr id="51" name="マスの線 20"/>
+            <p:cNvPr id="50" name="マスの線 20"/>
             <p:cNvCxnSpPr/>
             <p:nvPr/>
           </p:nvCxnSpPr>
@@ -5306,7 +5271,7 @@
         </p:cxnSp>
         <p:cxnSp>
           <p:nvCxnSpPr>
-            <p:cNvPr id="52" name="マスの線 21"/>
+            <p:cNvPr id="51" name="マスの線 21"/>
             <p:cNvCxnSpPr/>
             <p:nvPr/>
           </p:nvCxnSpPr>
@@ -5342,7 +5307,7 @@
         </p:cxnSp>
         <p:cxnSp>
           <p:nvCxnSpPr>
-            <p:cNvPr id="53" name="マスの線 22"/>
+            <p:cNvPr id="52" name="マスの線 22"/>
             <p:cNvCxnSpPr/>
             <p:nvPr/>
           </p:nvCxnSpPr>
@@ -5378,7 +5343,7 @@
         </p:cxnSp>
         <p:cxnSp>
           <p:nvCxnSpPr>
-            <p:cNvPr id="54" name="マスの線 23"/>
+            <p:cNvPr id="53" name="マスの線 23"/>
             <p:cNvCxnSpPr/>
             <p:nvPr/>
           </p:nvCxnSpPr>
@@ -5415,7 +5380,7 @@
       </p:grpSp>
       <p:grpSp>
         <p:nvGrpSpPr>
-          <p:cNvPr id="55" name="3行目（右から）"/>
+          <p:cNvPr id="54" name="3行目（右から）"/>
           <p:cNvGrpSpPr/>
           <p:nvPr/>
         </p:nvGrpSpPr>
@@ -5429,7 +5394,7 @@
         </p:grpSpPr>
         <p:sp>
           <p:nvSpPr>
-            <p:cNvPr id="56" name="外わく"/>
+            <p:cNvPr id="55" name="外わく"/>
             <p:cNvSpPr/>
             <p:nvPr/>
           </p:nvSpPr>
@@ -5473,7 +5438,7 @@
         </p:sp>
         <p:cxnSp>
           <p:nvCxnSpPr>
-            <p:cNvPr id="57" name="マスの線 1"/>
+            <p:cNvPr id="56" name="マスの線 1"/>
             <p:cNvCxnSpPr/>
             <p:nvPr/>
           </p:nvCxnSpPr>
@@ -5509,7 +5474,7 @@
         </p:cxnSp>
         <p:cxnSp>
           <p:nvCxnSpPr>
-            <p:cNvPr id="58" name="マスの線 2"/>
+            <p:cNvPr id="57" name="マスの線 2"/>
             <p:cNvCxnSpPr/>
             <p:nvPr/>
           </p:nvCxnSpPr>
@@ -5545,7 +5510,7 @@
         </p:cxnSp>
         <p:cxnSp>
           <p:nvCxnSpPr>
-            <p:cNvPr id="59" name="マスの線 3"/>
+            <p:cNvPr id="58" name="マスの線 3"/>
             <p:cNvCxnSpPr/>
             <p:nvPr/>
           </p:nvCxnSpPr>
@@ -5581,7 +5546,7 @@
         </p:cxnSp>
         <p:cxnSp>
           <p:nvCxnSpPr>
-            <p:cNvPr id="60" name="マスの線 4"/>
+            <p:cNvPr id="59" name="マスの線 4"/>
             <p:cNvCxnSpPr/>
             <p:nvPr/>
           </p:nvCxnSpPr>
@@ -5617,7 +5582,7 @@
         </p:cxnSp>
         <p:cxnSp>
           <p:nvCxnSpPr>
-            <p:cNvPr id="61" name="マスの線 5"/>
+            <p:cNvPr id="60" name="マスの線 5"/>
             <p:cNvCxnSpPr/>
             <p:nvPr/>
           </p:nvCxnSpPr>
@@ -5653,7 +5618,7 @@
         </p:cxnSp>
         <p:cxnSp>
           <p:nvCxnSpPr>
-            <p:cNvPr id="62" name="マスの線 6"/>
+            <p:cNvPr id="61" name="マスの線 6"/>
             <p:cNvCxnSpPr/>
             <p:nvPr/>
           </p:nvCxnSpPr>
@@ -5689,7 +5654,7 @@
         </p:cxnSp>
         <p:cxnSp>
           <p:nvCxnSpPr>
-            <p:cNvPr id="63" name="マスの線 7"/>
+            <p:cNvPr id="62" name="マスの線 7"/>
             <p:cNvCxnSpPr/>
             <p:nvPr/>
           </p:nvCxnSpPr>
@@ -5725,7 +5690,7 @@
         </p:cxnSp>
         <p:cxnSp>
           <p:nvCxnSpPr>
-            <p:cNvPr id="64" name="マスの線 8"/>
+            <p:cNvPr id="63" name="マスの線 8"/>
             <p:cNvCxnSpPr/>
             <p:nvPr/>
           </p:nvCxnSpPr>
@@ -5761,7 +5726,7 @@
         </p:cxnSp>
         <p:cxnSp>
           <p:nvCxnSpPr>
-            <p:cNvPr id="65" name="マスの線 9"/>
+            <p:cNvPr id="64" name="マスの線 9"/>
             <p:cNvCxnSpPr/>
             <p:nvPr/>
           </p:nvCxnSpPr>
@@ -5797,7 +5762,7 @@
         </p:cxnSp>
         <p:cxnSp>
           <p:nvCxnSpPr>
-            <p:cNvPr id="66" name="マスの線 10"/>
+            <p:cNvPr id="65" name="マスの線 10"/>
             <p:cNvCxnSpPr/>
             <p:nvPr/>
           </p:nvCxnSpPr>
@@ -5833,7 +5798,7 @@
         </p:cxnSp>
         <p:cxnSp>
           <p:nvCxnSpPr>
-            <p:cNvPr id="67" name="マスの線 11"/>
+            <p:cNvPr id="66" name="マスの線 11"/>
             <p:cNvCxnSpPr/>
             <p:nvPr/>
           </p:nvCxnSpPr>
@@ -5869,7 +5834,7 @@
         </p:cxnSp>
         <p:cxnSp>
           <p:nvCxnSpPr>
-            <p:cNvPr id="68" name="マスの線 12"/>
+            <p:cNvPr id="67" name="マスの線 12"/>
             <p:cNvCxnSpPr/>
             <p:nvPr/>
           </p:nvCxnSpPr>
@@ -5905,7 +5870,7 @@
         </p:cxnSp>
         <p:cxnSp>
           <p:nvCxnSpPr>
-            <p:cNvPr id="69" name="マスの線 13"/>
+            <p:cNvPr id="68" name="マスの線 13"/>
             <p:cNvCxnSpPr/>
             <p:nvPr/>
           </p:nvCxnSpPr>
@@ -5941,7 +5906,7 @@
         </p:cxnSp>
         <p:cxnSp>
           <p:nvCxnSpPr>
-            <p:cNvPr id="70" name="マスの線 14"/>
+            <p:cNvPr id="69" name="マスの線 14"/>
             <p:cNvCxnSpPr/>
             <p:nvPr/>
           </p:nvCxnSpPr>
@@ -5977,7 +5942,7 @@
         </p:cxnSp>
         <p:cxnSp>
           <p:nvCxnSpPr>
-            <p:cNvPr id="71" name="マスの線 15"/>
+            <p:cNvPr id="70" name="マスの線 15"/>
             <p:cNvCxnSpPr/>
             <p:nvPr/>
           </p:nvCxnSpPr>
@@ -6013,7 +5978,7 @@
         </p:cxnSp>
         <p:cxnSp>
           <p:nvCxnSpPr>
-            <p:cNvPr id="72" name="マスの線 16"/>
+            <p:cNvPr id="71" name="マスの線 16"/>
             <p:cNvCxnSpPr/>
             <p:nvPr/>
           </p:nvCxnSpPr>
@@ -6049,7 +6014,7 @@
         </p:cxnSp>
         <p:cxnSp>
           <p:nvCxnSpPr>
-            <p:cNvPr id="73" name="マスの線 17"/>
+            <p:cNvPr id="72" name="マスの線 17"/>
             <p:cNvCxnSpPr/>
             <p:nvPr/>
           </p:nvCxnSpPr>
@@ -6085,7 +6050,7 @@
         </p:cxnSp>
         <p:cxnSp>
           <p:nvCxnSpPr>
-            <p:cNvPr id="74" name="マスの線 18"/>
+            <p:cNvPr id="73" name="マスの線 18"/>
             <p:cNvCxnSpPr/>
             <p:nvPr/>
           </p:nvCxnSpPr>
@@ -6121,7 +6086,7 @@
         </p:cxnSp>
         <p:cxnSp>
           <p:nvCxnSpPr>
-            <p:cNvPr id="75" name="マスの線 19"/>
+            <p:cNvPr id="74" name="マスの線 19"/>
             <p:cNvCxnSpPr/>
             <p:nvPr/>
           </p:nvCxnSpPr>
@@ -6157,7 +6122,7 @@
         </p:cxnSp>
         <p:cxnSp>
           <p:nvCxnSpPr>
-            <p:cNvPr id="76" name="マスの線 20"/>
+            <p:cNvPr id="75" name="マスの線 20"/>
             <p:cNvCxnSpPr/>
             <p:nvPr/>
           </p:nvCxnSpPr>
@@ -6193,7 +6158,7 @@
         </p:cxnSp>
         <p:cxnSp>
           <p:nvCxnSpPr>
-            <p:cNvPr id="77" name="マスの線 21"/>
+            <p:cNvPr id="76" name="マスの線 21"/>
             <p:cNvCxnSpPr/>
             <p:nvPr/>
           </p:nvCxnSpPr>
@@ -6229,7 +6194,7 @@
         </p:cxnSp>
         <p:cxnSp>
           <p:nvCxnSpPr>
-            <p:cNvPr id="78" name="マスの線 22"/>
+            <p:cNvPr id="77" name="マスの線 22"/>
             <p:cNvCxnSpPr/>
             <p:nvPr/>
           </p:nvCxnSpPr>
@@ -6265,7 +6230,7 @@
         </p:cxnSp>
         <p:cxnSp>
           <p:nvCxnSpPr>
-            <p:cNvPr id="79" name="マスの線 23"/>
+            <p:cNvPr id="78" name="マスの線 23"/>
             <p:cNvCxnSpPr/>
             <p:nvPr/>
           </p:nvCxnSpPr>
@@ -6302,7 +6267,7 @@
       </p:grpSp>
       <p:grpSp>
         <p:nvGrpSpPr>
-          <p:cNvPr id="80" name="4行目（右から）"/>
+          <p:cNvPr id="79" name="4行目（右から）"/>
           <p:cNvGrpSpPr/>
           <p:nvPr/>
         </p:nvGrpSpPr>
@@ -6316,7 +6281,7 @@
         </p:grpSpPr>
         <p:sp>
           <p:nvSpPr>
-            <p:cNvPr id="81" name="外わく"/>
+            <p:cNvPr id="80" name="外わく"/>
             <p:cNvSpPr/>
             <p:nvPr/>
           </p:nvSpPr>
@@ -6360,7 +6325,7 @@
         </p:sp>
         <p:cxnSp>
           <p:nvCxnSpPr>
-            <p:cNvPr id="82" name="マスの線 1"/>
+            <p:cNvPr id="81" name="マスの線 1"/>
             <p:cNvCxnSpPr/>
             <p:nvPr/>
           </p:nvCxnSpPr>
@@ -6396,7 +6361,7 @@
         </p:cxnSp>
         <p:cxnSp>
           <p:nvCxnSpPr>
-            <p:cNvPr id="83" name="マスの線 2"/>
+            <p:cNvPr id="82" name="マスの線 2"/>
             <p:cNvCxnSpPr/>
             <p:nvPr/>
           </p:nvCxnSpPr>
@@ -6432,7 +6397,7 @@
         </p:cxnSp>
         <p:cxnSp>
           <p:nvCxnSpPr>
-            <p:cNvPr id="84" name="マスの線 3"/>
+            <p:cNvPr id="83" name="マスの線 3"/>
             <p:cNvCxnSpPr/>
             <p:nvPr/>
           </p:nvCxnSpPr>
@@ -6468,7 +6433,7 @@
         </p:cxnSp>
         <p:cxnSp>
           <p:nvCxnSpPr>
-            <p:cNvPr id="85" name="マスの線 4"/>
+            <p:cNvPr id="84" name="マスの線 4"/>
             <p:cNvCxnSpPr/>
             <p:nvPr/>
           </p:nvCxnSpPr>
@@ -6504,7 +6469,7 @@
         </p:cxnSp>
         <p:cxnSp>
           <p:nvCxnSpPr>
-            <p:cNvPr id="86" name="マスの線 5"/>
+            <p:cNvPr id="85" name="マスの線 5"/>
             <p:cNvCxnSpPr/>
             <p:nvPr/>
           </p:nvCxnSpPr>
@@ -6540,7 +6505,7 @@
         </p:cxnSp>
         <p:cxnSp>
           <p:nvCxnSpPr>
-            <p:cNvPr id="87" name="マスの線 6"/>
+            <p:cNvPr id="86" name="マスの線 6"/>
             <p:cNvCxnSpPr/>
             <p:nvPr/>
           </p:nvCxnSpPr>
@@ -6576,7 +6541,7 @@
         </p:cxnSp>
         <p:cxnSp>
           <p:nvCxnSpPr>
-            <p:cNvPr id="88" name="マスの線 7"/>
+            <p:cNvPr id="87" name="マスの線 7"/>
             <p:cNvCxnSpPr/>
             <p:nvPr/>
           </p:nvCxnSpPr>
@@ -6612,7 +6577,7 @@
         </p:cxnSp>
         <p:cxnSp>
           <p:nvCxnSpPr>
-            <p:cNvPr id="89" name="マスの線 8"/>
+            <p:cNvPr id="88" name="マスの線 8"/>
             <p:cNvCxnSpPr/>
             <p:nvPr/>
           </p:nvCxnSpPr>
@@ -6648,7 +6613,7 @@
         </p:cxnSp>
         <p:cxnSp>
           <p:nvCxnSpPr>
-            <p:cNvPr id="90" name="マスの線 9"/>
+            <p:cNvPr id="89" name="マスの線 9"/>
             <p:cNvCxnSpPr/>
             <p:nvPr/>
           </p:nvCxnSpPr>
@@ -6684,7 +6649,7 @@
         </p:cxnSp>
         <p:cxnSp>
           <p:nvCxnSpPr>
-            <p:cNvPr id="91" name="マスの線 10"/>
+            <p:cNvPr id="90" name="マスの線 10"/>
             <p:cNvCxnSpPr/>
             <p:nvPr/>
           </p:nvCxnSpPr>
@@ -6720,7 +6685,7 @@
         </p:cxnSp>
         <p:cxnSp>
           <p:nvCxnSpPr>
-            <p:cNvPr id="92" name="マスの線 11"/>
+            <p:cNvPr id="91" name="マスの線 11"/>
             <p:cNvCxnSpPr/>
             <p:nvPr/>
           </p:nvCxnSpPr>
@@ -6756,7 +6721,7 @@
         </p:cxnSp>
         <p:cxnSp>
           <p:nvCxnSpPr>
-            <p:cNvPr id="93" name="マスの線 12"/>
+            <p:cNvPr id="92" name="マスの線 12"/>
             <p:cNvCxnSpPr/>
             <p:nvPr/>
           </p:nvCxnSpPr>
@@ -6792,7 +6757,7 @@
         </p:cxnSp>
         <p:cxnSp>
           <p:nvCxnSpPr>
-            <p:cNvPr id="94" name="マスの線 13"/>
+            <p:cNvPr id="93" name="マスの線 13"/>
             <p:cNvCxnSpPr/>
             <p:nvPr/>
           </p:nvCxnSpPr>
@@ -6828,7 +6793,7 @@
         </p:cxnSp>
         <p:cxnSp>
           <p:nvCxnSpPr>
-            <p:cNvPr id="95" name="マスの線 14"/>
+            <p:cNvPr id="94" name="マスの線 14"/>
             <p:cNvCxnSpPr/>
             <p:nvPr/>
           </p:nvCxnSpPr>
@@ -6864,7 +6829,7 @@
         </p:cxnSp>
         <p:cxnSp>
           <p:nvCxnSpPr>
-            <p:cNvPr id="96" name="マスの線 15"/>
+            <p:cNvPr id="95" name="マスの線 15"/>
             <p:cNvCxnSpPr/>
             <p:nvPr/>
           </p:nvCxnSpPr>
@@ -6900,7 +6865,7 @@
         </p:cxnSp>
         <p:cxnSp>
           <p:nvCxnSpPr>
-            <p:cNvPr id="97" name="マスの線 16"/>
+            <p:cNvPr id="96" name="マスの線 16"/>
             <p:cNvCxnSpPr/>
             <p:nvPr/>
           </p:nvCxnSpPr>
@@ -6936,7 +6901,7 @@
         </p:cxnSp>
         <p:cxnSp>
           <p:nvCxnSpPr>
-            <p:cNvPr id="98" name="マスの線 17"/>
+            <p:cNvPr id="97" name="マスの線 17"/>
             <p:cNvCxnSpPr/>
             <p:nvPr/>
           </p:nvCxnSpPr>
@@ -6972,7 +6937,7 @@
         </p:cxnSp>
         <p:cxnSp>
           <p:nvCxnSpPr>
-            <p:cNvPr id="99" name="マスの線 18"/>
+            <p:cNvPr id="98" name="マスの線 18"/>
             <p:cNvCxnSpPr/>
             <p:nvPr/>
           </p:nvCxnSpPr>
@@ -7008,7 +6973,7 @@
         </p:cxnSp>
         <p:cxnSp>
           <p:nvCxnSpPr>
-            <p:cNvPr id="100" name="マスの線 19"/>
+            <p:cNvPr id="99" name="マスの線 19"/>
             <p:cNvCxnSpPr/>
             <p:nvPr/>
           </p:nvCxnSpPr>
@@ -7044,7 +7009,7 @@
         </p:cxnSp>
         <p:cxnSp>
           <p:nvCxnSpPr>
-            <p:cNvPr id="101" name="マスの線 20"/>
+            <p:cNvPr id="100" name="マスの線 20"/>
             <p:cNvCxnSpPr/>
             <p:nvPr/>
           </p:nvCxnSpPr>
@@ -7080,7 +7045,7 @@
         </p:cxnSp>
         <p:cxnSp>
           <p:nvCxnSpPr>
-            <p:cNvPr id="102" name="マスの線 21"/>
+            <p:cNvPr id="101" name="マスの線 21"/>
             <p:cNvCxnSpPr/>
             <p:nvPr/>
           </p:nvCxnSpPr>
@@ -7116,7 +7081,7 @@
         </p:cxnSp>
         <p:cxnSp>
           <p:nvCxnSpPr>
-            <p:cNvPr id="103" name="マスの線 22"/>
+            <p:cNvPr id="102" name="マスの線 22"/>
             <p:cNvCxnSpPr/>
             <p:nvPr/>
           </p:nvCxnSpPr>
@@ -7152,7 +7117,7 @@
         </p:cxnSp>
         <p:cxnSp>
           <p:nvCxnSpPr>
-            <p:cNvPr id="104" name="マスの線 23"/>
+            <p:cNvPr id="103" name="マスの線 23"/>
             <p:cNvCxnSpPr/>
             <p:nvPr/>
           </p:nvCxnSpPr>
@@ -7189,7 +7154,7 @@
       </p:grpSp>
       <p:grpSp>
         <p:nvGrpSpPr>
-          <p:cNvPr id="105" name="5行目（右から）"/>
+          <p:cNvPr id="104" name="5行目（右から）"/>
           <p:cNvGrpSpPr/>
           <p:nvPr/>
         </p:nvGrpSpPr>
@@ -7203,7 +7168,7 @@
         </p:grpSpPr>
         <p:sp>
           <p:nvSpPr>
-            <p:cNvPr id="106" name="外わく"/>
+            <p:cNvPr id="105" name="外わく"/>
             <p:cNvSpPr/>
             <p:nvPr/>
           </p:nvSpPr>
@@ -7247,7 +7212,7 @@
         </p:sp>
         <p:cxnSp>
           <p:nvCxnSpPr>
-            <p:cNvPr id="107" name="マスの線 1"/>
+            <p:cNvPr id="106" name="マスの線 1"/>
             <p:cNvCxnSpPr/>
             <p:nvPr/>
           </p:nvCxnSpPr>
@@ -7283,7 +7248,7 @@
         </p:cxnSp>
         <p:cxnSp>
           <p:nvCxnSpPr>
-            <p:cNvPr id="108" name="マスの線 2"/>
+            <p:cNvPr id="107" name="マスの線 2"/>
             <p:cNvCxnSpPr/>
             <p:nvPr/>
           </p:nvCxnSpPr>
@@ -7319,7 +7284,7 @@
         </p:cxnSp>
         <p:cxnSp>
           <p:nvCxnSpPr>
-            <p:cNvPr id="109" name="マスの線 3"/>
+            <p:cNvPr id="108" name="マスの線 3"/>
             <p:cNvCxnSpPr/>
             <p:nvPr/>
           </p:nvCxnSpPr>
@@ -7355,7 +7320,7 @@
         </p:cxnSp>
         <p:cxnSp>
           <p:nvCxnSpPr>
-            <p:cNvPr id="110" name="マスの線 4"/>
+            <p:cNvPr id="109" name="マスの線 4"/>
             <p:cNvCxnSpPr/>
             <p:nvPr/>
           </p:nvCxnSpPr>
@@ -7391,7 +7356,7 @@
         </p:cxnSp>
         <p:cxnSp>
           <p:nvCxnSpPr>
-            <p:cNvPr id="111" name="マスの線 5"/>
+            <p:cNvPr id="110" name="マスの線 5"/>
             <p:cNvCxnSpPr/>
             <p:nvPr/>
           </p:nvCxnSpPr>
@@ -7427,7 +7392,7 @@
         </p:cxnSp>
         <p:cxnSp>
           <p:nvCxnSpPr>
-            <p:cNvPr id="112" name="マスの線 6"/>
+            <p:cNvPr id="111" name="マスの線 6"/>
             <p:cNvCxnSpPr/>
             <p:nvPr/>
           </p:nvCxnSpPr>
@@ -7463,7 +7428,7 @@
         </p:cxnSp>
         <p:cxnSp>
           <p:nvCxnSpPr>
-            <p:cNvPr id="113" name="マスの線 7"/>
+            <p:cNvPr id="112" name="マスの線 7"/>
             <p:cNvCxnSpPr/>
             <p:nvPr/>
           </p:nvCxnSpPr>
@@ -7499,7 +7464,7 @@
         </p:cxnSp>
         <p:cxnSp>
           <p:nvCxnSpPr>
-            <p:cNvPr id="114" name="マスの線 8"/>
+            <p:cNvPr id="113" name="マスの線 8"/>
             <p:cNvCxnSpPr/>
             <p:nvPr/>
           </p:nvCxnSpPr>
@@ -7535,7 +7500,7 @@
         </p:cxnSp>
         <p:cxnSp>
           <p:nvCxnSpPr>
-            <p:cNvPr id="115" name="マスの線 9"/>
+            <p:cNvPr id="114" name="マスの線 9"/>
             <p:cNvCxnSpPr/>
             <p:nvPr/>
           </p:nvCxnSpPr>
@@ -7571,7 +7536,7 @@
         </p:cxnSp>
         <p:cxnSp>
           <p:nvCxnSpPr>
-            <p:cNvPr id="116" name="マスの線 10"/>
+            <p:cNvPr id="115" name="マスの線 10"/>
             <p:cNvCxnSpPr/>
             <p:nvPr/>
           </p:nvCxnSpPr>
@@ -7607,7 +7572,7 @@
         </p:cxnSp>
         <p:cxnSp>
           <p:nvCxnSpPr>
-            <p:cNvPr id="117" name="マスの線 11"/>
+            <p:cNvPr id="116" name="マスの線 11"/>
             <p:cNvCxnSpPr/>
             <p:nvPr/>
           </p:nvCxnSpPr>
@@ -7643,7 +7608,7 @@
         </p:cxnSp>
         <p:cxnSp>
           <p:nvCxnSpPr>
-            <p:cNvPr id="118" name="マスの線 12"/>
+            <p:cNvPr id="117" name="マスの線 12"/>
             <p:cNvCxnSpPr/>
             <p:nvPr/>
           </p:nvCxnSpPr>
@@ -7679,7 +7644,7 @@
         </p:cxnSp>
         <p:cxnSp>
           <p:nvCxnSpPr>
-            <p:cNvPr id="119" name="マスの線 13"/>
+            <p:cNvPr id="118" name="マスの線 13"/>
             <p:cNvCxnSpPr/>
             <p:nvPr/>
           </p:nvCxnSpPr>
@@ -7715,7 +7680,7 @@
         </p:cxnSp>
         <p:cxnSp>
           <p:nvCxnSpPr>
-            <p:cNvPr id="120" name="マスの線 14"/>
+            <p:cNvPr id="119" name="マスの線 14"/>
             <p:cNvCxnSpPr/>
             <p:nvPr/>
           </p:nvCxnSpPr>
@@ -7751,7 +7716,7 @@
         </p:cxnSp>
         <p:cxnSp>
           <p:nvCxnSpPr>
-            <p:cNvPr id="121" name="マスの線 15"/>
+            <p:cNvPr id="120" name="マスの線 15"/>
             <p:cNvCxnSpPr/>
             <p:nvPr/>
           </p:nvCxnSpPr>
@@ -7787,7 +7752,7 @@
         </p:cxnSp>
         <p:cxnSp>
           <p:nvCxnSpPr>
-            <p:cNvPr id="122" name="マスの線 16"/>
+            <p:cNvPr id="121" name="マスの線 16"/>
             <p:cNvCxnSpPr/>
             <p:nvPr/>
           </p:nvCxnSpPr>
@@ -7823,7 +7788,7 @@
         </p:cxnSp>
         <p:cxnSp>
           <p:nvCxnSpPr>
-            <p:cNvPr id="123" name="マスの線 17"/>
+            <p:cNvPr id="122" name="マスの線 17"/>
             <p:cNvCxnSpPr/>
             <p:nvPr/>
           </p:nvCxnSpPr>
@@ -7859,7 +7824,7 @@
         </p:cxnSp>
         <p:cxnSp>
           <p:nvCxnSpPr>
-            <p:cNvPr id="124" name="マスの線 18"/>
+            <p:cNvPr id="123" name="マスの線 18"/>
             <p:cNvCxnSpPr/>
             <p:nvPr/>
           </p:nvCxnSpPr>
@@ -7895,7 +7860,7 @@
         </p:cxnSp>
         <p:cxnSp>
           <p:nvCxnSpPr>
-            <p:cNvPr id="125" name="マスの線 19"/>
+            <p:cNvPr id="124" name="マスの線 19"/>
             <p:cNvCxnSpPr/>
             <p:nvPr/>
           </p:nvCxnSpPr>
@@ -7931,7 +7896,7 @@
         </p:cxnSp>
         <p:cxnSp>
           <p:nvCxnSpPr>
-            <p:cNvPr id="126" name="マスの線 20"/>
+            <p:cNvPr id="125" name="マスの線 20"/>
             <p:cNvCxnSpPr/>
             <p:nvPr/>
           </p:nvCxnSpPr>
@@ -7967,7 +7932,7 @@
         </p:cxnSp>
         <p:cxnSp>
           <p:nvCxnSpPr>
-            <p:cNvPr id="127" name="マスの線 21"/>
+            <p:cNvPr id="126" name="マスの線 21"/>
             <p:cNvCxnSpPr/>
             <p:nvPr/>
           </p:nvCxnSpPr>
@@ -8003,7 +7968,7 @@
         </p:cxnSp>
         <p:cxnSp>
           <p:nvCxnSpPr>
-            <p:cNvPr id="128" name="マスの線 22"/>
+            <p:cNvPr id="127" name="マスの線 22"/>
             <p:cNvCxnSpPr/>
             <p:nvPr/>
           </p:nvCxnSpPr>
@@ -8039,7 +8004,7 @@
         </p:cxnSp>
         <p:cxnSp>
           <p:nvCxnSpPr>
-            <p:cNvPr id="129" name="マスの線 23"/>
+            <p:cNvPr id="128" name="マスの線 23"/>
             <p:cNvCxnSpPr/>
             <p:nvPr/>
           </p:nvCxnSpPr>
@@ -8076,7 +8041,7 @@
       </p:grpSp>
       <p:grpSp>
         <p:nvGrpSpPr>
-          <p:cNvPr id="130" name="6行目（右から）"/>
+          <p:cNvPr id="129" name="6行目（右から）"/>
           <p:cNvGrpSpPr/>
           <p:nvPr/>
         </p:nvGrpSpPr>
@@ -8090,7 +8055,7 @@
         </p:grpSpPr>
         <p:sp>
           <p:nvSpPr>
-            <p:cNvPr id="131" name="外わく"/>
+            <p:cNvPr id="130" name="外わく"/>
             <p:cNvSpPr/>
             <p:nvPr/>
           </p:nvSpPr>
@@ -8134,7 +8099,7 @@
         </p:sp>
         <p:cxnSp>
           <p:nvCxnSpPr>
-            <p:cNvPr id="132" name="マスの線 1"/>
+            <p:cNvPr id="131" name="マスの線 1"/>
             <p:cNvCxnSpPr/>
             <p:nvPr/>
           </p:nvCxnSpPr>
@@ -8170,7 +8135,7 @@
         </p:cxnSp>
         <p:cxnSp>
           <p:nvCxnSpPr>
-            <p:cNvPr id="133" name="マスの線 2"/>
+            <p:cNvPr id="132" name="マスの線 2"/>
             <p:cNvCxnSpPr/>
             <p:nvPr/>
           </p:nvCxnSpPr>
@@ -8206,7 +8171,7 @@
         </p:cxnSp>
         <p:cxnSp>
           <p:nvCxnSpPr>
-            <p:cNvPr id="134" name="マスの線 3"/>
+            <p:cNvPr id="133" name="マスの線 3"/>
             <p:cNvCxnSpPr/>
             <p:nvPr/>
           </p:nvCxnSpPr>
@@ -8242,7 +8207,7 @@
         </p:cxnSp>
         <p:cxnSp>
           <p:nvCxnSpPr>
-            <p:cNvPr id="135" name="マスの線 4"/>
+            <p:cNvPr id="134" name="マスの線 4"/>
             <p:cNvCxnSpPr/>
             <p:nvPr/>
           </p:nvCxnSpPr>
@@ -8278,7 +8243,7 @@
         </p:cxnSp>
         <p:cxnSp>
           <p:nvCxnSpPr>
-            <p:cNvPr id="136" name="マスの線 5"/>
+            <p:cNvPr id="135" name="マスの線 5"/>
             <p:cNvCxnSpPr/>
             <p:nvPr/>
           </p:nvCxnSpPr>
@@ -8314,7 +8279,7 @@
         </p:cxnSp>
         <p:cxnSp>
           <p:nvCxnSpPr>
-            <p:cNvPr id="137" name="マスの線 6"/>
+            <p:cNvPr id="136" name="マスの線 6"/>
             <p:cNvCxnSpPr/>
             <p:nvPr/>
           </p:nvCxnSpPr>
@@ -8350,7 +8315,7 @@
         </p:cxnSp>
         <p:cxnSp>
           <p:nvCxnSpPr>
-            <p:cNvPr id="138" name="マスの線 7"/>
+            <p:cNvPr id="137" name="マスの線 7"/>
             <p:cNvCxnSpPr/>
             <p:nvPr/>
           </p:nvCxnSpPr>
@@ -8386,7 +8351,7 @@
         </p:cxnSp>
         <p:cxnSp>
           <p:nvCxnSpPr>
-            <p:cNvPr id="139" name="マスの線 8"/>
+            <p:cNvPr id="138" name="マスの線 8"/>
             <p:cNvCxnSpPr/>
             <p:nvPr/>
           </p:nvCxnSpPr>
@@ -8422,7 +8387,7 @@
         </p:cxnSp>
         <p:cxnSp>
           <p:nvCxnSpPr>
-            <p:cNvPr id="140" name="マスの線 9"/>
+            <p:cNvPr id="139" name="マスの線 9"/>
             <p:cNvCxnSpPr/>
             <p:nvPr/>
           </p:nvCxnSpPr>
@@ -8458,7 +8423,7 @@
         </p:cxnSp>
         <p:cxnSp>
           <p:nvCxnSpPr>
-            <p:cNvPr id="141" name="マスの線 10"/>
+            <p:cNvPr id="140" name="マスの線 10"/>
             <p:cNvCxnSpPr/>
             <p:nvPr/>
           </p:nvCxnSpPr>
@@ -8494,7 +8459,7 @@
         </p:cxnSp>
         <p:cxnSp>
           <p:nvCxnSpPr>
-            <p:cNvPr id="142" name="マスの線 11"/>
+            <p:cNvPr id="141" name="マスの線 11"/>
             <p:cNvCxnSpPr/>
             <p:nvPr/>
           </p:nvCxnSpPr>
@@ -8530,7 +8495,7 @@
         </p:cxnSp>
         <p:cxnSp>
           <p:nvCxnSpPr>
-            <p:cNvPr id="143" name="マスの線 12"/>
+            <p:cNvPr id="142" name="マスの線 12"/>
             <p:cNvCxnSpPr/>
             <p:nvPr/>
           </p:nvCxnSpPr>
@@ -8566,7 +8531,7 @@
         </p:cxnSp>
         <p:cxnSp>
           <p:nvCxnSpPr>
-            <p:cNvPr id="144" name="マスの線 13"/>
+            <p:cNvPr id="143" name="マスの線 13"/>
             <p:cNvCxnSpPr/>
             <p:nvPr/>
           </p:nvCxnSpPr>
@@ -8602,7 +8567,7 @@
         </p:cxnSp>
         <p:cxnSp>
           <p:nvCxnSpPr>
-            <p:cNvPr id="145" name="マスの線 14"/>
+            <p:cNvPr id="144" name="マスの線 14"/>
             <p:cNvCxnSpPr/>
             <p:nvPr/>
           </p:nvCxnSpPr>
@@ -8638,7 +8603,7 @@
         </p:cxnSp>
         <p:cxnSp>
           <p:nvCxnSpPr>
-            <p:cNvPr id="146" name="マスの線 15"/>
+            <p:cNvPr id="145" name="マスの線 15"/>
             <p:cNvCxnSpPr/>
             <p:nvPr/>
           </p:nvCxnSpPr>
@@ -8674,7 +8639,7 @@
         </p:cxnSp>
         <p:cxnSp>
           <p:nvCxnSpPr>
-            <p:cNvPr id="147" name="マスの線 16"/>
+            <p:cNvPr id="146" name="マスの線 16"/>
             <p:cNvCxnSpPr/>
             <p:nvPr/>
           </p:nvCxnSpPr>
@@ -8710,7 +8675,7 @@
         </p:cxnSp>
         <p:cxnSp>
           <p:nvCxnSpPr>
-            <p:cNvPr id="148" name="マスの線 17"/>
+            <p:cNvPr id="147" name="マスの線 17"/>
             <p:cNvCxnSpPr/>
             <p:nvPr/>
           </p:nvCxnSpPr>
@@ -8746,7 +8711,7 @@
         </p:cxnSp>
         <p:cxnSp>
           <p:nvCxnSpPr>
-            <p:cNvPr id="149" name="マスの線 18"/>
+            <p:cNvPr id="148" name="マスの線 18"/>
             <p:cNvCxnSpPr/>
             <p:nvPr/>
           </p:nvCxnSpPr>
@@ -8782,7 +8747,7 @@
         </p:cxnSp>
         <p:cxnSp>
           <p:nvCxnSpPr>
-            <p:cNvPr id="150" name="マスの線 19"/>
+            <p:cNvPr id="149" name="マスの線 19"/>
             <p:cNvCxnSpPr/>
             <p:nvPr/>
           </p:nvCxnSpPr>
@@ -8818,7 +8783,7 @@
         </p:cxnSp>
         <p:cxnSp>
           <p:nvCxnSpPr>
-            <p:cNvPr id="151" name="マスの線 20"/>
+            <p:cNvPr id="150" name="マスの線 20"/>
             <p:cNvCxnSpPr/>
             <p:nvPr/>
           </p:nvCxnSpPr>
@@ -8854,7 +8819,7 @@
         </p:cxnSp>
         <p:cxnSp>
           <p:nvCxnSpPr>
-            <p:cNvPr id="152" name="マスの線 21"/>
+            <p:cNvPr id="151" name="マスの線 21"/>
             <p:cNvCxnSpPr/>
             <p:nvPr/>
           </p:nvCxnSpPr>
@@ -8890,7 +8855,7 @@
         </p:cxnSp>
         <p:cxnSp>
           <p:nvCxnSpPr>
-            <p:cNvPr id="153" name="マスの線 22"/>
+            <p:cNvPr id="152" name="マスの線 22"/>
             <p:cNvCxnSpPr/>
             <p:nvPr/>
           </p:nvCxnSpPr>
@@ -8926,7 +8891,7 @@
         </p:cxnSp>
         <p:cxnSp>
           <p:nvCxnSpPr>
-            <p:cNvPr id="154" name="マスの線 23"/>
+            <p:cNvPr id="153" name="マスの線 23"/>
             <p:cNvCxnSpPr/>
             <p:nvPr/>
           </p:nvCxnSpPr>
@@ -8963,7 +8928,7 @@
       </p:grpSp>
       <p:grpSp>
         <p:nvGrpSpPr>
-          <p:cNvPr id="155" name="7行目（右から）"/>
+          <p:cNvPr id="154" name="7行目（右から）"/>
           <p:cNvGrpSpPr/>
           <p:nvPr/>
         </p:nvGrpSpPr>
@@ -8977,7 +8942,7 @@
         </p:grpSpPr>
         <p:sp>
           <p:nvSpPr>
-            <p:cNvPr id="156" name="外わく"/>
+            <p:cNvPr id="155" name="外わく"/>
             <p:cNvSpPr/>
             <p:nvPr/>
           </p:nvSpPr>
@@ -9021,7 +8986,7 @@
         </p:sp>
         <p:cxnSp>
           <p:nvCxnSpPr>
-            <p:cNvPr id="157" name="マスの線 1"/>
+            <p:cNvPr id="156" name="マスの線 1"/>
             <p:cNvCxnSpPr/>
             <p:nvPr/>
           </p:nvCxnSpPr>
@@ -9057,7 +9022,7 @@
         </p:cxnSp>
         <p:cxnSp>
           <p:nvCxnSpPr>
-            <p:cNvPr id="158" name="マスの線 2"/>
+            <p:cNvPr id="157" name="マスの線 2"/>
             <p:cNvCxnSpPr/>
             <p:nvPr/>
           </p:nvCxnSpPr>
@@ -9093,7 +9058,7 @@
         </p:cxnSp>
         <p:cxnSp>
           <p:nvCxnSpPr>
-            <p:cNvPr id="159" name="マスの線 3"/>
+            <p:cNvPr id="158" name="マスの線 3"/>
             <p:cNvCxnSpPr/>
             <p:nvPr/>
           </p:nvCxnSpPr>
@@ -9129,7 +9094,7 @@
         </p:cxnSp>
         <p:cxnSp>
           <p:nvCxnSpPr>
-            <p:cNvPr id="160" name="マスの線 4"/>
+            <p:cNvPr id="159" name="マスの線 4"/>
             <p:cNvCxnSpPr/>
             <p:nvPr/>
           </p:nvCxnSpPr>
@@ -9165,7 +9130,7 @@
         </p:cxnSp>
         <p:cxnSp>
           <p:nvCxnSpPr>
-            <p:cNvPr id="161" name="マスの線 5"/>
+            <p:cNvPr id="160" name="マスの線 5"/>
             <p:cNvCxnSpPr/>
             <p:nvPr/>
           </p:nvCxnSpPr>
@@ -9201,7 +9166,7 @@
         </p:cxnSp>
         <p:cxnSp>
           <p:nvCxnSpPr>
-            <p:cNvPr id="162" name="マスの線 6"/>
+            <p:cNvPr id="161" name="マスの線 6"/>
             <p:cNvCxnSpPr/>
             <p:nvPr/>
           </p:nvCxnSpPr>
@@ -9237,7 +9202,7 @@
         </p:cxnSp>
         <p:cxnSp>
           <p:nvCxnSpPr>
-            <p:cNvPr id="163" name="マスの線 7"/>
+            <p:cNvPr id="162" name="マスの線 7"/>
             <p:cNvCxnSpPr/>
             <p:nvPr/>
           </p:nvCxnSpPr>
@@ -9273,7 +9238,7 @@
         </p:cxnSp>
         <p:cxnSp>
           <p:nvCxnSpPr>
-            <p:cNvPr id="164" name="マスの線 8"/>
+            <p:cNvPr id="163" name="マスの線 8"/>
             <p:cNvCxnSpPr/>
             <p:nvPr/>
           </p:nvCxnSpPr>
@@ -9309,7 +9274,7 @@
         </p:cxnSp>
         <p:cxnSp>
           <p:nvCxnSpPr>
-            <p:cNvPr id="165" name="マスの線 9"/>
+            <p:cNvPr id="164" name="マスの線 9"/>
             <p:cNvCxnSpPr/>
             <p:nvPr/>
           </p:nvCxnSpPr>
@@ -9345,7 +9310,7 @@
         </p:cxnSp>
         <p:cxnSp>
           <p:nvCxnSpPr>
-            <p:cNvPr id="166" name="マスの線 10"/>
+            <p:cNvPr id="165" name="マスの線 10"/>
             <p:cNvCxnSpPr/>
             <p:nvPr/>
           </p:nvCxnSpPr>
@@ -9381,7 +9346,7 @@
         </p:cxnSp>
         <p:cxnSp>
           <p:nvCxnSpPr>
-            <p:cNvPr id="167" name="マスの線 11"/>
+            <p:cNvPr id="166" name="マスの線 11"/>
             <p:cNvCxnSpPr/>
             <p:nvPr/>
           </p:nvCxnSpPr>
@@ -9417,7 +9382,7 @@
         </p:cxnSp>
         <p:cxnSp>
           <p:nvCxnSpPr>
-            <p:cNvPr id="168" name="マスの線 12"/>
+            <p:cNvPr id="167" name="マスの線 12"/>
             <p:cNvCxnSpPr/>
             <p:nvPr/>
           </p:nvCxnSpPr>
@@ -9453,7 +9418,7 @@
         </p:cxnSp>
         <p:cxnSp>
           <p:nvCxnSpPr>
-            <p:cNvPr id="169" name="マスの線 13"/>
+            <p:cNvPr id="168" name="マスの線 13"/>
             <p:cNvCxnSpPr/>
             <p:nvPr/>
           </p:nvCxnSpPr>
@@ -9489,7 +9454,7 @@
         </p:cxnSp>
         <p:cxnSp>
           <p:nvCxnSpPr>
-            <p:cNvPr id="170" name="マスの線 14"/>
+            <p:cNvPr id="169" name="マスの線 14"/>
             <p:cNvCxnSpPr/>
             <p:nvPr/>
           </p:nvCxnSpPr>
@@ -9525,7 +9490,7 @@
         </p:cxnSp>
         <p:cxnSp>
           <p:nvCxnSpPr>
-            <p:cNvPr id="171" name="マスの線 15"/>
+            <p:cNvPr id="170" name="マスの線 15"/>
             <p:cNvCxnSpPr/>
             <p:nvPr/>
           </p:nvCxnSpPr>
@@ -9561,7 +9526,7 @@
         </p:cxnSp>
         <p:cxnSp>
           <p:nvCxnSpPr>
-            <p:cNvPr id="172" name="マスの線 16"/>
+            <p:cNvPr id="171" name="マスの線 16"/>
             <p:cNvCxnSpPr/>
             <p:nvPr/>
           </p:nvCxnSpPr>
@@ -9597,7 +9562,7 @@
         </p:cxnSp>
         <p:cxnSp>
           <p:nvCxnSpPr>
-            <p:cNvPr id="173" name="マスの線 17"/>
+            <p:cNvPr id="172" name="マスの線 17"/>
             <p:cNvCxnSpPr/>
             <p:nvPr/>
           </p:nvCxnSpPr>
@@ -9633,7 +9598,7 @@
         </p:cxnSp>
         <p:cxnSp>
           <p:nvCxnSpPr>
-            <p:cNvPr id="174" name="マスの線 18"/>
+            <p:cNvPr id="173" name="マスの線 18"/>
             <p:cNvCxnSpPr/>
             <p:nvPr/>
           </p:nvCxnSpPr>
@@ -9669,7 +9634,7 @@
         </p:cxnSp>
         <p:cxnSp>
           <p:nvCxnSpPr>
-            <p:cNvPr id="175" name="マスの線 19"/>
+            <p:cNvPr id="174" name="マスの線 19"/>
             <p:cNvCxnSpPr/>
             <p:nvPr/>
           </p:nvCxnSpPr>
@@ -9705,7 +9670,7 @@
         </p:cxnSp>
         <p:cxnSp>
           <p:nvCxnSpPr>
-            <p:cNvPr id="176" name="マスの線 20"/>
+            <p:cNvPr id="175" name="マスの線 20"/>
             <p:cNvCxnSpPr/>
             <p:nvPr/>
           </p:nvCxnSpPr>
@@ -9741,7 +9706,7 @@
         </p:cxnSp>
         <p:cxnSp>
           <p:nvCxnSpPr>
-            <p:cNvPr id="177" name="マスの線 21"/>
+            <p:cNvPr id="176" name="マスの線 21"/>
             <p:cNvCxnSpPr/>
             <p:nvPr/>
           </p:nvCxnSpPr>
@@ -9777,7 +9742,7 @@
         </p:cxnSp>
         <p:cxnSp>
           <p:nvCxnSpPr>
-            <p:cNvPr id="178" name="マスの線 22"/>
+            <p:cNvPr id="177" name="マスの線 22"/>
             <p:cNvCxnSpPr/>
             <p:nvPr/>
           </p:nvCxnSpPr>
@@ -9813,7 +9778,7 @@
         </p:cxnSp>
         <p:cxnSp>
           <p:nvCxnSpPr>
-            <p:cNvPr id="179" name="マスの線 23"/>
+            <p:cNvPr id="178" name="マスの線 23"/>
             <p:cNvCxnSpPr/>
             <p:nvPr/>
           </p:nvCxnSpPr>
@@ -9850,7 +9815,7 @@
       </p:grpSp>
       <p:grpSp>
         <p:nvGrpSpPr>
-          <p:cNvPr id="180" name="8行目（右から）"/>
+          <p:cNvPr id="179" name="8行目（右から）"/>
           <p:cNvGrpSpPr/>
           <p:nvPr/>
         </p:nvGrpSpPr>
@@ -9864,7 +9829,7 @@
         </p:grpSpPr>
         <p:sp>
           <p:nvSpPr>
-            <p:cNvPr id="181" name="外わく"/>
+            <p:cNvPr id="180" name="外わく"/>
             <p:cNvSpPr/>
             <p:nvPr/>
           </p:nvSpPr>
@@ -9908,7 +9873,7 @@
         </p:sp>
         <p:cxnSp>
           <p:nvCxnSpPr>
-            <p:cNvPr id="182" name="マスの線 1"/>
+            <p:cNvPr id="181" name="マスの線 1"/>
             <p:cNvCxnSpPr/>
             <p:nvPr/>
           </p:nvCxnSpPr>
@@ -9944,7 +9909,7 @@
         </p:cxnSp>
         <p:cxnSp>
           <p:nvCxnSpPr>
-            <p:cNvPr id="183" name="マスの線 2"/>
+            <p:cNvPr id="182" name="マスの線 2"/>
             <p:cNvCxnSpPr/>
             <p:nvPr/>
           </p:nvCxnSpPr>
@@ -9980,7 +9945,7 @@
         </p:cxnSp>
         <p:cxnSp>
           <p:nvCxnSpPr>
-            <p:cNvPr id="184" name="マスの線 3"/>
+            <p:cNvPr id="183" name="マスの線 3"/>
             <p:cNvCxnSpPr/>
             <p:nvPr/>
           </p:nvCxnSpPr>
@@ -10016,7 +9981,7 @@
         </p:cxnSp>
         <p:cxnSp>
           <p:nvCxnSpPr>
-            <p:cNvPr id="185" name="マスの線 4"/>
+            <p:cNvPr id="184" name="マスの線 4"/>
             <p:cNvCxnSpPr/>
             <p:nvPr/>
           </p:nvCxnSpPr>
@@ -10052,7 +10017,7 @@
         </p:cxnSp>
         <p:cxnSp>
           <p:nvCxnSpPr>
-            <p:cNvPr id="186" name="マスの線 5"/>
+            <p:cNvPr id="185" name="マスの線 5"/>
             <p:cNvCxnSpPr/>
             <p:nvPr/>
           </p:nvCxnSpPr>
@@ -10088,7 +10053,7 @@
         </p:cxnSp>
         <p:cxnSp>
           <p:nvCxnSpPr>
-            <p:cNvPr id="187" name="マスの線 6"/>
+            <p:cNvPr id="186" name="マスの線 6"/>
             <p:cNvCxnSpPr/>
             <p:nvPr/>
           </p:nvCxnSpPr>
@@ -10124,7 +10089,7 @@
         </p:cxnSp>
         <p:cxnSp>
           <p:nvCxnSpPr>
-            <p:cNvPr id="188" name="マスの線 7"/>
+            <p:cNvPr id="187" name="マスの線 7"/>
             <p:cNvCxnSpPr/>
             <p:nvPr/>
           </p:nvCxnSpPr>
@@ -10160,7 +10125,7 @@
         </p:cxnSp>
         <p:cxnSp>
           <p:nvCxnSpPr>
-            <p:cNvPr id="189" name="マスの線 8"/>
+            <p:cNvPr id="188" name="マスの線 8"/>
             <p:cNvCxnSpPr/>
             <p:nvPr/>
           </p:nvCxnSpPr>
@@ -10196,7 +10161,7 @@
         </p:cxnSp>
         <p:cxnSp>
           <p:nvCxnSpPr>
-            <p:cNvPr id="190" name="マスの線 9"/>
+            <p:cNvPr id="189" name="マスの線 9"/>
             <p:cNvCxnSpPr/>
             <p:nvPr/>
           </p:nvCxnSpPr>
@@ -10232,7 +10197,7 @@
         </p:cxnSp>
         <p:cxnSp>
           <p:nvCxnSpPr>
-            <p:cNvPr id="191" name="マスの線 10"/>
+            <p:cNvPr id="190" name="マスの線 10"/>
             <p:cNvCxnSpPr/>
             <p:nvPr/>
           </p:nvCxnSpPr>
@@ -10268,7 +10233,7 @@
         </p:cxnSp>
         <p:cxnSp>
           <p:nvCxnSpPr>
-            <p:cNvPr id="192" name="マスの線 11"/>
+            <p:cNvPr id="191" name="マスの線 11"/>
             <p:cNvCxnSpPr/>
             <p:nvPr/>
           </p:nvCxnSpPr>
@@ -10304,7 +10269,7 @@
         </p:cxnSp>
         <p:cxnSp>
           <p:nvCxnSpPr>
-            <p:cNvPr id="193" name="マスの線 12"/>
+            <p:cNvPr id="192" name="マスの線 12"/>
             <p:cNvCxnSpPr/>
             <p:nvPr/>
           </p:nvCxnSpPr>
@@ -10340,7 +10305,7 @@
         </p:cxnSp>
         <p:cxnSp>
           <p:nvCxnSpPr>
-            <p:cNvPr id="194" name="マスの線 13"/>
+            <p:cNvPr id="193" name="マスの線 13"/>
             <p:cNvCxnSpPr/>
             <p:nvPr/>
           </p:nvCxnSpPr>
@@ -10376,7 +10341,7 @@
         </p:cxnSp>
         <p:cxnSp>
           <p:nvCxnSpPr>
-            <p:cNvPr id="195" name="マスの線 14"/>
+            <p:cNvPr id="194" name="マスの線 14"/>
             <p:cNvCxnSpPr/>
             <p:nvPr/>
           </p:nvCxnSpPr>
@@ -10412,7 +10377,7 @@
         </p:cxnSp>
         <p:cxnSp>
           <p:nvCxnSpPr>
-            <p:cNvPr id="196" name="マスの線 15"/>
+            <p:cNvPr id="195" name="マスの線 15"/>
             <p:cNvCxnSpPr/>
             <p:nvPr/>
           </p:nvCxnSpPr>
@@ -10448,7 +10413,7 @@
         </p:cxnSp>
         <p:cxnSp>
           <p:nvCxnSpPr>
-            <p:cNvPr id="197" name="マスの線 16"/>
+            <p:cNvPr id="196" name="マスの線 16"/>
             <p:cNvCxnSpPr/>
             <p:nvPr/>
           </p:nvCxnSpPr>
@@ -10484,7 +10449,7 @@
         </p:cxnSp>
         <p:cxnSp>
           <p:nvCxnSpPr>
-            <p:cNvPr id="198" name="マスの線 17"/>
+            <p:cNvPr id="197" name="マスの線 17"/>
             <p:cNvCxnSpPr/>
             <p:nvPr/>
           </p:nvCxnSpPr>
@@ -10520,7 +10485,7 @@
         </p:cxnSp>
         <p:cxnSp>
           <p:nvCxnSpPr>
-            <p:cNvPr id="199" name="マスの線 18"/>
+            <p:cNvPr id="198" name="マスの線 18"/>
             <p:cNvCxnSpPr/>
             <p:nvPr/>
           </p:nvCxnSpPr>
@@ -10556,7 +10521,7 @@
         </p:cxnSp>
         <p:cxnSp>
           <p:nvCxnSpPr>
-            <p:cNvPr id="200" name="マスの線 19"/>
+            <p:cNvPr id="199" name="マスの線 19"/>
             <p:cNvCxnSpPr/>
             <p:nvPr/>
           </p:nvCxnSpPr>
@@ -10592,7 +10557,7 @@
         </p:cxnSp>
         <p:cxnSp>
           <p:nvCxnSpPr>
-            <p:cNvPr id="201" name="マスの線 20"/>
+            <p:cNvPr id="200" name="マスの線 20"/>
             <p:cNvCxnSpPr/>
             <p:nvPr/>
           </p:nvCxnSpPr>
@@ -10628,7 +10593,7 @@
         </p:cxnSp>
         <p:cxnSp>
           <p:nvCxnSpPr>
-            <p:cNvPr id="202" name="マスの線 21"/>
+            <p:cNvPr id="201" name="マスの線 21"/>
             <p:cNvCxnSpPr/>
             <p:nvPr/>
           </p:nvCxnSpPr>
@@ -10664,7 +10629,7 @@
         </p:cxnSp>
         <p:cxnSp>
           <p:nvCxnSpPr>
-            <p:cNvPr id="203" name="マスの線 22"/>
+            <p:cNvPr id="202" name="マスの線 22"/>
             <p:cNvCxnSpPr/>
             <p:nvPr/>
           </p:nvCxnSpPr>
@@ -10700,7 +10665,7 @@
         </p:cxnSp>
         <p:cxnSp>
           <p:nvCxnSpPr>
-            <p:cNvPr id="204" name="マスの線 23"/>
+            <p:cNvPr id="203" name="マスの線 23"/>
             <p:cNvCxnSpPr/>
             <p:nvPr/>
           </p:nvCxnSpPr>
@@ -10737,7 +10702,7 @@
       </p:grpSp>
       <p:grpSp>
         <p:nvGrpSpPr>
-          <p:cNvPr id="205" name="9行目（右から）"/>
+          <p:cNvPr id="204" name="9行目（右から）"/>
           <p:cNvGrpSpPr/>
           <p:nvPr/>
         </p:nvGrpSpPr>
@@ -10751,7 +10716,7 @@
         </p:grpSpPr>
         <p:sp>
           <p:nvSpPr>
-            <p:cNvPr id="206" name="外わく"/>
+            <p:cNvPr id="205" name="外わく"/>
             <p:cNvSpPr/>
             <p:nvPr/>
           </p:nvSpPr>
@@ -10795,7 +10760,7 @@
         </p:sp>
         <p:cxnSp>
           <p:nvCxnSpPr>
-            <p:cNvPr id="207" name="マスの線 1"/>
+            <p:cNvPr id="206" name="マスの線 1"/>
             <p:cNvCxnSpPr/>
             <p:nvPr/>
           </p:nvCxnSpPr>
@@ -10831,7 +10796,7 @@
         </p:cxnSp>
         <p:cxnSp>
           <p:nvCxnSpPr>
-            <p:cNvPr id="208" name="マスの線 2"/>
+            <p:cNvPr id="207" name="マスの線 2"/>
             <p:cNvCxnSpPr/>
             <p:nvPr/>
           </p:nvCxnSpPr>
@@ -10867,7 +10832,7 @@
         </p:cxnSp>
         <p:cxnSp>
           <p:nvCxnSpPr>
-            <p:cNvPr id="209" name="マスの線 3"/>
+            <p:cNvPr id="208" name="マスの線 3"/>
             <p:cNvCxnSpPr/>
             <p:nvPr/>
           </p:nvCxnSpPr>
@@ -10903,7 +10868,7 @@
         </p:cxnSp>
         <p:cxnSp>
           <p:nvCxnSpPr>
-            <p:cNvPr id="210" name="マスの線 4"/>
+            <p:cNvPr id="209" name="マスの線 4"/>
             <p:cNvCxnSpPr/>
             <p:nvPr/>
           </p:nvCxnSpPr>
@@ -10939,7 +10904,7 @@
         </p:cxnSp>
         <p:cxnSp>
           <p:nvCxnSpPr>
-            <p:cNvPr id="211" name="マスの線 5"/>
+            <p:cNvPr id="210" name="マスの線 5"/>
             <p:cNvCxnSpPr/>
             <p:nvPr/>
           </p:nvCxnSpPr>
@@ -10975,7 +10940,7 @@
         </p:cxnSp>
         <p:cxnSp>
           <p:nvCxnSpPr>
-            <p:cNvPr id="212" name="マスの線 6"/>
+            <p:cNvPr id="211" name="マスの線 6"/>
             <p:cNvCxnSpPr/>
             <p:nvPr/>
           </p:nvCxnSpPr>
@@ -11011,7 +10976,7 @@
         </p:cxnSp>
         <p:cxnSp>
           <p:nvCxnSpPr>
-            <p:cNvPr id="213" name="マスの線 7"/>
+            <p:cNvPr id="212" name="マスの線 7"/>
             <p:cNvCxnSpPr/>
             <p:nvPr/>
           </p:nvCxnSpPr>
@@ -11047,7 +11012,7 @@
         </p:cxnSp>
         <p:cxnSp>
           <p:nvCxnSpPr>
-            <p:cNvPr id="214" name="マスの線 8"/>
+            <p:cNvPr id="213" name="マスの線 8"/>
             <p:cNvCxnSpPr/>
             <p:nvPr/>
           </p:nvCxnSpPr>
@@ -11083,7 +11048,7 @@
         </p:cxnSp>
         <p:cxnSp>
           <p:nvCxnSpPr>
-            <p:cNvPr id="215" name="マスの線 9"/>
+            <p:cNvPr id="214" name="マスの線 9"/>
             <p:cNvCxnSpPr/>
             <p:nvPr/>
           </p:nvCxnSpPr>
@@ -11119,7 +11084,7 @@
         </p:cxnSp>
         <p:cxnSp>
           <p:nvCxnSpPr>
-            <p:cNvPr id="216" name="マスの線 10"/>
+            <p:cNvPr id="215" name="マスの線 10"/>
             <p:cNvCxnSpPr/>
             <p:nvPr/>
           </p:nvCxnSpPr>
@@ -11155,7 +11120,7 @@
         </p:cxnSp>
         <p:cxnSp>
           <p:nvCxnSpPr>
-            <p:cNvPr id="217" name="マスの線 11"/>
+            <p:cNvPr id="216" name="マスの線 11"/>
             <p:cNvCxnSpPr/>
             <p:nvPr/>
           </p:nvCxnSpPr>
@@ -11191,7 +11156,7 @@
         </p:cxnSp>
         <p:cxnSp>
           <p:nvCxnSpPr>
-            <p:cNvPr id="218" name="マスの線 12"/>
+            <p:cNvPr id="217" name="マスの線 12"/>
             <p:cNvCxnSpPr/>
             <p:nvPr/>
           </p:nvCxnSpPr>
@@ -11227,7 +11192,7 @@
         </p:cxnSp>
         <p:cxnSp>
           <p:nvCxnSpPr>
-            <p:cNvPr id="219" name="マスの線 13"/>
+            <p:cNvPr id="218" name="マスの線 13"/>
             <p:cNvCxnSpPr/>
             <p:nvPr/>
           </p:nvCxnSpPr>
@@ -11263,7 +11228,7 @@
         </p:cxnSp>
         <p:cxnSp>
           <p:nvCxnSpPr>
-            <p:cNvPr id="220" name="マスの線 14"/>
+            <p:cNvPr id="219" name="マスの線 14"/>
             <p:cNvCxnSpPr/>
             <p:nvPr/>
           </p:nvCxnSpPr>
@@ -11299,7 +11264,7 @@
         </p:cxnSp>
         <p:cxnSp>
           <p:nvCxnSpPr>
-            <p:cNvPr id="221" name="マスの線 15"/>
+            <p:cNvPr id="220" name="マスの線 15"/>
             <p:cNvCxnSpPr/>
             <p:nvPr/>
           </p:nvCxnSpPr>
@@ -11335,7 +11300,7 @@
         </p:cxnSp>
         <p:cxnSp>
           <p:nvCxnSpPr>
-            <p:cNvPr id="222" name="マスの線 16"/>
+            <p:cNvPr id="221" name="マスの線 16"/>
             <p:cNvCxnSpPr/>
             <p:nvPr/>
           </p:nvCxnSpPr>
@@ -11371,7 +11336,7 @@
         </p:cxnSp>
         <p:cxnSp>
           <p:nvCxnSpPr>
-            <p:cNvPr id="223" name="マスの線 17"/>
+            <p:cNvPr id="222" name="マスの線 17"/>
             <p:cNvCxnSpPr/>
             <p:nvPr/>
           </p:nvCxnSpPr>
@@ -11407,7 +11372,7 @@
         </p:cxnSp>
         <p:cxnSp>
           <p:nvCxnSpPr>
-            <p:cNvPr id="224" name="マスの線 18"/>
+            <p:cNvPr id="223" name="マスの線 18"/>
             <p:cNvCxnSpPr/>
             <p:nvPr/>
           </p:nvCxnSpPr>
@@ -11443,7 +11408,7 @@
         </p:cxnSp>
         <p:cxnSp>
           <p:nvCxnSpPr>
-            <p:cNvPr id="225" name="マスの線 19"/>
+            <p:cNvPr id="224" name="マスの線 19"/>
             <p:cNvCxnSpPr/>
             <p:nvPr/>
           </p:nvCxnSpPr>
@@ -11479,7 +11444,7 @@
         </p:cxnSp>
         <p:cxnSp>
           <p:nvCxnSpPr>
-            <p:cNvPr id="226" name="マスの線 20"/>
+            <p:cNvPr id="225" name="マスの線 20"/>
             <p:cNvCxnSpPr/>
             <p:nvPr/>
           </p:nvCxnSpPr>
@@ -11515,7 +11480,7 @@
         </p:cxnSp>
         <p:cxnSp>
           <p:nvCxnSpPr>
-            <p:cNvPr id="227" name="マスの線 21"/>
+            <p:cNvPr id="226" name="マスの線 21"/>
             <p:cNvCxnSpPr/>
             <p:nvPr/>
           </p:nvCxnSpPr>
@@ -11551,7 +11516,7 @@
         </p:cxnSp>
         <p:cxnSp>
           <p:nvCxnSpPr>
-            <p:cNvPr id="228" name="マスの線 22"/>
+            <p:cNvPr id="227" name="マスの線 22"/>
             <p:cNvCxnSpPr/>
             <p:nvPr/>
           </p:nvCxnSpPr>
@@ -11587,7 +11552,7 @@
         </p:cxnSp>
         <p:cxnSp>
           <p:nvCxnSpPr>
-            <p:cNvPr id="229" name="マスの線 23"/>
+            <p:cNvPr id="228" name="マスの線 23"/>
             <p:cNvCxnSpPr/>
             <p:nvPr/>
           </p:nvCxnSpPr>
@@ -11624,7 +11589,7 @@
       </p:grpSp>
       <p:grpSp>
         <p:nvGrpSpPr>
-          <p:cNvPr id="230" name="10行目（右から）"/>
+          <p:cNvPr id="229" name="10行目（右から）"/>
           <p:cNvGrpSpPr/>
           <p:nvPr/>
         </p:nvGrpSpPr>
@@ -11638,7 +11603,7 @@
         </p:grpSpPr>
         <p:sp>
           <p:nvSpPr>
-            <p:cNvPr id="231" name="外わく"/>
+            <p:cNvPr id="230" name="外わく"/>
             <p:cNvSpPr/>
             <p:nvPr/>
           </p:nvSpPr>
@@ -11682,7 +11647,7 @@
         </p:sp>
         <p:cxnSp>
           <p:nvCxnSpPr>
-            <p:cNvPr id="232" name="マスの線 1"/>
+            <p:cNvPr id="231" name="マスの線 1"/>
             <p:cNvCxnSpPr/>
             <p:nvPr/>
           </p:nvCxnSpPr>
@@ -11718,7 +11683,7 @@
         </p:cxnSp>
         <p:cxnSp>
           <p:nvCxnSpPr>
-            <p:cNvPr id="233" name="マスの線 2"/>
+            <p:cNvPr id="232" name="マスの線 2"/>
             <p:cNvCxnSpPr/>
             <p:nvPr/>
           </p:nvCxnSpPr>
@@ -11754,7 +11719,7 @@
         </p:cxnSp>
         <p:cxnSp>
           <p:nvCxnSpPr>
-            <p:cNvPr id="234" name="マスの線 3"/>
+            <p:cNvPr id="233" name="マスの線 3"/>
             <p:cNvCxnSpPr/>
             <p:nvPr/>
           </p:nvCxnSpPr>
@@ -11790,7 +11755,7 @@
         </p:cxnSp>
         <p:cxnSp>
           <p:nvCxnSpPr>
-            <p:cNvPr id="235" name="マスの線 4"/>
+            <p:cNvPr id="234" name="マスの線 4"/>
             <p:cNvCxnSpPr/>
             <p:nvPr/>
           </p:nvCxnSpPr>
@@ -11826,7 +11791,7 @@
         </p:cxnSp>
         <p:cxnSp>
           <p:nvCxnSpPr>
-            <p:cNvPr id="236" name="マスの線 5"/>
+            <p:cNvPr id="235" name="マスの線 5"/>
             <p:cNvCxnSpPr/>
             <p:nvPr/>
           </p:nvCxnSpPr>
@@ -11862,7 +11827,7 @@
         </p:cxnSp>
         <p:cxnSp>
           <p:nvCxnSpPr>
-            <p:cNvPr id="237" name="マスの線 6"/>
+            <p:cNvPr id="236" name="マスの線 6"/>
             <p:cNvCxnSpPr/>
             <p:nvPr/>
           </p:nvCxnSpPr>
@@ -11898,7 +11863,7 @@
         </p:cxnSp>
         <p:cxnSp>
           <p:nvCxnSpPr>
-            <p:cNvPr id="238" name="マスの線 7"/>
+            <p:cNvPr id="237" name="マスの線 7"/>
             <p:cNvCxnSpPr/>
             <p:nvPr/>
           </p:nvCxnSpPr>
@@ -11934,7 +11899,7 @@
         </p:cxnSp>
         <p:cxnSp>
           <p:nvCxnSpPr>
-            <p:cNvPr id="239" name="マスの線 8"/>
+            <p:cNvPr id="238" name="マスの線 8"/>
             <p:cNvCxnSpPr/>
             <p:nvPr/>
           </p:nvCxnSpPr>
@@ -11970,7 +11935,7 @@
         </p:cxnSp>
         <p:cxnSp>
           <p:nvCxnSpPr>
-            <p:cNvPr id="240" name="マスの線 9"/>
+            <p:cNvPr id="239" name="マスの線 9"/>
             <p:cNvCxnSpPr/>
             <p:nvPr/>
           </p:nvCxnSpPr>
@@ -12006,7 +11971,7 @@
         </p:cxnSp>
         <p:cxnSp>
           <p:nvCxnSpPr>
-            <p:cNvPr id="241" name="マスの線 10"/>
+            <p:cNvPr id="240" name="マスの線 10"/>
             <p:cNvCxnSpPr/>
             <p:nvPr/>
           </p:nvCxnSpPr>
@@ -12042,7 +12007,7 @@
         </p:cxnSp>
         <p:cxnSp>
           <p:nvCxnSpPr>
-            <p:cNvPr id="242" name="マスの線 11"/>
+            <p:cNvPr id="241" name="マスの線 11"/>
             <p:cNvCxnSpPr/>
             <p:nvPr/>
           </p:nvCxnSpPr>
@@ -12078,7 +12043,7 @@
         </p:cxnSp>
         <p:cxnSp>
           <p:nvCxnSpPr>
-            <p:cNvPr id="243" name="マスの線 12"/>
+            <p:cNvPr id="242" name="マスの線 12"/>
             <p:cNvCxnSpPr/>
             <p:nvPr/>
           </p:nvCxnSpPr>
@@ -12114,7 +12079,7 @@
         </p:cxnSp>
         <p:cxnSp>
           <p:nvCxnSpPr>
-            <p:cNvPr id="244" name="マスの線 13"/>
+            <p:cNvPr id="243" name="マスの線 13"/>
             <p:cNvCxnSpPr/>
             <p:nvPr/>
           </p:nvCxnSpPr>
@@ -12150,7 +12115,7 @@
         </p:cxnSp>
         <p:cxnSp>
           <p:nvCxnSpPr>
-            <p:cNvPr id="245" name="マスの線 14"/>
+            <p:cNvPr id="244" name="マスの線 14"/>
             <p:cNvCxnSpPr/>
             <p:nvPr/>
           </p:nvCxnSpPr>
@@ -12186,7 +12151,7 @@
         </p:cxnSp>
         <p:cxnSp>
           <p:nvCxnSpPr>
-            <p:cNvPr id="246" name="マスの線 15"/>
+            <p:cNvPr id="245" name="マスの線 15"/>
             <p:cNvCxnSpPr/>
             <p:nvPr/>
           </p:nvCxnSpPr>
@@ -12222,7 +12187,7 @@
         </p:cxnSp>
         <p:cxnSp>
           <p:nvCxnSpPr>
-            <p:cNvPr id="247" name="マスの線 16"/>
+            <p:cNvPr id="246" name="マスの線 16"/>
             <p:cNvCxnSpPr/>
             <p:nvPr/>
           </p:nvCxnSpPr>
@@ -12258,7 +12223,7 @@
         </p:cxnSp>
         <p:cxnSp>
           <p:nvCxnSpPr>
-            <p:cNvPr id="248" name="マスの線 17"/>
+            <p:cNvPr id="247" name="マスの線 17"/>
             <p:cNvCxnSpPr/>
             <p:nvPr/>
           </p:nvCxnSpPr>
@@ -12294,7 +12259,7 @@
         </p:cxnSp>
         <p:cxnSp>
           <p:nvCxnSpPr>
-            <p:cNvPr id="249" name="マスの線 18"/>
+            <p:cNvPr id="248" name="マスの線 18"/>
             <p:cNvCxnSpPr/>
             <p:nvPr/>
           </p:nvCxnSpPr>
@@ -12330,7 +12295,7 @@
         </p:cxnSp>
         <p:cxnSp>
           <p:nvCxnSpPr>
-            <p:cNvPr id="250" name="マスの線 19"/>
+            <p:cNvPr id="249" name="マスの線 19"/>
             <p:cNvCxnSpPr/>
             <p:nvPr/>
           </p:nvCxnSpPr>
@@ -12366,7 +12331,7 @@
         </p:cxnSp>
         <p:cxnSp>
           <p:nvCxnSpPr>
-            <p:cNvPr id="251" name="マスの線 20"/>
+            <p:cNvPr id="250" name="マスの線 20"/>
             <p:cNvCxnSpPr/>
             <p:nvPr/>
           </p:nvCxnSpPr>
@@ -12402,7 +12367,7 @@
         </p:cxnSp>
         <p:cxnSp>
           <p:nvCxnSpPr>
-            <p:cNvPr id="252" name="マスの線 21"/>
+            <p:cNvPr id="251" name="マスの線 21"/>
             <p:cNvCxnSpPr/>
             <p:nvPr/>
           </p:nvCxnSpPr>
@@ -12438,7 +12403,7 @@
         </p:cxnSp>
         <p:cxnSp>
           <p:nvCxnSpPr>
-            <p:cNvPr id="253" name="マスの線 22"/>
+            <p:cNvPr id="252" name="マスの線 22"/>
             <p:cNvCxnSpPr/>
             <p:nvPr/>
           </p:nvCxnSpPr>
@@ -12474,7 +12439,7 @@
         </p:cxnSp>
         <p:cxnSp>
           <p:nvCxnSpPr>
-            <p:cNvPr id="254" name="マスの線 23"/>
+            <p:cNvPr id="253" name="マスの線 23"/>
             <p:cNvCxnSpPr/>
             <p:nvPr/>
           </p:nvCxnSpPr>
@@ -12511,7 +12476,7 @@
       </p:grpSp>
       <p:grpSp>
         <p:nvGrpSpPr>
-          <p:cNvPr id="255" name="11行目（右から）"/>
+          <p:cNvPr id="254" name="11行目（右から）"/>
           <p:cNvGrpSpPr/>
           <p:nvPr/>
         </p:nvGrpSpPr>
@@ -12525,7 +12490,7 @@
         </p:grpSpPr>
         <p:sp>
           <p:nvSpPr>
-            <p:cNvPr id="256" name="外わく"/>
+            <p:cNvPr id="255" name="外わく"/>
             <p:cNvSpPr/>
             <p:nvPr/>
           </p:nvSpPr>
@@ -12569,7 +12534,7 @@
         </p:sp>
         <p:cxnSp>
           <p:nvCxnSpPr>
-            <p:cNvPr id="257" name="マスの線 1"/>
+            <p:cNvPr id="256" name="マスの線 1"/>
             <p:cNvCxnSpPr/>
             <p:nvPr/>
           </p:nvCxnSpPr>
@@ -12605,7 +12570,7 @@
         </p:cxnSp>
         <p:cxnSp>
           <p:nvCxnSpPr>
-            <p:cNvPr id="258" name="マスの線 2"/>
+            <p:cNvPr id="257" name="マスの線 2"/>
             <p:cNvCxnSpPr/>
             <p:nvPr/>
           </p:nvCxnSpPr>
@@ -12641,7 +12606,7 @@
         </p:cxnSp>
         <p:cxnSp>
           <p:nvCxnSpPr>
-            <p:cNvPr id="259" name="マスの線 3"/>
+            <p:cNvPr id="258" name="マスの線 3"/>
             <p:cNvCxnSpPr/>
             <p:nvPr/>
           </p:nvCxnSpPr>
@@ -12677,7 +12642,7 @@
         </p:cxnSp>
         <p:cxnSp>
           <p:nvCxnSpPr>
-            <p:cNvPr id="260" name="マスの線 4"/>
+            <p:cNvPr id="259" name="マスの線 4"/>
             <p:cNvCxnSpPr/>
             <p:nvPr/>
           </p:nvCxnSpPr>
@@ -12713,7 +12678,7 @@
         </p:cxnSp>
         <p:cxnSp>
           <p:nvCxnSpPr>
-            <p:cNvPr id="261" name="マスの線 5"/>
+            <p:cNvPr id="260" name="マスの線 5"/>
             <p:cNvCxnSpPr/>
             <p:nvPr/>
           </p:nvCxnSpPr>
@@ -12749,7 +12714,7 @@
         </p:cxnSp>
         <p:cxnSp>
           <p:nvCxnSpPr>
-            <p:cNvPr id="262" name="マスの線 6"/>
+            <p:cNvPr id="261" name="マスの線 6"/>
             <p:cNvCxnSpPr/>
             <p:nvPr/>
           </p:nvCxnSpPr>
@@ -12785,7 +12750,7 @@
         </p:cxnSp>
         <p:cxnSp>
           <p:nvCxnSpPr>
-            <p:cNvPr id="263" name="マスの線 7"/>
+            <p:cNvPr id="262" name="マスの線 7"/>
             <p:cNvCxnSpPr/>
             <p:nvPr/>
           </p:nvCxnSpPr>
@@ -12821,7 +12786,7 @@
         </p:cxnSp>
         <p:cxnSp>
           <p:nvCxnSpPr>
-            <p:cNvPr id="264" name="マスの線 8"/>
+            <p:cNvPr id="263" name="マスの線 8"/>
             <p:cNvCxnSpPr/>
             <p:nvPr/>
           </p:nvCxnSpPr>
@@ -12857,7 +12822,7 @@
         </p:cxnSp>
         <p:cxnSp>
           <p:nvCxnSpPr>
-            <p:cNvPr id="265" name="マスの線 9"/>
+            <p:cNvPr id="264" name="マスの線 9"/>
             <p:cNvCxnSpPr/>
             <p:nvPr/>
           </p:nvCxnSpPr>
@@ -12893,7 +12858,7 @@
         </p:cxnSp>
         <p:cxnSp>
           <p:nvCxnSpPr>
-            <p:cNvPr id="266" name="マスの線 10"/>
+            <p:cNvPr id="265" name="マスの線 10"/>
             <p:cNvCxnSpPr/>
             <p:nvPr/>
           </p:nvCxnSpPr>
@@ -12929,7 +12894,7 @@
         </p:cxnSp>
         <p:cxnSp>
           <p:nvCxnSpPr>
-            <p:cNvPr id="267" name="マスの線 11"/>
+            <p:cNvPr id="266" name="マスの線 11"/>
             <p:cNvCxnSpPr/>
             <p:nvPr/>
           </p:nvCxnSpPr>
@@ -12965,7 +12930,7 @@
         </p:cxnSp>
         <p:cxnSp>
           <p:nvCxnSpPr>
-            <p:cNvPr id="268" name="マスの線 12"/>
+            <p:cNvPr id="267" name="マスの線 12"/>
             <p:cNvCxnSpPr/>
             <p:nvPr/>
           </p:nvCxnSpPr>
@@ -13001,7 +12966,7 @@
         </p:cxnSp>
         <p:cxnSp>
           <p:nvCxnSpPr>
-            <p:cNvPr id="269" name="マスの線 13"/>
+            <p:cNvPr id="268" name="マスの線 13"/>
             <p:cNvCxnSpPr/>
             <p:nvPr/>
           </p:nvCxnSpPr>
@@ -13037,7 +13002,7 @@
         </p:cxnSp>
         <p:cxnSp>
           <p:nvCxnSpPr>
-            <p:cNvPr id="270" name="マスの線 14"/>
+            <p:cNvPr id="269" name="マスの線 14"/>
             <p:cNvCxnSpPr/>
             <p:nvPr/>
           </p:nvCxnSpPr>
@@ -13073,7 +13038,7 @@
         </p:cxnSp>
         <p:cxnSp>
           <p:nvCxnSpPr>
-            <p:cNvPr id="271" name="マスの線 15"/>
+            <p:cNvPr id="270" name="マスの線 15"/>
             <p:cNvCxnSpPr/>
             <p:nvPr/>
           </p:nvCxnSpPr>
@@ -13109,7 +13074,7 @@
         </p:cxnSp>
         <p:cxnSp>
           <p:nvCxnSpPr>
-            <p:cNvPr id="272" name="マスの線 16"/>
+            <p:cNvPr id="271" name="マスの線 16"/>
             <p:cNvCxnSpPr/>
             <p:nvPr/>
           </p:nvCxnSpPr>
@@ -13145,7 +13110,7 @@
         </p:cxnSp>
         <p:cxnSp>
           <p:nvCxnSpPr>
-            <p:cNvPr id="273" name="マスの線 17"/>
+            <p:cNvPr id="272" name="マスの線 17"/>
             <p:cNvCxnSpPr/>
             <p:nvPr/>
           </p:nvCxnSpPr>
@@ -13181,7 +13146,7 @@
         </p:cxnSp>
         <p:cxnSp>
           <p:nvCxnSpPr>
-            <p:cNvPr id="274" name="マスの線 18"/>
+            <p:cNvPr id="273" name="マスの線 18"/>
             <p:cNvCxnSpPr/>
             <p:nvPr/>
           </p:nvCxnSpPr>
@@ -13217,7 +13182,7 @@
         </p:cxnSp>
         <p:cxnSp>
           <p:nvCxnSpPr>
-            <p:cNvPr id="275" name="マスの線 19"/>
+            <p:cNvPr id="274" name="マスの線 19"/>
             <p:cNvCxnSpPr/>
             <p:nvPr/>
           </p:nvCxnSpPr>
@@ -13253,7 +13218,7 @@
         </p:cxnSp>
         <p:cxnSp>
           <p:nvCxnSpPr>
-            <p:cNvPr id="276" name="マスの線 20"/>
+            <p:cNvPr id="275" name="マスの線 20"/>
             <p:cNvCxnSpPr/>
             <p:nvPr/>
           </p:nvCxnSpPr>
@@ -13289,7 +13254,7 @@
         </p:cxnSp>
         <p:cxnSp>
           <p:nvCxnSpPr>
-            <p:cNvPr id="277" name="マスの線 21"/>
+            <p:cNvPr id="276" name="マスの線 21"/>
             <p:cNvCxnSpPr/>
             <p:nvPr/>
           </p:nvCxnSpPr>
@@ -13325,7 +13290,7 @@
         </p:cxnSp>
         <p:cxnSp>
           <p:nvCxnSpPr>
-            <p:cNvPr id="278" name="マスの線 22"/>
+            <p:cNvPr id="277" name="マスの線 22"/>
             <p:cNvCxnSpPr/>
             <p:nvPr/>
           </p:nvCxnSpPr>
@@ -13361,7 +13326,7 @@
         </p:cxnSp>
         <p:cxnSp>
           <p:nvCxnSpPr>
-            <p:cNvPr id="279" name="マスの線 23"/>
+            <p:cNvPr id="278" name="マスの線 23"/>
             <p:cNvCxnSpPr/>
             <p:nvPr/>
           </p:nvCxnSpPr>
@@ -13398,7 +13363,7 @@
       </p:grpSp>
       <p:grpSp>
         <p:nvGrpSpPr>
-          <p:cNvPr id="280" name="12行目（右から）"/>
+          <p:cNvPr id="279" name="12行目（右から）"/>
           <p:cNvGrpSpPr/>
           <p:nvPr/>
         </p:nvGrpSpPr>
@@ -13412,7 +13377,7 @@
         </p:grpSpPr>
         <p:sp>
           <p:nvSpPr>
-            <p:cNvPr id="281" name="外わく"/>
+            <p:cNvPr id="280" name="外わく"/>
             <p:cNvSpPr/>
             <p:nvPr/>
           </p:nvSpPr>
@@ -13456,7 +13421,7 @@
         </p:sp>
         <p:cxnSp>
           <p:nvCxnSpPr>
-            <p:cNvPr id="282" name="マスの線 1"/>
+            <p:cNvPr id="281" name="マスの線 1"/>
             <p:cNvCxnSpPr/>
             <p:nvPr/>
           </p:nvCxnSpPr>
@@ -13492,7 +13457,7 @@
         </p:cxnSp>
         <p:cxnSp>
           <p:nvCxnSpPr>
-            <p:cNvPr id="283" name="マスの線 2"/>
+            <p:cNvPr id="282" name="マスの線 2"/>
             <p:cNvCxnSpPr/>
             <p:nvPr/>
           </p:nvCxnSpPr>
@@ -13528,7 +13493,7 @@
         </p:cxnSp>
         <p:cxnSp>
           <p:nvCxnSpPr>
-            <p:cNvPr id="284" name="マスの線 3"/>
+            <p:cNvPr id="283" name="マスの線 3"/>
             <p:cNvCxnSpPr/>
             <p:nvPr/>
           </p:nvCxnSpPr>
@@ -13564,7 +13529,7 @@
         </p:cxnSp>
         <p:cxnSp>
           <p:nvCxnSpPr>
-            <p:cNvPr id="285" name="マスの線 4"/>
+            <p:cNvPr id="284" name="マスの線 4"/>
             <p:cNvCxnSpPr/>
             <p:nvPr/>
           </p:nvCxnSpPr>
@@ -13600,7 +13565,7 @@
         </p:cxnSp>
         <p:cxnSp>
           <p:nvCxnSpPr>
-            <p:cNvPr id="286" name="マスの線 5"/>
+            <p:cNvPr id="285" name="マスの線 5"/>
             <p:cNvCxnSpPr/>
             <p:nvPr/>
           </p:nvCxnSpPr>
@@ -13636,7 +13601,7 @@
         </p:cxnSp>
         <p:cxnSp>
           <p:nvCxnSpPr>
-            <p:cNvPr id="287" name="マスの線 6"/>
+            <p:cNvPr id="286" name="マスの線 6"/>
             <p:cNvCxnSpPr/>
             <p:nvPr/>
           </p:nvCxnSpPr>
@@ -13672,7 +13637,7 @@
         </p:cxnSp>
         <p:cxnSp>
           <p:nvCxnSpPr>
-            <p:cNvPr id="288" name="マスの線 7"/>
+            <p:cNvPr id="287" name="マスの線 7"/>
             <p:cNvCxnSpPr/>
             <p:nvPr/>
           </p:nvCxnSpPr>
@@ -13708,7 +13673,7 @@
         </p:cxnSp>
         <p:cxnSp>
           <p:nvCxnSpPr>
-            <p:cNvPr id="289" name="マスの線 8"/>
+            <p:cNvPr id="288" name="マスの線 8"/>
             <p:cNvCxnSpPr/>
             <p:nvPr/>
           </p:nvCxnSpPr>
@@ -13744,7 +13709,7 @@
         </p:cxnSp>
         <p:cxnSp>
           <p:nvCxnSpPr>
-            <p:cNvPr id="290" name="マスの線 9"/>
+            <p:cNvPr id="289" name="マスの線 9"/>
             <p:cNvCxnSpPr/>
             <p:nvPr/>
           </p:nvCxnSpPr>
@@ -13780,7 +13745,7 @@
         </p:cxnSp>
         <p:cxnSp>
           <p:nvCxnSpPr>
-            <p:cNvPr id="291" name="マスの線 10"/>
+            <p:cNvPr id="290" name="マスの線 10"/>
             <p:cNvCxnSpPr/>
             <p:nvPr/>
           </p:nvCxnSpPr>
@@ -13816,7 +13781,7 @@
         </p:cxnSp>
         <p:cxnSp>
           <p:nvCxnSpPr>
-            <p:cNvPr id="292" name="マスの線 11"/>
+            <p:cNvPr id="291" name="マスの線 11"/>
             <p:cNvCxnSpPr/>
             <p:nvPr/>
           </p:nvCxnSpPr>
@@ -13852,7 +13817,7 @@
         </p:cxnSp>
         <p:cxnSp>
           <p:nvCxnSpPr>
-            <p:cNvPr id="293" name="マスの線 12"/>
+            <p:cNvPr id="292" name="マスの線 12"/>
             <p:cNvCxnSpPr/>
             <p:nvPr/>
           </p:nvCxnSpPr>
@@ -13888,7 +13853,7 @@
         </p:cxnSp>
         <p:cxnSp>
           <p:nvCxnSpPr>
-            <p:cNvPr id="294" name="マスの線 13"/>
+            <p:cNvPr id="293" name="マスの線 13"/>
             <p:cNvCxnSpPr/>
             <p:nvPr/>
           </p:nvCxnSpPr>
@@ -13924,7 +13889,7 @@
         </p:cxnSp>
         <p:cxnSp>
           <p:nvCxnSpPr>
-            <p:cNvPr id="295" name="マスの線 14"/>
+            <p:cNvPr id="294" name="マスの線 14"/>
             <p:cNvCxnSpPr/>
             <p:nvPr/>
           </p:nvCxnSpPr>
@@ -13960,7 +13925,7 @@
         </p:cxnSp>
         <p:cxnSp>
           <p:nvCxnSpPr>
-            <p:cNvPr id="296" name="マスの線 15"/>
+            <p:cNvPr id="295" name="マスの線 15"/>
             <p:cNvCxnSpPr/>
             <p:nvPr/>
           </p:nvCxnSpPr>
@@ -13996,7 +13961,7 @@
         </p:cxnSp>
         <p:cxnSp>
           <p:nvCxnSpPr>
-            <p:cNvPr id="297" name="マスの線 16"/>
+            <p:cNvPr id="296" name="マスの線 16"/>
             <p:cNvCxnSpPr/>
             <p:nvPr/>
           </p:nvCxnSpPr>
@@ -14032,7 +13997,7 @@
         </p:cxnSp>
         <p:cxnSp>
           <p:nvCxnSpPr>
-            <p:cNvPr id="298" name="マスの線 17"/>
+            <p:cNvPr id="297" name="マスの線 17"/>
             <p:cNvCxnSpPr/>
             <p:nvPr/>
           </p:nvCxnSpPr>
@@ -14068,7 +14033,7 @@
         </p:cxnSp>
         <p:cxnSp>
           <p:nvCxnSpPr>
-            <p:cNvPr id="299" name="マスの線 18"/>
+            <p:cNvPr id="298" name="マスの線 18"/>
             <p:cNvCxnSpPr/>
             <p:nvPr/>
           </p:nvCxnSpPr>
@@ -14104,7 +14069,7 @@
         </p:cxnSp>
         <p:cxnSp>
           <p:nvCxnSpPr>
-            <p:cNvPr id="300" name="マスの線 19"/>
+            <p:cNvPr id="299" name="マスの線 19"/>
             <p:cNvCxnSpPr/>
             <p:nvPr/>
           </p:nvCxnSpPr>
@@ -14140,7 +14105,7 @@
         </p:cxnSp>
         <p:cxnSp>
           <p:nvCxnSpPr>
-            <p:cNvPr id="301" name="マスの線 20"/>
+            <p:cNvPr id="300" name="マスの線 20"/>
             <p:cNvCxnSpPr/>
             <p:nvPr/>
           </p:nvCxnSpPr>
@@ -14176,7 +14141,7 @@
         </p:cxnSp>
         <p:cxnSp>
           <p:nvCxnSpPr>
-            <p:cNvPr id="302" name="マスの線 21"/>
+            <p:cNvPr id="301" name="マスの線 21"/>
             <p:cNvCxnSpPr/>
             <p:nvPr/>
           </p:nvCxnSpPr>
@@ -14212,7 +14177,7 @@
         </p:cxnSp>
         <p:cxnSp>
           <p:nvCxnSpPr>
-            <p:cNvPr id="303" name="マスの線 22"/>
+            <p:cNvPr id="302" name="マスの線 22"/>
             <p:cNvCxnSpPr/>
             <p:nvPr/>
           </p:nvCxnSpPr>
@@ -14248,7 +14213,7 @@
         </p:cxnSp>
         <p:cxnSp>
           <p:nvCxnSpPr>
-            <p:cNvPr id="304" name="マスの線 23"/>
+            <p:cNvPr id="303" name="マスの線 23"/>
             <p:cNvCxnSpPr/>
             <p:nvPr/>
           </p:nvCxnSpPr>
@@ -14285,7 +14250,7 @@
       </p:grpSp>
       <p:grpSp>
         <p:nvGrpSpPr>
-          <p:cNvPr id="305" name="13行目（右から）"/>
+          <p:cNvPr id="304" name="13行目（右から）"/>
           <p:cNvGrpSpPr/>
           <p:nvPr/>
         </p:nvGrpSpPr>
@@ -14299,7 +14264,7 @@
         </p:grpSpPr>
         <p:sp>
           <p:nvSpPr>
-            <p:cNvPr id="306" name="外わく"/>
+            <p:cNvPr id="305" name="外わく"/>
             <p:cNvSpPr/>
             <p:nvPr/>
           </p:nvSpPr>
@@ -14343,7 +14308,7 @@
         </p:sp>
         <p:cxnSp>
           <p:nvCxnSpPr>
-            <p:cNvPr id="307" name="マスの線 1"/>
+            <p:cNvPr id="306" name="マスの線 1"/>
             <p:cNvCxnSpPr/>
             <p:nvPr/>
           </p:nvCxnSpPr>
@@ -14379,7 +14344,7 @@
         </p:cxnSp>
         <p:cxnSp>
           <p:nvCxnSpPr>
-            <p:cNvPr id="308" name="マスの線 2"/>
+            <p:cNvPr id="307" name="マスの線 2"/>
             <p:cNvCxnSpPr/>
             <p:nvPr/>
           </p:nvCxnSpPr>
@@ -14415,7 +14380,7 @@
         </p:cxnSp>
         <p:cxnSp>
           <p:nvCxnSpPr>
-            <p:cNvPr id="309" name="マスの線 3"/>
+            <p:cNvPr id="308" name="マスの線 3"/>
             <p:cNvCxnSpPr/>
             <p:nvPr/>
           </p:nvCxnSpPr>
@@ -14451,7 +14416,7 @@
         </p:cxnSp>
         <p:cxnSp>
           <p:nvCxnSpPr>
-            <p:cNvPr id="310" name="マスの線 4"/>
+            <p:cNvPr id="309" name="マスの線 4"/>
             <p:cNvCxnSpPr/>
             <p:nvPr/>
           </p:nvCxnSpPr>
@@ -14487,7 +14452,7 @@
         </p:cxnSp>
         <p:cxnSp>
           <p:nvCxnSpPr>
-            <p:cNvPr id="311" name="マスの線 5"/>
+            <p:cNvPr id="310" name="マスの線 5"/>
             <p:cNvCxnSpPr/>
             <p:nvPr/>
           </p:nvCxnSpPr>
@@ -14523,7 +14488,7 @@
         </p:cxnSp>
         <p:cxnSp>
           <p:nvCxnSpPr>
-            <p:cNvPr id="312" name="マスの線 6"/>
+            <p:cNvPr id="311" name="マスの線 6"/>
             <p:cNvCxnSpPr/>
             <p:nvPr/>
           </p:nvCxnSpPr>
@@ -14559,7 +14524,7 @@
         </p:cxnSp>
         <p:cxnSp>
           <p:nvCxnSpPr>
-            <p:cNvPr id="313" name="マスの線 7"/>
+            <p:cNvPr id="312" name="マスの線 7"/>
             <p:cNvCxnSpPr/>
             <p:nvPr/>
           </p:nvCxnSpPr>
@@ -14595,7 +14560,7 @@
         </p:cxnSp>
         <p:cxnSp>
           <p:nvCxnSpPr>
-            <p:cNvPr id="314" name="マスの線 8"/>
+            <p:cNvPr id="313" name="マスの線 8"/>
             <p:cNvCxnSpPr/>
             <p:nvPr/>
           </p:nvCxnSpPr>
@@ -14631,7 +14596,7 @@
         </p:cxnSp>
         <p:cxnSp>
           <p:nvCxnSpPr>
-            <p:cNvPr id="315" name="マスの線 9"/>
+            <p:cNvPr id="314" name="マスの線 9"/>
             <p:cNvCxnSpPr/>
             <p:nvPr/>
           </p:nvCxnSpPr>
@@ -14667,7 +14632,7 @@
         </p:cxnSp>
         <p:cxnSp>
           <p:nvCxnSpPr>
-            <p:cNvPr id="316" name="マスの線 10"/>
+            <p:cNvPr id="315" name="マスの線 10"/>
             <p:cNvCxnSpPr/>
             <p:nvPr/>
           </p:nvCxnSpPr>
@@ -14703,7 +14668,7 @@
         </p:cxnSp>
         <p:cxnSp>
           <p:nvCxnSpPr>
-            <p:cNvPr id="317" name="マスの線 11"/>
+            <p:cNvPr id="316" name="マスの線 11"/>
             <p:cNvCxnSpPr/>
             <p:nvPr/>
           </p:nvCxnSpPr>
@@ -14739,7 +14704,7 @@
         </p:cxnSp>
         <p:cxnSp>
           <p:nvCxnSpPr>
-            <p:cNvPr id="318" name="マスの線 12"/>
+            <p:cNvPr id="317" name="マスの線 12"/>
             <p:cNvCxnSpPr/>
             <p:nvPr/>
           </p:nvCxnSpPr>
@@ -14775,7 +14740,7 @@
         </p:cxnSp>
         <p:cxnSp>
           <p:nvCxnSpPr>
-            <p:cNvPr id="319" name="マスの線 13"/>
+            <p:cNvPr id="318" name="マスの線 13"/>
             <p:cNvCxnSpPr/>
             <p:nvPr/>
           </p:nvCxnSpPr>
@@ -14811,7 +14776,7 @@
         </p:cxnSp>
         <p:cxnSp>
           <p:nvCxnSpPr>
-            <p:cNvPr id="320" name="マスの線 14"/>
+            <p:cNvPr id="319" name="マスの線 14"/>
             <p:cNvCxnSpPr/>
             <p:nvPr/>
           </p:nvCxnSpPr>
@@ -14847,7 +14812,7 @@
         </p:cxnSp>
         <p:cxnSp>
           <p:nvCxnSpPr>
-            <p:cNvPr id="321" name="マスの線 15"/>
+            <p:cNvPr id="320" name="マスの線 15"/>
             <p:cNvCxnSpPr/>
             <p:nvPr/>
           </p:nvCxnSpPr>
@@ -14883,7 +14848,7 @@
         </p:cxnSp>
         <p:cxnSp>
           <p:nvCxnSpPr>
-            <p:cNvPr id="322" name="マスの線 16"/>
+            <p:cNvPr id="321" name="マスの線 16"/>
             <p:cNvCxnSpPr/>
             <p:nvPr/>
           </p:nvCxnSpPr>
@@ -14919,7 +14884,7 @@
         </p:cxnSp>
         <p:cxnSp>
           <p:nvCxnSpPr>
-            <p:cNvPr id="323" name="マスの線 17"/>
+            <p:cNvPr id="322" name="マスの線 17"/>
             <p:cNvCxnSpPr/>
             <p:nvPr/>
           </p:nvCxnSpPr>
@@ -14955,7 +14920,7 @@
         </p:cxnSp>
         <p:cxnSp>
           <p:nvCxnSpPr>
-            <p:cNvPr id="324" name="マスの線 18"/>
+            <p:cNvPr id="323" name="マスの線 18"/>
             <p:cNvCxnSpPr/>
             <p:nvPr/>
           </p:nvCxnSpPr>
@@ -14991,7 +14956,7 @@
         </p:cxnSp>
         <p:cxnSp>
           <p:nvCxnSpPr>
-            <p:cNvPr id="325" name="マスの線 19"/>
+            <p:cNvPr id="324" name="マスの線 19"/>
             <p:cNvCxnSpPr/>
             <p:nvPr/>
           </p:nvCxnSpPr>
@@ -15027,7 +14992,7 @@
         </p:cxnSp>
         <p:cxnSp>
           <p:nvCxnSpPr>
-            <p:cNvPr id="326" name="マスの線 20"/>
+            <p:cNvPr id="325" name="マスの線 20"/>
             <p:cNvCxnSpPr/>
             <p:nvPr/>
           </p:nvCxnSpPr>
@@ -15063,7 +15028,7 @@
         </p:cxnSp>
         <p:cxnSp>
           <p:nvCxnSpPr>
-            <p:cNvPr id="327" name="マスの線 21"/>
+            <p:cNvPr id="326" name="マスの線 21"/>
             <p:cNvCxnSpPr/>
             <p:nvPr/>
           </p:nvCxnSpPr>
@@ -15099,7 +15064,7 @@
         </p:cxnSp>
         <p:cxnSp>
           <p:nvCxnSpPr>
-            <p:cNvPr id="328" name="マスの線 22"/>
+            <p:cNvPr id="327" name="マスの線 22"/>
             <p:cNvCxnSpPr/>
             <p:nvPr/>
           </p:nvCxnSpPr>
@@ -15135,7 +15100,7 @@
         </p:cxnSp>
         <p:cxnSp>
           <p:nvCxnSpPr>
-            <p:cNvPr id="329" name="マスの線 23"/>
+            <p:cNvPr id="328" name="マスの線 23"/>
             <p:cNvCxnSpPr/>
             <p:nvPr/>
           </p:nvCxnSpPr>
@@ -15172,7 +15137,7 @@
       </p:grpSp>
       <p:grpSp>
         <p:nvGrpSpPr>
-          <p:cNvPr id="330" name="14行目（右から）"/>
+          <p:cNvPr id="329" name="14行目（右から）"/>
           <p:cNvGrpSpPr/>
           <p:nvPr/>
         </p:nvGrpSpPr>
@@ -15186,7 +15151,7 @@
         </p:grpSpPr>
         <p:sp>
           <p:nvSpPr>
-            <p:cNvPr id="331" name="外わく"/>
+            <p:cNvPr id="330" name="外わく"/>
             <p:cNvSpPr/>
             <p:nvPr/>
           </p:nvSpPr>
@@ -15230,7 +15195,7 @@
         </p:sp>
         <p:cxnSp>
           <p:nvCxnSpPr>
-            <p:cNvPr id="332" name="マスの線 1"/>
+            <p:cNvPr id="331" name="マスの線 1"/>
             <p:cNvCxnSpPr/>
             <p:nvPr/>
           </p:nvCxnSpPr>
@@ -15266,7 +15231,7 @@
         </p:cxnSp>
         <p:cxnSp>
           <p:nvCxnSpPr>
-            <p:cNvPr id="333" name="マスの線 2"/>
+            <p:cNvPr id="332" name="マスの線 2"/>
             <p:cNvCxnSpPr/>
             <p:nvPr/>
           </p:nvCxnSpPr>
@@ -15302,7 +15267,7 @@
         </p:cxnSp>
         <p:cxnSp>
           <p:nvCxnSpPr>
-            <p:cNvPr id="334" name="マスの線 3"/>
+            <p:cNvPr id="333" name="マスの線 3"/>
             <p:cNvCxnSpPr/>
             <p:nvPr/>
           </p:nvCxnSpPr>
@@ -15338,7 +15303,7 @@
         </p:cxnSp>
         <p:cxnSp>
           <p:nvCxnSpPr>
-            <p:cNvPr id="335" name="マスの線 4"/>
+            <p:cNvPr id="334" name="マスの線 4"/>
             <p:cNvCxnSpPr/>
             <p:nvPr/>
           </p:nvCxnSpPr>
@@ -15374,7 +15339,7 @@
         </p:cxnSp>
         <p:cxnSp>
           <p:nvCxnSpPr>
-            <p:cNvPr id="336" name="マスの線 5"/>
+            <p:cNvPr id="335" name="マスの線 5"/>
             <p:cNvCxnSpPr/>
             <p:nvPr/>
           </p:nvCxnSpPr>
@@ -15410,7 +15375,7 @@
         </p:cxnSp>
         <p:cxnSp>
           <p:nvCxnSpPr>
-            <p:cNvPr id="337" name="マスの線 6"/>
+            <p:cNvPr id="336" name="マスの線 6"/>
             <p:cNvCxnSpPr/>
             <p:nvPr/>
           </p:nvCxnSpPr>
@@ -15446,7 +15411,7 @@
         </p:cxnSp>
         <p:cxnSp>
           <p:nvCxnSpPr>
-            <p:cNvPr id="338" name="マスの線 7"/>
+            <p:cNvPr id="337" name="マスの線 7"/>
             <p:cNvCxnSpPr/>
             <p:nvPr/>
           </p:nvCxnSpPr>
@@ -15482,7 +15447,7 @@
         </p:cxnSp>
         <p:cxnSp>
           <p:nvCxnSpPr>
-            <p:cNvPr id="339" name="マスの線 8"/>
+            <p:cNvPr id="338" name="マスの線 8"/>
             <p:cNvCxnSpPr/>
             <p:nvPr/>
           </p:nvCxnSpPr>
@@ -15518,7 +15483,7 @@
         </p:cxnSp>
         <p:cxnSp>
           <p:nvCxnSpPr>
-            <p:cNvPr id="340" name="マスの線 9"/>
+            <p:cNvPr id="339" name="マスの線 9"/>
             <p:cNvCxnSpPr/>
             <p:nvPr/>
           </p:nvCxnSpPr>
@@ -15554,7 +15519,7 @@
         </p:cxnSp>
         <p:cxnSp>
           <p:nvCxnSpPr>
-            <p:cNvPr id="341" name="マスの線 10"/>
+            <p:cNvPr id="340" name="マスの線 10"/>
             <p:cNvCxnSpPr/>
             <p:nvPr/>
           </p:nvCxnSpPr>
@@ -15590,7 +15555,7 @@
         </p:cxnSp>
         <p:cxnSp>
           <p:nvCxnSpPr>
-            <p:cNvPr id="342" name="マスの線 11"/>
+            <p:cNvPr id="341" name="マスの線 11"/>
             <p:cNvCxnSpPr/>
             <p:nvPr/>
           </p:nvCxnSpPr>
@@ -15626,7 +15591,7 @@
         </p:cxnSp>
         <p:cxnSp>
           <p:nvCxnSpPr>
-            <p:cNvPr id="343" name="マスの線 12"/>
+            <p:cNvPr id="342" name="マスの線 12"/>
             <p:cNvCxnSpPr/>
             <p:nvPr/>
           </p:nvCxnSpPr>
@@ -15662,7 +15627,7 @@
         </p:cxnSp>
         <p:cxnSp>
           <p:nvCxnSpPr>
-            <p:cNvPr id="344" name="マスの線 13"/>
+            <p:cNvPr id="343" name="マスの線 13"/>
             <p:cNvCxnSpPr/>
             <p:nvPr/>
           </p:nvCxnSpPr>
@@ -15698,7 +15663,7 @@
         </p:cxnSp>
         <p:cxnSp>
           <p:nvCxnSpPr>
-            <p:cNvPr id="345" name="マスの線 14"/>
+            <p:cNvPr id="344" name="マスの線 14"/>
             <p:cNvCxnSpPr/>
             <p:nvPr/>
           </p:nvCxnSpPr>
@@ -15734,7 +15699,7 @@
         </p:cxnSp>
         <p:cxnSp>
           <p:nvCxnSpPr>
-            <p:cNvPr id="346" name="マスの線 15"/>
+            <p:cNvPr id="345" name="マスの線 15"/>
             <p:cNvCxnSpPr/>
             <p:nvPr/>
           </p:nvCxnSpPr>
@@ -15770,7 +15735,7 @@
         </p:cxnSp>
         <p:cxnSp>
           <p:nvCxnSpPr>
-            <p:cNvPr id="347" name="マスの線 16"/>
+            <p:cNvPr id="346" name="マスの線 16"/>
             <p:cNvCxnSpPr/>
             <p:nvPr/>
           </p:nvCxnSpPr>
@@ -15806,7 +15771,7 @@
         </p:cxnSp>
         <p:cxnSp>
           <p:nvCxnSpPr>
-            <p:cNvPr id="348" name="マスの線 17"/>
+            <p:cNvPr id="347" name="マスの線 17"/>
             <p:cNvCxnSpPr/>
             <p:nvPr/>
           </p:nvCxnSpPr>
@@ -15842,7 +15807,7 @@
         </p:cxnSp>
         <p:cxnSp>
           <p:nvCxnSpPr>
-            <p:cNvPr id="349" name="マスの線 18"/>
+            <p:cNvPr id="348" name="マスの線 18"/>
             <p:cNvCxnSpPr/>
             <p:nvPr/>
           </p:nvCxnSpPr>
@@ -15878,7 +15843,7 @@
         </p:cxnSp>
         <p:cxnSp>
           <p:nvCxnSpPr>
-            <p:cNvPr id="350" name="マスの線 19"/>
+            <p:cNvPr id="349" name="マスの線 19"/>
             <p:cNvCxnSpPr/>
             <p:nvPr/>
           </p:nvCxnSpPr>
@@ -15914,7 +15879,7 @@
         </p:cxnSp>
         <p:cxnSp>
           <p:nvCxnSpPr>
-            <p:cNvPr id="351" name="マスの線 20"/>
+            <p:cNvPr id="350" name="マスの線 20"/>
             <p:cNvCxnSpPr/>
             <p:nvPr/>
           </p:nvCxnSpPr>
@@ -15950,7 +15915,7 @@
         </p:cxnSp>
         <p:cxnSp>
           <p:nvCxnSpPr>
-            <p:cNvPr id="352" name="マスの線 21"/>
+            <p:cNvPr id="351" name="マスの線 21"/>
             <p:cNvCxnSpPr/>
             <p:nvPr/>
           </p:nvCxnSpPr>
@@ -15986,7 +15951,7 @@
         </p:cxnSp>
         <p:cxnSp>
           <p:nvCxnSpPr>
-            <p:cNvPr id="353" name="マスの線 22"/>
+            <p:cNvPr id="352" name="マスの線 22"/>
             <p:cNvCxnSpPr/>
             <p:nvPr/>
           </p:nvCxnSpPr>
@@ -16022,7 +15987,7 @@
         </p:cxnSp>
         <p:cxnSp>
           <p:nvCxnSpPr>
-            <p:cNvPr id="354" name="マスの線 23"/>
+            <p:cNvPr id="353" name="マスの線 23"/>
             <p:cNvCxnSpPr/>
             <p:nvPr/>
           </p:nvCxnSpPr>
@@ -16059,7 +16024,7 @@
       </p:grpSp>
       <p:grpSp>
         <p:nvGrpSpPr>
-          <p:cNvPr id="355" name="15行目（右から）"/>
+          <p:cNvPr id="354" name="15行目（右から）"/>
           <p:cNvGrpSpPr/>
           <p:nvPr/>
         </p:nvGrpSpPr>
@@ -16073,7 +16038,7 @@
         </p:grpSpPr>
         <p:sp>
           <p:nvSpPr>
-            <p:cNvPr id="356" name="外わく"/>
+            <p:cNvPr id="355" name="外わく"/>
             <p:cNvSpPr/>
             <p:nvPr/>
           </p:nvSpPr>
@@ -16117,7 +16082,7 @@
         </p:sp>
         <p:cxnSp>
           <p:nvCxnSpPr>
-            <p:cNvPr id="357" name="マスの線 1"/>
+            <p:cNvPr id="356" name="マスの線 1"/>
             <p:cNvCxnSpPr/>
             <p:nvPr/>
           </p:nvCxnSpPr>
@@ -16153,7 +16118,7 @@
         </p:cxnSp>
         <p:cxnSp>
           <p:nvCxnSpPr>
-            <p:cNvPr id="358" name="マスの線 2"/>
+            <p:cNvPr id="357" name="マスの線 2"/>
             <p:cNvCxnSpPr/>
             <p:nvPr/>
           </p:nvCxnSpPr>
@@ -16189,7 +16154,7 @@
         </p:cxnSp>
         <p:cxnSp>
           <p:nvCxnSpPr>
-            <p:cNvPr id="359" name="マスの線 3"/>
+            <p:cNvPr id="358" name="マスの線 3"/>
             <p:cNvCxnSpPr/>
             <p:nvPr/>
           </p:nvCxnSpPr>
@@ -16225,7 +16190,7 @@
         </p:cxnSp>
         <p:cxnSp>
           <p:nvCxnSpPr>
-            <p:cNvPr id="360" name="マスの線 4"/>
+            <p:cNvPr id="359" name="マスの線 4"/>
             <p:cNvCxnSpPr/>
             <p:nvPr/>
           </p:nvCxnSpPr>
@@ -16261,7 +16226,7 @@
         </p:cxnSp>
         <p:cxnSp>
           <p:nvCxnSpPr>
-            <p:cNvPr id="361" name="マスの線 5"/>
+            <p:cNvPr id="360" name="マスの線 5"/>
             <p:cNvCxnSpPr/>
             <p:nvPr/>
           </p:nvCxnSpPr>
@@ -16297,7 +16262,7 @@
         </p:cxnSp>
         <p:cxnSp>
           <p:nvCxnSpPr>
-            <p:cNvPr id="362" name="マスの線 6"/>
+            <p:cNvPr id="361" name="マスの線 6"/>
             <p:cNvCxnSpPr/>
             <p:nvPr/>
           </p:nvCxnSpPr>
@@ -16333,7 +16298,7 @@
         </p:cxnSp>
         <p:cxnSp>
           <p:nvCxnSpPr>
-            <p:cNvPr id="363" name="マスの線 7"/>
+            <p:cNvPr id="362" name="マスの線 7"/>
             <p:cNvCxnSpPr/>
             <p:nvPr/>
           </p:nvCxnSpPr>
@@ -16369,7 +16334,7 @@
         </p:cxnSp>
         <p:cxnSp>
           <p:nvCxnSpPr>
-            <p:cNvPr id="364" name="マスの線 8"/>
+            <p:cNvPr id="363" name="マスの線 8"/>
             <p:cNvCxnSpPr/>
             <p:nvPr/>
           </p:nvCxnSpPr>
@@ -16405,7 +16370,7 @@
         </p:cxnSp>
         <p:cxnSp>
           <p:nvCxnSpPr>
-            <p:cNvPr id="365" name="マスの線 9"/>
+            <p:cNvPr id="364" name="マスの線 9"/>
             <p:cNvCxnSpPr/>
             <p:nvPr/>
           </p:nvCxnSpPr>
@@ -16441,7 +16406,7 @@
         </p:cxnSp>
         <p:cxnSp>
           <p:nvCxnSpPr>
-            <p:cNvPr id="366" name="マスの線 10"/>
+            <p:cNvPr id="365" name="マスの線 10"/>
             <p:cNvCxnSpPr/>
             <p:nvPr/>
           </p:nvCxnSpPr>
@@ -16477,7 +16442,7 @@
         </p:cxnSp>
         <p:cxnSp>
           <p:nvCxnSpPr>
-            <p:cNvPr id="367" name="マスの線 11"/>
+            <p:cNvPr id="366" name="マスの線 11"/>
             <p:cNvCxnSpPr/>
             <p:nvPr/>
           </p:nvCxnSpPr>
@@ -16513,7 +16478,7 @@
         </p:cxnSp>
         <p:cxnSp>
           <p:nvCxnSpPr>
-            <p:cNvPr id="368" name="マスの線 12"/>
+            <p:cNvPr id="367" name="マスの線 12"/>
             <p:cNvCxnSpPr/>
             <p:nvPr/>
           </p:nvCxnSpPr>
@@ -16549,7 +16514,7 @@
         </p:cxnSp>
         <p:cxnSp>
           <p:nvCxnSpPr>
-            <p:cNvPr id="369" name="マスの線 13"/>
+            <p:cNvPr id="368" name="マスの線 13"/>
             <p:cNvCxnSpPr/>
             <p:nvPr/>
           </p:nvCxnSpPr>
@@ -16585,7 +16550,7 @@
         </p:cxnSp>
         <p:cxnSp>
           <p:nvCxnSpPr>
-            <p:cNvPr id="370" name="マスの線 14"/>
+            <p:cNvPr id="369" name="マスの線 14"/>
             <p:cNvCxnSpPr/>
             <p:nvPr/>
           </p:nvCxnSpPr>
@@ -16621,7 +16586,7 @@
         </p:cxnSp>
         <p:cxnSp>
           <p:nvCxnSpPr>
-            <p:cNvPr id="371" name="マスの線 15"/>
+            <p:cNvPr id="370" name="マスの線 15"/>
             <p:cNvCxnSpPr/>
             <p:nvPr/>
           </p:nvCxnSpPr>
@@ -16657,7 +16622,7 @@
         </p:cxnSp>
         <p:cxnSp>
           <p:nvCxnSpPr>
-            <p:cNvPr id="372" name="マスの線 16"/>
+            <p:cNvPr id="371" name="マスの線 16"/>
             <p:cNvCxnSpPr/>
             <p:nvPr/>
           </p:nvCxnSpPr>
@@ -16693,7 +16658,7 @@
         </p:cxnSp>
         <p:cxnSp>
           <p:nvCxnSpPr>
-            <p:cNvPr id="373" name="マスの線 17"/>
+            <p:cNvPr id="372" name="マスの線 17"/>
             <p:cNvCxnSpPr/>
             <p:nvPr/>
           </p:nvCxnSpPr>
@@ -16729,7 +16694,7 @@
         </p:cxnSp>
         <p:cxnSp>
           <p:nvCxnSpPr>
-            <p:cNvPr id="374" name="マスの線 18"/>
+            <p:cNvPr id="373" name="マスの線 18"/>
             <p:cNvCxnSpPr/>
             <p:nvPr/>
           </p:nvCxnSpPr>
@@ -16765,7 +16730,7 @@
         </p:cxnSp>
         <p:cxnSp>
           <p:nvCxnSpPr>
-            <p:cNvPr id="375" name="マスの線 19"/>
+            <p:cNvPr id="374" name="マスの線 19"/>
             <p:cNvCxnSpPr/>
             <p:nvPr/>
           </p:nvCxnSpPr>
@@ -16801,7 +16766,7 @@
         </p:cxnSp>
         <p:cxnSp>
           <p:nvCxnSpPr>
-            <p:cNvPr id="376" name="マスの線 20"/>
+            <p:cNvPr id="375" name="マスの線 20"/>
             <p:cNvCxnSpPr/>
             <p:nvPr/>
           </p:nvCxnSpPr>
@@ -16837,7 +16802,7 @@
         </p:cxnSp>
         <p:cxnSp>
           <p:nvCxnSpPr>
-            <p:cNvPr id="377" name="マスの線 21"/>
+            <p:cNvPr id="376" name="マスの線 21"/>
             <p:cNvCxnSpPr/>
             <p:nvPr/>
           </p:nvCxnSpPr>
@@ -16873,7 +16838,7 @@
         </p:cxnSp>
         <p:cxnSp>
           <p:nvCxnSpPr>
-            <p:cNvPr id="378" name="マスの線 22"/>
+            <p:cNvPr id="377" name="マスの線 22"/>
             <p:cNvCxnSpPr/>
             <p:nvPr/>
           </p:nvCxnSpPr>
@@ -16909,7 +16874,7 @@
         </p:cxnSp>
         <p:cxnSp>
           <p:nvCxnSpPr>
-            <p:cNvPr id="379" name="マスの線 23"/>
+            <p:cNvPr id="378" name="マスの線 23"/>
             <p:cNvCxnSpPr/>
             <p:nvPr/>
           </p:nvCxnSpPr>
@@ -16946,7 +16911,7 @@
       </p:grpSp>
       <p:pic>
         <p:nvPicPr>
-          <p:cNvPr id="380" name="さし絵（消してもかまいません）" descr="_tmp_ill.png"/>
+          <p:cNvPr id="379" name="さし絵（消してもかまいません）" descr="_tmp_ill.png"/>
           <p:cNvPicPr>
             <a:picLocks noChangeAspect="1"/>
           </p:cNvPicPr>
@@ -16970,7 +16935,7 @@
       </p:pic>
       <p:sp>
         <p:nvSpPr>
-          <p:cNvPr id="381" name="紙の説明（消してもかまいません）"/>
+          <p:cNvPr id="380" name="紙の説明（消してもかまいません）"/>
           <p:cNvSpPr txBox="1"/>
           <p:nvPr/>
         </p:nvSpPr>
@@ -17005,7 +16970,7 @@
       </p:sp>
       <p:sp>
         <p:nvSpPr>
-          <p:cNvPr id="382" name="クレジット"/>
+          <p:cNvPr id="381" name="クレジット"/>
           <p:cNvSpPr txBox="1"/>
           <p:nvPr/>
         </p:nvSpPr>
